--- a/docs/plots/carbo/jx_carbo_linsubhr_dosedisc_anyhosp.pptx
+++ b/docs/plots/carbo/jx_carbo_linsubhr_dosedisc_anyhosp.pptx
@@ -3132,530 +3132,536 @@
           <p:spPr>
             <a:xfrm>
               <a:off x="1172049" y="1896563"/>
-              <a:ext cx="7090630" cy="3553409"/>
+              <a:ext cx="7090630" cy="3537267"/>
             </a:xfrm>
             <a:custGeom>
               <a:avLst/>
               <a:pathLst>
-                <a:path w="7090630" h="3553409">
+                <a:path w="7090630" h="3537267">
                   <a:moveTo>
-                    <a:pt x="0" y="3132678"/>
+                    <a:pt x="0" y="3145613"/>
                   </a:moveTo>
                   <a:lnTo>
-                    <a:pt x="71622" y="3126360"/>
-                  </a:lnTo>
-                  <a:lnTo>
-                    <a:pt x="143245" y="3119965"/>
-                  </a:lnTo>
-                  <a:lnTo>
-                    <a:pt x="214867" y="3113492"/>
-                  </a:lnTo>
-                  <a:lnTo>
-                    <a:pt x="286490" y="3106941"/>
-                  </a:lnTo>
-                  <a:lnTo>
-                    <a:pt x="358112" y="3100310"/>
-                  </a:lnTo>
-                  <a:lnTo>
-                    <a:pt x="429735" y="3093598"/>
-                  </a:lnTo>
-                  <a:lnTo>
-                    <a:pt x="501357" y="3086805"/>
-                  </a:lnTo>
-                  <a:lnTo>
-                    <a:pt x="572980" y="3079929"/>
-                  </a:lnTo>
-                  <a:lnTo>
-                    <a:pt x="644602" y="3072970"/>
-                  </a:lnTo>
-                  <a:lnTo>
-                    <a:pt x="716225" y="3065926"/>
-                  </a:lnTo>
-                  <a:lnTo>
-                    <a:pt x="787847" y="3058797"/>
-                  </a:lnTo>
-                  <a:lnTo>
-                    <a:pt x="859470" y="3051580"/>
-                  </a:lnTo>
-                  <a:lnTo>
-                    <a:pt x="931092" y="3044277"/>
-                  </a:lnTo>
-                  <a:lnTo>
-                    <a:pt x="1002715" y="3036884"/>
-                  </a:lnTo>
-                  <a:lnTo>
-                    <a:pt x="1074337" y="3029402"/>
-                  </a:lnTo>
-                  <a:lnTo>
-                    <a:pt x="1145960" y="3021829"/>
-                  </a:lnTo>
-                  <a:lnTo>
-                    <a:pt x="1217582" y="3014163"/>
-                  </a:lnTo>
-                  <a:lnTo>
-                    <a:pt x="1289205" y="3006405"/>
-                  </a:lnTo>
-                  <a:lnTo>
-                    <a:pt x="1360827" y="2998552"/>
-                  </a:lnTo>
-                  <a:lnTo>
-                    <a:pt x="1432450" y="2990604"/>
-                  </a:lnTo>
-                  <a:lnTo>
-                    <a:pt x="1504073" y="2982559"/>
-                  </a:lnTo>
-                  <a:lnTo>
-                    <a:pt x="1575695" y="2974417"/>
-                  </a:lnTo>
-                  <a:lnTo>
-                    <a:pt x="1647318" y="2966175"/>
-                  </a:lnTo>
-                  <a:lnTo>
-                    <a:pt x="1718940" y="2957834"/>
-                  </a:lnTo>
-                  <a:lnTo>
-                    <a:pt x="1790563" y="2949391"/>
-                  </a:lnTo>
-                  <a:lnTo>
-                    <a:pt x="1862185" y="2940845"/>
-                  </a:lnTo>
-                  <a:lnTo>
-                    <a:pt x="1933808" y="2932196"/>
-                  </a:lnTo>
-                  <a:lnTo>
-                    <a:pt x="2005430" y="2923442"/>
-                  </a:lnTo>
-                  <a:lnTo>
-                    <a:pt x="2077053" y="2914581"/>
-                  </a:lnTo>
-                  <a:lnTo>
-                    <a:pt x="2148675" y="2905612"/>
-                  </a:lnTo>
-                  <a:lnTo>
-                    <a:pt x="2220298" y="2896535"/>
-                  </a:lnTo>
-                  <a:lnTo>
-                    <a:pt x="2291920" y="2887347"/>
-                  </a:lnTo>
-                  <a:lnTo>
-                    <a:pt x="2363543" y="2878048"/>
-                  </a:lnTo>
-                  <a:lnTo>
-                    <a:pt x="2435165" y="2868635"/>
-                  </a:lnTo>
-                  <a:lnTo>
-                    <a:pt x="2506788" y="2859108"/>
-                  </a:lnTo>
-                  <a:lnTo>
-                    <a:pt x="2578410" y="2849466"/>
-                  </a:lnTo>
-                  <a:lnTo>
-                    <a:pt x="2650033" y="2839706"/>
-                  </a:lnTo>
-                  <a:lnTo>
-                    <a:pt x="2721655" y="2829828"/>
-                  </a:lnTo>
-                  <a:lnTo>
-                    <a:pt x="2793278" y="2819829"/>
-                  </a:lnTo>
-                  <a:lnTo>
-                    <a:pt x="2864901" y="2809710"/>
-                  </a:lnTo>
-                  <a:lnTo>
-                    <a:pt x="2936523" y="2799467"/>
-                  </a:lnTo>
-                  <a:lnTo>
-                    <a:pt x="3008146" y="2789100"/>
-                  </a:lnTo>
-                  <a:lnTo>
-                    <a:pt x="3079768" y="2764418"/>
-                  </a:lnTo>
-                  <a:lnTo>
-                    <a:pt x="3151391" y="2717971"/>
-                  </a:lnTo>
-                  <a:lnTo>
-                    <a:pt x="3223013" y="2669095"/>
-                  </a:lnTo>
-                  <a:lnTo>
-                    <a:pt x="3294636" y="2617663"/>
-                  </a:lnTo>
-                  <a:lnTo>
-                    <a:pt x="3366258" y="2563542"/>
-                  </a:lnTo>
-                  <a:lnTo>
-                    <a:pt x="3437881" y="2506591"/>
-                  </a:lnTo>
-                  <a:lnTo>
-                    <a:pt x="3509503" y="2446661"/>
-                  </a:lnTo>
-                  <a:lnTo>
-                    <a:pt x="3581126" y="2383598"/>
-                  </a:lnTo>
-                  <a:lnTo>
-                    <a:pt x="3652748" y="2317237"/>
-                  </a:lnTo>
-                  <a:lnTo>
-                    <a:pt x="3724371" y="2247406"/>
-                  </a:lnTo>
-                  <a:lnTo>
-                    <a:pt x="3795993" y="2173923"/>
-                  </a:lnTo>
-                  <a:lnTo>
-                    <a:pt x="3867616" y="2096598"/>
-                  </a:lnTo>
-                  <a:lnTo>
-                    <a:pt x="3939238" y="2015229"/>
-                  </a:lnTo>
-                  <a:lnTo>
-                    <a:pt x="4010861" y="1929605"/>
-                  </a:lnTo>
-                  <a:lnTo>
-                    <a:pt x="4082483" y="1839504"/>
-                  </a:lnTo>
-                  <a:lnTo>
-                    <a:pt x="4154106" y="1744691"/>
-                  </a:lnTo>
-                  <a:lnTo>
-                    <a:pt x="4225729" y="1644921"/>
-                  </a:lnTo>
-                  <a:lnTo>
-                    <a:pt x="4297351" y="1539933"/>
-                  </a:lnTo>
-                  <a:lnTo>
-                    <a:pt x="4368974" y="1429455"/>
-                  </a:lnTo>
-                  <a:lnTo>
-                    <a:pt x="4440596" y="1313200"/>
-                  </a:lnTo>
-                  <a:lnTo>
-                    <a:pt x="4512219" y="1190866"/>
-                  </a:lnTo>
-                  <a:lnTo>
-                    <a:pt x="4583841" y="1062134"/>
-                  </a:lnTo>
-                  <a:lnTo>
-                    <a:pt x="4655464" y="926671"/>
-                  </a:lnTo>
-                  <a:lnTo>
-                    <a:pt x="4727086" y="784125"/>
-                  </a:lnTo>
-                  <a:lnTo>
-                    <a:pt x="4798709" y="634124"/>
-                  </a:lnTo>
-                  <a:lnTo>
-                    <a:pt x="4870331" y="476280"/>
-                  </a:lnTo>
-                  <a:lnTo>
-                    <a:pt x="4941954" y="310181"/>
-                  </a:lnTo>
-                  <a:lnTo>
-                    <a:pt x="5013576" y="135397"/>
-                  </a:lnTo>
-                  <a:lnTo>
-                    <a:pt x="5066302" y="0"/>
+                    <a:pt x="71622" y="3139148"/>
+                  </a:lnTo>
+                  <a:lnTo>
+                    <a:pt x="143245" y="3132601"/>
+                  </a:lnTo>
+                  <a:lnTo>
+                    <a:pt x="214867" y="3125970"/>
+                  </a:lnTo>
+                  <a:lnTo>
+                    <a:pt x="286490" y="3119255"/>
+                  </a:lnTo>
+                  <a:lnTo>
+                    <a:pt x="358112" y="3112454"/>
+                  </a:lnTo>
+                  <a:lnTo>
+                    <a:pt x="429735" y="3105567"/>
+                  </a:lnTo>
+                  <a:lnTo>
+                    <a:pt x="501357" y="3098591"/>
+                  </a:lnTo>
+                  <a:lnTo>
+                    <a:pt x="572980" y="3091527"/>
+                  </a:lnTo>
+                  <a:lnTo>
+                    <a:pt x="644602" y="3084372"/>
+                  </a:lnTo>
+                  <a:lnTo>
+                    <a:pt x="716225" y="3077127"/>
+                  </a:lnTo>
+                  <a:lnTo>
+                    <a:pt x="787847" y="3069789"/>
+                  </a:lnTo>
+                  <a:lnTo>
+                    <a:pt x="859470" y="3062357"/>
+                  </a:lnTo>
+                  <a:lnTo>
+                    <a:pt x="931092" y="3054831"/>
+                  </a:lnTo>
+                  <a:lnTo>
+                    <a:pt x="1002715" y="3047209"/>
+                  </a:lnTo>
+                  <a:lnTo>
+                    <a:pt x="1074337" y="3039489"/>
+                  </a:lnTo>
+                  <a:lnTo>
+                    <a:pt x="1145960" y="3031671"/>
+                  </a:lnTo>
+                  <a:lnTo>
+                    <a:pt x="1217582" y="3023754"/>
+                  </a:lnTo>
+                  <a:lnTo>
+                    <a:pt x="1289205" y="3015735"/>
+                  </a:lnTo>
+                  <a:lnTo>
+                    <a:pt x="1360827" y="3007614"/>
+                  </a:lnTo>
+                  <a:lnTo>
+                    <a:pt x="1432450" y="2999390"/>
+                  </a:lnTo>
+                  <a:lnTo>
+                    <a:pt x="1504073" y="2991061"/>
+                  </a:lnTo>
+                  <a:lnTo>
+                    <a:pt x="1575695" y="2982626"/>
+                  </a:lnTo>
+                  <a:lnTo>
+                    <a:pt x="1647318" y="2974083"/>
+                  </a:lnTo>
+                  <a:lnTo>
+                    <a:pt x="1718940" y="2965431"/>
+                  </a:lnTo>
+                  <a:lnTo>
+                    <a:pt x="1790563" y="2956669"/>
+                  </a:lnTo>
+                  <a:lnTo>
+                    <a:pt x="1862185" y="2947795"/>
+                  </a:lnTo>
+                  <a:lnTo>
+                    <a:pt x="1933808" y="2938808"/>
+                  </a:lnTo>
+                  <a:lnTo>
+                    <a:pt x="2005430" y="2929706"/>
+                  </a:lnTo>
+                  <a:lnTo>
+                    <a:pt x="2077053" y="2920488"/>
+                  </a:lnTo>
+                  <a:lnTo>
+                    <a:pt x="2148675" y="2911153"/>
+                  </a:lnTo>
+                  <a:lnTo>
+                    <a:pt x="2220298" y="2901699"/>
+                  </a:lnTo>
+                  <a:lnTo>
+                    <a:pt x="2291920" y="2892124"/>
+                  </a:lnTo>
+                  <a:lnTo>
+                    <a:pt x="2363543" y="2882427"/>
+                  </a:lnTo>
+                  <a:lnTo>
+                    <a:pt x="2435165" y="2872607"/>
+                  </a:lnTo>
+                  <a:lnTo>
+                    <a:pt x="2506788" y="2862661"/>
+                  </a:lnTo>
+                  <a:lnTo>
+                    <a:pt x="2578410" y="2852589"/>
+                  </a:lnTo>
+                  <a:lnTo>
+                    <a:pt x="2650033" y="2842388"/>
+                  </a:lnTo>
+                  <a:lnTo>
+                    <a:pt x="2721655" y="2832057"/>
+                  </a:lnTo>
+                  <a:lnTo>
+                    <a:pt x="2793278" y="2821594"/>
+                  </a:lnTo>
+                  <a:lnTo>
+                    <a:pt x="2864901" y="2810998"/>
+                  </a:lnTo>
+                  <a:lnTo>
+                    <a:pt x="2936523" y="2800267"/>
+                  </a:lnTo>
+                  <a:lnTo>
+                    <a:pt x="3008146" y="2789399"/>
+                  </a:lnTo>
+                  <a:lnTo>
+                    <a:pt x="3079768" y="2765718"/>
+                  </a:lnTo>
+                  <a:lnTo>
+                    <a:pt x="3151391" y="2722636"/>
+                  </a:lnTo>
+                  <a:lnTo>
+                    <a:pt x="3223013" y="2677462"/>
+                  </a:lnTo>
+                  <a:lnTo>
+                    <a:pt x="3294636" y="2630093"/>
+                  </a:lnTo>
+                  <a:lnTo>
+                    <a:pt x="3366258" y="2580423"/>
+                  </a:lnTo>
+                  <a:lnTo>
+                    <a:pt x="3437881" y="2528340"/>
+                  </a:lnTo>
+                  <a:lnTo>
+                    <a:pt x="3509503" y="2473728"/>
+                  </a:lnTo>
+                  <a:lnTo>
+                    <a:pt x="3581126" y="2416463"/>
+                  </a:lnTo>
+                  <a:lnTo>
+                    <a:pt x="3652748" y="2356416"/>
+                  </a:lnTo>
+                  <a:lnTo>
+                    <a:pt x="3724371" y="2293452"/>
+                  </a:lnTo>
+                  <a:lnTo>
+                    <a:pt x="3795993" y="2227430"/>
+                  </a:lnTo>
+                  <a:lnTo>
+                    <a:pt x="3867616" y="2158201"/>
+                  </a:lnTo>
+                  <a:lnTo>
+                    <a:pt x="3939238" y="2085609"/>
+                  </a:lnTo>
+                  <a:lnTo>
+                    <a:pt x="4010861" y="2009491"/>
+                  </a:lnTo>
+                  <a:lnTo>
+                    <a:pt x="4082483" y="1929676"/>
+                  </a:lnTo>
+                  <a:lnTo>
+                    <a:pt x="4154106" y="1845984"/>
+                  </a:lnTo>
+                  <a:lnTo>
+                    <a:pt x="4225729" y="1758226"/>
+                  </a:lnTo>
+                  <a:lnTo>
+                    <a:pt x="4297351" y="1666206"/>
+                  </a:lnTo>
+                  <a:lnTo>
+                    <a:pt x="4368974" y="1569715"/>
+                  </a:lnTo>
+                  <a:lnTo>
+                    <a:pt x="4440596" y="1468538"/>
+                  </a:lnTo>
+                  <a:lnTo>
+                    <a:pt x="4512219" y="1362446"/>
+                  </a:lnTo>
+                  <a:lnTo>
+                    <a:pt x="4583841" y="1251201"/>
+                  </a:lnTo>
+                  <a:lnTo>
+                    <a:pt x="4655464" y="1134552"/>
+                  </a:lnTo>
+                  <a:lnTo>
+                    <a:pt x="4727086" y="1012237"/>
+                  </a:lnTo>
+                  <a:lnTo>
+                    <a:pt x="4798709" y="883980"/>
+                  </a:lnTo>
+                  <a:lnTo>
+                    <a:pt x="4870331" y="749494"/>
+                  </a:lnTo>
+                  <a:lnTo>
+                    <a:pt x="4941954" y="608475"/>
+                  </a:lnTo>
+                  <a:lnTo>
+                    <a:pt x="5013576" y="460606"/>
+                  </a:lnTo>
+                  <a:lnTo>
+                    <a:pt x="5085199" y="305554"/>
+                  </a:lnTo>
+                  <a:lnTo>
+                    <a:pt x="5156821" y="142971"/>
+                  </a:lnTo>
+                  <a:lnTo>
+                    <a:pt x="5216887" y="0"/>
                   </a:lnTo>
                   <a:lnTo>
                     <a:pt x="7090630" y="0"/>
                   </a:lnTo>
                   <a:lnTo>
-                    <a:pt x="7090630" y="1933639"/>
-                  </a:lnTo>
-                  <a:lnTo>
-                    <a:pt x="7019007" y="1954277"/>
-                  </a:lnTo>
-                  <a:lnTo>
-                    <a:pt x="6947385" y="1974667"/>
-                  </a:lnTo>
-                  <a:lnTo>
-                    <a:pt x="6875762" y="1994812"/>
-                  </a:lnTo>
-                  <a:lnTo>
-                    <a:pt x="6804139" y="2014715"/>
-                  </a:lnTo>
-                  <a:lnTo>
-                    <a:pt x="6732517" y="2034379"/>
-                  </a:lnTo>
-                  <a:lnTo>
-                    <a:pt x="6660894" y="2053807"/>
-                  </a:lnTo>
-                  <a:lnTo>
-                    <a:pt x="6589272" y="2073002"/>
-                  </a:lnTo>
-                  <a:lnTo>
-                    <a:pt x="6517649" y="2091966"/>
-                  </a:lnTo>
-                  <a:lnTo>
-                    <a:pt x="6446027" y="2110703"/>
-                  </a:lnTo>
-                  <a:lnTo>
-                    <a:pt x="6374404" y="2129215"/>
-                  </a:lnTo>
-                  <a:lnTo>
-                    <a:pt x="6302782" y="2147504"/>
-                  </a:lnTo>
-                  <a:lnTo>
-                    <a:pt x="6231159" y="2165574"/>
-                  </a:lnTo>
-                  <a:lnTo>
-                    <a:pt x="6159537" y="2183427"/>
-                  </a:lnTo>
-                  <a:lnTo>
-                    <a:pt x="6087914" y="2201066"/>
-                  </a:lnTo>
-                  <a:lnTo>
-                    <a:pt x="6016292" y="2218493"/>
-                  </a:lnTo>
-                  <a:lnTo>
-                    <a:pt x="5944669" y="2235711"/>
-                  </a:lnTo>
-                  <a:lnTo>
-                    <a:pt x="5873047" y="2252722"/>
-                  </a:lnTo>
-                  <a:lnTo>
-                    <a:pt x="5801424" y="2269529"/>
-                  </a:lnTo>
-                  <a:lnTo>
-                    <a:pt x="5729802" y="2286134"/>
-                  </a:lnTo>
-                  <a:lnTo>
-                    <a:pt x="5658179" y="2302539"/>
-                  </a:lnTo>
-                  <a:lnTo>
-                    <a:pt x="5586557" y="2318748"/>
-                  </a:lnTo>
-                  <a:lnTo>
-                    <a:pt x="5514934" y="2334762"/>
-                  </a:lnTo>
-                  <a:lnTo>
-                    <a:pt x="5443311" y="2350584"/>
-                  </a:lnTo>
-                  <a:lnTo>
-                    <a:pt x="5371689" y="2366216"/>
-                  </a:lnTo>
-                  <a:lnTo>
-                    <a:pt x="5300066" y="2381660"/>
-                  </a:lnTo>
-                  <a:lnTo>
-                    <a:pt x="5228444" y="2396919"/>
-                  </a:lnTo>
-                  <a:lnTo>
-                    <a:pt x="5156821" y="2411995"/>
-                  </a:lnTo>
-                  <a:lnTo>
-                    <a:pt x="5085199" y="2426889"/>
-                  </a:lnTo>
-                  <a:lnTo>
-                    <a:pt x="5013576" y="2441605"/>
-                  </a:lnTo>
-                  <a:lnTo>
-                    <a:pt x="4941954" y="2456144"/>
-                  </a:lnTo>
-                  <a:lnTo>
-                    <a:pt x="4870331" y="2470509"/>
-                  </a:lnTo>
-                  <a:lnTo>
-                    <a:pt x="4798709" y="2484701"/>
-                  </a:lnTo>
-                  <a:lnTo>
-                    <a:pt x="4727086" y="2498723"/>
-                  </a:lnTo>
-                  <a:lnTo>
-                    <a:pt x="4655464" y="2512576"/>
-                  </a:lnTo>
-                  <a:lnTo>
-                    <a:pt x="4583841" y="2526263"/>
-                  </a:lnTo>
-                  <a:lnTo>
-                    <a:pt x="4512219" y="2539786"/>
-                  </a:lnTo>
-                  <a:lnTo>
-                    <a:pt x="4440596" y="2553146"/>
-                  </a:lnTo>
-                  <a:lnTo>
-                    <a:pt x="4368974" y="2566346"/>
-                  </a:lnTo>
-                  <a:lnTo>
-                    <a:pt x="4297351" y="2579388"/>
-                  </a:lnTo>
-                  <a:lnTo>
-                    <a:pt x="4225729" y="2592273"/>
-                  </a:lnTo>
-                  <a:lnTo>
-                    <a:pt x="4154106" y="2605003"/>
-                  </a:lnTo>
-                  <a:lnTo>
-                    <a:pt x="4082483" y="2617581"/>
-                  </a:lnTo>
-                  <a:lnTo>
-                    <a:pt x="4010861" y="2630007"/>
-                  </a:lnTo>
-                  <a:lnTo>
-                    <a:pt x="3939238" y="2642284"/>
-                  </a:lnTo>
-                  <a:lnTo>
-                    <a:pt x="3867616" y="2654414"/>
-                  </a:lnTo>
-                  <a:lnTo>
-                    <a:pt x="3795993" y="2666399"/>
-                  </a:lnTo>
-                  <a:lnTo>
-                    <a:pt x="3724371" y="2678239"/>
-                  </a:lnTo>
-                  <a:lnTo>
-                    <a:pt x="3652748" y="2689937"/>
-                  </a:lnTo>
-                  <a:lnTo>
-                    <a:pt x="3581126" y="2701495"/>
-                  </a:lnTo>
-                  <a:lnTo>
-                    <a:pt x="3509503" y="2712914"/>
-                  </a:lnTo>
-                  <a:lnTo>
-                    <a:pt x="3437881" y="2724196"/>
-                  </a:lnTo>
-                  <a:lnTo>
-                    <a:pt x="3366258" y="2735342"/>
-                  </a:lnTo>
-                  <a:lnTo>
-                    <a:pt x="3294636" y="2746355"/>
-                  </a:lnTo>
-                  <a:lnTo>
-                    <a:pt x="3223013" y="2757236"/>
-                  </a:lnTo>
-                  <a:lnTo>
-                    <a:pt x="3151391" y="2767985"/>
-                  </a:lnTo>
-                  <a:lnTo>
-                    <a:pt x="3079768" y="2778606"/>
-                  </a:lnTo>
-                  <a:lnTo>
-                    <a:pt x="3008146" y="2808557"/>
-                  </a:lnTo>
-                  <a:lnTo>
-                    <a:pt x="2936523" y="2850502"/>
-                  </a:lnTo>
-                  <a:lnTo>
-                    <a:pt x="2864901" y="2890364"/>
-                  </a:lnTo>
-                  <a:lnTo>
-                    <a:pt x="2793278" y="2928244"/>
-                  </a:lnTo>
-                  <a:lnTo>
-                    <a:pt x="2721655" y="2964242"/>
-                  </a:lnTo>
-                  <a:lnTo>
-                    <a:pt x="2650033" y="2998451"/>
-                  </a:lnTo>
-                  <a:lnTo>
-                    <a:pt x="2578410" y="3030960"/>
-                  </a:lnTo>
-                  <a:lnTo>
-                    <a:pt x="2506788" y="3061853"/>
-                  </a:lnTo>
-                  <a:lnTo>
-                    <a:pt x="2435165" y="3091212"/>
-                  </a:lnTo>
-                  <a:lnTo>
-                    <a:pt x="2363543" y="3119111"/>
-                  </a:lnTo>
-                  <a:lnTo>
-                    <a:pt x="2291920" y="3145624"/>
-                  </a:lnTo>
-                  <a:lnTo>
-                    <a:pt x="2220298" y="3170820"/>
-                  </a:lnTo>
-                  <a:lnTo>
-                    <a:pt x="2148675" y="3194763"/>
-                  </a:lnTo>
-                  <a:lnTo>
-                    <a:pt x="2077053" y="3217517"/>
-                  </a:lnTo>
-                  <a:lnTo>
-                    <a:pt x="2005430" y="3239140"/>
-                  </a:lnTo>
-                  <a:lnTo>
-                    <a:pt x="1933808" y="3259688"/>
-                  </a:lnTo>
-                  <a:lnTo>
-                    <a:pt x="1862185" y="3279216"/>
-                  </a:lnTo>
-                  <a:lnTo>
-                    <a:pt x="1790563" y="3297773"/>
-                  </a:lnTo>
-                  <a:lnTo>
-                    <a:pt x="1718940" y="3315407"/>
-                  </a:lnTo>
-                  <a:lnTo>
-                    <a:pt x="1647318" y="3332166"/>
-                  </a:lnTo>
-                  <a:lnTo>
-                    <a:pt x="1575695" y="3348091"/>
-                  </a:lnTo>
-                  <a:lnTo>
-                    <a:pt x="1504073" y="3363226"/>
-                  </a:lnTo>
-                  <a:lnTo>
-                    <a:pt x="1432450" y="3377608"/>
-                  </a:lnTo>
-                  <a:lnTo>
-                    <a:pt x="1360827" y="3391275"/>
-                  </a:lnTo>
-                  <a:lnTo>
-                    <a:pt x="1289205" y="3404264"/>
-                  </a:lnTo>
-                  <a:lnTo>
-                    <a:pt x="1217582" y="3416606"/>
-                  </a:lnTo>
-                  <a:lnTo>
-                    <a:pt x="1145960" y="3428336"/>
-                  </a:lnTo>
-                  <a:lnTo>
-                    <a:pt x="1074337" y="3439482"/>
-                  </a:lnTo>
-                  <a:lnTo>
-                    <a:pt x="1002715" y="3450075"/>
-                  </a:lnTo>
-                  <a:lnTo>
-                    <a:pt x="931092" y="3460141"/>
-                  </a:lnTo>
-                  <a:lnTo>
-                    <a:pt x="859470" y="3469708"/>
-                  </a:lnTo>
-                  <a:lnTo>
-                    <a:pt x="787847" y="3478798"/>
-                  </a:lnTo>
-                  <a:lnTo>
-                    <a:pt x="716225" y="3487437"/>
-                  </a:lnTo>
-                  <a:lnTo>
-                    <a:pt x="644602" y="3495647"/>
-                  </a:lnTo>
-                  <a:lnTo>
-                    <a:pt x="572980" y="3503449"/>
-                  </a:lnTo>
-                  <a:lnTo>
-                    <a:pt x="501357" y="3510863"/>
-                  </a:lnTo>
-                  <a:lnTo>
-                    <a:pt x="429735" y="3517908"/>
-                  </a:lnTo>
-                  <a:lnTo>
-                    <a:pt x="358112" y="3524604"/>
-                  </a:lnTo>
-                  <a:lnTo>
-                    <a:pt x="286490" y="3530966"/>
-                  </a:lnTo>
-                  <a:lnTo>
-                    <a:pt x="214867" y="3537013"/>
-                  </a:lnTo>
-                  <a:lnTo>
-                    <a:pt x="143245" y="3542759"/>
-                  </a:lnTo>
-                  <a:lnTo>
-                    <a:pt x="71622" y="3548219"/>
-                  </a:lnTo>
-                  <a:lnTo>
-                    <a:pt x="0" y="3553409"/>
+                    <a:pt x="7090630" y="1875308"/>
+                  </a:lnTo>
+                  <a:lnTo>
+                    <a:pt x="7019007" y="1897684"/>
+                  </a:lnTo>
+                  <a:lnTo>
+                    <a:pt x="6947385" y="1919779"/>
+                  </a:lnTo>
+                  <a:lnTo>
+                    <a:pt x="6875762" y="1941595"/>
+                  </a:lnTo>
+                  <a:lnTo>
+                    <a:pt x="6804139" y="1963137"/>
+                  </a:lnTo>
+                  <a:lnTo>
+                    <a:pt x="6732517" y="1984407"/>
+                  </a:lnTo>
+                  <a:lnTo>
+                    <a:pt x="6660894" y="2005410"/>
+                  </a:lnTo>
+                  <a:lnTo>
+                    <a:pt x="6589272" y="2026148"/>
+                  </a:lnTo>
+                  <a:lnTo>
+                    <a:pt x="6517649" y="2046626"/>
+                  </a:lnTo>
+                  <a:lnTo>
+                    <a:pt x="6446027" y="2066845"/>
+                  </a:lnTo>
+                  <a:lnTo>
+                    <a:pt x="6374404" y="2086810"/>
+                  </a:lnTo>
+                  <a:lnTo>
+                    <a:pt x="6302782" y="2106523"/>
+                  </a:lnTo>
+                  <a:lnTo>
+                    <a:pt x="6231159" y="2125989"/>
+                  </a:lnTo>
+                  <a:lnTo>
+                    <a:pt x="6159537" y="2145209"/>
+                  </a:lnTo>
+                  <a:lnTo>
+                    <a:pt x="6087914" y="2164187"/>
+                  </a:lnTo>
+                  <a:lnTo>
+                    <a:pt x="6016292" y="2182926"/>
+                  </a:lnTo>
+                  <a:lnTo>
+                    <a:pt x="5944669" y="2201430"/>
+                  </a:lnTo>
+                  <a:lnTo>
+                    <a:pt x="5873047" y="2219700"/>
+                  </a:lnTo>
+                  <a:lnTo>
+                    <a:pt x="5801424" y="2237741"/>
+                  </a:lnTo>
+                  <a:lnTo>
+                    <a:pt x="5729802" y="2255554"/>
+                  </a:lnTo>
+                  <a:lnTo>
+                    <a:pt x="5658179" y="2273143"/>
+                  </a:lnTo>
+                  <a:lnTo>
+                    <a:pt x="5586557" y="2290511"/>
+                  </a:lnTo>
+                  <a:lnTo>
+                    <a:pt x="5514934" y="2307660"/>
+                  </a:lnTo>
+                  <a:lnTo>
+                    <a:pt x="5443311" y="2324593"/>
+                  </a:lnTo>
+                  <a:lnTo>
+                    <a:pt x="5371689" y="2341312"/>
+                  </a:lnTo>
+                  <a:lnTo>
+                    <a:pt x="5300066" y="2357822"/>
+                  </a:lnTo>
+                  <a:lnTo>
+                    <a:pt x="5228444" y="2374123"/>
+                  </a:lnTo>
+                  <a:lnTo>
+                    <a:pt x="5156821" y="2390220"/>
+                  </a:lnTo>
+                  <a:lnTo>
+                    <a:pt x="5085199" y="2406113"/>
+                  </a:lnTo>
+                  <a:lnTo>
+                    <a:pt x="5013576" y="2421807"/>
+                  </a:lnTo>
+                  <a:lnTo>
+                    <a:pt x="4941954" y="2437303"/>
+                  </a:lnTo>
+                  <a:lnTo>
+                    <a:pt x="4870331" y="2452604"/>
+                  </a:lnTo>
+                  <a:lnTo>
+                    <a:pt x="4798709" y="2467712"/>
+                  </a:lnTo>
+                  <a:lnTo>
+                    <a:pt x="4727086" y="2482630"/>
+                  </a:lnTo>
+                  <a:lnTo>
+                    <a:pt x="4655464" y="2497360"/>
+                  </a:lnTo>
+                  <a:lnTo>
+                    <a:pt x="4583841" y="2511905"/>
+                  </a:lnTo>
+                  <a:lnTo>
+                    <a:pt x="4512219" y="2526266"/>
+                  </a:lnTo>
+                  <a:lnTo>
+                    <a:pt x="4440596" y="2540447"/>
+                  </a:lnTo>
+                  <a:lnTo>
+                    <a:pt x="4368974" y="2554449"/>
+                  </a:lnTo>
+                  <a:lnTo>
+                    <a:pt x="4297351" y="2568275"/>
+                  </a:lnTo>
+                  <a:lnTo>
+                    <a:pt x="4225729" y="2581927"/>
+                  </a:lnTo>
+                  <a:lnTo>
+                    <a:pt x="4154106" y="2595407"/>
+                  </a:lnTo>
+                  <a:lnTo>
+                    <a:pt x="4082483" y="2608718"/>
+                  </a:lnTo>
+                  <a:lnTo>
+                    <a:pt x="4010861" y="2621861"/>
+                  </a:lnTo>
+                  <a:lnTo>
+                    <a:pt x="3939238" y="2634838"/>
+                  </a:lnTo>
+                  <a:lnTo>
+                    <a:pt x="3867616" y="2647652"/>
+                  </a:lnTo>
+                  <a:lnTo>
+                    <a:pt x="3795993" y="2660304"/>
+                  </a:lnTo>
+                  <a:lnTo>
+                    <a:pt x="3724371" y="2672798"/>
+                  </a:lnTo>
+                  <a:lnTo>
+                    <a:pt x="3652748" y="2685134"/>
+                  </a:lnTo>
+                  <a:lnTo>
+                    <a:pt x="3581126" y="2697315"/>
+                  </a:lnTo>
+                  <a:lnTo>
+                    <a:pt x="3509503" y="2709342"/>
+                  </a:lnTo>
+                  <a:lnTo>
+                    <a:pt x="3437881" y="2721218"/>
+                  </a:lnTo>
+                  <a:lnTo>
+                    <a:pt x="3366258" y="2732944"/>
+                  </a:lnTo>
+                  <a:lnTo>
+                    <a:pt x="3294636" y="2744523"/>
+                  </a:lnTo>
+                  <a:lnTo>
+                    <a:pt x="3223013" y="2755956"/>
+                  </a:lnTo>
+                  <a:lnTo>
+                    <a:pt x="3151391" y="2767245"/>
+                  </a:lnTo>
+                  <a:lnTo>
+                    <a:pt x="3079768" y="2778392"/>
+                  </a:lnTo>
+                  <a:lnTo>
+                    <a:pt x="3008146" y="2806805"/>
+                  </a:lnTo>
+                  <a:lnTo>
+                    <a:pt x="2936523" y="2845988"/>
+                  </a:lnTo>
+                  <a:lnTo>
+                    <a:pt x="2864901" y="2883355"/>
+                  </a:lnTo>
+                  <a:lnTo>
+                    <a:pt x="2793278" y="2918992"/>
+                  </a:lnTo>
+                  <a:lnTo>
+                    <a:pt x="2721655" y="2952978"/>
+                  </a:lnTo>
+                  <a:lnTo>
+                    <a:pt x="2650033" y="2985389"/>
+                  </a:lnTo>
+                  <a:lnTo>
+                    <a:pt x="2578410" y="3016300"/>
+                  </a:lnTo>
+                  <a:lnTo>
+                    <a:pt x="2506788" y="3045778"/>
+                  </a:lnTo>
+                  <a:lnTo>
+                    <a:pt x="2435165" y="3073890"/>
+                  </a:lnTo>
+                  <a:lnTo>
+                    <a:pt x="2363543" y="3100701"/>
+                  </a:lnTo>
+                  <a:lnTo>
+                    <a:pt x="2291920" y="3126269"/>
+                  </a:lnTo>
+                  <a:lnTo>
+                    <a:pt x="2220298" y="3150653"/>
+                  </a:lnTo>
+                  <a:lnTo>
+                    <a:pt x="2148675" y="3173907"/>
+                  </a:lnTo>
+                  <a:lnTo>
+                    <a:pt x="2077053" y="3196085"/>
+                  </a:lnTo>
+                  <a:lnTo>
+                    <a:pt x="2005430" y="3217234"/>
+                  </a:lnTo>
+                  <a:lnTo>
+                    <a:pt x="1933808" y="3237404"/>
+                  </a:lnTo>
+                  <a:lnTo>
+                    <a:pt x="1862185" y="3256640"/>
+                  </a:lnTo>
+                  <a:lnTo>
+                    <a:pt x="1790563" y="3274985"/>
+                  </a:lnTo>
+                  <a:lnTo>
+                    <a:pt x="1718940" y="3292479"/>
+                  </a:lnTo>
+                  <a:lnTo>
+                    <a:pt x="1647318" y="3309164"/>
+                  </a:lnTo>
+                  <a:lnTo>
+                    <a:pt x="1575695" y="3325075"/>
+                  </a:lnTo>
+                  <a:lnTo>
+                    <a:pt x="1504073" y="3340250"/>
+                  </a:lnTo>
+                  <a:lnTo>
+                    <a:pt x="1432450" y="3354721"/>
+                  </a:lnTo>
+                  <a:lnTo>
+                    <a:pt x="1360827" y="3368522"/>
+                  </a:lnTo>
+                  <a:lnTo>
+                    <a:pt x="1289205" y="3381684"/>
+                  </a:lnTo>
+                  <a:lnTo>
+                    <a:pt x="1217582" y="3394236"/>
+                  </a:lnTo>
+                  <a:lnTo>
+                    <a:pt x="1145960" y="3406206"/>
+                  </a:lnTo>
+                  <a:lnTo>
+                    <a:pt x="1074337" y="3417622"/>
+                  </a:lnTo>
+                  <a:lnTo>
+                    <a:pt x="1002715" y="3428510"/>
+                  </a:lnTo>
+                  <a:lnTo>
+                    <a:pt x="931092" y="3438892"/>
+                  </a:lnTo>
+                  <a:lnTo>
+                    <a:pt x="859470" y="3448794"/>
+                  </a:lnTo>
+                  <a:lnTo>
+                    <a:pt x="787847" y="3458237"/>
+                  </a:lnTo>
+                  <a:lnTo>
+                    <a:pt x="716225" y="3467243"/>
+                  </a:lnTo>
+                  <a:lnTo>
+                    <a:pt x="644602" y="3475832"/>
+                  </a:lnTo>
+                  <a:lnTo>
+                    <a:pt x="572980" y="3484022"/>
+                  </a:lnTo>
+                  <a:lnTo>
+                    <a:pt x="501357" y="3491834"/>
+                  </a:lnTo>
+                  <a:lnTo>
+                    <a:pt x="429735" y="3499283"/>
+                  </a:lnTo>
+                  <a:lnTo>
+                    <a:pt x="358112" y="3506387"/>
+                  </a:lnTo>
+                  <a:lnTo>
+                    <a:pt x="286490" y="3513163"/>
+                  </a:lnTo>
+                  <a:lnTo>
+                    <a:pt x="214867" y="3519624"/>
+                  </a:lnTo>
+                  <a:lnTo>
+                    <a:pt x="143245" y="3525786"/>
+                  </a:lnTo>
+                  <a:lnTo>
+                    <a:pt x="71622" y="3531663"/>
+                  </a:lnTo>
+                  <a:lnTo>
+                    <a:pt x="0" y="3537267"/>
                   </a:lnTo>
                   <a:close/>
                 </a:path>
@@ -3682,227 +3688,233 @@
           <p:spPr>
             <a:xfrm>
               <a:off x="1172049" y="1896563"/>
-              <a:ext cx="5066302" cy="3132678"/>
+              <a:ext cx="5216887" cy="3145613"/>
             </a:xfrm>
             <a:custGeom>
               <a:avLst/>
               <a:pathLst>
-                <a:path w="5066302" h="3132678">
+                <a:path w="5216887" h="3145613">
                   <a:moveTo>
-                    <a:pt x="0" y="3132678"/>
+                    <a:pt x="0" y="3145613"/>
                   </a:moveTo>
                   <a:lnTo>
-                    <a:pt x="71622" y="3126360"/>
-                  </a:lnTo>
-                  <a:lnTo>
-                    <a:pt x="143245" y="3119965"/>
-                  </a:lnTo>
-                  <a:lnTo>
-                    <a:pt x="214867" y="3113492"/>
-                  </a:lnTo>
-                  <a:lnTo>
-                    <a:pt x="286490" y="3106941"/>
-                  </a:lnTo>
-                  <a:lnTo>
-                    <a:pt x="358112" y="3100310"/>
-                  </a:lnTo>
-                  <a:lnTo>
-                    <a:pt x="429735" y="3093598"/>
-                  </a:lnTo>
-                  <a:lnTo>
-                    <a:pt x="501357" y="3086805"/>
-                  </a:lnTo>
-                  <a:lnTo>
-                    <a:pt x="572980" y="3079929"/>
-                  </a:lnTo>
-                  <a:lnTo>
-                    <a:pt x="644602" y="3072970"/>
-                  </a:lnTo>
-                  <a:lnTo>
-                    <a:pt x="716225" y="3065926"/>
-                  </a:lnTo>
-                  <a:lnTo>
-                    <a:pt x="787847" y="3058797"/>
-                  </a:lnTo>
-                  <a:lnTo>
-                    <a:pt x="859470" y="3051580"/>
-                  </a:lnTo>
-                  <a:lnTo>
-                    <a:pt x="931092" y="3044277"/>
-                  </a:lnTo>
-                  <a:lnTo>
-                    <a:pt x="1002715" y="3036884"/>
-                  </a:lnTo>
-                  <a:lnTo>
-                    <a:pt x="1074337" y="3029402"/>
-                  </a:lnTo>
-                  <a:lnTo>
-                    <a:pt x="1145960" y="3021829"/>
-                  </a:lnTo>
-                  <a:lnTo>
-                    <a:pt x="1217582" y="3014163"/>
-                  </a:lnTo>
-                  <a:lnTo>
-                    <a:pt x="1289205" y="3006405"/>
-                  </a:lnTo>
-                  <a:lnTo>
-                    <a:pt x="1360827" y="2998552"/>
-                  </a:lnTo>
-                  <a:lnTo>
-                    <a:pt x="1432450" y="2990604"/>
-                  </a:lnTo>
-                  <a:lnTo>
-                    <a:pt x="1504073" y="2982559"/>
-                  </a:lnTo>
-                  <a:lnTo>
-                    <a:pt x="1575695" y="2974417"/>
-                  </a:lnTo>
-                  <a:lnTo>
-                    <a:pt x="1647318" y="2966175"/>
-                  </a:lnTo>
-                  <a:lnTo>
-                    <a:pt x="1718940" y="2957834"/>
-                  </a:lnTo>
-                  <a:lnTo>
-                    <a:pt x="1790563" y="2949391"/>
-                  </a:lnTo>
-                  <a:lnTo>
-                    <a:pt x="1862185" y="2940845"/>
-                  </a:lnTo>
-                  <a:lnTo>
-                    <a:pt x="1933808" y="2932196"/>
-                  </a:lnTo>
-                  <a:lnTo>
-                    <a:pt x="2005430" y="2923442"/>
-                  </a:lnTo>
-                  <a:lnTo>
-                    <a:pt x="2077053" y="2914581"/>
-                  </a:lnTo>
-                  <a:lnTo>
-                    <a:pt x="2148675" y="2905612"/>
-                  </a:lnTo>
-                  <a:lnTo>
-                    <a:pt x="2220298" y="2896535"/>
-                  </a:lnTo>
-                  <a:lnTo>
-                    <a:pt x="2291920" y="2887347"/>
-                  </a:lnTo>
-                  <a:lnTo>
-                    <a:pt x="2363543" y="2878048"/>
-                  </a:lnTo>
-                  <a:lnTo>
-                    <a:pt x="2435165" y="2868635"/>
-                  </a:lnTo>
-                  <a:lnTo>
-                    <a:pt x="2506788" y="2859108"/>
-                  </a:lnTo>
-                  <a:lnTo>
-                    <a:pt x="2578410" y="2849466"/>
-                  </a:lnTo>
-                  <a:lnTo>
-                    <a:pt x="2650033" y="2839706"/>
-                  </a:lnTo>
-                  <a:lnTo>
-                    <a:pt x="2721655" y="2829828"/>
-                  </a:lnTo>
-                  <a:lnTo>
-                    <a:pt x="2793278" y="2819829"/>
-                  </a:lnTo>
-                  <a:lnTo>
-                    <a:pt x="2864901" y="2809710"/>
-                  </a:lnTo>
-                  <a:lnTo>
-                    <a:pt x="2936523" y="2799467"/>
-                  </a:lnTo>
-                  <a:lnTo>
-                    <a:pt x="3008146" y="2789100"/>
-                  </a:lnTo>
-                  <a:lnTo>
-                    <a:pt x="3079768" y="2764418"/>
-                  </a:lnTo>
-                  <a:lnTo>
-                    <a:pt x="3151391" y="2717971"/>
-                  </a:lnTo>
-                  <a:lnTo>
-                    <a:pt x="3223013" y="2669095"/>
-                  </a:lnTo>
-                  <a:lnTo>
-                    <a:pt x="3294636" y="2617663"/>
-                  </a:lnTo>
-                  <a:lnTo>
-                    <a:pt x="3366258" y="2563542"/>
-                  </a:lnTo>
-                  <a:lnTo>
-                    <a:pt x="3437881" y="2506591"/>
-                  </a:lnTo>
-                  <a:lnTo>
-                    <a:pt x="3509503" y="2446661"/>
-                  </a:lnTo>
-                  <a:lnTo>
-                    <a:pt x="3581126" y="2383598"/>
-                  </a:lnTo>
-                  <a:lnTo>
-                    <a:pt x="3652748" y="2317237"/>
-                  </a:lnTo>
-                  <a:lnTo>
-                    <a:pt x="3724371" y="2247406"/>
-                  </a:lnTo>
-                  <a:lnTo>
-                    <a:pt x="3795993" y="2173923"/>
-                  </a:lnTo>
-                  <a:lnTo>
-                    <a:pt x="3867616" y="2096598"/>
-                  </a:lnTo>
-                  <a:lnTo>
-                    <a:pt x="3939238" y="2015229"/>
-                  </a:lnTo>
-                  <a:lnTo>
-                    <a:pt x="4010861" y="1929605"/>
-                  </a:lnTo>
-                  <a:lnTo>
-                    <a:pt x="4082483" y="1839504"/>
-                  </a:lnTo>
-                  <a:lnTo>
-                    <a:pt x="4154106" y="1744691"/>
-                  </a:lnTo>
-                  <a:lnTo>
-                    <a:pt x="4225729" y="1644921"/>
-                  </a:lnTo>
-                  <a:lnTo>
-                    <a:pt x="4297351" y="1539933"/>
-                  </a:lnTo>
-                  <a:lnTo>
-                    <a:pt x="4368974" y="1429455"/>
-                  </a:lnTo>
-                  <a:lnTo>
-                    <a:pt x="4440596" y="1313200"/>
-                  </a:lnTo>
-                  <a:lnTo>
-                    <a:pt x="4512219" y="1190866"/>
-                  </a:lnTo>
-                  <a:lnTo>
-                    <a:pt x="4583841" y="1062134"/>
-                  </a:lnTo>
-                  <a:lnTo>
-                    <a:pt x="4655464" y="926671"/>
-                  </a:lnTo>
-                  <a:lnTo>
-                    <a:pt x="4727086" y="784125"/>
-                  </a:lnTo>
-                  <a:lnTo>
-                    <a:pt x="4798709" y="634124"/>
-                  </a:lnTo>
-                  <a:lnTo>
-                    <a:pt x="4870331" y="476280"/>
-                  </a:lnTo>
-                  <a:lnTo>
-                    <a:pt x="4941954" y="310181"/>
-                  </a:lnTo>
-                  <a:lnTo>
-                    <a:pt x="5013576" y="135397"/>
-                  </a:lnTo>
-                  <a:lnTo>
-                    <a:pt x="5066302" y="0"/>
+                    <a:pt x="71622" y="3139148"/>
+                  </a:lnTo>
+                  <a:lnTo>
+                    <a:pt x="143245" y="3132601"/>
+                  </a:lnTo>
+                  <a:lnTo>
+                    <a:pt x="214867" y="3125970"/>
+                  </a:lnTo>
+                  <a:lnTo>
+                    <a:pt x="286490" y="3119255"/>
+                  </a:lnTo>
+                  <a:lnTo>
+                    <a:pt x="358112" y="3112454"/>
+                  </a:lnTo>
+                  <a:lnTo>
+                    <a:pt x="429735" y="3105567"/>
+                  </a:lnTo>
+                  <a:lnTo>
+                    <a:pt x="501357" y="3098591"/>
+                  </a:lnTo>
+                  <a:lnTo>
+                    <a:pt x="572980" y="3091527"/>
+                  </a:lnTo>
+                  <a:lnTo>
+                    <a:pt x="644602" y="3084372"/>
+                  </a:lnTo>
+                  <a:lnTo>
+                    <a:pt x="716225" y="3077127"/>
+                  </a:lnTo>
+                  <a:lnTo>
+                    <a:pt x="787847" y="3069789"/>
+                  </a:lnTo>
+                  <a:lnTo>
+                    <a:pt x="859470" y="3062357"/>
+                  </a:lnTo>
+                  <a:lnTo>
+                    <a:pt x="931092" y="3054831"/>
+                  </a:lnTo>
+                  <a:lnTo>
+                    <a:pt x="1002715" y="3047209"/>
+                  </a:lnTo>
+                  <a:lnTo>
+                    <a:pt x="1074337" y="3039489"/>
+                  </a:lnTo>
+                  <a:lnTo>
+                    <a:pt x="1145960" y="3031671"/>
+                  </a:lnTo>
+                  <a:lnTo>
+                    <a:pt x="1217582" y="3023754"/>
+                  </a:lnTo>
+                  <a:lnTo>
+                    <a:pt x="1289205" y="3015735"/>
+                  </a:lnTo>
+                  <a:lnTo>
+                    <a:pt x="1360827" y="3007614"/>
+                  </a:lnTo>
+                  <a:lnTo>
+                    <a:pt x="1432450" y="2999390"/>
+                  </a:lnTo>
+                  <a:lnTo>
+                    <a:pt x="1504073" y="2991061"/>
+                  </a:lnTo>
+                  <a:lnTo>
+                    <a:pt x="1575695" y="2982626"/>
+                  </a:lnTo>
+                  <a:lnTo>
+                    <a:pt x="1647318" y="2974083"/>
+                  </a:lnTo>
+                  <a:lnTo>
+                    <a:pt x="1718940" y="2965431"/>
+                  </a:lnTo>
+                  <a:lnTo>
+                    <a:pt x="1790563" y="2956669"/>
+                  </a:lnTo>
+                  <a:lnTo>
+                    <a:pt x="1862185" y="2947795"/>
+                  </a:lnTo>
+                  <a:lnTo>
+                    <a:pt x="1933808" y="2938808"/>
+                  </a:lnTo>
+                  <a:lnTo>
+                    <a:pt x="2005430" y="2929706"/>
+                  </a:lnTo>
+                  <a:lnTo>
+                    <a:pt x="2077053" y="2920488"/>
+                  </a:lnTo>
+                  <a:lnTo>
+                    <a:pt x="2148675" y="2911153"/>
+                  </a:lnTo>
+                  <a:lnTo>
+                    <a:pt x="2220298" y="2901699"/>
+                  </a:lnTo>
+                  <a:lnTo>
+                    <a:pt x="2291920" y="2892124"/>
+                  </a:lnTo>
+                  <a:lnTo>
+                    <a:pt x="2363543" y="2882427"/>
+                  </a:lnTo>
+                  <a:lnTo>
+                    <a:pt x="2435165" y="2872607"/>
+                  </a:lnTo>
+                  <a:lnTo>
+                    <a:pt x="2506788" y="2862661"/>
+                  </a:lnTo>
+                  <a:lnTo>
+                    <a:pt x="2578410" y="2852589"/>
+                  </a:lnTo>
+                  <a:lnTo>
+                    <a:pt x="2650033" y="2842388"/>
+                  </a:lnTo>
+                  <a:lnTo>
+                    <a:pt x="2721655" y="2832057"/>
+                  </a:lnTo>
+                  <a:lnTo>
+                    <a:pt x="2793278" y="2821594"/>
+                  </a:lnTo>
+                  <a:lnTo>
+                    <a:pt x="2864901" y="2810998"/>
+                  </a:lnTo>
+                  <a:lnTo>
+                    <a:pt x="2936523" y="2800267"/>
+                  </a:lnTo>
+                  <a:lnTo>
+                    <a:pt x="3008146" y="2789399"/>
+                  </a:lnTo>
+                  <a:lnTo>
+                    <a:pt x="3079768" y="2765718"/>
+                  </a:lnTo>
+                  <a:lnTo>
+                    <a:pt x="3151391" y="2722636"/>
+                  </a:lnTo>
+                  <a:lnTo>
+                    <a:pt x="3223013" y="2677462"/>
+                  </a:lnTo>
+                  <a:lnTo>
+                    <a:pt x="3294636" y="2630093"/>
+                  </a:lnTo>
+                  <a:lnTo>
+                    <a:pt x="3366258" y="2580423"/>
+                  </a:lnTo>
+                  <a:lnTo>
+                    <a:pt x="3437881" y="2528340"/>
+                  </a:lnTo>
+                  <a:lnTo>
+                    <a:pt x="3509503" y="2473728"/>
+                  </a:lnTo>
+                  <a:lnTo>
+                    <a:pt x="3581126" y="2416463"/>
+                  </a:lnTo>
+                  <a:lnTo>
+                    <a:pt x="3652748" y="2356416"/>
+                  </a:lnTo>
+                  <a:lnTo>
+                    <a:pt x="3724371" y="2293452"/>
+                  </a:lnTo>
+                  <a:lnTo>
+                    <a:pt x="3795993" y="2227430"/>
+                  </a:lnTo>
+                  <a:lnTo>
+                    <a:pt x="3867616" y="2158201"/>
+                  </a:lnTo>
+                  <a:lnTo>
+                    <a:pt x="3939238" y="2085609"/>
+                  </a:lnTo>
+                  <a:lnTo>
+                    <a:pt x="4010861" y="2009491"/>
+                  </a:lnTo>
+                  <a:lnTo>
+                    <a:pt x="4082483" y="1929676"/>
+                  </a:lnTo>
+                  <a:lnTo>
+                    <a:pt x="4154106" y="1845984"/>
+                  </a:lnTo>
+                  <a:lnTo>
+                    <a:pt x="4225729" y="1758226"/>
+                  </a:lnTo>
+                  <a:lnTo>
+                    <a:pt x="4297351" y="1666206"/>
+                  </a:lnTo>
+                  <a:lnTo>
+                    <a:pt x="4368974" y="1569715"/>
+                  </a:lnTo>
+                  <a:lnTo>
+                    <a:pt x="4440596" y="1468538"/>
+                  </a:lnTo>
+                  <a:lnTo>
+                    <a:pt x="4512219" y="1362446"/>
+                  </a:lnTo>
+                  <a:lnTo>
+                    <a:pt x="4583841" y="1251201"/>
+                  </a:lnTo>
+                  <a:lnTo>
+                    <a:pt x="4655464" y="1134552"/>
+                  </a:lnTo>
+                  <a:lnTo>
+                    <a:pt x="4727086" y="1012237"/>
+                  </a:lnTo>
+                  <a:lnTo>
+                    <a:pt x="4798709" y="883980"/>
+                  </a:lnTo>
+                  <a:lnTo>
+                    <a:pt x="4870331" y="749494"/>
+                  </a:lnTo>
+                  <a:lnTo>
+                    <a:pt x="4941954" y="608475"/>
+                  </a:lnTo>
+                  <a:lnTo>
+                    <a:pt x="5013576" y="460606"/>
+                  </a:lnTo>
+                  <a:lnTo>
+                    <a:pt x="5085199" y="305554"/>
+                  </a:lnTo>
+                  <a:lnTo>
+                    <a:pt x="5156821" y="142971"/>
+                  </a:lnTo>
+                  <a:lnTo>
+                    <a:pt x="5216887" y="0"/>
                   </a:lnTo>
                 </a:path>
               </a:pathLst>
@@ -3922,312 +3934,312 @@
           </p:nvSpPr>
           <p:spPr>
             <a:xfrm>
-              <a:off x="1172049" y="3830203"/>
-              <a:ext cx="7090630" cy="1619769"/>
+              <a:off x="1172049" y="3771871"/>
+              <a:ext cx="7090630" cy="1661958"/>
             </a:xfrm>
             <a:custGeom>
               <a:avLst/>
               <a:pathLst>
-                <a:path w="7090630" h="1619769">
+                <a:path w="7090630" h="1661958">
                   <a:moveTo>
                     <a:pt x="7090630" y="0"/>
                   </a:moveTo>
                   <a:lnTo>
-                    <a:pt x="7019007" y="20637"/>
-                  </a:lnTo>
-                  <a:lnTo>
-                    <a:pt x="6947385" y="41027"/>
-                  </a:lnTo>
-                  <a:lnTo>
-                    <a:pt x="6875762" y="61172"/>
-                  </a:lnTo>
-                  <a:lnTo>
-                    <a:pt x="6804139" y="81075"/>
-                  </a:lnTo>
-                  <a:lnTo>
-                    <a:pt x="6732517" y="100739"/>
-                  </a:lnTo>
-                  <a:lnTo>
-                    <a:pt x="6660894" y="120167"/>
-                  </a:lnTo>
-                  <a:lnTo>
-                    <a:pt x="6589272" y="139362"/>
-                  </a:lnTo>
-                  <a:lnTo>
-                    <a:pt x="6517649" y="158327"/>
-                  </a:lnTo>
-                  <a:lnTo>
-                    <a:pt x="6446027" y="177063"/>
-                  </a:lnTo>
-                  <a:lnTo>
-                    <a:pt x="6374404" y="195575"/>
-                  </a:lnTo>
-                  <a:lnTo>
-                    <a:pt x="6302782" y="213865"/>
-                  </a:lnTo>
-                  <a:lnTo>
-                    <a:pt x="6231159" y="231935"/>
-                  </a:lnTo>
-                  <a:lnTo>
-                    <a:pt x="6159537" y="249788"/>
-                  </a:lnTo>
-                  <a:lnTo>
-                    <a:pt x="6087914" y="267426"/>
-                  </a:lnTo>
-                  <a:lnTo>
-                    <a:pt x="6016292" y="284853"/>
-                  </a:lnTo>
-                  <a:lnTo>
-                    <a:pt x="5944669" y="302071"/>
-                  </a:lnTo>
-                  <a:lnTo>
-                    <a:pt x="5873047" y="319082"/>
-                  </a:lnTo>
-                  <a:lnTo>
-                    <a:pt x="5801424" y="335889"/>
-                  </a:lnTo>
-                  <a:lnTo>
-                    <a:pt x="5729802" y="352494"/>
-                  </a:lnTo>
-                  <a:lnTo>
-                    <a:pt x="5658179" y="368899"/>
-                  </a:lnTo>
-                  <a:lnTo>
-                    <a:pt x="5586557" y="385108"/>
-                  </a:lnTo>
-                  <a:lnTo>
-                    <a:pt x="5514934" y="401122"/>
-                  </a:lnTo>
-                  <a:lnTo>
-                    <a:pt x="5443311" y="416944"/>
-                  </a:lnTo>
-                  <a:lnTo>
-                    <a:pt x="5371689" y="432576"/>
-                  </a:lnTo>
-                  <a:lnTo>
-                    <a:pt x="5300066" y="448020"/>
-                  </a:lnTo>
-                  <a:lnTo>
-                    <a:pt x="5228444" y="463279"/>
-                  </a:lnTo>
-                  <a:lnTo>
-                    <a:pt x="5156821" y="478355"/>
-                  </a:lnTo>
-                  <a:lnTo>
-                    <a:pt x="5085199" y="493249"/>
-                  </a:lnTo>
-                  <a:lnTo>
-                    <a:pt x="5013576" y="507965"/>
-                  </a:lnTo>
-                  <a:lnTo>
-                    <a:pt x="4941954" y="522504"/>
-                  </a:lnTo>
-                  <a:lnTo>
-                    <a:pt x="4870331" y="536869"/>
-                  </a:lnTo>
-                  <a:lnTo>
-                    <a:pt x="4798709" y="551061"/>
-                  </a:lnTo>
-                  <a:lnTo>
-                    <a:pt x="4727086" y="565083"/>
-                  </a:lnTo>
-                  <a:lnTo>
-                    <a:pt x="4655464" y="578936"/>
-                  </a:lnTo>
-                  <a:lnTo>
-                    <a:pt x="4583841" y="592623"/>
-                  </a:lnTo>
-                  <a:lnTo>
-                    <a:pt x="4512219" y="606146"/>
-                  </a:lnTo>
-                  <a:lnTo>
-                    <a:pt x="4440596" y="619507"/>
-                  </a:lnTo>
-                  <a:lnTo>
-                    <a:pt x="4368974" y="632707"/>
-                  </a:lnTo>
-                  <a:lnTo>
-                    <a:pt x="4297351" y="645748"/>
-                  </a:lnTo>
-                  <a:lnTo>
-                    <a:pt x="4225729" y="658633"/>
-                  </a:lnTo>
-                  <a:lnTo>
-                    <a:pt x="4154106" y="671363"/>
-                  </a:lnTo>
-                  <a:lnTo>
-                    <a:pt x="4082483" y="683941"/>
-                  </a:lnTo>
-                  <a:lnTo>
-                    <a:pt x="4010861" y="696367"/>
-                  </a:lnTo>
-                  <a:lnTo>
-                    <a:pt x="3939238" y="708645"/>
-                  </a:lnTo>
-                  <a:lnTo>
-                    <a:pt x="3867616" y="720774"/>
-                  </a:lnTo>
-                  <a:lnTo>
-                    <a:pt x="3795993" y="732759"/>
-                  </a:lnTo>
-                  <a:lnTo>
-                    <a:pt x="3724371" y="744599"/>
-                  </a:lnTo>
-                  <a:lnTo>
-                    <a:pt x="3652748" y="756297"/>
-                  </a:lnTo>
-                  <a:lnTo>
-                    <a:pt x="3581126" y="767855"/>
-                  </a:lnTo>
-                  <a:lnTo>
-                    <a:pt x="3509503" y="779274"/>
-                  </a:lnTo>
-                  <a:lnTo>
-                    <a:pt x="3437881" y="790556"/>
-                  </a:lnTo>
-                  <a:lnTo>
-                    <a:pt x="3366258" y="801703"/>
-                  </a:lnTo>
-                  <a:lnTo>
-                    <a:pt x="3294636" y="812715"/>
-                  </a:lnTo>
-                  <a:lnTo>
-                    <a:pt x="3223013" y="823596"/>
-                  </a:lnTo>
-                  <a:lnTo>
-                    <a:pt x="3151391" y="834346"/>
-                  </a:lnTo>
-                  <a:lnTo>
-                    <a:pt x="3079768" y="844966"/>
-                  </a:lnTo>
-                  <a:lnTo>
-                    <a:pt x="3008146" y="874917"/>
-                  </a:lnTo>
-                  <a:lnTo>
-                    <a:pt x="2936523" y="916863"/>
-                  </a:lnTo>
-                  <a:lnTo>
-                    <a:pt x="2864901" y="956724"/>
-                  </a:lnTo>
-                  <a:lnTo>
-                    <a:pt x="2793278" y="994604"/>
-                  </a:lnTo>
-                  <a:lnTo>
-                    <a:pt x="2721655" y="1030602"/>
-                  </a:lnTo>
-                  <a:lnTo>
-                    <a:pt x="2650033" y="1064811"/>
-                  </a:lnTo>
-                  <a:lnTo>
-                    <a:pt x="2578410" y="1097320"/>
-                  </a:lnTo>
-                  <a:lnTo>
-                    <a:pt x="2506788" y="1128214"/>
-                  </a:lnTo>
-                  <a:lnTo>
-                    <a:pt x="2435165" y="1157572"/>
-                  </a:lnTo>
-                  <a:lnTo>
-                    <a:pt x="2363543" y="1185471"/>
-                  </a:lnTo>
-                  <a:lnTo>
-                    <a:pt x="2291920" y="1211985"/>
-                  </a:lnTo>
-                  <a:lnTo>
-                    <a:pt x="2220298" y="1237180"/>
-                  </a:lnTo>
-                  <a:lnTo>
-                    <a:pt x="2148675" y="1261123"/>
-                  </a:lnTo>
-                  <a:lnTo>
-                    <a:pt x="2077053" y="1283877"/>
-                  </a:lnTo>
-                  <a:lnTo>
-                    <a:pt x="2005430" y="1305500"/>
-                  </a:lnTo>
-                  <a:lnTo>
-                    <a:pt x="1933808" y="1326048"/>
-                  </a:lnTo>
-                  <a:lnTo>
-                    <a:pt x="1862185" y="1345576"/>
-                  </a:lnTo>
-                  <a:lnTo>
-                    <a:pt x="1790563" y="1364133"/>
-                  </a:lnTo>
-                  <a:lnTo>
-                    <a:pt x="1718940" y="1381767"/>
-                  </a:lnTo>
-                  <a:lnTo>
-                    <a:pt x="1647318" y="1398526"/>
-                  </a:lnTo>
-                  <a:lnTo>
-                    <a:pt x="1575695" y="1414451"/>
-                  </a:lnTo>
-                  <a:lnTo>
-                    <a:pt x="1504073" y="1429586"/>
-                  </a:lnTo>
-                  <a:lnTo>
-                    <a:pt x="1432450" y="1443968"/>
-                  </a:lnTo>
-                  <a:lnTo>
-                    <a:pt x="1360827" y="1457635"/>
-                  </a:lnTo>
-                  <a:lnTo>
-                    <a:pt x="1289205" y="1470624"/>
-                  </a:lnTo>
-                  <a:lnTo>
-                    <a:pt x="1217582" y="1482966"/>
-                  </a:lnTo>
-                  <a:lnTo>
-                    <a:pt x="1145960" y="1494696"/>
-                  </a:lnTo>
-                  <a:lnTo>
-                    <a:pt x="1074337" y="1505843"/>
-                  </a:lnTo>
-                  <a:lnTo>
-                    <a:pt x="1002715" y="1516435"/>
-                  </a:lnTo>
-                  <a:lnTo>
-                    <a:pt x="931092" y="1526502"/>
-                  </a:lnTo>
-                  <a:lnTo>
-                    <a:pt x="859470" y="1536068"/>
-                  </a:lnTo>
-                  <a:lnTo>
-                    <a:pt x="787847" y="1545158"/>
-                  </a:lnTo>
-                  <a:lnTo>
-                    <a:pt x="716225" y="1553797"/>
-                  </a:lnTo>
-                  <a:lnTo>
-                    <a:pt x="644602" y="1562007"/>
-                  </a:lnTo>
-                  <a:lnTo>
-                    <a:pt x="572980" y="1569809"/>
-                  </a:lnTo>
-                  <a:lnTo>
-                    <a:pt x="501357" y="1577223"/>
-                  </a:lnTo>
-                  <a:lnTo>
-                    <a:pt x="429735" y="1584268"/>
-                  </a:lnTo>
-                  <a:lnTo>
-                    <a:pt x="358112" y="1590964"/>
-                  </a:lnTo>
-                  <a:lnTo>
-                    <a:pt x="286490" y="1597326"/>
-                  </a:lnTo>
-                  <a:lnTo>
-                    <a:pt x="214867" y="1603373"/>
-                  </a:lnTo>
-                  <a:lnTo>
-                    <a:pt x="143245" y="1609119"/>
-                  </a:lnTo>
-                  <a:lnTo>
-                    <a:pt x="71622" y="1614580"/>
-                  </a:lnTo>
-                  <a:lnTo>
-                    <a:pt x="0" y="1619769"/>
+                    <a:pt x="7019007" y="22376"/>
+                  </a:lnTo>
+                  <a:lnTo>
+                    <a:pt x="6947385" y="44470"/>
+                  </a:lnTo>
+                  <a:lnTo>
+                    <a:pt x="6875762" y="66287"/>
+                  </a:lnTo>
+                  <a:lnTo>
+                    <a:pt x="6804139" y="87828"/>
+                  </a:lnTo>
+                  <a:lnTo>
+                    <a:pt x="6732517" y="109099"/>
+                  </a:lnTo>
+                  <a:lnTo>
+                    <a:pt x="6660894" y="130102"/>
+                  </a:lnTo>
+                  <a:lnTo>
+                    <a:pt x="6589272" y="150840"/>
+                  </a:lnTo>
+                  <a:lnTo>
+                    <a:pt x="6517649" y="171317"/>
+                  </a:lnTo>
+                  <a:lnTo>
+                    <a:pt x="6446027" y="191536"/>
+                  </a:lnTo>
+                  <a:lnTo>
+                    <a:pt x="6374404" y="211501"/>
+                  </a:lnTo>
+                  <a:lnTo>
+                    <a:pt x="6302782" y="231215"/>
+                  </a:lnTo>
+                  <a:lnTo>
+                    <a:pt x="6231159" y="250680"/>
+                  </a:lnTo>
+                  <a:lnTo>
+                    <a:pt x="6159537" y="269900"/>
+                  </a:lnTo>
+                  <a:lnTo>
+                    <a:pt x="6087914" y="288879"/>
+                  </a:lnTo>
+                  <a:lnTo>
+                    <a:pt x="6016292" y="307618"/>
+                  </a:lnTo>
+                  <a:lnTo>
+                    <a:pt x="5944669" y="326121"/>
+                  </a:lnTo>
+                  <a:lnTo>
+                    <a:pt x="5873047" y="344392"/>
+                  </a:lnTo>
+                  <a:lnTo>
+                    <a:pt x="5801424" y="362432"/>
+                  </a:lnTo>
+                  <a:lnTo>
+                    <a:pt x="5729802" y="380245"/>
+                  </a:lnTo>
+                  <a:lnTo>
+                    <a:pt x="5658179" y="397834"/>
+                  </a:lnTo>
+                  <a:lnTo>
+                    <a:pt x="5586557" y="415202"/>
+                  </a:lnTo>
+                  <a:lnTo>
+                    <a:pt x="5514934" y="432351"/>
+                  </a:lnTo>
+                  <a:lnTo>
+                    <a:pt x="5443311" y="449284"/>
+                  </a:lnTo>
+                  <a:lnTo>
+                    <a:pt x="5371689" y="466004"/>
+                  </a:lnTo>
+                  <a:lnTo>
+                    <a:pt x="5300066" y="482513"/>
+                  </a:lnTo>
+                  <a:lnTo>
+                    <a:pt x="5228444" y="498815"/>
+                  </a:lnTo>
+                  <a:lnTo>
+                    <a:pt x="5156821" y="514911"/>
+                  </a:lnTo>
+                  <a:lnTo>
+                    <a:pt x="5085199" y="530805"/>
+                  </a:lnTo>
+                  <a:lnTo>
+                    <a:pt x="5013576" y="546498"/>
+                  </a:lnTo>
+                  <a:lnTo>
+                    <a:pt x="4941954" y="561994"/>
+                  </a:lnTo>
+                  <a:lnTo>
+                    <a:pt x="4870331" y="577295"/>
+                  </a:lnTo>
+                  <a:lnTo>
+                    <a:pt x="4798709" y="592403"/>
+                  </a:lnTo>
+                  <a:lnTo>
+                    <a:pt x="4727086" y="607321"/>
+                  </a:lnTo>
+                  <a:lnTo>
+                    <a:pt x="4655464" y="622051"/>
+                  </a:lnTo>
+                  <a:lnTo>
+                    <a:pt x="4583841" y="636596"/>
+                  </a:lnTo>
+                  <a:lnTo>
+                    <a:pt x="4512219" y="650958"/>
+                  </a:lnTo>
+                  <a:lnTo>
+                    <a:pt x="4440596" y="665139"/>
+                  </a:lnTo>
+                  <a:lnTo>
+                    <a:pt x="4368974" y="679141"/>
+                  </a:lnTo>
+                  <a:lnTo>
+                    <a:pt x="4297351" y="692967"/>
+                  </a:lnTo>
+                  <a:lnTo>
+                    <a:pt x="4225729" y="706619"/>
+                  </a:lnTo>
+                  <a:lnTo>
+                    <a:pt x="4154106" y="720099"/>
+                  </a:lnTo>
+                  <a:lnTo>
+                    <a:pt x="4082483" y="733409"/>
+                  </a:lnTo>
+                  <a:lnTo>
+                    <a:pt x="4010861" y="746552"/>
+                  </a:lnTo>
+                  <a:lnTo>
+                    <a:pt x="3939238" y="759529"/>
+                  </a:lnTo>
+                  <a:lnTo>
+                    <a:pt x="3867616" y="772343"/>
+                  </a:lnTo>
+                  <a:lnTo>
+                    <a:pt x="3795993" y="784996"/>
+                  </a:lnTo>
+                  <a:lnTo>
+                    <a:pt x="3724371" y="797489"/>
+                  </a:lnTo>
+                  <a:lnTo>
+                    <a:pt x="3652748" y="809825"/>
+                  </a:lnTo>
+                  <a:lnTo>
+                    <a:pt x="3581126" y="822006"/>
+                  </a:lnTo>
+                  <a:lnTo>
+                    <a:pt x="3509503" y="834033"/>
+                  </a:lnTo>
+                  <a:lnTo>
+                    <a:pt x="3437881" y="845909"/>
+                  </a:lnTo>
+                  <a:lnTo>
+                    <a:pt x="3366258" y="857636"/>
+                  </a:lnTo>
+                  <a:lnTo>
+                    <a:pt x="3294636" y="869215"/>
+                  </a:lnTo>
+                  <a:lnTo>
+                    <a:pt x="3223013" y="880648"/>
+                  </a:lnTo>
+                  <a:lnTo>
+                    <a:pt x="3151391" y="891937"/>
+                  </a:lnTo>
+                  <a:lnTo>
+                    <a:pt x="3079768" y="903084"/>
+                  </a:lnTo>
+                  <a:lnTo>
+                    <a:pt x="3008146" y="931496"/>
+                  </a:lnTo>
+                  <a:lnTo>
+                    <a:pt x="2936523" y="970679"/>
+                  </a:lnTo>
+                  <a:lnTo>
+                    <a:pt x="2864901" y="1008047"/>
+                  </a:lnTo>
+                  <a:lnTo>
+                    <a:pt x="2793278" y="1043684"/>
+                  </a:lnTo>
+                  <a:lnTo>
+                    <a:pt x="2721655" y="1077669"/>
+                  </a:lnTo>
+                  <a:lnTo>
+                    <a:pt x="2650033" y="1110081"/>
+                  </a:lnTo>
+                  <a:lnTo>
+                    <a:pt x="2578410" y="1140991"/>
+                  </a:lnTo>
+                  <a:lnTo>
+                    <a:pt x="2506788" y="1170469"/>
+                  </a:lnTo>
+                  <a:lnTo>
+                    <a:pt x="2435165" y="1198582"/>
+                  </a:lnTo>
+                  <a:lnTo>
+                    <a:pt x="2363543" y="1225392"/>
+                  </a:lnTo>
+                  <a:lnTo>
+                    <a:pt x="2291920" y="1250961"/>
+                  </a:lnTo>
+                  <a:lnTo>
+                    <a:pt x="2220298" y="1275345"/>
+                  </a:lnTo>
+                  <a:lnTo>
+                    <a:pt x="2148675" y="1298599"/>
+                  </a:lnTo>
+                  <a:lnTo>
+                    <a:pt x="2077053" y="1320776"/>
+                  </a:lnTo>
+                  <a:lnTo>
+                    <a:pt x="2005430" y="1341926"/>
+                  </a:lnTo>
+                  <a:lnTo>
+                    <a:pt x="1933808" y="1362096"/>
+                  </a:lnTo>
+                  <a:lnTo>
+                    <a:pt x="1862185" y="1381331"/>
+                  </a:lnTo>
+                  <a:lnTo>
+                    <a:pt x="1790563" y="1399676"/>
+                  </a:lnTo>
+                  <a:lnTo>
+                    <a:pt x="1718940" y="1417171"/>
+                  </a:lnTo>
+                  <a:lnTo>
+                    <a:pt x="1647318" y="1433855"/>
+                  </a:lnTo>
+                  <a:lnTo>
+                    <a:pt x="1575695" y="1449767"/>
+                  </a:lnTo>
+                  <a:lnTo>
+                    <a:pt x="1504073" y="1464941"/>
+                  </a:lnTo>
+                  <a:lnTo>
+                    <a:pt x="1432450" y="1479412"/>
+                  </a:lnTo>
+                  <a:lnTo>
+                    <a:pt x="1360827" y="1493214"/>
+                  </a:lnTo>
+                  <a:lnTo>
+                    <a:pt x="1289205" y="1506375"/>
+                  </a:lnTo>
+                  <a:lnTo>
+                    <a:pt x="1217582" y="1518927"/>
+                  </a:lnTo>
+                  <a:lnTo>
+                    <a:pt x="1145960" y="1530898"/>
+                  </a:lnTo>
+                  <a:lnTo>
+                    <a:pt x="1074337" y="1542314"/>
+                  </a:lnTo>
+                  <a:lnTo>
+                    <a:pt x="1002715" y="1553201"/>
+                  </a:lnTo>
+                  <a:lnTo>
+                    <a:pt x="931092" y="1563584"/>
+                  </a:lnTo>
+                  <a:lnTo>
+                    <a:pt x="859470" y="1573486"/>
+                  </a:lnTo>
+                  <a:lnTo>
+                    <a:pt x="787847" y="1582929"/>
+                  </a:lnTo>
+                  <a:lnTo>
+                    <a:pt x="716225" y="1591935"/>
+                  </a:lnTo>
+                  <a:lnTo>
+                    <a:pt x="644602" y="1600523"/>
+                  </a:lnTo>
+                  <a:lnTo>
+                    <a:pt x="572980" y="1608714"/>
+                  </a:lnTo>
+                  <a:lnTo>
+                    <a:pt x="501357" y="1616525"/>
+                  </a:lnTo>
+                  <a:lnTo>
+                    <a:pt x="429735" y="1623975"/>
+                  </a:lnTo>
+                  <a:lnTo>
+                    <a:pt x="358112" y="1631079"/>
+                  </a:lnTo>
+                  <a:lnTo>
+                    <a:pt x="286490" y="1637854"/>
+                  </a:lnTo>
+                  <a:lnTo>
+                    <a:pt x="214867" y="1644315"/>
+                  </a:lnTo>
+                  <a:lnTo>
+                    <a:pt x="143245" y="1650477"/>
+                  </a:lnTo>
+                  <a:lnTo>
+                    <a:pt x="71622" y="1656354"/>
+                  </a:lnTo>
+                  <a:lnTo>
+                    <a:pt x="0" y="1661958"/>
                   </a:lnTo>
                 </a:path>
               </a:pathLst>
@@ -4248,281 +4260,287 @@
           <p:spPr>
             <a:xfrm>
               <a:off x="1172049" y="1896563"/>
-              <a:ext cx="6310474" cy="3425490"/>
+              <a:ext cx="6470242" cy="3410777"/>
             </a:xfrm>
             <a:custGeom>
               <a:avLst/>
               <a:pathLst>
-                <a:path w="6310474" h="3425490">
+                <a:path w="6470242" h="3410777">
                   <a:moveTo>
-                    <a:pt x="0" y="3425490"/>
+                    <a:pt x="0" y="3410777"/>
                   </a:moveTo>
                   <a:lnTo>
-                    <a:pt x="71622" y="3418215"/>
-                  </a:lnTo>
-                  <a:lnTo>
-                    <a:pt x="143245" y="3410707"/>
-                  </a:lnTo>
-                  <a:lnTo>
-                    <a:pt x="214867" y="3402959"/>
-                  </a:lnTo>
-                  <a:lnTo>
-                    <a:pt x="286490" y="3394962"/>
-                  </a:lnTo>
-                  <a:lnTo>
-                    <a:pt x="358112" y="3386710"/>
-                  </a:lnTo>
-                  <a:lnTo>
-                    <a:pt x="429735" y="3378193"/>
-                  </a:lnTo>
-                  <a:lnTo>
-                    <a:pt x="501357" y="3369403"/>
-                  </a:lnTo>
-                  <a:lnTo>
-                    <a:pt x="572980" y="3360332"/>
-                  </a:lnTo>
-                  <a:lnTo>
-                    <a:pt x="644602" y="3350970"/>
-                  </a:lnTo>
-                  <a:lnTo>
-                    <a:pt x="716225" y="3341309"/>
-                  </a:lnTo>
-                  <a:lnTo>
-                    <a:pt x="787847" y="3331338"/>
-                  </a:lnTo>
-                  <a:lnTo>
-                    <a:pt x="859470" y="3321047"/>
-                  </a:lnTo>
-                  <a:lnTo>
-                    <a:pt x="931092" y="3310427"/>
-                  </a:lnTo>
-                  <a:lnTo>
-                    <a:pt x="1002715" y="3299467"/>
-                  </a:lnTo>
-                  <a:lnTo>
-                    <a:pt x="1074337" y="3288156"/>
-                  </a:lnTo>
-                  <a:lnTo>
-                    <a:pt x="1145960" y="3276483"/>
-                  </a:lnTo>
-                  <a:lnTo>
-                    <a:pt x="1217582" y="3264436"/>
-                  </a:lnTo>
-                  <a:lnTo>
-                    <a:pt x="1289205" y="3252003"/>
-                  </a:lnTo>
-                  <a:lnTo>
-                    <a:pt x="1360827" y="3239172"/>
-                  </a:lnTo>
-                  <a:lnTo>
-                    <a:pt x="1432450" y="3225930"/>
-                  </a:lnTo>
-                  <a:lnTo>
-                    <a:pt x="1504073" y="3212264"/>
-                  </a:lnTo>
-                  <a:lnTo>
-                    <a:pt x="1575695" y="3198160"/>
-                  </a:lnTo>
-                  <a:lnTo>
-                    <a:pt x="1647318" y="3183604"/>
-                  </a:lnTo>
-                  <a:lnTo>
-                    <a:pt x="1718940" y="3168583"/>
-                  </a:lnTo>
-                  <a:lnTo>
-                    <a:pt x="1790563" y="3153080"/>
-                  </a:lnTo>
-                  <a:lnTo>
-                    <a:pt x="1862185" y="3137081"/>
-                  </a:lnTo>
-                  <a:lnTo>
-                    <a:pt x="1933808" y="3120569"/>
-                  </a:lnTo>
-                  <a:lnTo>
-                    <a:pt x="2005430" y="3103528"/>
-                  </a:lnTo>
-                  <a:lnTo>
-                    <a:pt x="2077053" y="3085942"/>
-                  </a:lnTo>
-                  <a:lnTo>
-                    <a:pt x="2148675" y="3067793"/>
-                  </a:lnTo>
-                  <a:lnTo>
-                    <a:pt x="2220298" y="3049062"/>
-                  </a:lnTo>
-                  <a:lnTo>
-                    <a:pt x="2291920" y="3029731"/>
-                  </a:lnTo>
-                  <a:lnTo>
-                    <a:pt x="2363543" y="3009781"/>
-                  </a:lnTo>
-                  <a:lnTo>
-                    <a:pt x="2435165" y="2989193"/>
-                  </a:lnTo>
-                  <a:lnTo>
-                    <a:pt x="2506788" y="2967945"/>
-                  </a:lnTo>
-                  <a:lnTo>
-                    <a:pt x="2578410" y="2946016"/>
-                  </a:lnTo>
-                  <a:lnTo>
-                    <a:pt x="2650033" y="2923385"/>
-                  </a:lnTo>
-                  <a:lnTo>
-                    <a:pt x="2721655" y="2900030"/>
-                  </a:lnTo>
-                  <a:lnTo>
-                    <a:pt x="2793278" y="2875926"/>
-                  </a:lnTo>
-                  <a:lnTo>
-                    <a:pt x="2864901" y="2851050"/>
-                  </a:lnTo>
-                  <a:lnTo>
-                    <a:pt x="2936523" y="2825378"/>
-                  </a:lnTo>
-                  <a:lnTo>
-                    <a:pt x="3008146" y="2798884"/>
-                  </a:lnTo>
-                  <a:lnTo>
-                    <a:pt x="3079768" y="2771541"/>
-                  </a:lnTo>
-                  <a:lnTo>
-                    <a:pt x="3151391" y="2743322"/>
-                  </a:lnTo>
-                  <a:lnTo>
-                    <a:pt x="3223013" y="2714199"/>
-                  </a:lnTo>
-                  <a:lnTo>
-                    <a:pt x="3294636" y="2684144"/>
-                  </a:lnTo>
-                  <a:lnTo>
-                    <a:pt x="3366258" y="2653127"/>
-                  </a:lnTo>
-                  <a:lnTo>
-                    <a:pt x="3437881" y="2621115"/>
-                  </a:lnTo>
-                  <a:lnTo>
-                    <a:pt x="3509503" y="2588079"/>
-                  </a:lnTo>
-                  <a:lnTo>
-                    <a:pt x="3581126" y="2553985"/>
-                  </a:lnTo>
-                  <a:lnTo>
-                    <a:pt x="3652748" y="2518799"/>
-                  </a:lnTo>
-                  <a:lnTo>
-                    <a:pt x="3724371" y="2482485"/>
-                  </a:lnTo>
-                  <a:lnTo>
-                    <a:pt x="3795993" y="2445009"/>
-                  </a:lnTo>
-                  <a:lnTo>
-                    <a:pt x="3867616" y="2406333"/>
-                  </a:lnTo>
-                  <a:lnTo>
-                    <a:pt x="3939238" y="2366418"/>
-                  </a:lnTo>
-                  <a:lnTo>
-                    <a:pt x="4010861" y="2325224"/>
-                  </a:lnTo>
-                  <a:lnTo>
-                    <a:pt x="4082483" y="2282712"/>
-                  </a:lnTo>
-                  <a:lnTo>
-                    <a:pt x="4154106" y="2238838"/>
-                  </a:lnTo>
-                  <a:lnTo>
-                    <a:pt x="4225729" y="2193558"/>
-                  </a:lnTo>
-                  <a:lnTo>
-                    <a:pt x="4297351" y="2146829"/>
-                  </a:lnTo>
-                  <a:lnTo>
-                    <a:pt x="4368974" y="2098603"/>
-                  </a:lnTo>
-                  <a:lnTo>
-                    <a:pt x="4440596" y="2048832"/>
-                  </a:lnTo>
-                  <a:lnTo>
-                    <a:pt x="4512219" y="1997467"/>
-                  </a:lnTo>
-                  <a:lnTo>
-                    <a:pt x="4583841" y="1944458"/>
-                  </a:lnTo>
-                  <a:lnTo>
-                    <a:pt x="4655464" y="1889750"/>
-                  </a:lnTo>
-                  <a:lnTo>
-                    <a:pt x="4727086" y="1833291"/>
-                  </a:lnTo>
-                  <a:lnTo>
-                    <a:pt x="4798709" y="1775023"/>
-                  </a:lnTo>
-                  <a:lnTo>
-                    <a:pt x="4870331" y="1714890"/>
-                  </a:lnTo>
-                  <a:lnTo>
-                    <a:pt x="4941954" y="1652830"/>
-                  </a:lnTo>
-                  <a:lnTo>
-                    <a:pt x="5013576" y="1588783"/>
-                  </a:lnTo>
-                  <a:lnTo>
-                    <a:pt x="5085199" y="1522685"/>
-                  </a:lnTo>
-                  <a:lnTo>
-                    <a:pt x="5156821" y="1454469"/>
-                  </a:lnTo>
-                  <a:lnTo>
-                    <a:pt x="5228444" y="1384069"/>
-                  </a:lnTo>
-                  <a:lnTo>
-                    <a:pt x="5300066" y="1311415"/>
-                  </a:lnTo>
-                  <a:lnTo>
-                    <a:pt x="5371689" y="1236433"/>
-                  </a:lnTo>
-                  <a:lnTo>
-                    <a:pt x="5443311" y="1159050"/>
-                  </a:lnTo>
-                  <a:lnTo>
-                    <a:pt x="5514934" y="1079189"/>
-                  </a:lnTo>
-                  <a:lnTo>
-                    <a:pt x="5586557" y="996770"/>
-                  </a:lnTo>
-                  <a:lnTo>
-                    <a:pt x="5658179" y="911711"/>
-                  </a:lnTo>
-                  <a:lnTo>
-                    <a:pt x="5729802" y="823929"/>
-                  </a:lnTo>
-                  <a:lnTo>
-                    <a:pt x="5801424" y="733335"/>
-                  </a:lnTo>
-                  <a:lnTo>
-                    <a:pt x="5873047" y="639839"/>
-                  </a:lnTo>
-                  <a:lnTo>
-                    <a:pt x="5944669" y="543349"/>
-                  </a:lnTo>
-                  <a:lnTo>
-                    <a:pt x="6016292" y="443769"/>
-                  </a:lnTo>
-                  <a:lnTo>
-                    <a:pt x="6087914" y="341000"/>
-                  </a:lnTo>
-                  <a:lnTo>
-                    <a:pt x="6159537" y="234940"/>
-                  </a:lnTo>
-                  <a:lnTo>
-                    <a:pt x="6231159" y="125482"/>
-                  </a:lnTo>
-                  <a:lnTo>
-                    <a:pt x="6302782" y="12519"/>
-                  </a:lnTo>
-                  <a:lnTo>
-                    <a:pt x="6310474" y="0"/>
+                    <a:pt x="71622" y="3403398"/>
+                  </a:lnTo>
+                  <a:lnTo>
+                    <a:pt x="143245" y="3395795"/>
+                  </a:lnTo>
+                  <a:lnTo>
+                    <a:pt x="214867" y="3387959"/>
+                  </a:lnTo>
+                  <a:lnTo>
+                    <a:pt x="286490" y="3379884"/>
+                  </a:lnTo>
+                  <a:lnTo>
+                    <a:pt x="358112" y="3371563"/>
+                  </a:lnTo>
+                  <a:lnTo>
+                    <a:pt x="429735" y="3362989"/>
+                  </a:lnTo>
+                  <a:lnTo>
+                    <a:pt x="501357" y="3354152"/>
+                  </a:lnTo>
+                  <a:lnTo>
+                    <a:pt x="572980" y="3345046"/>
+                  </a:lnTo>
+                  <a:lnTo>
+                    <a:pt x="644602" y="3335662"/>
+                  </a:lnTo>
+                  <a:lnTo>
+                    <a:pt x="716225" y="3325992"/>
+                  </a:lnTo>
+                  <a:lnTo>
+                    <a:pt x="787847" y="3316027"/>
+                  </a:lnTo>
+                  <a:lnTo>
+                    <a:pt x="859470" y="3305758"/>
+                  </a:lnTo>
+                  <a:lnTo>
+                    <a:pt x="931092" y="3295176"/>
+                  </a:lnTo>
+                  <a:lnTo>
+                    <a:pt x="1002715" y="3284271"/>
+                  </a:lnTo>
+                  <a:lnTo>
+                    <a:pt x="1074337" y="3273033"/>
+                  </a:lnTo>
+                  <a:lnTo>
+                    <a:pt x="1145960" y="3261452"/>
+                  </a:lnTo>
+                  <a:lnTo>
+                    <a:pt x="1217582" y="3249518"/>
+                  </a:lnTo>
+                  <a:lnTo>
+                    <a:pt x="1289205" y="3237220"/>
+                  </a:lnTo>
+                  <a:lnTo>
+                    <a:pt x="1360827" y="3224547"/>
+                  </a:lnTo>
+                  <a:lnTo>
+                    <a:pt x="1432450" y="3211487"/>
+                  </a:lnTo>
+                  <a:lnTo>
+                    <a:pt x="1504073" y="3198029"/>
+                  </a:lnTo>
+                  <a:lnTo>
+                    <a:pt x="1575695" y="3184160"/>
+                  </a:lnTo>
+                  <a:lnTo>
+                    <a:pt x="1647318" y="3169868"/>
+                  </a:lnTo>
+                  <a:lnTo>
+                    <a:pt x="1718940" y="3155140"/>
+                  </a:lnTo>
+                  <a:lnTo>
+                    <a:pt x="1790563" y="3139963"/>
+                  </a:lnTo>
+                  <a:lnTo>
+                    <a:pt x="1862185" y="3124323"/>
+                  </a:lnTo>
+                  <a:lnTo>
+                    <a:pt x="1933808" y="3108206"/>
+                  </a:lnTo>
+                  <a:lnTo>
+                    <a:pt x="2005430" y="3091597"/>
+                  </a:lnTo>
+                  <a:lnTo>
+                    <a:pt x="2077053" y="3074481"/>
+                  </a:lnTo>
+                  <a:lnTo>
+                    <a:pt x="2148675" y="3056843"/>
+                  </a:lnTo>
+                  <a:lnTo>
+                    <a:pt x="2220298" y="3038667"/>
+                  </a:lnTo>
+                  <a:lnTo>
+                    <a:pt x="2291920" y="3019937"/>
+                  </a:lnTo>
+                  <a:lnTo>
+                    <a:pt x="2363543" y="3000635"/>
+                  </a:lnTo>
+                  <a:lnTo>
+                    <a:pt x="2435165" y="2980744"/>
+                  </a:lnTo>
+                  <a:lnTo>
+                    <a:pt x="2506788" y="2960247"/>
+                  </a:lnTo>
+                  <a:lnTo>
+                    <a:pt x="2578410" y="2939124"/>
+                  </a:lnTo>
+                  <a:lnTo>
+                    <a:pt x="2650033" y="2917357"/>
+                  </a:lnTo>
+                  <a:lnTo>
+                    <a:pt x="2721655" y="2894926"/>
+                  </a:lnTo>
+                  <a:lnTo>
+                    <a:pt x="2793278" y="2871810"/>
+                  </a:lnTo>
+                  <a:lnTo>
+                    <a:pt x="2864901" y="2847990"/>
+                  </a:lnTo>
+                  <a:lnTo>
+                    <a:pt x="2936523" y="2823442"/>
+                  </a:lnTo>
+                  <a:lnTo>
+                    <a:pt x="3008146" y="2798146"/>
+                  </a:lnTo>
+                  <a:lnTo>
+                    <a:pt x="3079768" y="2772078"/>
+                  </a:lnTo>
+                  <a:lnTo>
+                    <a:pt x="3151391" y="2745215"/>
+                  </a:lnTo>
+                  <a:lnTo>
+                    <a:pt x="3223013" y="2717532"/>
+                  </a:lnTo>
+                  <a:lnTo>
+                    <a:pt x="3294636" y="2689005"/>
+                  </a:lnTo>
+                  <a:lnTo>
+                    <a:pt x="3366258" y="2659608"/>
+                  </a:lnTo>
+                  <a:lnTo>
+                    <a:pt x="3437881" y="2629313"/>
+                  </a:lnTo>
+                  <a:lnTo>
+                    <a:pt x="3509503" y="2598095"/>
+                  </a:lnTo>
+                  <a:lnTo>
+                    <a:pt x="3581126" y="2565924"/>
+                  </a:lnTo>
+                  <a:lnTo>
+                    <a:pt x="3652748" y="2532772"/>
+                  </a:lnTo>
+                  <a:lnTo>
+                    <a:pt x="3724371" y="2498608"/>
+                  </a:lnTo>
+                  <a:lnTo>
+                    <a:pt x="3795993" y="2463402"/>
+                  </a:lnTo>
+                  <a:lnTo>
+                    <a:pt x="3867616" y="2427122"/>
+                  </a:lnTo>
+                  <a:lnTo>
+                    <a:pt x="3939238" y="2389736"/>
+                  </a:lnTo>
+                  <a:lnTo>
+                    <a:pt x="4010861" y="2351208"/>
+                  </a:lnTo>
+                  <a:lnTo>
+                    <a:pt x="4082483" y="2311506"/>
+                  </a:lnTo>
+                  <a:lnTo>
+                    <a:pt x="4154106" y="2270592"/>
+                  </a:lnTo>
+                  <a:lnTo>
+                    <a:pt x="4225729" y="2228430"/>
+                  </a:lnTo>
+                  <a:lnTo>
+                    <a:pt x="4297351" y="2184982"/>
+                  </a:lnTo>
+                  <a:lnTo>
+                    <a:pt x="4368974" y="2140209"/>
+                  </a:lnTo>
+                  <a:lnTo>
+                    <a:pt x="4440596" y="2094069"/>
+                  </a:lnTo>
+                  <a:lnTo>
+                    <a:pt x="4512219" y="2046522"/>
+                  </a:lnTo>
+                  <a:lnTo>
+                    <a:pt x="4583841" y="1997525"/>
+                  </a:lnTo>
+                  <a:lnTo>
+                    <a:pt x="4655464" y="1947032"/>
+                  </a:lnTo>
+                  <a:lnTo>
+                    <a:pt x="4727086" y="1895000"/>
+                  </a:lnTo>
+                  <a:lnTo>
+                    <a:pt x="4798709" y="1841380"/>
+                  </a:lnTo>
+                  <a:lnTo>
+                    <a:pt x="4870331" y="1786124"/>
+                  </a:lnTo>
+                  <a:lnTo>
+                    <a:pt x="4941954" y="1729182"/>
+                  </a:lnTo>
+                  <a:lnTo>
+                    <a:pt x="5013576" y="1670504"/>
+                  </a:lnTo>
+                  <a:lnTo>
+                    <a:pt x="5085199" y="1610035"/>
+                  </a:lnTo>
+                  <a:lnTo>
+                    <a:pt x="5156821" y="1547722"/>
+                  </a:lnTo>
+                  <a:lnTo>
+                    <a:pt x="5228444" y="1483508"/>
+                  </a:lnTo>
+                  <a:lnTo>
+                    <a:pt x="5300066" y="1417334"/>
+                  </a:lnTo>
+                  <a:lnTo>
+                    <a:pt x="5371689" y="1349142"/>
+                  </a:lnTo>
+                  <a:lnTo>
+                    <a:pt x="5443311" y="1278870"/>
+                  </a:lnTo>
+                  <a:lnTo>
+                    <a:pt x="5514934" y="1206454"/>
+                  </a:lnTo>
+                  <a:lnTo>
+                    <a:pt x="5586557" y="1131829"/>
+                  </a:lnTo>
+                  <a:lnTo>
+                    <a:pt x="5658179" y="1054927"/>
+                  </a:lnTo>
+                  <a:lnTo>
+                    <a:pt x="5729802" y="975679"/>
+                  </a:lnTo>
+                  <a:lnTo>
+                    <a:pt x="5801424" y="894014"/>
+                  </a:lnTo>
+                  <a:lnTo>
+                    <a:pt x="5873047" y="809857"/>
+                  </a:lnTo>
+                  <a:lnTo>
+                    <a:pt x="5944669" y="723133"/>
+                  </a:lnTo>
+                  <a:lnTo>
+                    <a:pt x="6016292" y="633763"/>
+                  </a:lnTo>
+                  <a:lnTo>
+                    <a:pt x="6087914" y="541667"/>
+                  </a:lnTo>
+                  <a:lnTo>
+                    <a:pt x="6159537" y="446761"/>
+                  </a:lnTo>
+                  <a:lnTo>
+                    <a:pt x="6231159" y="348960"/>
+                  </a:lnTo>
+                  <a:lnTo>
+                    <a:pt x="6302782" y="248175"/>
+                  </a:lnTo>
+                  <a:lnTo>
+                    <a:pt x="6374404" y="144316"/>
+                  </a:lnTo>
+                  <a:lnTo>
+                    <a:pt x="6446027" y="37288"/>
+                  </a:lnTo>
+                  <a:lnTo>
+                    <a:pt x="6470242" y="0"/>
                   </a:lnTo>
                 </a:path>
               </a:pathLst>

--- a/docs/plots/carbo/jx_carbo_linsubhr_dosedisc_anyhosp.pptx
+++ b/docs/plots/carbo/jx_carbo_linsubhr_dosedisc_anyhosp.pptx
@@ -3132,536 +3132,536 @@
           <p:spPr>
             <a:xfrm>
               <a:off x="1172049" y="1896563"/>
-              <a:ext cx="7090630" cy="3537267"/>
+              <a:ext cx="7090630" cy="3540236"/>
             </a:xfrm>
             <a:custGeom>
               <a:avLst/>
               <a:pathLst>
-                <a:path w="7090630" h="3537267">
+                <a:path w="7090630" h="3540236">
                   <a:moveTo>
-                    <a:pt x="0" y="3145613"/>
+                    <a:pt x="0" y="3149206"/>
                   </a:moveTo>
                   <a:lnTo>
-                    <a:pt x="71622" y="3139148"/>
-                  </a:lnTo>
-                  <a:lnTo>
-                    <a:pt x="143245" y="3132601"/>
-                  </a:lnTo>
-                  <a:lnTo>
-                    <a:pt x="214867" y="3125970"/>
-                  </a:lnTo>
-                  <a:lnTo>
-                    <a:pt x="286490" y="3119255"/>
-                  </a:lnTo>
-                  <a:lnTo>
-                    <a:pt x="358112" y="3112454"/>
-                  </a:lnTo>
-                  <a:lnTo>
-                    <a:pt x="429735" y="3105567"/>
-                  </a:lnTo>
-                  <a:lnTo>
-                    <a:pt x="501357" y="3098591"/>
-                  </a:lnTo>
-                  <a:lnTo>
-                    <a:pt x="572980" y="3091527"/>
-                  </a:lnTo>
-                  <a:lnTo>
-                    <a:pt x="644602" y="3084372"/>
-                  </a:lnTo>
-                  <a:lnTo>
-                    <a:pt x="716225" y="3077127"/>
-                  </a:lnTo>
-                  <a:lnTo>
-                    <a:pt x="787847" y="3069789"/>
-                  </a:lnTo>
-                  <a:lnTo>
-                    <a:pt x="859470" y="3062357"/>
-                  </a:lnTo>
-                  <a:lnTo>
-                    <a:pt x="931092" y="3054831"/>
-                  </a:lnTo>
-                  <a:lnTo>
-                    <a:pt x="1002715" y="3047209"/>
-                  </a:lnTo>
-                  <a:lnTo>
-                    <a:pt x="1074337" y="3039489"/>
-                  </a:lnTo>
-                  <a:lnTo>
-                    <a:pt x="1145960" y="3031671"/>
-                  </a:lnTo>
-                  <a:lnTo>
-                    <a:pt x="1217582" y="3023754"/>
-                  </a:lnTo>
-                  <a:lnTo>
-                    <a:pt x="1289205" y="3015735"/>
-                  </a:lnTo>
-                  <a:lnTo>
-                    <a:pt x="1360827" y="3007614"/>
-                  </a:lnTo>
-                  <a:lnTo>
-                    <a:pt x="1432450" y="2999390"/>
-                  </a:lnTo>
-                  <a:lnTo>
-                    <a:pt x="1504073" y="2991061"/>
-                  </a:lnTo>
-                  <a:lnTo>
-                    <a:pt x="1575695" y="2982626"/>
-                  </a:lnTo>
-                  <a:lnTo>
-                    <a:pt x="1647318" y="2974083"/>
-                  </a:lnTo>
-                  <a:lnTo>
-                    <a:pt x="1718940" y="2965431"/>
-                  </a:lnTo>
-                  <a:lnTo>
-                    <a:pt x="1790563" y="2956669"/>
-                  </a:lnTo>
-                  <a:lnTo>
-                    <a:pt x="1862185" y="2947795"/>
-                  </a:lnTo>
-                  <a:lnTo>
-                    <a:pt x="1933808" y="2938808"/>
-                  </a:lnTo>
-                  <a:lnTo>
-                    <a:pt x="2005430" y="2929706"/>
-                  </a:lnTo>
-                  <a:lnTo>
-                    <a:pt x="2077053" y="2920488"/>
-                  </a:lnTo>
-                  <a:lnTo>
-                    <a:pt x="2148675" y="2911153"/>
-                  </a:lnTo>
-                  <a:lnTo>
-                    <a:pt x="2220298" y="2901699"/>
-                  </a:lnTo>
-                  <a:lnTo>
-                    <a:pt x="2291920" y="2892124"/>
-                  </a:lnTo>
-                  <a:lnTo>
-                    <a:pt x="2363543" y="2882427"/>
-                  </a:lnTo>
-                  <a:lnTo>
-                    <a:pt x="2435165" y="2872607"/>
-                  </a:lnTo>
-                  <a:lnTo>
-                    <a:pt x="2506788" y="2862661"/>
-                  </a:lnTo>
-                  <a:lnTo>
-                    <a:pt x="2578410" y="2852589"/>
-                  </a:lnTo>
-                  <a:lnTo>
-                    <a:pt x="2650033" y="2842388"/>
-                  </a:lnTo>
-                  <a:lnTo>
-                    <a:pt x="2721655" y="2832057"/>
-                  </a:lnTo>
-                  <a:lnTo>
-                    <a:pt x="2793278" y="2821594"/>
-                  </a:lnTo>
-                  <a:lnTo>
-                    <a:pt x="2864901" y="2810998"/>
-                  </a:lnTo>
-                  <a:lnTo>
-                    <a:pt x="2936523" y="2800267"/>
-                  </a:lnTo>
-                  <a:lnTo>
-                    <a:pt x="3008146" y="2789399"/>
-                  </a:lnTo>
-                  <a:lnTo>
-                    <a:pt x="3079768" y="2765718"/>
-                  </a:lnTo>
-                  <a:lnTo>
-                    <a:pt x="3151391" y="2722636"/>
-                  </a:lnTo>
-                  <a:lnTo>
-                    <a:pt x="3223013" y="2677462"/>
-                  </a:lnTo>
-                  <a:lnTo>
-                    <a:pt x="3294636" y="2630093"/>
-                  </a:lnTo>
-                  <a:lnTo>
-                    <a:pt x="3366258" y="2580423"/>
-                  </a:lnTo>
-                  <a:lnTo>
-                    <a:pt x="3437881" y="2528340"/>
-                  </a:lnTo>
-                  <a:lnTo>
-                    <a:pt x="3509503" y="2473728"/>
-                  </a:lnTo>
-                  <a:lnTo>
-                    <a:pt x="3581126" y="2416463"/>
-                  </a:lnTo>
-                  <a:lnTo>
-                    <a:pt x="3652748" y="2356416"/>
-                  </a:lnTo>
-                  <a:lnTo>
-                    <a:pt x="3724371" y="2293452"/>
-                  </a:lnTo>
-                  <a:lnTo>
-                    <a:pt x="3795993" y="2227430"/>
-                  </a:lnTo>
-                  <a:lnTo>
-                    <a:pt x="3867616" y="2158201"/>
-                  </a:lnTo>
-                  <a:lnTo>
-                    <a:pt x="3939238" y="2085609"/>
-                  </a:lnTo>
-                  <a:lnTo>
-                    <a:pt x="4010861" y="2009491"/>
-                  </a:lnTo>
-                  <a:lnTo>
-                    <a:pt x="4082483" y="1929676"/>
-                  </a:lnTo>
-                  <a:lnTo>
-                    <a:pt x="4154106" y="1845984"/>
-                  </a:lnTo>
-                  <a:lnTo>
-                    <a:pt x="4225729" y="1758226"/>
-                  </a:lnTo>
-                  <a:lnTo>
-                    <a:pt x="4297351" y="1666206"/>
-                  </a:lnTo>
-                  <a:lnTo>
-                    <a:pt x="4368974" y="1569715"/>
-                  </a:lnTo>
-                  <a:lnTo>
-                    <a:pt x="4440596" y="1468538"/>
-                  </a:lnTo>
-                  <a:lnTo>
-                    <a:pt x="4512219" y="1362446"/>
-                  </a:lnTo>
-                  <a:lnTo>
-                    <a:pt x="4583841" y="1251201"/>
-                  </a:lnTo>
-                  <a:lnTo>
-                    <a:pt x="4655464" y="1134552"/>
-                  </a:lnTo>
-                  <a:lnTo>
-                    <a:pt x="4727086" y="1012237"/>
-                  </a:lnTo>
-                  <a:lnTo>
-                    <a:pt x="4798709" y="883980"/>
-                  </a:lnTo>
-                  <a:lnTo>
-                    <a:pt x="4870331" y="749494"/>
-                  </a:lnTo>
-                  <a:lnTo>
-                    <a:pt x="4941954" y="608475"/>
-                  </a:lnTo>
-                  <a:lnTo>
-                    <a:pt x="5013576" y="460606"/>
-                  </a:lnTo>
-                  <a:lnTo>
-                    <a:pt x="5085199" y="305554"/>
-                  </a:lnTo>
-                  <a:lnTo>
-                    <a:pt x="5156821" y="142971"/>
-                  </a:lnTo>
-                  <a:lnTo>
-                    <a:pt x="5216887" y="0"/>
+                    <a:pt x="71622" y="3142702"/>
+                  </a:lnTo>
+                  <a:lnTo>
+                    <a:pt x="143245" y="3136114"/>
+                  </a:lnTo>
+                  <a:lnTo>
+                    <a:pt x="214867" y="3129441"/>
+                  </a:lnTo>
+                  <a:lnTo>
+                    <a:pt x="286490" y="3122681"/>
+                  </a:lnTo>
+                  <a:lnTo>
+                    <a:pt x="358112" y="3115834"/>
+                  </a:lnTo>
+                  <a:lnTo>
+                    <a:pt x="429735" y="3108899"/>
+                  </a:lnTo>
+                  <a:lnTo>
+                    <a:pt x="501357" y="3101874"/>
+                  </a:lnTo>
+                  <a:lnTo>
+                    <a:pt x="572980" y="3094758"/>
+                  </a:lnTo>
+                  <a:lnTo>
+                    <a:pt x="644602" y="3087551"/>
+                  </a:lnTo>
+                  <a:lnTo>
+                    <a:pt x="716225" y="3080250"/>
+                  </a:lnTo>
+                  <a:lnTo>
+                    <a:pt x="787847" y="3072855"/>
+                  </a:lnTo>
+                  <a:lnTo>
+                    <a:pt x="859470" y="3065365"/>
+                  </a:lnTo>
+                  <a:lnTo>
+                    <a:pt x="931092" y="3057777"/>
+                  </a:lnTo>
+                  <a:lnTo>
+                    <a:pt x="1002715" y="3050092"/>
+                  </a:lnTo>
+                  <a:lnTo>
+                    <a:pt x="1074337" y="3042307"/>
+                  </a:lnTo>
+                  <a:lnTo>
+                    <a:pt x="1145960" y="3034422"/>
+                  </a:lnTo>
+                  <a:lnTo>
+                    <a:pt x="1217582" y="3026435"/>
+                  </a:lnTo>
+                  <a:lnTo>
+                    <a:pt x="1289205" y="3018345"/>
+                  </a:lnTo>
+                  <a:lnTo>
+                    <a:pt x="1360827" y="3010150"/>
+                  </a:lnTo>
+                  <a:lnTo>
+                    <a:pt x="1432450" y="3001849"/>
+                  </a:lnTo>
+                  <a:lnTo>
+                    <a:pt x="1504073" y="2993442"/>
+                  </a:lnTo>
+                  <a:lnTo>
+                    <a:pt x="1575695" y="2984925"/>
+                  </a:lnTo>
+                  <a:lnTo>
+                    <a:pt x="1647318" y="2976299"/>
+                  </a:lnTo>
+                  <a:lnTo>
+                    <a:pt x="1718940" y="2967561"/>
+                  </a:lnTo>
+                  <a:lnTo>
+                    <a:pt x="1790563" y="2958710"/>
+                  </a:lnTo>
+                  <a:lnTo>
+                    <a:pt x="1862185" y="2949744"/>
+                  </a:lnTo>
+                  <a:lnTo>
+                    <a:pt x="1933808" y="2940663"/>
+                  </a:lnTo>
+                  <a:lnTo>
+                    <a:pt x="2005430" y="2931465"/>
+                  </a:lnTo>
+                  <a:lnTo>
+                    <a:pt x="2077053" y="2922148"/>
+                  </a:lnTo>
+                  <a:lnTo>
+                    <a:pt x="2148675" y="2912710"/>
+                  </a:lnTo>
+                  <a:lnTo>
+                    <a:pt x="2220298" y="2903151"/>
+                  </a:lnTo>
+                  <a:lnTo>
+                    <a:pt x="2291920" y="2893468"/>
+                  </a:lnTo>
+                  <a:lnTo>
+                    <a:pt x="2363543" y="2883660"/>
+                  </a:lnTo>
+                  <a:lnTo>
+                    <a:pt x="2435165" y="2873725"/>
+                  </a:lnTo>
+                  <a:lnTo>
+                    <a:pt x="2506788" y="2863661"/>
+                  </a:lnTo>
+                  <a:lnTo>
+                    <a:pt x="2578410" y="2853468"/>
+                  </a:lnTo>
+                  <a:lnTo>
+                    <a:pt x="2650033" y="2843143"/>
+                  </a:lnTo>
+                  <a:lnTo>
+                    <a:pt x="2721655" y="2832685"/>
+                  </a:lnTo>
+                  <a:lnTo>
+                    <a:pt x="2793278" y="2822092"/>
+                  </a:lnTo>
+                  <a:lnTo>
+                    <a:pt x="2864901" y="2811361"/>
+                  </a:lnTo>
+                  <a:lnTo>
+                    <a:pt x="2936523" y="2800493"/>
+                  </a:lnTo>
+                  <a:lnTo>
+                    <a:pt x="3008146" y="2789483"/>
+                  </a:lnTo>
+                  <a:lnTo>
+                    <a:pt x="3079768" y="2765494"/>
+                  </a:lnTo>
+                  <a:lnTo>
+                    <a:pt x="3151391" y="2721831"/>
+                  </a:lnTo>
+                  <a:lnTo>
+                    <a:pt x="3223013" y="2676020"/>
+                  </a:lnTo>
+                  <a:lnTo>
+                    <a:pt x="3294636" y="2627953"/>
+                  </a:lnTo>
+                  <a:lnTo>
+                    <a:pt x="3366258" y="2577522"/>
+                  </a:lnTo>
+                  <a:lnTo>
+                    <a:pt x="3437881" y="2524608"/>
+                  </a:lnTo>
+                  <a:lnTo>
+                    <a:pt x="3509503" y="2469090"/>
+                  </a:lnTo>
+                  <a:lnTo>
+                    <a:pt x="3581126" y="2410839"/>
+                  </a:lnTo>
+                  <a:lnTo>
+                    <a:pt x="3652748" y="2349721"/>
+                  </a:lnTo>
+                  <a:lnTo>
+                    <a:pt x="3724371" y="2285596"/>
+                  </a:lnTo>
+                  <a:lnTo>
+                    <a:pt x="3795993" y="2218315"/>
+                  </a:lnTo>
+                  <a:lnTo>
+                    <a:pt x="3867616" y="2147722"/>
+                  </a:lnTo>
+                  <a:lnTo>
+                    <a:pt x="3939238" y="2073654"/>
+                  </a:lnTo>
+                  <a:lnTo>
+                    <a:pt x="4010861" y="1995942"/>
+                  </a:lnTo>
+                  <a:lnTo>
+                    <a:pt x="4082483" y="1914405"/>
+                  </a:lnTo>
+                  <a:lnTo>
+                    <a:pt x="4154106" y="1828854"/>
+                  </a:lnTo>
+                  <a:lnTo>
+                    <a:pt x="4225729" y="1739094"/>
+                  </a:lnTo>
+                  <a:lnTo>
+                    <a:pt x="4297351" y="1644915"/>
+                  </a:lnTo>
+                  <a:lnTo>
+                    <a:pt x="4368974" y="1546101"/>
+                  </a:lnTo>
+                  <a:lnTo>
+                    <a:pt x="4440596" y="1442424"/>
+                  </a:lnTo>
+                  <a:lnTo>
+                    <a:pt x="4512219" y="1333645"/>
+                  </a:lnTo>
+                  <a:lnTo>
+                    <a:pt x="4583841" y="1219511"/>
+                  </a:lnTo>
+                  <a:lnTo>
+                    <a:pt x="4655464" y="1099761"/>
+                  </a:lnTo>
+                  <a:lnTo>
+                    <a:pt x="4727086" y="974116"/>
+                  </a:lnTo>
+                  <a:lnTo>
+                    <a:pt x="4798709" y="842288"/>
+                  </a:lnTo>
+                  <a:lnTo>
+                    <a:pt x="4870331" y="703972"/>
+                  </a:lnTo>
+                  <a:lnTo>
+                    <a:pt x="4941954" y="558848"/>
+                  </a:lnTo>
+                  <a:lnTo>
+                    <a:pt x="5013576" y="406582"/>
+                  </a:lnTo>
+                  <a:lnTo>
+                    <a:pt x="5085199" y="246822"/>
+                  </a:lnTo>
+                  <a:lnTo>
+                    <a:pt x="5156821" y="79199"/>
+                  </a:lnTo>
+                  <a:lnTo>
+                    <a:pt x="5189074" y="0"/>
                   </a:lnTo>
                   <a:lnTo>
                     <a:pt x="7090630" y="0"/>
                   </a:lnTo>
                   <a:lnTo>
-                    <a:pt x="7090630" y="1875308"/>
-                  </a:lnTo>
-                  <a:lnTo>
-                    <a:pt x="7019007" y="1897684"/>
-                  </a:lnTo>
-                  <a:lnTo>
-                    <a:pt x="6947385" y="1919779"/>
-                  </a:lnTo>
-                  <a:lnTo>
-                    <a:pt x="6875762" y="1941595"/>
-                  </a:lnTo>
-                  <a:lnTo>
-                    <a:pt x="6804139" y="1963137"/>
-                  </a:lnTo>
-                  <a:lnTo>
-                    <a:pt x="6732517" y="1984407"/>
-                  </a:lnTo>
-                  <a:lnTo>
-                    <a:pt x="6660894" y="2005410"/>
-                  </a:lnTo>
-                  <a:lnTo>
-                    <a:pt x="6589272" y="2026148"/>
-                  </a:lnTo>
-                  <a:lnTo>
-                    <a:pt x="6517649" y="2046626"/>
-                  </a:lnTo>
-                  <a:lnTo>
-                    <a:pt x="6446027" y="2066845"/>
-                  </a:lnTo>
-                  <a:lnTo>
-                    <a:pt x="6374404" y="2086810"/>
-                  </a:lnTo>
-                  <a:lnTo>
-                    <a:pt x="6302782" y="2106523"/>
-                  </a:lnTo>
-                  <a:lnTo>
-                    <a:pt x="6231159" y="2125989"/>
-                  </a:lnTo>
-                  <a:lnTo>
-                    <a:pt x="6159537" y="2145209"/>
-                  </a:lnTo>
-                  <a:lnTo>
-                    <a:pt x="6087914" y="2164187"/>
-                  </a:lnTo>
-                  <a:lnTo>
-                    <a:pt x="6016292" y="2182926"/>
-                  </a:lnTo>
-                  <a:lnTo>
-                    <a:pt x="5944669" y="2201430"/>
-                  </a:lnTo>
-                  <a:lnTo>
-                    <a:pt x="5873047" y="2219700"/>
-                  </a:lnTo>
-                  <a:lnTo>
-                    <a:pt x="5801424" y="2237741"/>
-                  </a:lnTo>
-                  <a:lnTo>
-                    <a:pt x="5729802" y="2255554"/>
-                  </a:lnTo>
-                  <a:lnTo>
-                    <a:pt x="5658179" y="2273143"/>
-                  </a:lnTo>
-                  <a:lnTo>
-                    <a:pt x="5586557" y="2290511"/>
-                  </a:lnTo>
-                  <a:lnTo>
-                    <a:pt x="5514934" y="2307660"/>
-                  </a:lnTo>
-                  <a:lnTo>
-                    <a:pt x="5443311" y="2324593"/>
-                  </a:lnTo>
-                  <a:lnTo>
-                    <a:pt x="5371689" y="2341312"/>
-                  </a:lnTo>
-                  <a:lnTo>
-                    <a:pt x="5300066" y="2357822"/>
-                  </a:lnTo>
-                  <a:lnTo>
-                    <a:pt x="5228444" y="2374123"/>
-                  </a:lnTo>
-                  <a:lnTo>
-                    <a:pt x="5156821" y="2390220"/>
-                  </a:lnTo>
-                  <a:lnTo>
-                    <a:pt x="5085199" y="2406113"/>
-                  </a:lnTo>
-                  <a:lnTo>
-                    <a:pt x="5013576" y="2421807"/>
-                  </a:lnTo>
-                  <a:lnTo>
-                    <a:pt x="4941954" y="2437303"/>
-                  </a:lnTo>
-                  <a:lnTo>
-                    <a:pt x="4870331" y="2452604"/>
-                  </a:lnTo>
-                  <a:lnTo>
-                    <a:pt x="4798709" y="2467712"/>
-                  </a:lnTo>
-                  <a:lnTo>
-                    <a:pt x="4727086" y="2482630"/>
-                  </a:lnTo>
-                  <a:lnTo>
-                    <a:pt x="4655464" y="2497360"/>
-                  </a:lnTo>
-                  <a:lnTo>
-                    <a:pt x="4583841" y="2511905"/>
-                  </a:lnTo>
-                  <a:lnTo>
-                    <a:pt x="4512219" y="2526266"/>
-                  </a:lnTo>
-                  <a:lnTo>
-                    <a:pt x="4440596" y="2540447"/>
-                  </a:lnTo>
-                  <a:lnTo>
-                    <a:pt x="4368974" y="2554449"/>
-                  </a:lnTo>
-                  <a:lnTo>
-                    <a:pt x="4297351" y="2568275"/>
-                  </a:lnTo>
-                  <a:lnTo>
-                    <a:pt x="4225729" y="2581927"/>
-                  </a:lnTo>
-                  <a:lnTo>
-                    <a:pt x="4154106" y="2595407"/>
-                  </a:lnTo>
-                  <a:lnTo>
-                    <a:pt x="4082483" y="2608718"/>
-                  </a:lnTo>
-                  <a:lnTo>
-                    <a:pt x="4010861" y="2621861"/>
-                  </a:lnTo>
-                  <a:lnTo>
-                    <a:pt x="3939238" y="2634838"/>
-                  </a:lnTo>
-                  <a:lnTo>
-                    <a:pt x="3867616" y="2647652"/>
-                  </a:lnTo>
-                  <a:lnTo>
-                    <a:pt x="3795993" y="2660304"/>
-                  </a:lnTo>
-                  <a:lnTo>
-                    <a:pt x="3724371" y="2672798"/>
-                  </a:lnTo>
-                  <a:lnTo>
-                    <a:pt x="3652748" y="2685134"/>
-                  </a:lnTo>
-                  <a:lnTo>
-                    <a:pt x="3581126" y="2697315"/>
-                  </a:lnTo>
-                  <a:lnTo>
-                    <a:pt x="3509503" y="2709342"/>
-                  </a:lnTo>
-                  <a:lnTo>
-                    <a:pt x="3437881" y="2721218"/>
-                  </a:lnTo>
-                  <a:lnTo>
-                    <a:pt x="3366258" y="2732944"/>
-                  </a:lnTo>
-                  <a:lnTo>
-                    <a:pt x="3294636" y="2744523"/>
-                  </a:lnTo>
-                  <a:lnTo>
-                    <a:pt x="3223013" y="2755956"/>
-                  </a:lnTo>
-                  <a:lnTo>
-                    <a:pt x="3151391" y="2767245"/>
-                  </a:lnTo>
-                  <a:lnTo>
-                    <a:pt x="3079768" y="2778392"/>
-                  </a:lnTo>
-                  <a:lnTo>
-                    <a:pt x="3008146" y="2806805"/>
-                  </a:lnTo>
-                  <a:lnTo>
-                    <a:pt x="2936523" y="2845988"/>
-                  </a:lnTo>
-                  <a:lnTo>
-                    <a:pt x="2864901" y="2883355"/>
-                  </a:lnTo>
-                  <a:lnTo>
-                    <a:pt x="2793278" y="2918992"/>
-                  </a:lnTo>
-                  <a:lnTo>
-                    <a:pt x="2721655" y="2952978"/>
-                  </a:lnTo>
-                  <a:lnTo>
-                    <a:pt x="2650033" y="2985389"/>
-                  </a:lnTo>
-                  <a:lnTo>
-                    <a:pt x="2578410" y="3016300"/>
-                  </a:lnTo>
-                  <a:lnTo>
-                    <a:pt x="2506788" y="3045778"/>
-                  </a:lnTo>
-                  <a:lnTo>
-                    <a:pt x="2435165" y="3073890"/>
-                  </a:lnTo>
-                  <a:lnTo>
-                    <a:pt x="2363543" y="3100701"/>
-                  </a:lnTo>
-                  <a:lnTo>
-                    <a:pt x="2291920" y="3126269"/>
-                  </a:lnTo>
-                  <a:lnTo>
-                    <a:pt x="2220298" y="3150653"/>
-                  </a:lnTo>
-                  <a:lnTo>
-                    <a:pt x="2148675" y="3173907"/>
-                  </a:lnTo>
-                  <a:lnTo>
-                    <a:pt x="2077053" y="3196085"/>
-                  </a:lnTo>
-                  <a:lnTo>
-                    <a:pt x="2005430" y="3217234"/>
-                  </a:lnTo>
-                  <a:lnTo>
-                    <a:pt x="1933808" y="3237404"/>
-                  </a:lnTo>
-                  <a:lnTo>
-                    <a:pt x="1862185" y="3256640"/>
-                  </a:lnTo>
-                  <a:lnTo>
-                    <a:pt x="1790563" y="3274985"/>
-                  </a:lnTo>
-                  <a:lnTo>
-                    <a:pt x="1718940" y="3292479"/>
-                  </a:lnTo>
-                  <a:lnTo>
-                    <a:pt x="1647318" y="3309164"/>
-                  </a:lnTo>
-                  <a:lnTo>
-                    <a:pt x="1575695" y="3325075"/>
-                  </a:lnTo>
-                  <a:lnTo>
-                    <a:pt x="1504073" y="3340250"/>
-                  </a:lnTo>
-                  <a:lnTo>
-                    <a:pt x="1432450" y="3354721"/>
-                  </a:lnTo>
-                  <a:lnTo>
-                    <a:pt x="1360827" y="3368522"/>
-                  </a:lnTo>
-                  <a:lnTo>
-                    <a:pt x="1289205" y="3381684"/>
-                  </a:lnTo>
-                  <a:lnTo>
-                    <a:pt x="1217582" y="3394236"/>
-                  </a:lnTo>
-                  <a:lnTo>
-                    <a:pt x="1145960" y="3406206"/>
-                  </a:lnTo>
-                  <a:lnTo>
-                    <a:pt x="1074337" y="3417622"/>
-                  </a:lnTo>
-                  <a:lnTo>
-                    <a:pt x="1002715" y="3428510"/>
-                  </a:lnTo>
-                  <a:lnTo>
-                    <a:pt x="931092" y="3438892"/>
-                  </a:lnTo>
-                  <a:lnTo>
-                    <a:pt x="859470" y="3448794"/>
-                  </a:lnTo>
-                  <a:lnTo>
-                    <a:pt x="787847" y="3458237"/>
-                  </a:lnTo>
-                  <a:lnTo>
-                    <a:pt x="716225" y="3467243"/>
-                  </a:lnTo>
-                  <a:lnTo>
-                    <a:pt x="644602" y="3475832"/>
-                  </a:lnTo>
-                  <a:lnTo>
-                    <a:pt x="572980" y="3484022"/>
-                  </a:lnTo>
-                  <a:lnTo>
-                    <a:pt x="501357" y="3491834"/>
-                  </a:lnTo>
-                  <a:lnTo>
-                    <a:pt x="429735" y="3499283"/>
-                  </a:lnTo>
-                  <a:lnTo>
-                    <a:pt x="358112" y="3506387"/>
-                  </a:lnTo>
-                  <a:lnTo>
-                    <a:pt x="286490" y="3513163"/>
-                  </a:lnTo>
-                  <a:lnTo>
-                    <a:pt x="214867" y="3519624"/>
-                  </a:lnTo>
-                  <a:lnTo>
-                    <a:pt x="143245" y="3525786"/>
-                  </a:lnTo>
-                  <a:lnTo>
-                    <a:pt x="71622" y="3531663"/>
-                  </a:lnTo>
-                  <a:lnTo>
-                    <a:pt x="0" y="3537267"/>
+                    <a:pt x="7090630" y="1858484"/>
+                  </a:lnTo>
+                  <a:lnTo>
+                    <a:pt x="7019007" y="1881368"/>
+                  </a:lnTo>
+                  <a:lnTo>
+                    <a:pt x="6947385" y="1903960"/>
+                  </a:lnTo>
+                  <a:lnTo>
+                    <a:pt x="6875762" y="1926264"/>
+                  </a:lnTo>
+                  <a:lnTo>
+                    <a:pt x="6804139" y="1948283"/>
+                  </a:lnTo>
+                  <a:lnTo>
+                    <a:pt x="6732517" y="1970022"/>
+                  </a:lnTo>
+                  <a:lnTo>
+                    <a:pt x="6660894" y="1991483"/>
+                  </a:lnTo>
+                  <a:lnTo>
+                    <a:pt x="6589272" y="2012671"/>
+                  </a:lnTo>
+                  <a:lnTo>
+                    <a:pt x="6517649" y="2033588"/>
+                  </a:lnTo>
+                  <a:lnTo>
+                    <a:pt x="6446027" y="2054238"/>
+                  </a:lnTo>
+                  <a:lnTo>
+                    <a:pt x="6374404" y="2074626"/>
+                  </a:lnTo>
+                  <a:lnTo>
+                    <a:pt x="6302782" y="2094753"/>
+                  </a:lnTo>
+                  <a:lnTo>
+                    <a:pt x="6231159" y="2114623"/>
+                  </a:lnTo>
+                  <a:lnTo>
+                    <a:pt x="6159537" y="2134240"/>
+                  </a:lnTo>
+                  <a:lnTo>
+                    <a:pt x="6087914" y="2153607"/>
+                  </a:lnTo>
+                  <a:lnTo>
+                    <a:pt x="6016292" y="2172726"/>
+                  </a:lnTo>
+                  <a:lnTo>
+                    <a:pt x="5944669" y="2191602"/>
+                  </a:lnTo>
+                  <a:lnTo>
+                    <a:pt x="5873047" y="2210237"/>
+                  </a:lnTo>
+                  <a:lnTo>
+                    <a:pt x="5801424" y="2228635"/>
+                  </a:lnTo>
+                  <a:lnTo>
+                    <a:pt x="5729802" y="2246797"/>
+                  </a:lnTo>
+                  <a:lnTo>
+                    <a:pt x="5658179" y="2264728"/>
+                  </a:lnTo>
+                  <a:lnTo>
+                    <a:pt x="5586557" y="2282431"/>
+                  </a:lnTo>
+                  <a:lnTo>
+                    <a:pt x="5514934" y="2299907"/>
+                  </a:lnTo>
+                  <a:lnTo>
+                    <a:pt x="5443311" y="2317161"/>
+                  </a:lnTo>
+                  <a:lnTo>
+                    <a:pt x="5371689" y="2334195"/>
+                  </a:lnTo>
+                  <a:lnTo>
+                    <a:pt x="5300066" y="2351011"/>
+                  </a:lnTo>
+                  <a:lnTo>
+                    <a:pt x="5228444" y="2367613"/>
+                  </a:lnTo>
+                  <a:lnTo>
+                    <a:pt x="5156821" y="2384003"/>
+                  </a:lnTo>
+                  <a:lnTo>
+                    <a:pt x="5085199" y="2400184"/>
+                  </a:lnTo>
+                  <a:lnTo>
+                    <a:pt x="5013576" y="2416159"/>
+                  </a:lnTo>
+                  <a:lnTo>
+                    <a:pt x="4941954" y="2431930"/>
+                  </a:lnTo>
+                  <a:lnTo>
+                    <a:pt x="4870331" y="2447500"/>
+                  </a:lnTo>
+                  <a:lnTo>
+                    <a:pt x="4798709" y="2462871"/>
+                  </a:lnTo>
+                  <a:lnTo>
+                    <a:pt x="4727086" y="2478046"/>
+                  </a:lnTo>
+                  <a:lnTo>
+                    <a:pt x="4655464" y="2493027"/>
+                  </a:lnTo>
+                  <a:lnTo>
+                    <a:pt x="4583841" y="2507818"/>
+                  </a:lnTo>
+                  <a:lnTo>
+                    <a:pt x="4512219" y="2522420"/>
+                  </a:lnTo>
+                  <a:lnTo>
+                    <a:pt x="4440596" y="2536835"/>
+                  </a:lnTo>
+                  <a:lnTo>
+                    <a:pt x="4368974" y="2551067"/>
+                  </a:lnTo>
+                  <a:lnTo>
+                    <a:pt x="4297351" y="2565117"/>
+                  </a:lnTo>
+                  <a:lnTo>
+                    <a:pt x="4225729" y="2578988"/>
+                  </a:lnTo>
+                  <a:lnTo>
+                    <a:pt x="4154106" y="2592682"/>
+                  </a:lnTo>
+                  <a:lnTo>
+                    <a:pt x="4082483" y="2606202"/>
+                  </a:lnTo>
+                  <a:lnTo>
+                    <a:pt x="4010861" y="2619549"/>
+                  </a:lnTo>
+                  <a:lnTo>
+                    <a:pt x="3939238" y="2632726"/>
+                  </a:lnTo>
+                  <a:lnTo>
+                    <a:pt x="3867616" y="2645734"/>
+                  </a:lnTo>
+                  <a:lnTo>
+                    <a:pt x="3795993" y="2658577"/>
+                  </a:lnTo>
+                  <a:lnTo>
+                    <a:pt x="3724371" y="2671256"/>
+                  </a:lnTo>
+                  <a:lnTo>
+                    <a:pt x="3652748" y="2683773"/>
+                  </a:lnTo>
+                  <a:lnTo>
+                    <a:pt x="3581126" y="2696131"/>
+                  </a:lnTo>
+                  <a:lnTo>
+                    <a:pt x="3509503" y="2708331"/>
+                  </a:lnTo>
+                  <a:lnTo>
+                    <a:pt x="3437881" y="2720375"/>
+                  </a:lnTo>
+                  <a:lnTo>
+                    <a:pt x="3366258" y="2732266"/>
+                  </a:lnTo>
+                  <a:lnTo>
+                    <a:pt x="3294636" y="2744005"/>
+                  </a:lnTo>
+                  <a:lnTo>
+                    <a:pt x="3223013" y="2755595"/>
+                  </a:lnTo>
+                  <a:lnTo>
+                    <a:pt x="3151391" y="2767036"/>
+                  </a:lnTo>
+                  <a:lnTo>
+                    <a:pt x="3079768" y="2778332"/>
+                  </a:lnTo>
+                  <a:lnTo>
+                    <a:pt x="3008146" y="2807108"/>
+                  </a:lnTo>
+                  <a:lnTo>
+                    <a:pt x="2936523" y="2846770"/>
+                  </a:lnTo>
+                  <a:lnTo>
+                    <a:pt x="2864901" y="2884572"/>
+                  </a:lnTo>
+                  <a:lnTo>
+                    <a:pt x="2793278" y="2920601"/>
+                  </a:lnTo>
+                  <a:lnTo>
+                    <a:pt x="2721655" y="2954940"/>
+                  </a:lnTo>
+                  <a:lnTo>
+                    <a:pt x="2650033" y="2987667"/>
+                  </a:lnTo>
+                  <a:lnTo>
+                    <a:pt x="2578410" y="3018860"/>
+                  </a:lnTo>
+                  <a:lnTo>
+                    <a:pt x="2506788" y="3048590"/>
+                  </a:lnTo>
+                  <a:lnTo>
+                    <a:pt x="2435165" y="3076925"/>
+                  </a:lnTo>
+                  <a:lnTo>
+                    <a:pt x="2363543" y="3103930"/>
+                  </a:lnTo>
+                  <a:lnTo>
+                    <a:pt x="2291920" y="3129669"/>
+                  </a:lnTo>
+                  <a:lnTo>
+                    <a:pt x="2220298" y="3154201"/>
+                  </a:lnTo>
+                  <a:lnTo>
+                    <a:pt x="2148675" y="3177582"/>
+                  </a:lnTo>
+                  <a:lnTo>
+                    <a:pt x="2077053" y="3199866"/>
+                  </a:lnTo>
+                  <a:lnTo>
+                    <a:pt x="2005430" y="3221105"/>
+                  </a:lnTo>
+                  <a:lnTo>
+                    <a:pt x="1933808" y="3241348"/>
+                  </a:lnTo>
+                  <a:lnTo>
+                    <a:pt x="1862185" y="3260641"/>
+                  </a:lnTo>
+                  <a:lnTo>
+                    <a:pt x="1790563" y="3279029"/>
+                  </a:lnTo>
+                  <a:lnTo>
+                    <a:pt x="1718940" y="3296554"/>
+                  </a:lnTo>
+                  <a:lnTo>
+                    <a:pt x="1647318" y="3313258"/>
+                  </a:lnTo>
+                  <a:lnTo>
+                    <a:pt x="1575695" y="3329178"/>
+                  </a:lnTo>
+                  <a:lnTo>
+                    <a:pt x="1504073" y="3344351"/>
+                  </a:lnTo>
+                  <a:lnTo>
+                    <a:pt x="1432450" y="3358812"/>
+                  </a:lnTo>
+                  <a:lnTo>
+                    <a:pt x="1360827" y="3372595"/>
+                  </a:lnTo>
+                  <a:lnTo>
+                    <a:pt x="1289205" y="3385732"/>
+                  </a:lnTo>
+                  <a:lnTo>
+                    <a:pt x="1217582" y="3398252"/>
+                  </a:lnTo>
+                  <a:lnTo>
+                    <a:pt x="1145960" y="3410185"/>
+                  </a:lnTo>
+                  <a:lnTo>
+                    <a:pt x="1074337" y="3421558"/>
+                  </a:lnTo>
+                  <a:lnTo>
+                    <a:pt x="1002715" y="3432398"/>
+                  </a:lnTo>
+                  <a:lnTo>
+                    <a:pt x="931092" y="3442729"/>
+                  </a:lnTo>
+                  <a:lnTo>
+                    <a:pt x="859470" y="3452576"/>
+                  </a:lnTo>
+                  <a:lnTo>
+                    <a:pt x="787847" y="3461961"/>
+                  </a:lnTo>
+                  <a:lnTo>
+                    <a:pt x="716225" y="3470905"/>
+                  </a:lnTo>
+                  <a:lnTo>
+                    <a:pt x="644602" y="3479430"/>
+                  </a:lnTo>
+                  <a:lnTo>
+                    <a:pt x="572980" y="3487555"/>
+                  </a:lnTo>
+                  <a:lnTo>
+                    <a:pt x="501357" y="3495299"/>
+                  </a:lnTo>
+                  <a:lnTo>
+                    <a:pt x="429735" y="3502680"/>
+                  </a:lnTo>
+                  <a:lnTo>
+                    <a:pt x="358112" y="3509714"/>
+                  </a:lnTo>
+                  <a:lnTo>
+                    <a:pt x="286490" y="3516419"/>
+                  </a:lnTo>
+                  <a:lnTo>
+                    <a:pt x="214867" y="3522809"/>
+                  </a:lnTo>
+                  <a:lnTo>
+                    <a:pt x="143245" y="3528899"/>
+                  </a:lnTo>
+                  <a:lnTo>
+                    <a:pt x="71622" y="3534704"/>
+                  </a:lnTo>
+                  <a:lnTo>
+                    <a:pt x="0" y="3540236"/>
                   </a:lnTo>
                   <a:close/>
                 </a:path>
@@ -3688,233 +3688,233 @@
           <p:spPr>
             <a:xfrm>
               <a:off x="1172049" y="1896563"/>
-              <a:ext cx="5216887" cy="3145613"/>
+              <a:ext cx="5189074" cy="3149206"/>
             </a:xfrm>
             <a:custGeom>
               <a:avLst/>
               <a:pathLst>
-                <a:path w="5216887" h="3145613">
+                <a:path w="5189074" h="3149206">
                   <a:moveTo>
-                    <a:pt x="0" y="3145613"/>
+                    <a:pt x="0" y="3149206"/>
                   </a:moveTo>
                   <a:lnTo>
-                    <a:pt x="71622" y="3139148"/>
-                  </a:lnTo>
-                  <a:lnTo>
-                    <a:pt x="143245" y="3132601"/>
-                  </a:lnTo>
-                  <a:lnTo>
-                    <a:pt x="214867" y="3125970"/>
-                  </a:lnTo>
-                  <a:lnTo>
-                    <a:pt x="286490" y="3119255"/>
-                  </a:lnTo>
-                  <a:lnTo>
-                    <a:pt x="358112" y="3112454"/>
-                  </a:lnTo>
-                  <a:lnTo>
-                    <a:pt x="429735" y="3105567"/>
-                  </a:lnTo>
-                  <a:lnTo>
-                    <a:pt x="501357" y="3098591"/>
-                  </a:lnTo>
-                  <a:lnTo>
-                    <a:pt x="572980" y="3091527"/>
-                  </a:lnTo>
-                  <a:lnTo>
-                    <a:pt x="644602" y="3084372"/>
-                  </a:lnTo>
-                  <a:lnTo>
-                    <a:pt x="716225" y="3077127"/>
-                  </a:lnTo>
-                  <a:lnTo>
-                    <a:pt x="787847" y="3069789"/>
-                  </a:lnTo>
-                  <a:lnTo>
-                    <a:pt x="859470" y="3062357"/>
-                  </a:lnTo>
-                  <a:lnTo>
-                    <a:pt x="931092" y="3054831"/>
-                  </a:lnTo>
-                  <a:lnTo>
-                    <a:pt x="1002715" y="3047209"/>
-                  </a:lnTo>
-                  <a:lnTo>
-                    <a:pt x="1074337" y="3039489"/>
-                  </a:lnTo>
-                  <a:lnTo>
-                    <a:pt x="1145960" y="3031671"/>
-                  </a:lnTo>
-                  <a:lnTo>
-                    <a:pt x="1217582" y="3023754"/>
-                  </a:lnTo>
-                  <a:lnTo>
-                    <a:pt x="1289205" y="3015735"/>
-                  </a:lnTo>
-                  <a:lnTo>
-                    <a:pt x="1360827" y="3007614"/>
-                  </a:lnTo>
-                  <a:lnTo>
-                    <a:pt x="1432450" y="2999390"/>
-                  </a:lnTo>
-                  <a:lnTo>
-                    <a:pt x="1504073" y="2991061"/>
-                  </a:lnTo>
-                  <a:lnTo>
-                    <a:pt x="1575695" y="2982626"/>
-                  </a:lnTo>
-                  <a:lnTo>
-                    <a:pt x="1647318" y="2974083"/>
-                  </a:lnTo>
-                  <a:lnTo>
-                    <a:pt x="1718940" y="2965431"/>
-                  </a:lnTo>
-                  <a:lnTo>
-                    <a:pt x="1790563" y="2956669"/>
-                  </a:lnTo>
-                  <a:lnTo>
-                    <a:pt x="1862185" y="2947795"/>
-                  </a:lnTo>
-                  <a:lnTo>
-                    <a:pt x="1933808" y="2938808"/>
-                  </a:lnTo>
-                  <a:lnTo>
-                    <a:pt x="2005430" y="2929706"/>
-                  </a:lnTo>
-                  <a:lnTo>
-                    <a:pt x="2077053" y="2920488"/>
-                  </a:lnTo>
-                  <a:lnTo>
-                    <a:pt x="2148675" y="2911153"/>
-                  </a:lnTo>
-                  <a:lnTo>
-                    <a:pt x="2220298" y="2901699"/>
-                  </a:lnTo>
-                  <a:lnTo>
-                    <a:pt x="2291920" y="2892124"/>
-                  </a:lnTo>
-                  <a:lnTo>
-                    <a:pt x="2363543" y="2882427"/>
-                  </a:lnTo>
-                  <a:lnTo>
-                    <a:pt x="2435165" y="2872607"/>
-                  </a:lnTo>
-                  <a:lnTo>
-                    <a:pt x="2506788" y="2862661"/>
-                  </a:lnTo>
-                  <a:lnTo>
-                    <a:pt x="2578410" y="2852589"/>
-                  </a:lnTo>
-                  <a:lnTo>
-                    <a:pt x="2650033" y="2842388"/>
-                  </a:lnTo>
-                  <a:lnTo>
-                    <a:pt x="2721655" y="2832057"/>
-                  </a:lnTo>
-                  <a:lnTo>
-                    <a:pt x="2793278" y="2821594"/>
-                  </a:lnTo>
-                  <a:lnTo>
-                    <a:pt x="2864901" y="2810998"/>
-                  </a:lnTo>
-                  <a:lnTo>
-                    <a:pt x="2936523" y="2800267"/>
-                  </a:lnTo>
-                  <a:lnTo>
-                    <a:pt x="3008146" y="2789399"/>
-                  </a:lnTo>
-                  <a:lnTo>
-                    <a:pt x="3079768" y="2765718"/>
-                  </a:lnTo>
-                  <a:lnTo>
-                    <a:pt x="3151391" y="2722636"/>
-                  </a:lnTo>
-                  <a:lnTo>
-                    <a:pt x="3223013" y="2677462"/>
-                  </a:lnTo>
-                  <a:lnTo>
-                    <a:pt x="3294636" y="2630093"/>
-                  </a:lnTo>
-                  <a:lnTo>
-                    <a:pt x="3366258" y="2580423"/>
-                  </a:lnTo>
-                  <a:lnTo>
-                    <a:pt x="3437881" y="2528340"/>
-                  </a:lnTo>
-                  <a:lnTo>
-                    <a:pt x="3509503" y="2473728"/>
-                  </a:lnTo>
-                  <a:lnTo>
-                    <a:pt x="3581126" y="2416463"/>
-                  </a:lnTo>
-                  <a:lnTo>
-                    <a:pt x="3652748" y="2356416"/>
-                  </a:lnTo>
-                  <a:lnTo>
-                    <a:pt x="3724371" y="2293452"/>
-                  </a:lnTo>
-                  <a:lnTo>
-                    <a:pt x="3795993" y="2227430"/>
-                  </a:lnTo>
-                  <a:lnTo>
-                    <a:pt x="3867616" y="2158201"/>
-                  </a:lnTo>
-                  <a:lnTo>
-                    <a:pt x="3939238" y="2085609"/>
-                  </a:lnTo>
-                  <a:lnTo>
-                    <a:pt x="4010861" y="2009491"/>
-                  </a:lnTo>
-                  <a:lnTo>
-                    <a:pt x="4082483" y="1929676"/>
-                  </a:lnTo>
-                  <a:lnTo>
-                    <a:pt x="4154106" y="1845984"/>
-                  </a:lnTo>
-                  <a:lnTo>
-                    <a:pt x="4225729" y="1758226"/>
-                  </a:lnTo>
-                  <a:lnTo>
-                    <a:pt x="4297351" y="1666206"/>
-                  </a:lnTo>
-                  <a:lnTo>
-                    <a:pt x="4368974" y="1569715"/>
-                  </a:lnTo>
-                  <a:lnTo>
-                    <a:pt x="4440596" y="1468538"/>
-                  </a:lnTo>
-                  <a:lnTo>
-                    <a:pt x="4512219" y="1362446"/>
-                  </a:lnTo>
-                  <a:lnTo>
-                    <a:pt x="4583841" y="1251201"/>
-                  </a:lnTo>
-                  <a:lnTo>
-                    <a:pt x="4655464" y="1134552"/>
-                  </a:lnTo>
-                  <a:lnTo>
-                    <a:pt x="4727086" y="1012237"/>
-                  </a:lnTo>
-                  <a:lnTo>
-                    <a:pt x="4798709" y="883980"/>
-                  </a:lnTo>
-                  <a:lnTo>
-                    <a:pt x="4870331" y="749494"/>
-                  </a:lnTo>
-                  <a:lnTo>
-                    <a:pt x="4941954" y="608475"/>
-                  </a:lnTo>
-                  <a:lnTo>
-                    <a:pt x="5013576" y="460606"/>
-                  </a:lnTo>
-                  <a:lnTo>
-                    <a:pt x="5085199" y="305554"/>
-                  </a:lnTo>
-                  <a:lnTo>
-                    <a:pt x="5156821" y="142971"/>
-                  </a:lnTo>
-                  <a:lnTo>
-                    <a:pt x="5216887" y="0"/>
+                    <a:pt x="71622" y="3142702"/>
+                  </a:lnTo>
+                  <a:lnTo>
+                    <a:pt x="143245" y="3136114"/>
+                  </a:lnTo>
+                  <a:lnTo>
+                    <a:pt x="214867" y="3129441"/>
+                  </a:lnTo>
+                  <a:lnTo>
+                    <a:pt x="286490" y="3122681"/>
+                  </a:lnTo>
+                  <a:lnTo>
+                    <a:pt x="358112" y="3115834"/>
+                  </a:lnTo>
+                  <a:lnTo>
+                    <a:pt x="429735" y="3108899"/>
+                  </a:lnTo>
+                  <a:lnTo>
+                    <a:pt x="501357" y="3101874"/>
+                  </a:lnTo>
+                  <a:lnTo>
+                    <a:pt x="572980" y="3094758"/>
+                  </a:lnTo>
+                  <a:lnTo>
+                    <a:pt x="644602" y="3087551"/>
+                  </a:lnTo>
+                  <a:lnTo>
+                    <a:pt x="716225" y="3080250"/>
+                  </a:lnTo>
+                  <a:lnTo>
+                    <a:pt x="787847" y="3072855"/>
+                  </a:lnTo>
+                  <a:lnTo>
+                    <a:pt x="859470" y="3065365"/>
+                  </a:lnTo>
+                  <a:lnTo>
+                    <a:pt x="931092" y="3057777"/>
+                  </a:lnTo>
+                  <a:lnTo>
+                    <a:pt x="1002715" y="3050092"/>
+                  </a:lnTo>
+                  <a:lnTo>
+                    <a:pt x="1074337" y="3042307"/>
+                  </a:lnTo>
+                  <a:lnTo>
+                    <a:pt x="1145960" y="3034422"/>
+                  </a:lnTo>
+                  <a:lnTo>
+                    <a:pt x="1217582" y="3026435"/>
+                  </a:lnTo>
+                  <a:lnTo>
+                    <a:pt x="1289205" y="3018345"/>
+                  </a:lnTo>
+                  <a:lnTo>
+                    <a:pt x="1360827" y="3010150"/>
+                  </a:lnTo>
+                  <a:lnTo>
+                    <a:pt x="1432450" y="3001849"/>
+                  </a:lnTo>
+                  <a:lnTo>
+                    <a:pt x="1504073" y="2993442"/>
+                  </a:lnTo>
+                  <a:lnTo>
+                    <a:pt x="1575695" y="2984925"/>
+                  </a:lnTo>
+                  <a:lnTo>
+                    <a:pt x="1647318" y="2976299"/>
+                  </a:lnTo>
+                  <a:lnTo>
+                    <a:pt x="1718940" y="2967561"/>
+                  </a:lnTo>
+                  <a:lnTo>
+                    <a:pt x="1790563" y="2958710"/>
+                  </a:lnTo>
+                  <a:lnTo>
+                    <a:pt x="1862185" y="2949744"/>
+                  </a:lnTo>
+                  <a:lnTo>
+                    <a:pt x="1933808" y="2940663"/>
+                  </a:lnTo>
+                  <a:lnTo>
+                    <a:pt x="2005430" y="2931465"/>
+                  </a:lnTo>
+                  <a:lnTo>
+                    <a:pt x="2077053" y="2922148"/>
+                  </a:lnTo>
+                  <a:lnTo>
+                    <a:pt x="2148675" y="2912710"/>
+                  </a:lnTo>
+                  <a:lnTo>
+                    <a:pt x="2220298" y="2903151"/>
+                  </a:lnTo>
+                  <a:lnTo>
+                    <a:pt x="2291920" y="2893468"/>
+                  </a:lnTo>
+                  <a:lnTo>
+                    <a:pt x="2363543" y="2883660"/>
+                  </a:lnTo>
+                  <a:lnTo>
+                    <a:pt x="2435165" y="2873725"/>
+                  </a:lnTo>
+                  <a:lnTo>
+                    <a:pt x="2506788" y="2863661"/>
+                  </a:lnTo>
+                  <a:lnTo>
+                    <a:pt x="2578410" y="2853468"/>
+                  </a:lnTo>
+                  <a:lnTo>
+                    <a:pt x="2650033" y="2843143"/>
+                  </a:lnTo>
+                  <a:lnTo>
+                    <a:pt x="2721655" y="2832685"/>
+                  </a:lnTo>
+                  <a:lnTo>
+                    <a:pt x="2793278" y="2822092"/>
+                  </a:lnTo>
+                  <a:lnTo>
+                    <a:pt x="2864901" y="2811361"/>
+                  </a:lnTo>
+                  <a:lnTo>
+                    <a:pt x="2936523" y="2800493"/>
+                  </a:lnTo>
+                  <a:lnTo>
+                    <a:pt x="3008146" y="2789483"/>
+                  </a:lnTo>
+                  <a:lnTo>
+                    <a:pt x="3079768" y="2765494"/>
+                  </a:lnTo>
+                  <a:lnTo>
+                    <a:pt x="3151391" y="2721831"/>
+                  </a:lnTo>
+                  <a:lnTo>
+                    <a:pt x="3223013" y="2676020"/>
+                  </a:lnTo>
+                  <a:lnTo>
+                    <a:pt x="3294636" y="2627953"/>
+                  </a:lnTo>
+                  <a:lnTo>
+                    <a:pt x="3366258" y="2577522"/>
+                  </a:lnTo>
+                  <a:lnTo>
+                    <a:pt x="3437881" y="2524608"/>
+                  </a:lnTo>
+                  <a:lnTo>
+                    <a:pt x="3509503" y="2469090"/>
+                  </a:lnTo>
+                  <a:lnTo>
+                    <a:pt x="3581126" y="2410839"/>
+                  </a:lnTo>
+                  <a:lnTo>
+                    <a:pt x="3652748" y="2349721"/>
+                  </a:lnTo>
+                  <a:lnTo>
+                    <a:pt x="3724371" y="2285596"/>
+                  </a:lnTo>
+                  <a:lnTo>
+                    <a:pt x="3795993" y="2218315"/>
+                  </a:lnTo>
+                  <a:lnTo>
+                    <a:pt x="3867616" y="2147722"/>
+                  </a:lnTo>
+                  <a:lnTo>
+                    <a:pt x="3939238" y="2073654"/>
+                  </a:lnTo>
+                  <a:lnTo>
+                    <a:pt x="4010861" y="1995942"/>
+                  </a:lnTo>
+                  <a:lnTo>
+                    <a:pt x="4082483" y="1914405"/>
+                  </a:lnTo>
+                  <a:lnTo>
+                    <a:pt x="4154106" y="1828854"/>
+                  </a:lnTo>
+                  <a:lnTo>
+                    <a:pt x="4225729" y="1739094"/>
+                  </a:lnTo>
+                  <a:lnTo>
+                    <a:pt x="4297351" y="1644915"/>
+                  </a:lnTo>
+                  <a:lnTo>
+                    <a:pt x="4368974" y="1546101"/>
+                  </a:lnTo>
+                  <a:lnTo>
+                    <a:pt x="4440596" y="1442424"/>
+                  </a:lnTo>
+                  <a:lnTo>
+                    <a:pt x="4512219" y="1333645"/>
+                  </a:lnTo>
+                  <a:lnTo>
+                    <a:pt x="4583841" y="1219511"/>
+                  </a:lnTo>
+                  <a:lnTo>
+                    <a:pt x="4655464" y="1099761"/>
+                  </a:lnTo>
+                  <a:lnTo>
+                    <a:pt x="4727086" y="974116"/>
+                  </a:lnTo>
+                  <a:lnTo>
+                    <a:pt x="4798709" y="842288"/>
+                  </a:lnTo>
+                  <a:lnTo>
+                    <a:pt x="4870331" y="703972"/>
+                  </a:lnTo>
+                  <a:lnTo>
+                    <a:pt x="4941954" y="558848"/>
+                  </a:lnTo>
+                  <a:lnTo>
+                    <a:pt x="5013576" y="406582"/>
+                  </a:lnTo>
+                  <a:lnTo>
+                    <a:pt x="5085199" y="246822"/>
+                  </a:lnTo>
+                  <a:lnTo>
+                    <a:pt x="5156821" y="79199"/>
+                  </a:lnTo>
+                  <a:lnTo>
+                    <a:pt x="5189074" y="0"/>
                   </a:lnTo>
                 </a:path>
               </a:pathLst>
@@ -3934,312 +3934,312 @@
           </p:nvSpPr>
           <p:spPr>
             <a:xfrm>
-              <a:off x="1172049" y="3771871"/>
-              <a:ext cx="7090630" cy="1661958"/>
+              <a:off x="1172049" y="3755048"/>
+              <a:ext cx="7090630" cy="1681751"/>
             </a:xfrm>
             <a:custGeom>
               <a:avLst/>
               <a:pathLst>
-                <a:path w="7090630" h="1661958">
+                <a:path w="7090630" h="1681751">
                   <a:moveTo>
                     <a:pt x="7090630" y="0"/>
                   </a:moveTo>
                   <a:lnTo>
-                    <a:pt x="7019007" y="22376"/>
-                  </a:lnTo>
-                  <a:lnTo>
-                    <a:pt x="6947385" y="44470"/>
-                  </a:lnTo>
-                  <a:lnTo>
-                    <a:pt x="6875762" y="66287"/>
-                  </a:lnTo>
-                  <a:lnTo>
-                    <a:pt x="6804139" y="87828"/>
-                  </a:lnTo>
-                  <a:lnTo>
-                    <a:pt x="6732517" y="109099"/>
-                  </a:lnTo>
-                  <a:lnTo>
-                    <a:pt x="6660894" y="130102"/>
-                  </a:lnTo>
-                  <a:lnTo>
-                    <a:pt x="6589272" y="150840"/>
-                  </a:lnTo>
-                  <a:lnTo>
-                    <a:pt x="6517649" y="171317"/>
-                  </a:lnTo>
-                  <a:lnTo>
-                    <a:pt x="6446027" y="191536"/>
-                  </a:lnTo>
-                  <a:lnTo>
-                    <a:pt x="6374404" y="211501"/>
-                  </a:lnTo>
-                  <a:lnTo>
-                    <a:pt x="6302782" y="231215"/>
-                  </a:lnTo>
-                  <a:lnTo>
-                    <a:pt x="6231159" y="250680"/>
-                  </a:lnTo>
-                  <a:lnTo>
-                    <a:pt x="6159537" y="269900"/>
-                  </a:lnTo>
-                  <a:lnTo>
-                    <a:pt x="6087914" y="288879"/>
-                  </a:lnTo>
-                  <a:lnTo>
-                    <a:pt x="6016292" y="307618"/>
-                  </a:lnTo>
-                  <a:lnTo>
-                    <a:pt x="5944669" y="326121"/>
-                  </a:lnTo>
-                  <a:lnTo>
-                    <a:pt x="5873047" y="344392"/>
-                  </a:lnTo>
-                  <a:lnTo>
-                    <a:pt x="5801424" y="362432"/>
-                  </a:lnTo>
-                  <a:lnTo>
-                    <a:pt x="5729802" y="380245"/>
-                  </a:lnTo>
-                  <a:lnTo>
-                    <a:pt x="5658179" y="397834"/>
-                  </a:lnTo>
-                  <a:lnTo>
-                    <a:pt x="5586557" y="415202"/>
-                  </a:lnTo>
-                  <a:lnTo>
-                    <a:pt x="5514934" y="432351"/>
-                  </a:lnTo>
-                  <a:lnTo>
-                    <a:pt x="5443311" y="449284"/>
-                  </a:lnTo>
-                  <a:lnTo>
-                    <a:pt x="5371689" y="466004"/>
-                  </a:lnTo>
-                  <a:lnTo>
-                    <a:pt x="5300066" y="482513"/>
-                  </a:lnTo>
-                  <a:lnTo>
-                    <a:pt x="5228444" y="498815"/>
-                  </a:lnTo>
-                  <a:lnTo>
-                    <a:pt x="5156821" y="514911"/>
-                  </a:lnTo>
-                  <a:lnTo>
-                    <a:pt x="5085199" y="530805"/>
-                  </a:lnTo>
-                  <a:lnTo>
-                    <a:pt x="5013576" y="546498"/>
-                  </a:lnTo>
-                  <a:lnTo>
-                    <a:pt x="4941954" y="561994"/>
-                  </a:lnTo>
-                  <a:lnTo>
-                    <a:pt x="4870331" y="577295"/>
-                  </a:lnTo>
-                  <a:lnTo>
-                    <a:pt x="4798709" y="592403"/>
-                  </a:lnTo>
-                  <a:lnTo>
-                    <a:pt x="4727086" y="607321"/>
-                  </a:lnTo>
-                  <a:lnTo>
-                    <a:pt x="4655464" y="622051"/>
-                  </a:lnTo>
-                  <a:lnTo>
-                    <a:pt x="4583841" y="636596"/>
-                  </a:lnTo>
-                  <a:lnTo>
-                    <a:pt x="4512219" y="650958"/>
-                  </a:lnTo>
-                  <a:lnTo>
-                    <a:pt x="4440596" y="665139"/>
-                  </a:lnTo>
-                  <a:lnTo>
-                    <a:pt x="4368974" y="679141"/>
-                  </a:lnTo>
-                  <a:lnTo>
-                    <a:pt x="4297351" y="692967"/>
-                  </a:lnTo>
-                  <a:lnTo>
-                    <a:pt x="4225729" y="706619"/>
-                  </a:lnTo>
-                  <a:lnTo>
-                    <a:pt x="4154106" y="720099"/>
-                  </a:lnTo>
-                  <a:lnTo>
-                    <a:pt x="4082483" y="733409"/>
-                  </a:lnTo>
-                  <a:lnTo>
-                    <a:pt x="4010861" y="746552"/>
-                  </a:lnTo>
-                  <a:lnTo>
-                    <a:pt x="3939238" y="759529"/>
-                  </a:lnTo>
-                  <a:lnTo>
-                    <a:pt x="3867616" y="772343"/>
-                  </a:lnTo>
-                  <a:lnTo>
-                    <a:pt x="3795993" y="784996"/>
-                  </a:lnTo>
-                  <a:lnTo>
-                    <a:pt x="3724371" y="797489"/>
-                  </a:lnTo>
-                  <a:lnTo>
-                    <a:pt x="3652748" y="809825"/>
-                  </a:lnTo>
-                  <a:lnTo>
-                    <a:pt x="3581126" y="822006"/>
-                  </a:lnTo>
-                  <a:lnTo>
-                    <a:pt x="3509503" y="834033"/>
-                  </a:lnTo>
-                  <a:lnTo>
-                    <a:pt x="3437881" y="845909"/>
-                  </a:lnTo>
-                  <a:lnTo>
-                    <a:pt x="3366258" y="857636"/>
-                  </a:lnTo>
-                  <a:lnTo>
-                    <a:pt x="3294636" y="869215"/>
-                  </a:lnTo>
-                  <a:lnTo>
-                    <a:pt x="3223013" y="880648"/>
-                  </a:lnTo>
-                  <a:lnTo>
-                    <a:pt x="3151391" y="891937"/>
-                  </a:lnTo>
-                  <a:lnTo>
-                    <a:pt x="3079768" y="903084"/>
-                  </a:lnTo>
-                  <a:lnTo>
-                    <a:pt x="3008146" y="931496"/>
-                  </a:lnTo>
-                  <a:lnTo>
-                    <a:pt x="2936523" y="970679"/>
-                  </a:lnTo>
-                  <a:lnTo>
-                    <a:pt x="2864901" y="1008047"/>
-                  </a:lnTo>
-                  <a:lnTo>
-                    <a:pt x="2793278" y="1043684"/>
-                  </a:lnTo>
-                  <a:lnTo>
-                    <a:pt x="2721655" y="1077669"/>
-                  </a:lnTo>
-                  <a:lnTo>
-                    <a:pt x="2650033" y="1110081"/>
-                  </a:lnTo>
-                  <a:lnTo>
-                    <a:pt x="2578410" y="1140991"/>
-                  </a:lnTo>
-                  <a:lnTo>
-                    <a:pt x="2506788" y="1170469"/>
-                  </a:lnTo>
-                  <a:lnTo>
-                    <a:pt x="2435165" y="1198582"/>
-                  </a:lnTo>
-                  <a:lnTo>
-                    <a:pt x="2363543" y="1225392"/>
-                  </a:lnTo>
-                  <a:lnTo>
-                    <a:pt x="2291920" y="1250961"/>
-                  </a:lnTo>
-                  <a:lnTo>
-                    <a:pt x="2220298" y="1275345"/>
-                  </a:lnTo>
-                  <a:lnTo>
-                    <a:pt x="2148675" y="1298599"/>
-                  </a:lnTo>
-                  <a:lnTo>
-                    <a:pt x="2077053" y="1320776"/>
-                  </a:lnTo>
-                  <a:lnTo>
-                    <a:pt x="2005430" y="1341926"/>
-                  </a:lnTo>
-                  <a:lnTo>
-                    <a:pt x="1933808" y="1362096"/>
-                  </a:lnTo>
-                  <a:lnTo>
-                    <a:pt x="1862185" y="1381331"/>
-                  </a:lnTo>
-                  <a:lnTo>
-                    <a:pt x="1790563" y="1399676"/>
-                  </a:lnTo>
-                  <a:lnTo>
-                    <a:pt x="1718940" y="1417171"/>
-                  </a:lnTo>
-                  <a:lnTo>
-                    <a:pt x="1647318" y="1433855"/>
-                  </a:lnTo>
-                  <a:lnTo>
-                    <a:pt x="1575695" y="1449767"/>
-                  </a:lnTo>
-                  <a:lnTo>
-                    <a:pt x="1504073" y="1464941"/>
-                  </a:lnTo>
-                  <a:lnTo>
-                    <a:pt x="1432450" y="1479412"/>
-                  </a:lnTo>
-                  <a:lnTo>
-                    <a:pt x="1360827" y="1493214"/>
-                  </a:lnTo>
-                  <a:lnTo>
-                    <a:pt x="1289205" y="1506375"/>
-                  </a:lnTo>
-                  <a:lnTo>
-                    <a:pt x="1217582" y="1518927"/>
-                  </a:lnTo>
-                  <a:lnTo>
-                    <a:pt x="1145960" y="1530898"/>
-                  </a:lnTo>
-                  <a:lnTo>
-                    <a:pt x="1074337" y="1542314"/>
-                  </a:lnTo>
-                  <a:lnTo>
-                    <a:pt x="1002715" y="1553201"/>
-                  </a:lnTo>
-                  <a:lnTo>
-                    <a:pt x="931092" y="1563584"/>
-                  </a:lnTo>
-                  <a:lnTo>
-                    <a:pt x="859470" y="1573486"/>
-                  </a:lnTo>
-                  <a:lnTo>
-                    <a:pt x="787847" y="1582929"/>
-                  </a:lnTo>
-                  <a:lnTo>
-                    <a:pt x="716225" y="1591935"/>
-                  </a:lnTo>
-                  <a:lnTo>
-                    <a:pt x="644602" y="1600523"/>
-                  </a:lnTo>
-                  <a:lnTo>
-                    <a:pt x="572980" y="1608714"/>
-                  </a:lnTo>
-                  <a:lnTo>
-                    <a:pt x="501357" y="1616525"/>
-                  </a:lnTo>
-                  <a:lnTo>
-                    <a:pt x="429735" y="1623975"/>
-                  </a:lnTo>
-                  <a:lnTo>
-                    <a:pt x="358112" y="1631079"/>
-                  </a:lnTo>
-                  <a:lnTo>
-                    <a:pt x="286490" y="1637854"/>
-                  </a:lnTo>
-                  <a:lnTo>
-                    <a:pt x="214867" y="1644315"/>
-                  </a:lnTo>
-                  <a:lnTo>
-                    <a:pt x="143245" y="1650477"/>
-                  </a:lnTo>
-                  <a:lnTo>
-                    <a:pt x="71622" y="1656354"/>
-                  </a:lnTo>
-                  <a:lnTo>
-                    <a:pt x="0" y="1661958"/>
+                    <a:pt x="7019007" y="22883"/>
+                  </a:lnTo>
+                  <a:lnTo>
+                    <a:pt x="6947385" y="45475"/>
+                  </a:lnTo>
+                  <a:lnTo>
+                    <a:pt x="6875762" y="67779"/>
+                  </a:lnTo>
+                  <a:lnTo>
+                    <a:pt x="6804139" y="89799"/>
+                  </a:lnTo>
+                  <a:lnTo>
+                    <a:pt x="6732517" y="111537"/>
+                  </a:lnTo>
+                  <a:lnTo>
+                    <a:pt x="6660894" y="132998"/>
+                  </a:lnTo>
+                  <a:lnTo>
+                    <a:pt x="6589272" y="154186"/>
+                  </a:lnTo>
+                  <a:lnTo>
+                    <a:pt x="6517649" y="175103"/>
+                  </a:lnTo>
+                  <a:lnTo>
+                    <a:pt x="6446027" y="195754"/>
+                  </a:lnTo>
+                  <a:lnTo>
+                    <a:pt x="6374404" y="216141"/>
+                  </a:lnTo>
+                  <a:lnTo>
+                    <a:pt x="6302782" y="236268"/>
+                  </a:lnTo>
+                  <a:lnTo>
+                    <a:pt x="6231159" y="256138"/>
+                  </a:lnTo>
+                  <a:lnTo>
+                    <a:pt x="6159537" y="275755"/>
+                  </a:lnTo>
+                  <a:lnTo>
+                    <a:pt x="6087914" y="295122"/>
+                  </a:lnTo>
+                  <a:lnTo>
+                    <a:pt x="6016292" y="314242"/>
+                  </a:lnTo>
+                  <a:lnTo>
+                    <a:pt x="5944669" y="333117"/>
+                  </a:lnTo>
+                  <a:lnTo>
+                    <a:pt x="5873047" y="351752"/>
+                  </a:lnTo>
+                  <a:lnTo>
+                    <a:pt x="5801424" y="370150"/>
+                  </a:lnTo>
+                  <a:lnTo>
+                    <a:pt x="5729802" y="388313"/>
+                  </a:lnTo>
+                  <a:lnTo>
+                    <a:pt x="5658179" y="406244"/>
+                  </a:lnTo>
+                  <a:lnTo>
+                    <a:pt x="5586557" y="423946"/>
+                  </a:lnTo>
+                  <a:lnTo>
+                    <a:pt x="5514934" y="441423"/>
+                  </a:lnTo>
+                  <a:lnTo>
+                    <a:pt x="5443311" y="458676"/>
+                  </a:lnTo>
+                  <a:lnTo>
+                    <a:pt x="5371689" y="475710"/>
+                  </a:lnTo>
+                  <a:lnTo>
+                    <a:pt x="5300066" y="492526"/>
+                  </a:lnTo>
+                  <a:lnTo>
+                    <a:pt x="5228444" y="509128"/>
+                  </a:lnTo>
+                  <a:lnTo>
+                    <a:pt x="5156821" y="525518"/>
+                  </a:lnTo>
+                  <a:lnTo>
+                    <a:pt x="5085199" y="541699"/>
+                  </a:lnTo>
+                  <a:lnTo>
+                    <a:pt x="5013576" y="557674"/>
+                  </a:lnTo>
+                  <a:lnTo>
+                    <a:pt x="4941954" y="573445"/>
+                  </a:lnTo>
+                  <a:lnTo>
+                    <a:pt x="4870331" y="589015"/>
+                  </a:lnTo>
+                  <a:lnTo>
+                    <a:pt x="4798709" y="604386"/>
+                  </a:lnTo>
+                  <a:lnTo>
+                    <a:pt x="4727086" y="619561"/>
+                  </a:lnTo>
+                  <a:lnTo>
+                    <a:pt x="4655464" y="634543"/>
+                  </a:lnTo>
+                  <a:lnTo>
+                    <a:pt x="4583841" y="649333"/>
+                  </a:lnTo>
+                  <a:lnTo>
+                    <a:pt x="4512219" y="663935"/>
+                  </a:lnTo>
+                  <a:lnTo>
+                    <a:pt x="4440596" y="678351"/>
+                  </a:lnTo>
+                  <a:lnTo>
+                    <a:pt x="4368974" y="692582"/>
+                  </a:lnTo>
+                  <a:lnTo>
+                    <a:pt x="4297351" y="706633"/>
+                  </a:lnTo>
+                  <a:lnTo>
+                    <a:pt x="4225729" y="720504"/>
+                  </a:lnTo>
+                  <a:lnTo>
+                    <a:pt x="4154106" y="734198"/>
+                  </a:lnTo>
+                  <a:lnTo>
+                    <a:pt x="4082483" y="747717"/>
+                  </a:lnTo>
+                  <a:lnTo>
+                    <a:pt x="4010861" y="761064"/>
+                  </a:lnTo>
+                  <a:lnTo>
+                    <a:pt x="3939238" y="774241"/>
+                  </a:lnTo>
+                  <a:lnTo>
+                    <a:pt x="3867616" y="787250"/>
+                  </a:lnTo>
+                  <a:lnTo>
+                    <a:pt x="3795993" y="800092"/>
+                  </a:lnTo>
+                  <a:lnTo>
+                    <a:pt x="3724371" y="812771"/>
+                  </a:lnTo>
+                  <a:lnTo>
+                    <a:pt x="3652748" y="825289"/>
+                  </a:lnTo>
+                  <a:lnTo>
+                    <a:pt x="3581126" y="837646"/>
+                  </a:lnTo>
+                  <a:lnTo>
+                    <a:pt x="3509503" y="849846"/>
+                  </a:lnTo>
+                  <a:lnTo>
+                    <a:pt x="3437881" y="861891"/>
+                  </a:lnTo>
+                  <a:lnTo>
+                    <a:pt x="3366258" y="873781"/>
+                  </a:lnTo>
+                  <a:lnTo>
+                    <a:pt x="3294636" y="885520"/>
+                  </a:lnTo>
+                  <a:lnTo>
+                    <a:pt x="3223013" y="897110"/>
+                  </a:lnTo>
+                  <a:lnTo>
+                    <a:pt x="3151391" y="908551"/>
+                  </a:lnTo>
+                  <a:lnTo>
+                    <a:pt x="3079768" y="919847"/>
+                  </a:lnTo>
+                  <a:lnTo>
+                    <a:pt x="3008146" y="948623"/>
+                  </a:lnTo>
+                  <a:lnTo>
+                    <a:pt x="2936523" y="988286"/>
+                  </a:lnTo>
+                  <a:lnTo>
+                    <a:pt x="2864901" y="1026087"/>
+                  </a:lnTo>
+                  <a:lnTo>
+                    <a:pt x="2793278" y="1062116"/>
+                  </a:lnTo>
+                  <a:lnTo>
+                    <a:pt x="2721655" y="1096455"/>
+                  </a:lnTo>
+                  <a:lnTo>
+                    <a:pt x="2650033" y="1129183"/>
+                  </a:lnTo>
+                  <a:lnTo>
+                    <a:pt x="2578410" y="1160375"/>
+                  </a:lnTo>
+                  <a:lnTo>
+                    <a:pt x="2506788" y="1190105"/>
+                  </a:lnTo>
+                  <a:lnTo>
+                    <a:pt x="2435165" y="1218440"/>
+                  </a:lnTo>
+                  <a:lnTo>
+                    <a:pt x="2363543" y="1245446"/>
+                  </a:lnTo>
+                  <a:lnTo>
+                    <a:pt x="2291920" y="1271185"/>
+                  </a:lnTo>
+                  <a:lnTo>
+                    <a:pt x="2220298" y="1295716"/>
+                  </a:lnTo>
+                  <a:lnTo>
+                    <a:pt x="2148675" y="1319097"/>
+                  </a:lnTo>
+                  <a:lnTo>
+                    <a:pt x="2077053" y="1341381"/>
+                  </a:lnTo>
+                  <a:lnTo>
+                    <a:pt x="2005430" y="1362620"/>
+                  </a:lnTo>
+                  <a:lnTo>
+                    <a:pt x="1933808" y="1382863"/>
+                  </a:lnTo>
+                  <a:lnTo>
+                    <a:pt x="1862185" y="1402156"/>
+                  </a:lnTo>
+                  <a:lnTo>
+                    <a:pt x="1790563" y="1420544"/>
+                  </a:lnTo>
+                  <a:lnTo>
+                    <a:pt x="1718940" y="1438069"/>
+                  </a:lnTo>
+                  <a:lnTo>
+                    <a:pt x="1647318" y="1454773"/>
+                  </a:lnTo>
+                  <a:lnTo>
+                    <a:pt x="1575695" y="1470693"/>
+                  </a:lnTo>
+                  <a:lnTo>
+                    <a:pt x="1504073" y="1485866"/>
+                  </a:lnTo>
+                  <a:lnTo>
+                    <a:pt x="1432450" y="1500327"/>
+                  </a:lnTo>
+                  <a:lnTo>
+                    <a:pt x="1360827" y="1514110"/>
+                  </a:lnTo>
+                  <a:lnTo>
+                    <a:pt x="1289205" y="1527247"/>
+                  </a:lnTo>
+                  <a:lnTo>
+                    <a:pt x="1217582" y="1539767"/>
+                  </a:lnTo>
+                  <a:lnTo>
+                    <a:pt x="1145960" y="1551700"/>
+                  </a:lnTo>
+                  <a:lnTo>
+                    <a:pt x="1074337" y="1563073"/>
+                  </a:lnTo>
+                  <a:lnTo>
+                    <a:pt x="1002715" y="1573913"/>
+                  </a:lnTo>
+                  <a:lnTo>
+                    <a:pt x="931092" y="1584244"/>
+                  </a:lnTo>
+                  <a:lnTo>
+                    <a:pt x="859470" y="1594091"/>
+                  </a:lnTo>
+                  <a:lnTo>
+                    <a:pt x="787847" y="1603476"/>
+                  </a:lnTo>
+                  <a:lnTo>
+                    <a:pt x="716225" y="1612420"/>
+                  </a:lnTo>
+                  <a:lnTo>
+                    <a:pt x="644602" y="1620945"/>
+                  </a:lnTo>
+                  <a:lnTo>
+                    <a:pt x="572980" y="1629070"/>
+                  </a:lnTo>
+                  <a:lnTo>
+                    <a:pt x="501357" y="1636814"/>
+                  </a:lnTo>
+                  <a:lnTo>
+                    <a:pt x="429735" y="1644195"/>
+                  </a:lnTo>
+                  <a:lnTo>
+                    <a:pt x="358112" y="1651230"/>
+                  </a:lnTo>
+                  <a:lnTo>
+                    <a:pt x="286490" y="1657934"/>
+                  </a:lnTo>
+                  <a:lnTo>
+                    <a:pt x="214867" y="1664324"/>
+                  </a:lnTo>
+                  <a:lnTo>
+                    <a:pt x="143245" y="1670414"/>
+                  </a:lnTo>
+                  <a:lnTo>
+                    <a:pt x="71622" y="1676219"/>
+                  </a:lnTo>
+                  <a:lnTo>
+                    <a:pt x="0" y="1681751"/>
                   </a:lnTo>
                 </a:path>
               </a:pathLst>
@@ -4260,287 +4260,284 @@
           <p:spPr>
             <a:xfrm>
               <a:off x="1172049" y="1896563"/>
-              <a:ext cx="6470242" cy="3410777"/>
+              <a:ext cx="6426491" cy="3414757"/>
             </a:xfrm>
             <a:custGeom>
               <a:avLst/>
               <a:pathLst>
-                <a:path w="6470242" h="3410777">
+                <a:path w="6426491" h="3414757">
                   <a:moveTo>
-                    <a:pt x="0" y="3410777"/>
+                    <a:pt x="0" y="3414757"/>
                   </a:moveTo>
                   <a:lnTo>
-                    <a:pt x="71622" y="3403398"/>
-                  </a:lnTo>
-                  <a:lnTo>
-                    <a:pt x="143245" y="3395795"/>
-                  </a:lnTo>
-                  <a:lnTo>
-                    <a:pt x="214867" y="3387959"/>
-                  </a:lnTo>
-                  <a:lnTo>
-                    <a:pt x="286490" y="3379884"/>
-                  </a:lnTo>
-                  <a:lnTo>
-                    <a:pt x="358112" y="3371563"/>
-                  </a:lnTo>
-                  <a:lnTo>
-                    <a:pt x="429735" y="3362989"/>
-                  </a:lnTo>
-                  <a:lnTo>
-                    <a:pt x="501357" y="3354152"/>
-                  </a:lnTo>
-                  <a:lnTo>
-                    <a:pt x="572980" y="3345046"/>
-                  </a:lnTo>
-                  <a:lnTo>
-                    <a:pt x="644602" y="3335662"/>
-                  </a:lnTo>
-                  <a:lnTo>
-                    <a:pt x="716225" y="3325992"/>
-                  </a:lnTo>
-                  <a:lnTo>
-                    <a:pt x="787847" y="3316027"/>
-                  </a:lnTo>
-                  <a:lnTo>
-                    <a:pt x="859470" y="3305758"/>
-                  </a:lnTo>
-                  <a:lnTo>
-                    <a:pt x="931092" y="3295176"/>
-                  </a:lnTo>
-                  <a:lnTo>
-                    <a:pt x="1002715" y="3284271"/>
-                  </a:lnTo>
-                  <a:lnTo>
-                    <a:pt x="1074337" y="3273033"/>
-                  </a:lnTo>
-                  <a:lnTo>
-                    <a:pt x="1145960" y="3261452"/>
-                  </a:lnTo>
-                  <a:lnTo>
-                    <a:pt x="1217582" y="3249518"/>
-                  </a:lnTo>
-                  <a:lnTo>
-                    <a:pt x="1289205" y="3237220"/>
-                  </a:lnTo>
-                  <a:lnTo>
-                    <a:pt x="1360827" y="3224547"/>
-                  </a:lnTo>
-                  <a:lnTo>
-                    <a:pt x="1432450" y="3211487"/>
-                  </a:lnTo>
-                  <a:lnTo>
-                    <a:pt x="1504073" y="3198029"/>
-                  </a:lnTo>
-                  <a:lnTo>
-                    <a:pt x="1575695" y="3184160"/>
-                  </a:lnTo>
-                  <a:lnTo>
-                    <a:pt x="1647318" y="3169868"/>
-                  </a:lnTo>
-                  <a:lnTo>
-                    <a:pt x="1718940" y="3155140"/>
-                  </a:lnTo>
-                  <a:lnTo>
-                    <a:pt x="1790563" y="3139963"/>
-                  </a:lnTo>
-                  <a:lnTo>
-                    <a:pt x="1862185" y="3124323"/>
-                  </a:lnTo>
-                  <a:lnTo>
-                    <a:pt x="1933808" y="3108206"/>
-                  </a:lnTo>
-                  <a:lnTo>
-                    <a:pt x="2005430" y="3091597"/>
-                  </a:lnTo>
-                  <a:lnTo>
-                    <a:pt x="2077053" y="3074481"/>
-                  </a:lnTo>
-                  <a:lnTo>
-                    <a:pt x="2148675" y="3056843"/>
-                  </a:lnTo>
-                  <a:lnTo>
-                    <a:pt x="2220298" y="3038667"/>
-                  </a:lnTo>
-                  <a:lnTo>
-                    <a:pt x="2291920" y="3019937"/>
-                  </a:lnTo>
-                  <a:lnTo>
-                    <a:pt x="2363543" y="3000635"/>
-                  </a:lnTo>
-                  <a:lnTo>
-                    <a:pt x="2435165" y="2980744"/>
-                  </a:lnTo>
-                  <a:lnTo>
-                    <a:pt x="2506788" y="2960247"/>
-                  </a:lnTo>
-                  <a:lnTo>
-                    <a:pt x="2578410" y="2939124"/>
-                  </a:lnTo>
-                  <a:lnTo>
-                    <a:pt x="2650033" y="2917357"/>
-                  </a:lnTo>
-                  <a:lnTo>
-                    <a:pt x="2721655" y="2894926"/>
-                  </a:lnTo>
-                  <a:lnTo>
-                    <a:pt x="2793278" y="2871810"/>
-                  </a:lnTo>
-                  <a:lnTo>
-                    <a:pt x="2864901" y="2847990"/>
-                  </a:lnTo>
-                  <a:lnTo>
-                    <a:pt x="2936523" y="2823442"/>
-                  </a:lnTo>
-                  <a:lnTo>
-                    <a:pt x="3008146" y="2798146"/>
-                  </a:lnTo>
-                  <a:lnTo>
-                    <a:pt x="3079768" y="2772078"/>
-                  </a:lnTo>
-                  <a:lnTo>
-                    <a:pt x="3151391" y="2745215"/>
-                  </a:lnTo>
-                  <a:lnTo>
-                    <a:pt x="3223013" y="2717532"/>
-                  </a:lnTo>
-                  <a:lnTo>
-                    <a:pt x="3294636" y="2689005"/>
-                  </a:lnTo>
-                  <a:lnTo>
-                    <a:pt x="3366258" y="2659608"/>
-                  </a:lnTo>
-                  <a:lnTo>
-                    <a:pt x="3437881" y="2629313"/>
-                  </a:lnTo>
-                  <a:lnTo>
-                    <a:pt x="3509503" y="2598095"/>
-                  </a:lnTo>
-                  <a:lnTo>
-                    <a:pt x="3581126" y="2565924"/>
-                  </a:lnTo>
-                  <a:lnTo>
-                    <a:pt x="3652748" y="2532772"/>
-                  </a:lnTo>
-                  <a:lnTo>
-                    <a:pt x="3724371" y="2498608"/>
-                  </a:lnTo>
-                  <a:lnTo>
-                    <a:pt x="3795993" y="2463402"/>
-                  </a:lnTo>
-                  <a:lnTo>
-                    <a:pt x="3867616" y="2427122"/>
-                  </a:lnTo>
-                  <a:lnTo>
-                    <a:pt x="3939238" y="2389736"/>
-                  </a:lnTo>
-                  <a:lnTo>
-                    <a:pt x="4010861" y="2351208"/>
-                  </a:lnTo>
-                  <a:lnTo>
-                    <a:pt x="4082483" y="2311506"/>
-                  </a:lnTo>
-                  <a:lnTo>
-                    <a:pt x="4154106" y="2270592"/>
-                  </a:lnTo>
-                  <a:lnTo>
-                    <a:pt x="4225729" y="2228430"/>
-                  </a:lnTo>
-                  <a:lnTo>
-                    <a:pt x="4297351" y="2184982"/>
-                  </a:lnTo>
-                  <a:lnTo>
-                    <a:pt x="4368974" y="2140209"/>
-                  </a:lnTo>
-                  <a:lnTo>
-                    <a:pt x="4440596" y="2094069"/>
-                  </a:lnTo>
-                  <a:lnTo>
-                    <a:pt x="4512219" y="2046522"/>
-                  </a:lnTo>
-                  <a:lnTo>
-                    <a:pt x="4583841" y="1997525"/>
-                  </a:lnTo>
-                  <a:lnTo>
-                    <a:pt x="4655464" y="1947032"/>
-                  </a:lnTo>
-                  <a:lnTo>
-                    <a:pt x="4727086" y="1895000"/>
-                  </a:lnTo>
-                  <a:lnTo>
-                    <a:pt x="4798709" y="1841380"/>
-                  </a:lnTo>
-                  <a:lnTo>
-                    <a:pt x="4870331" y="1786124"/>
-                  </a:lnTo>
-                  <a:lnTo>
-                    <a:pt x="4941954" y="1729182"/>
-                  </a:lnTo>
-                  <a:lnTo>
-                    <a:pt x="5013576" y="1670504"/>
-                  </a:lnTo>
-                  <a:lnTo>
-                    <a:pt x="5085199" y="1610035"/>
-                  </a:lnTo>
-                  <a:lnTo>
-                    <a:pt x="5156821" y="1547722"/>
-                  </a:lnTo>
-                  <a:lnTo>
-                    <a:pt x="5228444" y="1483508"/>
-                  </a:lnTo>
-                  <a:lnTo>
-                    <a:pt x="5300066" y="1417334"/>
-                  </a:lnTo>
-                  <a:lnTo>
-                    <a:pt x="5371689" y="1349142"/>
-                  </a:lnTo>
-                  <a:lnTo>
-                    <a:pt x="5443311" y="1278870"/>
-                  </a:lnTo>
-                  <a:lnTo>
-                    <a:pt x="5514934" y="1206454"/>
-                  </a:lnTo>
-                  <a:lnTo>
-                    <a:pt x="5586557" y="1131829"/>
-                  </a:lnTo>
-                  <a:lnTo>
-                    <a:pt x="5658179" y="1054927"/>
-                  </a:lnTo>
-                  <a:lnTo>
-                    <a:pt x="5729802" y="975679"/>
-                  </a:lnTo>
-                  <a:lnTo>
-                    <a:pt x="5801424" y="894014"/>
-                  </a:lnTo>
-                  <a:lnTo>
-                    <a:pt x="5873047" y="809857"/>
-                  </a:lnTo>
-                  <a:lnTo>
-                    <a:pt x="5944669" y="723133"/>
-                  </a:lnTo>
-                  <a:lnTo>
-                    <a:pt x="6016292" y="633763"/>
-                  </a:lnTo>
-                  <a:lnTo>
-                    <a:pt x="6087914" y="541667"/>
-                  </a:lnTo>
-                  <a:lnTo>
-                    <a:pt x="6159537" y="446761"/>
-                  </a:lnTo>
-                  <a:lnTo>
-                    <a:pt x="6231159" y="348960"/>
-                  </a:lnTo>
-                  <a:lnTo>
-                    <a:pt x="6302782" y="248175"/>
-                  </a:lnTo>
-                  <a:lnTo>
-                    <a:pt x="6374404" y="144316"/>
-                  </a:lnTo>
-                  <a:lnTo>
-                    <a:pt x="6446027" y="37288"/>
-                  </a:lnTo>
-                  <a:lnTo>
-                    <a:pt x="6470242" y="0"/>
+                    <a:pt x="71622" y="3407404"/>
+                  </a:lnTo>
+                  <a:lnTo>
+                    <a:pt x="143245" y="3399824"/>
+                  </a:lnTo>
+                  <a:lnTo>
+                    <a:pt x="214867" y="3392010"/>
+                  </a:lnTo>
+                  <a:lnTo>
+                    <a:pt x="286490" y="3383954"/>
+                  </a:lnTo>
+                  <a:lnTo>
+                    <a:pt x="358112" y="3375650"/>
+                  </a:lnTo>
+                  <a:lnTo>
+                    <a:pt x="429735" y="3367088"/>
+                  </a:lnTo>
+                  <a:lnTo>
+                    <a:pt x="501357" y="3358262"/>
+                  </a:lnTo>
+                  <a:lnTo>
+                    <a:pt x="572980" y="3349163"/>
+                  </a:lnTo>
+                  <a:lnTo>
+                    <a:pt x="644602" y="3339783"/>
+                  </a:lnTo>
+                  <a:lnTo>
+                    <a:pt x="716225" y="3330113"/>
+                  </a:lnTo>
+                  <a:lnTo>
+                    <a:pt x="787847" y="3320144"/>
+                  </a:lnTo>
+                  <a:lnTo>
+                    <a:pt x="859470" y="3309867"/>
+                  </a:lnTo>
+                  <a:lnTo>
+                    <a:pt x="931092" y="3299273"/>
+                  </a:lnTo>
+                  <a:lnTo>
+                    <a:pt x="1002715" y="3288351"/>
+                  </a:lnTo>
+                  <a:lnTo>
+                    <a:pt x="1074337" y="3277091"/>
+                  </a:lnTo>
+                  <a:lnTo>
+                    <a:pt x="1145960" y="3265483"/>
+                  </a:lnTo>
+                  <a:lnTo>
+                    <a:pt x="1217582" y="3253517"/>
+                  </a:lnTo>
+                  <a:lnTo>
+                    <a:pt x="1289205" y="3241181"/>
+                  </a:lnTo>
+                  <a:lnTo>
+                    <a:pt x="1360827" y="3228463"/>
+                  </a:lnTo>
+                  <a:lnTo>
+                    <a:pt x="1432450" y="3215352"/>
+                  </a:lnTo>
+                  <a:lnTo>
+                    <a:pt x="1504073" y="3201836"/>
+                  </a:lnTo>
+                  <a:lnTo>
+                    <a:pt x="1575695" y="3187903"/>
+                  </a:lnTo>
+                  <a:lnTo>
+                    <a:pt x="1647318" y="3173538"/>
+                  </a:lnTo>
+                  <a:lnTo>
+                    <a:pt x="1718940" y="3158730"/>
+                  </a:lnTo>
+                  <a:lnTo>
+                    <a:pt x="1790563" y="3143464"/>
+                  </a:lnTo>
+                  <a:lnTo>
+                    <a:pt x="1862185" y="3127726"/>
+                  </a:lnTo>
+                  <a:lnTo>
+                    <a:pt x="1933808" y="3111502"/>
+                  </a:lnTo>
+                  <a:lnTo>
+                    <a:pt x="2005430" y="3094776"/>
+                  </a:lnTo>
+                  <a:lnTo>
+                    <a:pt x="2077053" y="3077533"/>
+                  </a:lnTo>
+                  <a:lnTo>
+                    <a:pt x="2148675" y="3059757"/>
+                  </a:lnTo>
+                  <a:lnTo>
+                    <a:pt x="2220298" y="3041432"/>
+                  </a:lnTo>
+                  <a:lnTo>
+                    <a:pt x="2291920" y="3022541"/>
+                  </a:lnTo>
+                  <a:lnTo>
+                    <a:pt x="2363543" y="3003065"/>
+                  </a:lnTo>
+                  <a:lnTo>
+                    <a:pt x="2435165" y="2982988"/>
+                  </a:lnTo>
+                  <a:lnTo>
+                    <a:pt x="2506788" y="2962290"/>
+                  </a:lnTo>
+                  <a:lnTo>
+                    <a:pt x="2578410" y="2940953"/>
+                  </a:lnTo>
+                  <a:lnTo>
+                    <a:pt x="2650033" y="2918955"/>
+                  </a:lnTo>
+                  <a:lnTo>
+                    <a:pt x="2721655" y="2896278"/>
+                  </a:lnTo>
+                  <a:lnTo>
+                    <a:pt x="2793278" y="2872900"/>
+                  </a:lnTo>
+                  <a:lnTo>
+                    <a:pt x="2864901" y="2848800"/>
+                  </a:lnTo>
+                  <a:lnTo>
+                    <a:pt x="2936523" y="2823954"/>
+                  </a:lnTo>
+                  <a:lnTo>
+                    <a:pt x="3008146" y="2798341"/>
+                  </a:lnTo>
+                  <a:lnTo>
+                    <a:pt x="3079768" y="2771936"/>
+                  </a:lnTo>
+                  <a:lnTo>
+                    <a:pt x="3151391" y="2744715"/>
+                  </a:lnTo>
+                  <a:lnTo>
+                    <a:pt x="3223013" y="2716652"/>
+                  </a:lnTo>
+                  <a:lnTo>
+                    <a:pt x="3294636" y="2687722"/>
+                  </a:lnTo>
+                  <a:lnTo>
+                    <a:pt x="3366258" y="2657898"/>
+                  </a:lnTo>
+                  <a:lnTo>
+                    <a:pt x="3437881" y="2627152"/>
+                  </a:lnTo>
+                  <a:lnTo>
+                    <a:pt x="3509503" y="2595456"/>
+                  </a:lnTo>
+                  <a:lnTo>
+                    <a:pt x="3581126" y="2562780"/>
+                  </a:lnTo>
+                  <a:lnTo>
+                    <a:pt x="3652748" y="2529095"/>
+                  </a:lnTo>
+                  <a:lnTo>
+                    <a:pt x="3724371" y="2494368"/>
+                  </a:lnTo>
+                  <a:lnTo>
+                    <a:pt x="3795993" y="2458567"/>
+                  </a:lnTo>
+                  <a:lnTo>
+                    <a:pt x="3867616" y="2421660"/>
+                  </a:lnTo>
+                  <a:lnTo>
+                    <a:pt x="3939238" y="2383613"/>
+                  </a:lnTo>
+                  <a:lnTo>
+                    <a:pt x="4010861" y="2344389"/>
+                  </a:lnTo>
+                  <a:lnTo>
+                    <a:pt x="4082483" y="2303953"/>
+                  </a:lnTo>
+                  <a:lnTo>
+                    <a:pt x="4154106" y="2262267"/>
+                  </a:lnTo>
+                  <a:lnTo>
+                    <a:pt x="4225729" y="2219293"/>
+                  </a:lnTo>
+                  <a:lnTo>
+                    <a:pt x="4297351" y="2174991"/>
+                  </a:lnTo>
+                  <a:lnTo>
+                    <a:pt x="4368974" y="2129319"/>
+                  </a:lnTo>
+                  <a:lnTo>
+                    <a:pt x="4440596" y="2082236"/>
+                  </a:lnTo>
+                  <a:lnTo>
+                    <a:pt x="4512219" y="2033697"/>
+                  </a:lnTo>
+                  <a:lnTo>
+                    <a:pt x="4583841" y="1983658"/>
+                  </a:lnTo>
+                  <a:lnTo>
+                    <a:pt x="4655464" y="1932073"/>
+                  </a:lnTo>
+                  <a:lnTo>
+                    <a:pt x="4727086" y="1878893"/>
+                  </a:lnTo>
+                  <a:lnTo>
+                    <a:pt x="4798709" y="1824069"/>
+                  </a:lnTo>
+                  <a:lnTo>
+                    <a:pt x="4870331" y="1767551"/>
+                  </a:lnTo>
+                  <a:lnTo>
+                    <a:pt x="4941954" y="1709286"/>
+                  </a:lnTo>
+                  <a:lnTo>
+                    <a:pt x="5013576" y="1649220"/>
+                  </a:lnTo>
+                  <a:lnTo>
+                    <a:pt x="5085199" y="1587298"/>
+                  </a:lnTo>
+                  <a:lnTo>
+                    <a:pt x="5156821" y="1523461"/>
+                  </a:lnTo>
+                  <a:lnTo>
+                    <a:pt x="5228444" y="1457652"/>
+                  </a:lnTo>
+                  <a:lnTo>
+                    <a:pt x="5300066" y="1389808"/>
+                  </a:lnTo>
+                  <a:lnTo>
+                    <a:pt x="5371689" y="1319868"/>
+                  </a:lnTo>
+                  <a:lnTo>
+                    <a:pt x="5443311" y="1247766"/>
+                  </a:lnTo>
+                  <a:lnTo>
+                    <a:pt x="5514934" y="1173435"/>
+                  </a:lnTo>
+                  <a:lnTo>
+                    <a:pt x="5586557" y="1096807"/>
+                  </a:lnTo>
+                  <a:lnTo>
+                    <a:pt x="5658179" y="1017811"/>
+                  </a:lnTo>
+                  <a:lnTo>
+                    <a:pt x="5729802" y="936372"/>
+                  </a:lnTo>
+                  <a:lnTo>
+                    <a:pt x="5801424" y="852417"/>
+                  </a:lnTo>
+                  <a:lnTo>
+                    <a:pt x="5873047" y="765867"/>
+                  </a:lnTo>
+                  <a:lnTo>
+                    <a:pt x="5944669" y="676641"/>
+                  </a:lnTo>
+                  <a:lnTo>
+                    <a:pt x="6016292" y="584658"/>
+                  </a:lnTo>
+                  <a:lnTo>
+                    <a:pt x="6087914" y="489832"/>
+                  </a:lnTo>
+                  <a:lnTo>
+                    <a:pt x="6159537" y="392075"/>
+                  </a:lnTo>
+                  <a:lnTo>
+                    <a:pt x="6231159" y="291296"/>
+                  </a:lnTo>
+                  <a:lnTo>
+                    <a:pt x="6302782" y="187402"/>
+                  </a:lnTo>
+                  <a:lnTo>
+                    <a:pt x="6374404" y="80298"/>
+                  </a:lnTo>
+                  <a:lnTo>
+                    <a:pt x="6426491" y="0"/>
                   </a:lnTo>
                 </a:path>
               </a:pathLst>

--- a/docs/plots/carbo/jx_carbo_linsubhr_dosedisc_anyhosp.pptx
+++ b/docs/plots/carbo/jx_carbo_linsubhr_dosedisc_anyhosp.pptx
@@ -3132,536 +3132,536 @@
           <p:spPr>
             <a:xfrm>
               <a:off x="1172049" y="1896563"/>
-              <a:ext cx="7090630" cy="3540236"/>
+              <a:ext cx="7090630" cy="3537267"/>
             </a:xfrm>
             <a:custGeom>
               <a:avLst/>
               <a:pathLst>
-                <a:path w="7090630" h="3540236">
+                <a:path w="7090630" h="3537267">
                   <a:moveTo>
-                    <a:pt x="0" y="3149206"/>
+                    <a:pt x="0" y="3145613"/>
                   </a:moveTo>
                   <a:lnTo>
-                    <a:pt x="71622" y="3142702"/>
-                  </a:lnTo>
-                  <a:lnTo>
-                    <a:pt x="143245" y="3136114"/>
-                  </a:lnTo>
-                  <a:lnTo>
-                    <a:pt x="214867" y="3129441"/>
-                  </a:lnTo>
-                  <a:lnTo>
-                    <a:pt x="286490" y="3122681"/>
-                  </a:lnTo>
-                  <a:lnTo>
-                    <a:pt x="358112" y="3115834"/>
-                  </a:lnTo>
-                  <a:lnTo>
-                    <a:pt x="429735" y="3108899"/>
-                  </a:lnTo>
-                  <a:lnTo>
-                    <a:pt x="501357" y="3101874"/>
-                  </a:lnTo>
-                  <a:lnTo>
-                    <a:pt x="572980" y="3094758"/>
-                  </a:lnTo>
-                  <a:lnTo>
-                    <a:pt x="644602" y="3087551"/>
-                  </a:lnTo>
-                  <a:lnTo>
-                    <a:pt x="716225" y="3080250"/>
-                  </a:lnTo>
-                  <a:lnTo>
-                    <a:pt x="787847" y="3072855"/>
-                  </a:lnTo>
-                  <a:lnTo>
-                    <a:pt x="859470" y="3065365"/>
-                  </a:lnTo>
-                  <a:lnTo>
-                    <a:pt x="931092" y="3057777"/>
-                  </a:lnTo>
-                  <a:lnTo>
-                    <a:pt x="1002715" y="3050092"/>
-                  </a:lnTo>
-                  <a:lnTo>
-                    <a:pt x="1074337" y="3042307"/>
-                  </a:lnTo>
-                  <a:lnTo>
-                    <a:pt x="1145960" y="3034422"/>
-                  </a:lnTo>
-                  <a:lnTo>
-                    <a:pt x="1217582" y="3026435"/>
-                  </a:lnTo>
-                  <a:lnTo>
-                    <a:pt x="1289205" y="3018345"/>
-                  </a:lnTo>
-                  <a:lnTo>
-                    <a:pt x="1360827" y="3010150"/>
-                  </a:lnTo>
-                  <a:lnTo>
-                    <a:pt x="1432450" y="3001849"/>
-                  </a:lnTo>
-                  <a:lnTo>
-                    <a:pt x="1504073" y="2993442"/>
-                  </a:lnTo>
-                  <a:lnTo>
-                    <a:pt x="1575695" y="2984925"/>
-                  </a:lnTo>
-                  <a:lnTo>
-                    <a:pt x="1647318" y="2976299"/>
-                  </a:lnTo>
-                  <a:lnTo>
-                    <a:pt x="1718940" y="2967561"/>
-                  </a:lnTo>
-                  <a:lnTo>
-                    <a:pt x="1790563" y="2958710"/>
-                  </a:lnTo>
-                  <a:lnTo>
-                    <a:pt x="1862185" y="2949744"/>
-                  </a:lnTo>
-                  <a:lnTo>
-                    <a:pt x="1933808" y="2940663"/>
-                  </a:lnTo>
-                  <a:lnTo>
-                    <a:pt x="2005430" y="2931465"/>
-                  </a:lnTo>
-                  <a:lnTo>
-                    <a:pt x="2077053" y="2922148"/>
-                  </a:lnTo>
-                  <a:lnTo>
-                    <a:pt x="2148675" y="2912710"/>
-                  </a:lnTo>
-                  <a:lnTo>
-                    <a:pt x="2220298" y="2903151"/>
-                  </a:lnTo>
-                  <a:lnTo>
-                    <a:pt x="2291920" y="2893468"/>
-                  </a:lnTo>
-                  <a:lnTo>
-                    <a:pt x="2363543" y="2883660"/>
-                  </a:lnTo>
-                  <a:lnTo>
-                    <a:pt x="2435165" y="2873725"/>
-                  </a:lnTo>
-                  <a:lnTo>
-                    <a:pt x="2506788" y="2863661"/>
-                  </a:lnTo>
-                  <a:lnTo>
-                    <a:pt x="2578410" y="2853468"/>
-                  </a:lnTo>
-                  <a:lnTo>
-                    <a:pt x="2650033" y="2843143"/>
-                  </a:lnTo>
-                  <a:lnTo>
-                    <a:pt x="2721655" y="2832685"/>
-                  </a:lnTo>
-                  <a:lnTo>
-                    <a:pt x="2793278" y="2822092"/>
-                  </a:lnTo>
-                  <a:lnTo>
-                    <a:pt x="2864901" y="2811361"/>
-                  </a:lnTo>
-                  <a:lnTo>
-                    <a:pt x="2936523" y="2800493"/>
-                  </a:lnTo>
-                  <a:lnTo>
-                    <a:pt x="3008146" y="2789483"/>
-                  </a:lnTo>
-                  <a:lnTo>
-                    <a:pt x="3079768" y="2765494"/>
-                  </a:lnTo>
-                  <a:lnTo>
-                    <a:pt x="3151391" y="2721831"/>
-                  </a:lnTo>
-                  <a:lnTo>
-                    <a:pt x="3223013" y="2676020"/>
-                  </a:lnTo>
-                  <a:lnTo>
-                    <a:pt x="3294636" y="2627953"/>
-                  </a:lnTo>
-                  <a:lnTo>
-                    <a:pt x="3366258" y="2577522"/>
-                  </a:lnTo>
-                  <a:lnTo>
-                    <a:pt x="3437881" y="2524608"/>
-                  </a:lnTo>
-                  <a:lnTo>
-                    <a:pt x="3509503" y="2469090"/>
-                  </a:lnTo>
-                  <a:lnTo>
-                    <a:pt x="3581126" y="2410839"/>
-                  </a:lnTo>
-                  <a:lnTo>
-                    <a:pt x="3652748" y="2349721"/>
-                  </a:lnTo>
-                  <a:lnTo>
-                    <a:pt x="3724371" y="2285596"/>
-                  </a:lnTo>
-                  <a:lnTo>
-                    <a:pt x="3795993" y="2218315"/>
-                  </a:lnTo>
-                  <a:lnTo>
-                    <a:pt x="3867616" y="2147722"/>
-                  </a:lnTo>
-                  <a:lnTo>
-                    <a:pt x="3939238" y="2073654"/>
-                  </a:lnTo>
-                  <a:lnTo>
-                    <a:pt x="4010861" y="1995942"/>
-                  </a:lnTo>
-                  <a:lnTo>
-                    <a:pt x="4082483" y="1914405"/>
-                  </a:lnTo>
-                  <a:lnTo>
-                    <a:pt x="4154106" y="1828854"/>
-                  </a:lnTo>
-                  <a:lnTo>
-                    <a:pt x="4225729" y="1739094"/>
-                  </a:lnTo>
-                  <a:lnTo>
-                    <a:pt x="4297351" y="1644915"/>
-                  </a:lnTo>
-                  <a:lnTo>
-                    <a:pt x="4368974" y="1546101"/>
-                  </a:lnTo>
-                  <a:lnTo>
-                    <a:pt x="4440596" y="1442424"/>
-                  </a:lnTo>
-                  <a:lnTo>
-                    <a:pt x="4512219" y="1333645"/>
-                  </a:lnTo>
-                  <a:lnTo>
-                    <a:pt x="4583841" y="1219511"/>
-                  </a:lnTo>
-                  <a:lnTo>
-                    <a:pt x="4655464" y="1099761"/>
-                  </a:lnTo>
-                  <a:lnTo>
-                    <a:pt x="4727086" y="974116"/>
-                  </a:lnTo>
-                  <a:lnTo>
-                    <a:pt x="4798709" y="842288"/>
-                  </a:lnTo>
-                  <a:lnTo>
-                    <a:pt x="4870331" y="703972"/>
-                  </a:lnTo>
-                  <a:lnTo>
-                    <a:pt x="4941954" y="558848"/>
-                  </a:lnTo>
-                  <a:lnTo>
-                    <a:pt x="5013576" y="406582"/>
-                  </a:lnTo>
-                  <a:lnTo>
-                    <a:pt x="5085199" y="246822"/>
-                  </a:lnTo>
-                  <a:lnTo>
-                    <a:pt x="5156821" y="79199"/>
-                  </a:lnTo>
-                  <a:lnTo>
-                    <a:pt x="5189074" y="0"/>
+                    <a:pt x="71622" y="3139148"/>
+                  </a:lnTo>
+                  <a:lnTo>
+                    <a:pt x="143245" y="3132601"/>
+                  </a:lnTo>
+                  <a:lnTo>
+                    <a:pt x="214867" y="3125970"/>
+                  </a:lnTo>
+                  <a:lnTo>
+                    <a:pt x="286490" y="3119255"/>
+                  </a:lnTo>
+                  <a:lnTo>
+                    <a:pt x="358112" y="3112454"/>
+                  </a:lnTo>
+                  <a:lnTo>
+                    <a:pt x="429735" y="3105567"/>
+                  </a:lnTo>
+                  <a:lnTo>
+                    <a:pt x="501357" y="3098591"/>
+                  </a:lnTo>
+                  <a:lnTo>
+                    <a:pt x="572980" y="3091527"/>
+                  </a:lnTo>
+                  <a:lnTo>
+                    <a:pt x="644602" y="3084372"/>
+                  </a:lnTo>
+                  <a:lnTo>
+                    <a:pt x="716225" y="3077127"/>
+                  </a:lnTo>
+                  <a:lnTo>
+                    <a:pt x="787847" y="3069789"/>
+                  </a:lnTo>
+                  <a:lnTo>
+                    <a:pt x="859470" y="3062357"/>
+                  </a:lnTo>
+                  <a:lnTo>
+                    <a:pt x="931092" y="3054831"/>
+                  </a:lnTo>
+                  <a:lnTo>
+                    <a:pt x="1002715" y="3047209"/>
+                  </a:lnTo>
+                  <a:lnTo>
+                    <a:pt x="1074337" y="3039489"/>
+                  </a:lnTo>
+                  <a:lnTo>
+                    <a:pt x="1145960" y="3031671"/>
+                  </a:lnTo>
+                  <a:lnTo>
+                    <a:pt x="1217582" y="3023754"/>
+                  </a:lnTo>
+                  <a:lnTo>
+                    <a:pt x="1289205" y="3015735"/>
+                  </a:lnTo>
+                  <a:lnTo>
+                    <a:pt x="1360827" y="3007614"/>
+                  </a:lnTo>
+                  <a:lnTo>
+                    <a:pt x="1432450" y="2999390"/>
+                  </a:lnTo>
+                  <a:lnTo>
+                    <a:pt x="1504073" y="2991061"/>
+                  </a:lnTo>
+                  <a:lnTo>
+                    <a:pt x="1575695" y="2982626"/>
+                  </a:lnTo>
+                  <a:lnTo>
+                    <a:pt x="1647318" y="2974083"/>
+                  </a:lnTo>
+                  <a:lnTo>
+                    <a:pt x="1718940" y="2965431"/>
+                  </a:lnTo>
+                  <a:lnTo>
+                    <a:pt x="1790563" y="2956669"/>
+                  </a:lnTo>
+                  <a:lnTo>
+                    <a:pt x="1862185" y="2947795"/>
+                  </a:lnTo>
+                  <a:lnTo>
+                    <a:pt x="1933808" y="2938808"/>
+                  </a:lnTo>
+                  <a:lnTo>
+                    <a:pt x="2005430" y="2929706"/>
+                  </a:lnTo>
+                  <a:lnTo>
+                    <a:pt x="2077053" y="2920488"/>
+                  </a:lnTo>
+                  <a:lnTo>
+                    <a:pt x="2148675" y="2911153"/>
+                  </a:lnTo>
+                  <a:lnTo>
+                    <a:pt x="2220298" y="2901699"/>
+                  </a:lnTo>
+                  <a:lnTo>
+                    <a:pt x="2291920" y="2892124"/>
+                  </a:lnTo>
+                  <a:lnTo>
+                    <a:pt x="2363543" y="2882427"/>
+                  </a:lnTo>
+                  <a:lnTo>
+                    <a:pt x="2435165" y="2872607"/>
+                  </a:lnTo>
+                  <a:lnTo>
+                    <a:pt x="2506788" y="2862661"/>
+                  </a:lnTo>
+                  <a:lnTo>
+                    <a:pt x="2578410" y="2852589"/>
+                  </a:lnTo>
+                  <a:lnTo>
+                    <a:pt x="2650033" y="2842388"/>
+                  </a:lnTo>
+                  <a:lnTo>
+                    <a:pt x="2721655" y="2832057"/>
+                  </a:lnTo>
+                  <a:lnTo>
+                    <a:pt x="2793278" y="2821594"/>
+                  </a:lnTo>
+                  <a:lnTo>
+                    <a:pt x="2864901" y="2810998"/>
+                  </a:lnTo>
+                  <a:lnTo>
+                    <a:pt x="2936523" y="2800267"/>
+                  </a:lnTo>
+                  <a:lnTo>
+                    <a:pt x="3008146" y="2789399"/>
+                  </a:lnTo>
+                  <a:lnTo>
+                    <a:pt x="3079768" y="2765718"/>
+                  </a:lnTo>
+                  <a:lnTo>
+                    <a:pt x="3151391" y="2722636"/>
+                  </a:lnTo>
+                  <a:lnTo>
+                    <a:pt x="3223013" y="2677462"/>
+                  </a:lnTo>
+                  <a:lnTo>
+                    <a:pt x="3294636" y="2630093"/>
+                  </a:lnTo>
+                  <a:lnTo>
+                    <a:pt x="3366258" y="2580423"/>
+                  </a:lnTo>
+                  <a:lnTo>
+                    <a:pt x="3437881" y="2528340"/>
+                  </a:lnTo>
+                  <a:lnTo>
+                    <a:pt x="3509503" y="2473728"/>
+                  </a:lnTo>
+                  <a:lnTo>
+                    <a:pt x="3581126" y="2416463"/>
+                  </a:lnTo>
+                  <a:lnTo>
+                    <a:pt x="3652748" y="2356416"/>
+                  </a:lnTo>
+                  <a:lnTo>
+                    <a:pt x="3724371" y="2293452"/>
+                  </a:lnTo>
+                  <a:lnTo>
+                    <a:pt x="3795993" y="2227430"/>
+                  </a:lnTo>
+                  <a:lnTo>
+                    <a:pt x="3867616" y="2158201"/>
+                  </a:lnTo>
+                  <a:lnTo>
+                    <a:pt x="3939238" y="2085609"/>
+                  </a:lnTo>
+                  <a:lnTo>
+                    <a:pt x="4010861" y="2009491"/>
+                  </a:lnTo>
+                  <a:lnTo>
+                    <a:pt x="4082483" y="1929676"/>
+                  </a:lnTo>
+                  <a:lnTo>
+                    <a:pt x="4154106" y="1845984"/>
+                  </a:lnTo>
+                  <a:lnTo>
+                    <a:pt x="4225729" y="1758226"/>
+                  </a:lnTo>
+                  <a:lnTo>
+                    <a:pt x="4297351" y="1666206"/>
+                  </a:lnTo>
+                  <a:lnTo>
+                    <a:pt x="4368974" y="1569715"/>
+                  </a:lnTo>
+                  <a:lnTo>
+                    <a:pt x="4440596" y="1468538"/>
+                  </a:lnTo>
+                  <a:lnTo>
+                    <a:pt x="4512219" y="1362446"/>
+                  </a:lnTo>
+                  <a:lnTo>
+                    <a:pt x="4583841" y="1251201"/>
+                  </a:lnTo>
+                  <a:lnTo>
+                    <a:pt x="4655464" y="1134552"/>
+                  </a:lnTo>
+                  <a:lnTo>
+                    <a:pt x="4727086" y="1012237"/>
+                  </a:lnTo>
+                  <a:lnTo>
+                    <a:pt x="4798709" y="883980"/>
+                  </a:lnTo>
+                  <a:lnTo>
+                    <a:pt x="4870331" y="749494"/>
+                  </a:lnTo>
+                  <a:lnTo>
+                    <a:pt x="4941954" y="608475"/>
+                  </a:lnTo>
+                  <a:lnTo>
+                    <a:pt x="5013576" y="460606"/>
+                  </a:lnTo>
+                  <a:lnTo>
+                    <a:pt x="5085199" y="305554"/>
+                  </a:lnTo>
+                  <a:lnTo>
+                    <a:pt x="5156821" y="142971"/>
+                  </a:lnTo>
+                  <a:lnTo>
+                    <a:pt x="5216887" y="0"/>
                   </a:lnTo>
                   <a:lnTo>
                     <a:pt x="7090630" y="0"/>
                   </a:lnTo>
                   <a:lnTo>
-                    <a:pt x="7090630" y="1858484"/>
-                  </a:lnTo>
-                  <a:lnTo>
-                    <a:pt x="7019007" y="1881368"/>
-                  </a:lnTo>
-                  <a:lnTo>
-                    <a:pt x="6947385" y="1903960"/>
-                  </a:lnTo>
-                  <a:lnTo>
-                    <a:pt x="6875762" y="1926264"/>
-                  </a:lnTo>
-                  <a:lnTo>
-                    <a:pt x="6804139" y="1948283"/>
-                  </a:lnTo>
-                  <a:lnTo>
-                    <a:pt x="6732517" y="1970022"/>
-                  </a:lnTo>
-                  <a:lnTo>
-                    <a:pt x="6660894" y="1991483"/>
-                  </a:lnTo>
-                  <a:lnTo>
-                    <a:pt x="6589272" y="2012671"/>
-                  </a:lnTo>
-                  <a:lnTo>
-                    <a:pt x="6517649" y="2033588"/>
-                  </a:lnTo>
-                  <a:lnTo>
-                    <a:pt x="6446027" y="2054238"/>
-                  </a:lnTo>
-                  <a:lnTo>
-                    <a:pt x="6374404" y="2074626"/>
-                  </a:lnTo>
-                  <a:lnTo>
-                    <a:pt x="6302782" y="2094753"/>
-                  </a:lnTo>
-                  <a:lnTo>
-                    <a:pt x="6231159" y="2114623"/>
-                  </a:lnTo>
-                  <a:lnTo>
-                    <a:pt x="6159537" y="2134240"/>
-                  </a:lnTo>
-                  <a:lnTo>
-                    <a:pt x="6087914" y="2153607"/>
-                  </a:lnTo>
-                  <a:lnTo>
-                    <a:pt x="6016292" y="2172726"/>
-                  </a:lnTo>
-                  <a:lnTo>
-                    <a:pt x="5944669" y="2191602"/>
-                  </a:lnTo>
-                  <a:lnTo>
-                    <a:pt x="5873047" y="2210237"/>
-                  </a:lnTo>
-                  <a:lnTo>
-                    <a:pt x="5801424" y="2228635"/>
-                  </a:lnTo>
-                  <a:lnTo>
-                    <a:pt x="5729802" y="2246797"/>
-                  </a:lnTo>
-                  <a:lnTo>
-                    <a:pt x="5658179" y="2264728"/>
-                  </a:lnTo>
-                  <a:lnTo>
-                    <a:pt x="5586557" y="2282431"/>
-                  </a:lnTo>
-                  <a:lnTo>
-                    <a:pt x="5514934" y="2299907"/>
-                  </a:lnTo>
-                  <a:lnTo>
-                    <a:pt x="5443311" y="2317161"/>
-                  </a:lnTo>
-                  <a:lnTo>
-                    <a:pt x="5371689" y="2334195"/>
-                  </a:lnTo>
-                  <a:lnTo>
-                    <a:pt x="5300066" y="2351011"/>
-                  </a:lnTo>
-                  <a:lnTo>
-                    <a:pt x="5228444" y="2367613"/>
-                  </a:lnTo>
-                  <a:lnTo>
-                    <a:pt x="5156821" y="2384003"/>
-                  </a:lnTo>
-                  <a:lnTo>
-                    <a:pt x="5085199" y="2400184"/>
-                  </a:lnTo>
-                  <a:lnTo>
-                    <a:pt x="5013576" y="2416159"/>
-                  </a:lnTo>
-                  <a:lnTo>
-                    <a:pt x="4941954" y="2431930"/>
-                  </a:lnTo>
-                  <a:lnTo>
-                    <a:pt x="4870331" y="2447500"/>
-                  </a:lnTo>
-                  <a:lnTo>
-                    <a:pt x="4798709" y="2462871"/>
-                  </a:lnTo>
-                  <a:lnTo>
-                    <a:pt x="4727086" y="2478046"/>
-                  </a:lnTo>
-                  <a:lnTo>
-                    <a:pt x="4655464" y="2493027"/>
-                  </a:lnTo>
-                  <a:lnTo>
-                    <a:pt x="4583841" y="2507818"/>
-                  </a:lnTo>
-                  <a:lnTo>
-                    <a:pt x="4512219" y="2522420"/>
-                  </a:lnTo>
-                  <a:lnTo>
-                    <a:pt x="4440596" y="2536835"/>
-                  </a:lnTo>
-                  <a:lnTo>
-                    <a:pt x="4368974" y="2551067"/>
-                  </a:lnTo>
-                  <a:lnTo>
-                    <a:pt x="4297351" y="2565117"/>
-                  </a:lnTo>
-                  <a:lnTo>
-                    <a:pt x="4225729" y="2578988"/>
-                  </a:lnTo>
-                  <a:lnTo>
-                    <a:pt x="4154106" y="2592682"/>
-                  </a:lnTo>
-                  <a:lnTo>
-                    <a:pt x="4082483" y="2606202"/>
-                  </a:lnTo>
-                  <a:lnTo>
-                    <a:pt x="4010861" y="2619549"/>
-                  </a:lnTo>
-                  <a:lnTo>
-                    <a:pt x="3939238" y="2632726"/>
-                  </a:lnTo>
-                  <a:lnTo>
-                    <a:pt x="3867616" y="2645734"/>
-                  </a:lnTo>
-                  <a:lnTo>
-                    <a:pt x="3795993" y="2658577"/>
-                  </a:lnTo>
-                  <a:lnTo>
-                    <a:pt x="3724371" y="2671256"/>
-                  </a:lnTo>
-                  <a:lnTo>
-                    <a:pt x="3652748" y="2683773"/>
-                  </a:lnTo>
-                  <a:lnTo>
-                    <a:pt x="3581126" y="2696131"/>
-                  </a:lnTo>
-                  <a:lnTo>
-                    <a:pt x="3509503" y="2708331"/>
-                  </a:lnTo>
-                  <a:lnTo>
-                    <a:pt x="3437881" y="2720375"/>
-                  </a:lnTo>
-                  <a:lnTo>
-                    <a:pt x="3366258" y="2732266"/>
-                  </a:lnTo>
-                  <a:lnTo>
-                    <a:pt x="3294636" y="2744005"/>
-                  </a:lnTo>
-                  <a:lnTo>
-                    <a:pt x="3223013" y="2755595"/>
-                  </a:lnTo>
-                  <a:lnTo>
-                    <a:pt x="3151391" y="2767036"/>
-                  </a:lnTo>
-                  <a:lnTo>
-                    <a:pt x="3079768" y="2778332"/>
-                  </a:lnTo>
-                  <a:lnTo>
-                    <a:pt x="3008146" y="2807108"/>
-                  </a:lnTo>
-                  <a:lnTo>
-                    <a:pt x="2936523" y="2846770"/>
-                  </a:lnTo>
-                  <a:lnTo>
-                    <a:pt x="2864901" y="2884572"/>
-                  </a:lnTo>
-                  <a:lnTo>
-                    <a:pt x="2793278" y="2920601"/>
-                  </a:lnTo>
-                  <a:lnTo>
-                    <a:pt x="2721655" y="2954940"/>
-                  </a:lnTo>
-                  <a:lnTo>
-                    <a:pt x="2650033" y="2987667"/>
-                  </a:lnTo>
-                  <a:lnTo>
-                    <a:pt x="2578410" y="3018860"/>
-                  </a:lnTo>
-                  <a:lnTo>
-                    <a:pt x="2506788" y="3048590"/>
-                  </a:lnTo>
-                  <a:lnTo>
-                    <a:pt x="2435165" y="3076925"/>
-                  </a:lnTo>
-                  <a:lnTo>
-                    <a:pt x="2363543" y="3103930"/>
-                  </a:lnTo>
-                  <a:lnTo>
-                    <a:pt x="2291920" y="3129669"/>
-                  </a:lnTo>
-                  <a:lnTo>
-                    <a:pt x="2220298" y="3154201"/>
-                  </a:lnTo>
-                  <a:lnTo>
-                    <a:pt x="2148675" y="3177582"/>
-                  </a:lnTo>
-                  <a:lnTo>
-                    <a:pt x="2077053" y="3199866"/>
-                  </a:lnTo>
-                  <a:lnTo>
-                    <a:pt x="2005430" y="3221105"/>
-                  </a:lnTo>
-                  <a:lnTo>
-                    <a:pt x="1933808" y="3241348"/>
-                  </a:lnTo>
-                  <a:lnTo>
-                    <a:pt x="1862185" y="3260641"/>
-                  </a:lnTo>
-                  <a:lnTo>
-                    <a:pt x="1790563" y="3279029"/>
-                  </a:lnTo>
-                  <a:lnTo>
-                    <a:pt x="1718940" y="3296554"/>
-                  </a:lnTo>
-                  <a:lnTo>
-                    <a:pt x="1647318" y="3313258"/>
-                  </a:lnTo>
-                  <a:lnTo>
-                    <a:pt x="1575695" y="3329178"/>
-                  </a:lnTo>
-                  <a:lnTo>
-                    <a:pt x="1504073" y="3344351"/>
-                  </a:lnTo>
-                  <a:lnTo>
-                    <a:pt x="1432450" y="3358812"/>
-                  </a:lnTo>
-                  <a:lnTo>
-                    <a:pt x="1360827" y="3372595"/>
-                  </a:lnTo>
-                  <a:lnTo>
-                    <a:pt x="1289205" y="3385732"/>
-                  </a:lnTo>
-                  <a:lnTo>
-                    <a:pt x="1217582" y="3398252"/>
-                  </a:lnTo>
-                  <a:lnTo>
-                    <a:pt x="1145960" y="3410185"/>
-                  </a:lnTo>
-                  <a:lnTo>
-                    <a:pt x="1074337" y="3421558"/>
-                  </a:lnTo>
-                  <a:lnTo>
-                    <a:pt x="1002715" y="3432398"/>
-                  </a:lnTo>
-                  <a:lnTo>
-                    <a:pt x="931092" y="3442729"/>
-                  </a:lnTo>
-                  <a:lnTo>
-                    <a:pt x="859470" y="3452576"/>
-                  </a:lnTo>
-                  <a:lnTo>
-                    <a:pt x="787847" y="3461961"/>
-                  </a:lnTo>
-                  <a:lnTo>
-                    <a:pt x="716225" y="3470905"/>
-                  </a:lnTo>
-                  <a:lnTo>
-                    <a:pt x="644602" y="3479430"/>
-                  </a:lnTo>
-                  <a:lnTo>
-                    <a:pt x="572980" y="3487555"/>
-                  </a:lnTo>
-                  <a:lnTo>
-                    <a:pt x="501357" y="3495299"/>
-                  </a:lnTo>
-                  <a:lnTo>
-                    <a:pt x="429735" y="3502680"/>
-                  </a:lnTo>
-                  <a:lnTo>
-                    <a:pt x="358112" y="3509714"/>
-                  </a:lnTo>
-                  <a:lnTo>
-                    <a:pt x="286490" y="3516419"/>
-                  </a:lnTo>
-                  <a:lnTo>
-                    <a:pt x="214867" y="3522809"/>
-                  </a:lnTo>
-                  <a:lnTo>
-                    <a:pt x="143245" y="3528899"/>
-                  </a:lnTo>
-                  <a:lnTo>
-                    <a:pt x="71622" y="3534704"/>
-                  </a:lnTo>
-                  <a:lnTo>
-                    <a:pt x="0" y="3540236"/>
+                    <a:pt x="7090630" y="1875308"/>
+                  </a:lnTo>
+                  <a:lnTo>
+                    <a:pt x="7019007" y="1897684"/>
+                  </a:lnTo>
+                  <a:lnTo>
+                    <a:pt x="6947385" y="1919779"/>
+                  </a:lnTo>
+                  <a:lnTo>
+                    <a:pt x="6875762" y="1941595"/>
+                  </a:lnTo>
+                  <a:lnTo>
+                    <a:pt x="6804139" y="1963137"/>
+                  </a:lnTo>
+                  <a:lnTo>
+                    <a:pt x="6732517" y="1984407"/>
+                  </a:lnTo>
+                  <a:lnTo>
+                    <a:pt x="6660894" y="2005410"/>
+                  </a:lnTo>
+                  <a:lnTo>
+                    <a:pt x="6589272" y="2026148"/>
+                  </a:lnTo>
+                  <a:lnTo>
+                    <a:pt x="6517649" y="2046626"/>
+                  </a:lnTo>
+                  <a:lnTo>
+                    <a:pt x="6446027" y="2066845"/>
+                  </a:lnTo>
+                  <a:lnTo>
+                    <a:pt x="6374404" y="2086810"/>
+                  </a:lnTo>
+                  <a:lnTo>
+                    <a:pt x="6302782" y="2106523"/>
+                  </a:lnTo>
+                  <a:lnTo>
+                    <a:pt x="6231159" y="2125989"/>
+                  </a:lnTo>
+                  <a:lnTo>
+                    <a:pt x="6159537" y="2145209"/>
+                  </a:lnTo>
+                  <a:lnTo>
+                    <a:pt x="6087914" y="2164187"/>
+                  </a:lnTo>
+                  <a:lnTo>
+                    <a:pt x="6016292" y="2182926"/>
+                  </a:lnTo>
+                  <a:lnTo>
+                    <a:pt x="5944669" y="2201430"/>
+                  </a:lnTo>
+                  <a:lnTo>
+                    <a:pt x="5873047" y="2219700"/>
+                  </a:lnTo>
+                  <a:lnTo>
+                    <a:pt x="5801424" y="2237741"/>
+                  </a:lnTo>
+                  <a:lnTo>
+                    <a:pt x="5729802" y="2255554"/>
+                  </a:lnTo>
+                  <a:lnTo>
+                    <a:pt x="5658179" y="2273143"/>
+                  </a:lnTo>
+                  <a:lnTo>
+                    <a:pt x="5586557" y="2290511"/>
+                  </a:lnTo>
+                  <a:lnTo>
+                    <a:pt x="5514934" y="2307660"/>
+                  </a:lnTo>
+                  <a:lnTo>
+                    <a:pt x="5443311" y="2324593"/>
+                  </a:lnTo>
+                  <a:lnTo>
+                    <a:pt x="5371689" y="2341312"/>
+                  </a:lnTo>
+                  <a:lnTo>
+                    <a:pt x="5300066" y="2357822"/>
+                  </a:lnTo>
+                  <a:lnTo>
+                    <a:pt x="5228444" y="2374123"/>
+                  </a:lnTo>
+                  <a:lnTo>
+                    <a:pt x="5156821" y="2390220"/>
+                  </a:lnTo>
+                  <a:lnTo>
+                    <a:pt x="5085199" y="2406113"/>
+                  </a:lnTo>
+                  <a:lnTo>
+                    <a:pt x="5013576" y="2421807"/>
+                  </a:lnTo>
+                  <a:lnTo>
+                    <a:pt x="4941954" y="2437303"/>
+                  </a:lnTo>
+                  <a:lnTo>
+                    <a:pt x="4870331" y="2452604"/>
+                  </a:lnTo>
+                  <a:lnTo>
+                    <a:pt x="4798709" y="2467712"/>
+                  </a:lnTo>
+                  <a:lnTo>
+                    <a:pt x="4727086" y="2482630"/>
+                  </a:lnTo>
+                  <a:lnTo>
+                    <a:pt x="4655464" y="2497360"/>
+                  </a:lnTo>
+                  <a:lnTo>
+                    <a:pt x="4583841" y="2511905"/>
+                  </a:lnTo>
+                  <a:lnTo>
+                    <a:pt x="4512219" y="2526266"/>
+                  </a:lnTo>
+                  <a:lnTo>
+                    <a:pt x="4440596" y="2540447"/>
+                  </a:lnTo>
+                  <a:lnTo>
+                    <a:pt x="4368974" y="2554449"/>
+                  </a:lnTo>
+                  <a:lnTo>
+                    <a:pt x="4297351" y="2568275"/>
+                  </a:lnTo>
+                  <a:lnTo>
+                    <a:pt x="4225729" y="2581927"/>
+                  </a:lnTo>
+                  <a:lnTo>
+                    <a:pt x="4154106" y="2595407"/>
+                  </a:lnTo>
+                  <a:lnTo>
+                    <a:pt x="4082483" y="2608718"/>
+                  </a:lnTo>
+                  <a:lnTo>
+                    <a:pt x="4010861" y="2621861"/>
+                  </a:lnTo>
+                  <a:lnTo>
+                    <a:pt x="3939238" y="2634838"/>
+                  </a:lnTo>
+                  <a:lnTo>
+                    <a:pt x="3867616" y="2647652"/>
+                  </a:lnTo>
+                  <a:lnTo>
+                    <a:pt x="3795993" y="2660304"/>
+                  </a:lnTo>
+                  <a:lnTo>
+                    <a:pt x="3724371" y="2672798"/>
+                  </a:lnTo>
+                  <a:lnTo>
+                    <a:pt x="3652748" y="2685134"/>
+                  </a:lnTo>
+                  <a:lnTo>
+                    <a:pt x="3581126" y="2697315"/>
+                  </a:lnTo>
+                  <a:lnTo>
+                    <a:pt x="3509503" y="2709342"/>
+                  </a:lnTo>
+                  <a:lnTo>
+                    <a:pt x="3437881" y="2721218"/>
+                  </a:lnTo>
+                  <a:lnTo>
+                    <a:pt x="3366258" y="2732944"/>
+                  </a:lnTo>
+                  <a:lnTo>
+                    <a:pt x="3294636" y="2744523"/>
+                  </a:lnTo>
+                  <a:lnTo>
+                    <a:pt x="3223013" y="2755956"/>
+                  </a:lnTo>
+                  <a:lnTo>
+                    <a:pt x="3151391" y="2767245"/>
+                  </a:lnTo>
+                  <a:lnTo>
+                    <a:pt x="3079768" y="2778392"/>
+                  </a:lnTo>
+                  <a:lnTo>
+                    <a:pt x="3008146" y="2806805"/>
+                  </a:lnTo>
+                  <a:lnTo>
+                    <a:pt x="2936523" y="2845988"/>
+                  </a:lnTo>
+                  <a:lnTo>
+                    <a:pt x="2864901" y="2883355"/>
+                  </a:lnTo>
+                  <a:lnTo>
+                    <a:pt x="2793278" y="2918992"/>
+                  </a:lnTo>
+                  <a:lnTo>
+                    <a:pt x="2721655" y="2952978"/>
+                  </a:lnTo>
+                  <a:lnTo>
+                    <a:pt x="2650033" y="2985389"/>
+                  </a:lnTo>
+                  <a:lnTo>
+                    <a:pt x="2578410" y="3016300"/>
+                  </a:lnTo>
+                  <a:lnTo>
+                    <a:pt x="2506788" y="3045778"/>
+                  </a:lnTo>
+                  <a:lnTo>
+                    <a:pt x="2435165" y="3073890"/>
+                  </a:lnTo>
+                  <a:lnTo>
+                    <a:pt x="2363543" y="3100701"/>
+                  </a:lnTo>
+                  <a:lnTo>
+                    <a:pt x="2291920" y="3126269"/>
+                  </a:lnTo>
+                  <a:lnTo>
+                    <a:pt x="2220298" y="3150653"/>
+                  </a:lnTo>
+                  <a:lnTo>
+                    <a:pt x="2148675" y="3173907"/>
+                  </a:lnTo>
+                  <a:lnTo>
+                    <a:pt x="2077053" y="3196085"/>
+                  </a:lnTo>
+                  <a:lnTo>
+                    <a:pt x="2005430" y="3217234"/>
+                  </a:lnTo>
+                  <a:lnTo>
+                    <a:pt x="1933808" y="3237404"/>
+                  </a:lnTo>
+                  <a:lnTo>
+                    <a:pt x="1862185" y="3256640"/>
+                  </a:lnTo>
+                  <a:lnTo>
+                    <a:pt x="1790563" y="3274985"/>
+                  </a:lnTo>
+                  <a:lnTo>
+                    <a:pt x="1718940" y="3292479"/>
+                  </a:lnTo>
+                  <a:lnTo>
+                    <a:pt x="1647318" y="3309164"/>
+                  </a:lnTo>
+                  <a:lnTo>
+                    <a:pt x="1575695" y="3325075"/>
+                  </a:lnTo>
+                  <a:lnTo>
+                    <a:pt x="1504073" y="3340250"/>
+                  </a:lnTo>
+                  <a:lnTo>
+                    <a:pt x="1432450" y="3354721"/>
+                  </a:lnTo>
+                  <a:lnTo>
+                    <a:pt x="1360827" y="3368522"/>
+                  </a:lnTo>
+                  <a:lnTo>
+                    <a:pt x="1289205" y="3381684"/>
+                  </a:lnTo>
+                  <a:lnTo>
+                    <a:pt x="1217582" y="3394236"/>
+                  </a:lnTo>
+                  <a:lnTo>
+                    <a:pt x="1145960" y="3406206"/>
+                  </a:lnTo>
+                  <a:lnTo>
+                    <a:pt x="1074337" y="3417622"/>
+                  </a:lnTo>
+                  <a:lnTo>
+                    <a:pt x="1002715" y="3428510"/>
+                  </a:lnTo>
+                  <a:lnTo>
+                    <a:pt x="931092" y="3438892"/>
+                  </a:lnTo>
+                  <a:lnTo>
+                    <a:pt x="859470" y="3448794"/>
+                  </a:lnTo>
+                  <a:lnTo>
+                    <a:pt x="787847" y="3458237"/>
+                  </a:lnTo>
+                  <a:lnTo>
+                    <a:pt x="716225" y="3467243"/>
+                  </a:lnTo>
+                  <a:lnTo>
+                    <a:pt x="644602" y="3475832"/>
+                  </a:lnTo>
+                  <a:lnTo>
+                    <a:pt x="572980" y="3484022"/>
+                  </a:lnTo>
+                  <a:lnTo>
+                    <a:pt x="501357" y="3491834"/>
+                  </a:lnTo>
+                  <a:lnTo>
+                    <a:pt x="429735" y="3499283"/>
+                  </a:lnTo>
+                  <a:lnTo>
+                    <a:pt x="358112" y="3506387"/>
+                  </a:lnTo>
+                  <a:lnTo>
+                    <a:pt x="286490" y="3513163"/>
+                  </a:lnTo>
+                  <a:lnTo>
+                    <a:pt x="214867" y="3519624"/>
+                  </a:lnTo>
+                  <a:lnTo>
+                    <a:pt x="143245" y="3525786"/>
+                  </a:lnTo>
+                  <a:lnTo>
+                    <a:pt x="71622" y="3531663"/>
+                  </a:lnTo>
+                  <a:lnTo>
+                    <a:pt x="0" y="3537267"/>
                   </a:lnTo>
                   <a:close/>
                 </a:path>
@@ -3688,233 +3688,233 @@
           <p:spPr>
             <a:xfrm>
               <a:off x="1172049" y="1896563"/>
-              <a:ext cx="5189074" cy="3149206"/>
+              <a:ext cx="5216887" cy="3145613"/>
             </a:xfrm>
             <a:custGeom>
               <a:avLst/>
               <a:pathLst>
-                <a:path w="5189074" h="3149206">
+                <a:path w="5216887" h="3145613">
                   <a:moveTo>
-                    <a:pt x="0" y="3149206"/>
+                    <a:pt x="0" y="3145613"/>
                   </a:moveTo>
                   <a:lnTo>
-                    <a:pt x="71622" y="3142702"/>
-                  </a:lnTo>
-                  <a:lnTo>
-                    <a:pt x="143245" y="3136114"/>
-                  </a:lnTo>
-                  <a:lnTo>
-                    <a:pt x="214867" y="3129441"/>
-                  </a:lnTo>
-                  <a:lnTo>
-                    <a:pt x="286490" y="3122681"/>
-                  </a:lnTo>
-                  <a:lnTo>
-                    <a:pt x="358112" y="3115834"/>
-                  </a:lnTo>
-                  <a:lnTo>
-                    <a:pt x="429735" y="3108899"/>
-                  </a:lnTo>
-                  <a:lnTo>
-                    <a:pt x="501357" y="3101874"/>
-                  </a:lnTo>
-                  <a:lnTo>
-                    <a:pt x="572980" y="3094758"/>
-                  </a:lnTo>
-                  <a:lnTo>
-                    <a:pt x="644602" y="3087551"/>
-                  </a:lnTo>
-                  <a:lnTo>
-                    <a:pt x="716225" y="3080250"/>
-                  </a:lnTo>
-                  <a:lnTo>
-                    <a:pt x="787847" y="3072855"/>
-                  </a:lnTo>
-                  <a:lnTo>
-                    <a:pt x="859470" y="3065365"/>
-                  </a:lnTo>
-                  <a:lnTo>
-                    <a:pt x="931092" y="3057777"/>
-                  </a:lnTo>
-                  <a:lnTo>
-                    <a:pt x="1002715" y="3050092"/>
-                  </a:lnTo>
-                  <a:lnTo>
-                    <a:pt x="1074337" y="3042307"/>
-                  </a:lnTo>
-                  <a:lnTo>
-                    <a:pt x="1145960" y="3034422"/>
-                  </a:lnTo>
-                  <a:lnTo>
-                    <a:pt x="1217582" y="3026435"/>
-                  </a:lnTo>
-                  <a:lnTo>
-                    <a:pt x="1289205" y="3018345"/>
-                  </a:lnTo>
-                  <a:lnTo>
-                    <a:pt x="1360827" y="3010150"/>
-                  </a:lnTo>
-                  <a:lnTo>
-                    <a:pt x="1432450" y="3001849"/>
-                  </a:lnTo>
-                  <a:lnTo>
-                    <a:pt x="1504073" y="2993442"/>
-                  </a:lnTo>
-                  <a:lnTo>
-                    <a:pt x="1575695" y="2984925"/>
-                  </a:lnTo>
-                  <a:lnTo>
-                    <a:pt x="1647318" y="2976299"/>
-                  </a:lnTo>
-                  <a:lnTo>
-                    <a:pt x="1718940" y="2967561"/>
-                  </a:lnTo>
-                  <a:lnTo>
-                    <a:pt x="1790563" y="2958710"/>
-                  </a:lnTo>
-                  <a:lnTo>
-                    <a:pt x="1862185" y="2949744"/>
-                  </a:lnTo>
-                  <a:lnTo>
-                    <a:pt x="1933808" y="2940663"/>
-                  </a:lnTo>
-                  <a:lnTo>
-                    <a:pt x="2005430" y="2931465"/>
-                  </a:lnTo>
-                  <a:lnTo>
-                    <a:pt x="2077053" y="2922148"/>
-                  </a:lnTo>
-                  <a:lnTo>
-                    <a:pt x="2148675" y="2912710"/>
-                  </a:lnTo>
-                  <a:lnTo>
-                    <a:pt x="2220298" y="2903151"/>
-                  </a:lnTo>
-                  <a:lnTo>
-                    <a:pt x="2291920" y="2893468"/>
-                  </a:lnTo>
-                  <a:lnTo>
-                    <a:pt x="2363543" y="2883660"/>
-                  </a:lnTo>
-                  <a:lnTo>
-                    <a:pt x="2435165" y="2873725"/>
-                  </a:lnTo>
-                  <a:lnTo>
-                    <a:pt x="2506788" y="2863661"/>
-                  </a:lnTo>
-                  <a:lnTo>
-                    <a:pt x="2578410" y="2853468"/>
-                  </a:lnTo>
-                  <a:lnTo>
-                    <a:pt x="2650033" y="2843143"/>
-                  </a:lnTo>
-                  <a:lnTo>
-                    <a:pt x="2721655" y="2832685"/>
-                  </a:lnTo>
-                  <a:lnTo>
-                    <a:pt x="2793278" y="2822092"/>
-                  </a:lnTo>
-                  <a:lnTo>
-                    <a:pt x="2864901" y="2811361"/>
-                  </a:lnTo>
-                  <a:lnTo>
-                    <a:pt x="2936523" y="2800493"/>
-                  </a:lnTo>
-                  <a:lnTo>
-                    <a:pt x="3008146" y="2789483"/>
-                  </a:lnTo>
-                  <a:lnTo>
-                    <a:pt x="3079768" y="2765494"/>
-                  </a:lnTo>
-                  <a:lnTo>
-                    <a:pt x="3151391" y="2721831"/>
-                  </a:lnTo>
-                  <a:lnTo>
-                    <a:pt x="3223013" y="2676020"/>
-                  </a:lnTo>
-                  <a:lnTo>
-                    <a:pt x="3294636" y="2627953"/>
-                  </a:lnTo>
-                  <a:lnTo>
-                    <a:pt x="3366258" y="2577522"/>
-                  </a:lnTo>
-                  <a:lnTo>
-                    <a:pt x="3437881" y="2524608"/>
-                  </a:lnTo>
-                  <a:lnTo>
-                    <a:pt x="3509503" y="2469090"/>
-                  </a:lnTo>
-                  <a:lnTo>
-                    <a:pt x="3581126" y="2410839"/>
-                  </a:lnTo>
-                  <a:lnTo>
-                    <a:pt x="3652748" y="2349721"/>
-                  </a:lnTo>
-                  <a:lnTo>
-                    <a:pt x="3724371" y="2285596"/>
-                  </a:lnTo>
-                  <a:lnTo>
-                    <a:pt x="3795993" y="2218315"/>
-                  </a:lnTo>
-                  <a:lnTo>
-                    <a:pt x="3867616" y="2147722"/>
-                  </a:lnTo>
-                  <a:lnTo>
-                    <a:pt x="3939238" y="2073654"/>
-                  </a:lnTo>
-                  <a:lnTo>
-                    <a:pt x="4010861" y="1995942"/>
-                  </a:lnTo>
-                  <a:lnTo>
-                    <a:pt x="4082483" y="1914405"/>
-                  </a:lnTo>
-                  <a:lnTo>
-                    <a:pt x="4154106" y="1828854"/>
-                  </a:lnTo>
-                  <a:lnTo>
-                    <a:pt x="4225729" y="1739094"/>
-                  </a:lnTo>
-                  <a:lnTo>
-                    <a:pt x="4297351" y="1644915"/>
-                  </a:lnTo>
-                  <a:lnTo>
-                    <a:pt x="4368974" y="1546101"/>
-                  </a:lnTo>
-                  <a:lnTo>
-                    <a:pt x="4440596" y="1442424"/>
-                  </a:lnTo>
-                  <a:lnTo>
-                    <a:pt x="4512219" y="1333645"/>
-                  </a:lnTo>
-                  <a:lnTo>
-                    <a:pt x="4583841" y="1219511"/>
-                  </a:lnTo>
-                  <a:lnTo>
-                    <a:pt x="4655464" y="1099761"/>
-                  </a:lnTo>
-                  <a:lnTo>
-                    <a:pt x="4727086" y="974116"/>
-                  </a:lnTo>
-                  <a:lnTo>
-                    <a:pt x="4798709" y="842288"/>
-                  </a:lnTo>
-                  <a:lnTo>
-                    <a:pt x="4870331" y="703972"/>
-                  </a:lnTo>
-                  <a:lnTo>
-                    <a:pt x="4941954" y="558848"/>
-                  </a:lnTo>
-                  <a:lnTo>
-                    <a:pt x="5013576" y="406582"/>
-                  </a:lnTo>
-                  <a:lnTo>
-                    <a:pt x="5085199" y="246822"/>
-                  </a:lnTo>
-                  <a:lnTo>
-                    <a:pt x="5156821" y="79199"/>
-                  </a:lnTo>
-                  <a:lnTo>
-                    <a:pt x="5189074" y="0"/>
+                    <a:pt x="71622" y="3139148"/>
+                  </a:lnTo>
+                  <a:lnTo>
+                    <a:pt x="143245" y="3132601"/>
+                  </a:lnTo>
+                  <a:lnTo>
+                    <a:pt x="214867" y="3125970"/>
+                  </a:lnTo>
+                  <a:lnTo>
+                    <a:pt x="286490" y="3119255"/>
+                  </a:lnTo>
+                  <a:lnTo>
+                    <a:pt x="358112" y="3112454"/>
+                  </a:lnTo>
+                  <a:lnTo>
+                    <a:pt x="429735" y="3105567"/>
+                  </a:lnTo>
+                  <a:lnTo>
+                    <a:pt x="501357" y="3098591"/>
+                  </a:lnTo>
+                  <a:lnTo>
+                    <a:pt x="572980" y="3091527"/>
+                  </a:lnTo>
+                  <a:lnTo>
+                    <a:pt x="644602" y="3084372"/>
+                  </a:lnTo>
+                  <a:lnTo>
+                    <a:pt x="716225" y="3077127"/>
+                  </a:lnTo>
+                  <a:lnTo>
+                    <a:pt x="787847" y="3069789"/>
+                  </a:lnTo>
+                  <a:lnTo>
+                    <a:pt x="859470" y="3062357"/>
+                  </a:lnTo>
+                  <a:lnTo>
+                    <a:pt x="931092" y="3054831"/>
+                  </a:lnTo>
+                  <a:lnTo>
+                    <a:pt x="1002715" y="3047209"/>
+                  </a:lnTo>
+                  <a:lnTo>
+                    <a:pt x="1074337" y="3039489"/>
+                  </a:lnTo>
+                  <a:lnTo>
+                    <a:pt x="1145960" y="3031671"/>
+                  </a:lnTo>
+                  <a:lnTo>
+                    <a:pt x="1217582" y="3023754"/>
+                  </a:lnTo>
+                  <a:lnTo>
+                    <a:pt x="1289205" y="3015735"/>
+                  </a:lnTo>
+                  <a:lnTo>
+                    <a:pt x="1360827" y="3007614"/>
+                  </a:lnTo>
+                  <a:lnTo>
+                    <a:pt x="1432450" y="2999390"/>
+                  </a:lnTo>
+                  <a:lnTo>
+                    <a:pt x="1504073" y="2991061"/>
+                  </a:lnTo>
+                  <a:lnTo>
+                    <a:pt x="1575695" y="2982626"/>
+                  </a:lnTo>
+                  <a:lnTo>
+                    <a:pt x="1647318" y="2974083"/>
+                  </a:lnTo>
+                  <a:lnTo>
+                    <a:pt x="1718940" y="2965431"/>
+                  </a:lnTo>
+                  <a:lnTo>
+                    <a:pt x="1790563" y="2956669"/>
+                  </a:lnTo>
+                  <a:lnTo>
+                    <a:pt x="1862185" y="2947795"/>
+                  </a:lnTo>
+                  <a:lnTo>
+                    <a:pt x="1933808" y="2938808"/>
+                  </a:lnTo>
+                  <a:lnTo>
+                    <a:pt x="2005430" y="2929706"/>
+                  </a:lnTo>
+                  <a:lnTo>
+                    <a:pt x="2077053" y="2920488"/>
+                  </a:lnTo>
+                  <a:lnTo>
+                    <a:pt x="2148675" y="2911153"/>
+                  </a:lnTo>
+                  <a:lnTo>
+                    <a:pt x="2220298" y="2901699"/>
+                  </a:lnTo>
+                  <a:lnTo>
+                    <a:pt x="2291920" y="2892124"/>
+                  </a:lnTo>
+                  <a:lnTo>
+                    <a:pt x="2363543" y="2882427"/>
+                  </a:lnTo>
+                  <a:lnTo>
+                    <a:pt x="2435165" y="2872607"/>
+                  </a:lnTo>
+                  <a:lnTo>
+                    <a:pt x="2506788" y="2862661"/>
+                  </a:lnTo>
+                  <a:lnTo>
+                    <a:pt x="2578410" y="2852589"/>
+                  </a:lnTo>
+                  <a:lnTo>
+                    <a:pt x="2650033" y="2842388"/>
+                  </a:lnTo>
+                  <a:lnTo>
+                    <a:pt x="2721655" y="2832057"/>
+                  </a:lnTo>
+                  <a:lnTo>
+                    <a:pt x="2793278" y="2821594"/>
+                  </a:lnTo>
+                  <a:lnTo>
+                    <a:pt x="2864901" y="2810998"/>
+                  </a:lnTo>
+                  <a:lnTo>
+                    <a:pt x="2936523" y="2800267"/>
+                  </a:lnTo>
+                  <a:lnTo>
+                    <a:pt x="3008146" y="2789399"/>
+                  </a:lnTo>
+                  <a:lnTo>
+                    <a:pt x="3079768" y="2765718"/>
+                  </a:lnTo>
+                  <a:lnTo>
+                    <a:pt x="3151391" y="2722636"/>
+                  </a:lnTo>
+                  <a:lnTo>
+                    <a:pt x="3223013" y="2677462"/>
+                  </a:lnTo>
+                  <a:lnTo>
+                    <a:pt x="3294636" y="2630093"/>
+                  </a:lnTo>
+                  <a:lnTo>
+                    <a:pt x="3366258" y="2580423"/>
+                  </a:lnTo>
+                  <a:lnTo>
+                    <a:pt x="3437881" y="2528340"/>
+                  </a:lnTo>
+                  <a:lnTo>
+                    <a:pt x="3509503" y="2473728"/>
+                  </a:lnTo>
+                  <a:lnTo>
+                    <a:pt x="3581126" y="2416463"/>
+                  </a:lnTo>
+                  <a:lnTo>
+                    <a:pt x="3652748" y="2356416"/>
+                  </a:lnTo>
+                  <a:lnTo>
+                    <a:pt x="3724371" y="2293452"/>
+                  </a:lnTo>
+                  <a:lnTo>
+                    <a:pt x="3795993" y="2227430"/>
+                  </a:lnTo>
+                  <a:lnTo>
+                    <a:pt x="3867616" y="2158201"/>
+                  </a:lnTo>
+                  <a:lnTo>
+                    <a:pt x="3939238" y="2085609"/>
+                  </a:lnTo>
+                  <a:lnTo>
+                    <a:pt x="4010861" y="2009491"/>
+                  </a:lnTo>
+                  <a:lnTo>
+                    <a:pt x="4082483" y="1929676"/>
+                  </a:lnTo>
+                  <a:lnTo>
+                    <a:pt x="4154106" y="1845984"/>
+                  </a:lnTo>
+                  <a:lnTo>
+                    <a:pt x="4225729" y="1758226"/>
+                  </a:lnTo>
+                  <a:lnTo>
+                    <a:pt x="4297351" y="1666206"/>
+                  </a:lnTo>
+                  <a:lnTo>
+                    <a:pt x="4368974" y="1569715"/>
+                  </a:lnTo>
+                  <a:lnTo>
+                    <a:pt x="4440596" y="1468538"/>
+                  </a:lnTo>
+                  <a:lnTo>
+                    <a:pt x="4512219" y="1362446"/>
+                  </a:lnTo>
+                  <a:lnTo>
+                    <a:pt x="4583841" y="1251201"/>
+                  </a:lnTo>
+                  <a:lnTo>
+                    <a:pt x="4655464" y="1134552"/>
+                  </a:lnTo>
+                  <a:lnTo>
+                    <a:pt x="4727086" y="1012237"/>
+                  </a:lnTo>
+                  <a:lnTo>
+                    <a:pt x="4798709" y="883980"/>
+                  </a:lnTo>
+                  <a:lnTo>
+                    <a:pt x="4870331" y="749494"/>
+                  </a:lnTo>
+                  <a:lnTo>
+                    <a:pt x="4941954" y="608475"/>
+                  </a:lnTo>
+                  <a:lnTo>
+                    <a:pt x="5013576" y="460606"/>
+                  </a:lnTo>
+                  <a:lnTo>
+                    <a:pt x="5085199" y="305554"/>
+                  </a:lnTo>
+                  <a:lnTo>
+                    <a:pt x="5156821" y="142971"/>
+                  </a:lnTo>
+                  <a:lnTo>
+                    <a:pt x="5216887" y="0"/>
                   </a:lnTo>
                 </a:path>
               </a:pathLst>
@@ -3934,312 +3934,312 @@
           </p:nvSpPr>
           <p:spPr>
             <a:xfrm>
-              <a:off x="1172049" y="3755048"/>
-              <a:ext cx="7090630" cy="1681751"/>
+              <a:off x="1172049" y="3771871"/>
+              <a:ext cx="7090630" cy="1661958"/>
             </a:xfrm>
             <a:custGeom>
               <a:avLst/>
               <a:pathLst>
-                <a:path w="7090630" h="1681751">
+                <a:path w="7090630" h="1661958">
                   <a:moveTo>
                     <a:pt x="7090630" y="0"/>
                   </a:moveTo>
                   <a:lnTo>
-                    <a:pt x="7019007" y="22883"/>
-                  </a:lnTo>
-                  <a:lnTo>
-                    <a:pt x="6947385" y="45475"/>
-                  </a:lnTo>
-                  <a:lnTo>
-                    <a:pt x="6875762" y="67779"/>
-                  </a:lnTo>
-                  <a:lnTo>
-                    <a:pt x="6804139" y="89799"/>
-                  </a:lnTo>
-                  <a:lnTo>
-                    <a:pt x="6732517" y="111537"/>
-                  </a:lnTo>
-                  <a:lnTo>
-                    <a:pt x="6660894" y="132998"/>
-                  </a:lnTo>
-                  <a:lnTo>
-                    <a:pt x="6589272" y="154186"/>
-                  </a:lnTo>
-                  <a:lnTo>
-                    <a:pt x="6517649" y="175103"/>
-                  </a:lnTo>
-                  <a:lnTo>
-                    <a:pt x="6446027" y="195754"/>
-                  </a:lnTo>
-                  <a:lnTo>
-                    <a:pt x="6374404" y="216141"/>
-                  </a:lnTo>
-                  <a:lnTo>
-                    <a:pt x="6302782" y="236268"/>
-                  </a:lnTo>
-                  <a:lnTo>
-                    <a:pt x="6231159" y="256138"/>
-                  </a:lnTo>
-                  <a:lnTo>
-                    <a:pt x="6159537" y="275755"/>
-                  </a:lnTo>
-                  <a:lnTo>
-                    <a:pt x="6087914" y="295122"/>
-                  </a:lnTo>
-                  <a:lnTo>
-                    <a:pt x="6016292" y="314242"/>
-                  </a:lnTo>
-                  <a:lnTo>
-                    <a:pt x="5944669" y="333117"/>
-                  </a:lnTo>
-                  <a:lnTo>
-                    <a:pt x="5873047" y="351752"/>
-                  </a:lnTo>
-                  <a:lnTo>
-                    <a:pt x="5801424" y="370150"/>
-                  </a:lnTo>
-                  <a:lnTo>
-                    <a:pt x="5729802" y="388313"/>
-                  </a:lnTo>
-                  <a:lnTo>
-                    <a:pt x="5658179" y="406244"/>
-                  </a:lnTo>
-                  <a:lnTo>
-                    <a:pt x="5586557" y="423946"/>
-                  </a:lnTo>
-                  <a:lnTo>
-                    <a:pt x="5514934" y="441423"/>
-                  </a:lnTo>
-                  <a:lnTo>
-                    <a:pt x="5443311" y="458676"/>
-                  </a:lnTo>
-                  <a:lnTo>
-                    <a:pt x="5371689" y="475710"/>
-                  </a:lnTo>
-                  <a:lnTo>
-                    <a:pt x="5300066" y="492526"/>
-                  </a:lnTo>
-                  <a:lnTo>
-                    <a:pt x="5228444" y="509128"/>
-                  </a:lnTo>
-                  <a:lnTo>
-                    <a:pt x="5156821" y="525518"/>
-                  </a:lnTo>
-                  <a:lnTo>
-                    <a:pt x="5085199" y="541699"/>
-                  </a:lnTo>
-                  <a:lnTo>
-                    <a:pt x="5013576" y="557674"/>
-                  </a:lnTo>
-                  <a:lnTo>
-                    <a:pt x="4941954" y="573445"/>
-                  </a:lnTo>
-                  <a:lnTo>
-                    <a:pt x="4870331" y="589015"/>
-                  </a:lnTo>
-                  <a:lnTo>
-                    <a:pt x="4798709" y="604386"/>
-                  </a:lnTo>
-                  <a:lnTo>
-                    <a:pt x="4727086" y="619561"/>
-                  </a:lnTo>
-                  <a:lnTo>
-                    <a:pt x="4655464" y="634543"/>
-                  </a:lnTo>
-                  <a:lnTo>
-                    <a:pt x="4583841" y="649333"/>
-                  </a:lnTo>
-                  <a:lnTo>
-                    <a:pt x="4512219" y="663935"/>
-                  </a:lnTo>
-                  <a:lnTo>
-                    <a:pt x="4440596" y="678351"/>
-                  </a:lnTo>
-                  <a:lnTo>
-                    <a:pt x="4368974" y="692582"/>
-                  </a:lnTo>
-                  <a:lnTo>
-                    <a:pt x="4297351" y="706633"/>
-                  </a:lnTo>
-                  <a:lnTo>
-                    <a:pt x="4225729" y="720504"/>
-                  </a:lnTo>
-                  <a:lnTo>
-                    <a:pt x="4154106" y="734198"/>
-                  </a:lnTo>
-                  <a:lnTo>
-                    <a:pt x="4082483" y="747717"/>
-                  </a:lnTo>
-                  <a:lnTo>
-                    <a:pt x="4010861" y="761064"/>
-                  </a:lnTo>
-                  <a:lnTo>
-                    <a:pt x="3939238" y="774241"/>
-                  </a:lnTo>
-                  <a:lnTo>
-                    <a:pt x="3867616" y="787250"/>
-                  </a:lnTo>
-                  <a:lnTo>
-                    <a:pt x="3795993" y="800092"/>
-                  </a:lnTo>
-                  <a:lnTo>
-                    <a:pt x="3724371" y="812771"/>
-                  </a:lnTo>
-                  <a:lnTo>
-                    <a:pt x="3652748" y="825289"/>
-                  </a:lnTo>
-                  <a:lnTo>
-                    <a:pt x="3581126" y="837646"/>
-                  </a:lnTo>
-                  <a:lnTo>
-                    <a:pt x="3509503" y="849846"/>
-                  </a:lnTo>
-                  <a:lnTo>
-                    <a:pt x="3437881" y="861891"/>
-                  </a:lnTo>
-                  <a:lnTo>
-                    <a:pt x="3366258" y="873781"/>
-                  </a:lnTo>
-                  <a:lnTo>
-                    <a:pt x="3294636" y="885520"/>
-                  </a:lnTo>
-                  <a:lnTo>
-                    <a:pt x="3223013" y="897110"/>
-                  </a:lnTo>
-                  <a:lnTo>
-                    <a:pt x="3151391" y="908551"/>
-                  </a:lnTo>
-                  <a:lnTo>
-                    <a:pt x="3079768" y="919847"/>
-                  </a:lnTo>
-                  <a:lnTo>
-                    <a:pt x="3008146" y="948623"/>
-                  </a:lnTo>
-                  <a:lnTo>
-                    <a:pt x="2936523" y="988286"/>
-                  </a:lnTo>
-                  <a:lnTo>
-                    <a:pt x="2864901" y="1026087"/>
-                  </a:lnTo>
-                  <a:lnTo>
-                    <a:pt x="2793278" y="1062116"/>
-                  </a:lnTo>
-                  <a:lnTo>
-                    <a:pt x="2721655" y="1096455"/>
-                  </a:lnTo>
-                  <a:lnTo>
-                    <a:pt x="2650033" y="1129183"/>
-                  </a:lnTo>
-                  <a:lnTo>
-                    <a:pt x="2578410" y="1160375"/>
-                  </a:lnTo>
-                  <a:lnTo>
-                    <a:pt x="2506788" y="1190105"/>
-                  </a:lnTo>
-                  <a:lnTo>
-                    <a:pt x="2435165" y="1218440"/>
-                  </a:lnTo>
-                  <a:lnTo>
-                    <a:pt x="2363543" y="1245446"/>
-                  </a:lnTo>
-                  <a:lnTo>
-                    <a:pt x="2291920" y="1271185"/>
-                  </a:lnTo>
-                  <a:lnTo>
-                    <a:pt x="2220298" y="1295716"/>
-                  </a:lnTo>
-                  <a:lnTo>
-                    <a:pt x="2148675" y="1319097"/>
-                  </a:lnTo>
-                  <a:lnTo>
-                    <a:pt x="2077053" y="1341381"/>
-                  </a:lnTo>
-                  <a:lnTo>
-                    <a:pt x="2005430" y="1362620"/>
-                  </a:lnTo>
-                  <a:lnTo>
-                    <a:pt x="1933808" y="1382863"/>
-                  </a:lnTo>
-                  <a:lnTo>
-                    <a:pt x="1862185" y="1402156"/>
-                  </a:lnTo>
-                  <a:lnTo>
-                    <a:pt x="1790563" y="1420544"/>
-                  </a:lnTo>
-                  <a:lnTo>
-                    <a:pt x="1718940" y="1438069"/>
-                  </a:lnTo>
-                  <a:lnTo>
-                    <a:pt x="1647318" y="1454773"/>
-                  </a:lnTo>
-                  <a:lnTo>
-                    <a:pt x="1575695" y="1470693"/>
-                  </a:lnTo>
-                  <a:lnTo>
-                    <a:pt x="1504073" y="1485866"/>
-                  </a:lnTo>
-                  <a:lnTo>
-                    <a:pt x="1432450" y="1500327"/>
-                  </a:lnTo>
-                  <a:lnTo>
-                    <a:pt x="1360827" y="1514110"/>
-                  </a:lnTo>
-                  <a:lnTo>
-                    <a:pt x="1289205" y="1527247"/>
-                  </a:lnTo>
-                  <a:lnTo>
-                    <a:pt x="1217582" y="1539767"/>
-                  </a:lnTo>
-                  <a:lnTo>
-                    <a:pt x="1145960" y="1551700"/>
-                  </a:lnTo>
-                  <a:lnTo>
-                    <a:pt x="1074337" y="1563073"/>
-                  </a:lnTo>
-                  <a:lnTo>
-                    <a:pt x="1002715" y="1573913"/>
-                  </a:lnTo>
-                  <a:lnTo>
-                    <a:pt x="931092" y="1584244"/>
-                  </a:lnTo>
-                  <a:lnTo>
-                    <a:pt x="859470" y="1594091"/>
-                  </a:lnTo>
-                  <a:lnTo>
-                    <a:pt x="787847" y="1603476"/>
-                  </a:lnTo>
-                  <a:lnTo>
-                    <a:pt x="716225" y="1612420"/>
-                  </a:lnTo>
-                  <a:lnTo>
-                    <a:pt x="644602" y="1620945"/>
-                  </a:lnTo>
-                  <a:lnTo>
-                    <a:pt x="572980" y="1629070"/>
-                  </a:lnTo>
-                  <a:lnTo>
-                    <a:pt x="501357" y="1636814"/>
-                  </a:lnTo>
-                  <a:lnTo>
-                    <a:pt x="429735" y="1644195"/>
-                  </a:lnTo>
-                  <a:lnTo>
-                    <a:pt x="358112" y="1651230"/>
-                  </a:lnTo>
-                  <a:lnTo>
-                    <a:pt x="286490" y="1657934"/>
-                  </a:lnTo>
-                  <a:lnTo>
-                    <a:pt x="214867" y="1664324"/>
-                  </a:lnTo>
-                  <a:lnTo>
-                    <a:pt x="143245" y="1670414"/>
-                  </a:lnTo>
-                  <a:lnTo>
-                    <a:pt x="71622" y="1676219"/>
-                  </a:lnTo>
-                  <a:lnTo>
-                    <a:pt x="0" y="1681751"/>
+                    <a:pt x="7019007" y="22376"/>
+                  </a:lnTo>
+                  <a:lnTo>
+                    <a:pt x="6947385" y="44470"/>
+                  </a:lnTo>
+                  <a:lnTo>
+                    <a:pt x="6875762" y="66287"/>
+                  </a:lnTo>
+                  <a:lnTo>
+                    <a:pt x="6804139" y="87828"/>
+                  </a:lnTo>
+                  <a:lnTo>
+                    <a:pt x="6732517" y="109099"/>
+                  </a:lnTo>
+                  <a:lnTo>
+                    <a:pt x="6660894" y="130102"/>
+                  </a:lnTo>
+                  <a:lnTo>
+                    <a:pt x="6589272" y="150840"/>
+                  </a:lnTo>
+                  <a:lnTo>
+                    <a:pt x="6517649" y="171317"/>
+                  </a:lnTo>
+                  <a:lnTo>
+                    <a:pt x="6446027" y="191536"/>
+                  </a:lnTo>
+                  <a:lnTo>
+                    <a:pt x="6374404" y="211501"/>
+                  </a:lnTo>
+                  <a:lnTo>
+                    <a:pt x="6302782" y="231215"/>
+                  </a:lnTo>
+                  <a:lnTo>
+                    <a:pt x="6231159" y="250680"/>
+                  </a:lnTo>
+                  <a:lnTo>
+                    <a:pt x="6159537" y="269900"/>
+                  </a:lnTo>
+                  <a:lnTo>
+                    <a:pt x="6087914" y="288879"/>
+                  </a:lnTo>
+                  <a:lnTo>
+                    <a:pt x="6016292" y="307618"/>
+                  </a:lnTo>
+                  <a:lnTo>
+                    <a:pt x="5944669" y="326121"/>
+                  </a:lnTo>
+                  <a:lnTo>
+                    <a:pt x="5873047" y="344392"/>
+                  </a:lnTo>
+                  <a:lnTo>
+                    <a:pt x="5801424" y="362432"/>
+                  </a:lnTo>
+                  <a:lnTo>
+                    <a:pt x="5729802" y="380245"/>
+                  </a:lnTo>
+                  <a:lnTo>
+                    <a:pt x="5658179" y="397834"/>
+                  </a:lnTo>
+                  <a:lnTo>
+                    <a:pt x="5586557" y="415202"/>
+                  </a:lnTo>
+                  <a:lnTo>
+                    <a:pt x="5514934" y="432351"/>
+                  </a:lnTo>
+                  <a:lnTo>
+                    <a:pt x="5443311" y="449284"/>
+                  </a:lnTo>
+                  <a:lnTo>
+                    <a:pt x="5371689" y="466004"/>
+                  </a:lnTo>
+                  <a:lnTo>
+                    <a:pt x="5300066" y="482513"/>
+                  </a:lnTo>
+                  <a:lnTo>
+                    <a:pt x="5228444" y="498815"/>
+                  </a:lnTo>
+                  <a:lnTo>
+                    <a:pt x="5156821" y="514911"/>
+                  </a:lnTo>
+                  <a:lnTo>
+                    <a:pt x="5085199" y="530805"/>
+                  </a:lnTo>
+                  <a:lnTo>
+                    <a:pt x="5013576" y="546498"/>
+                  </a:lnTo>
+                  <a:lnTo>
+                    <a:pt x="4941954" y="561994"/>
+                  </a:lnTo>
+                  <a:lnTo>
+                    <a:pt x="4870331" y="577295"/>
+                  </a:lnTo>
+                  <a:lnTo>
+                    <a:pt x="4798709" y="592403"/>
+                  </a:lnTo>
+                  <a:lnTo>
+                    <a:pt x="4727086" y="607321"/>
+                  </a:lnTo>
+                  <a:lnTo>
+                    <a:pt x="4655464" y="622051"/>
+                  </a:lnTo>
+                  <a:lnTo>
+                    <a:pt x="4583841" y="636596"/>
+                  </a:lnTo>
+                  <a:lnTo>
+                    <a:pt x="4512219" y="650958"/>
+                  </a:lnTo>
+                  <a:lnTo>
+                    <a:pt x="4440596" y="665139"/>
+                  </a:lnTo>
+                  <a:lnTo>
+                    <a:pt x="4368974" y="679141"/>
+                  </a:lnTo>
+                  <a:lnTo>
+                    <a:pt x="4297351" y="692967"/>
+                  </a:lnTo>
+                  <a:lnTo>
+                    <a:pt x="4225729" y="706619"/>
+                  </a:lnTo>
+                  <a:lnTo>
+                    <a:pt x="4154106" y="720099"/>
+                  </a:lnTo>
+                  <a:lnTo>
+                    <a:pt x="4082483" y="733409"/>
+                  </a:lnTo>
+                  <a:lnTo>
+                    <a:pt x="4010861" y="746552"/>
+                  </a:lnTo>
+                  <a:lnTo>
+                    <a:pt x="3939238" y="759529"/>
+                  </a:lnTo>
+                  <a:lnTo>
+                    <a:pt x="3867616" y="772343"/>
+                  </a:lnTo>
+                  <a:lnTo>
+                    <a:pt x="3795993" y="784996"/>
+                  </a:lnTo>
+                  <a:lnTo>
+                    <a:pt x="3724371" y="797489"/>
+                  </a:lnTo>
+                  <a:lnTo>
+                    <a:pt x="3652748" y="809825"/>
+                  </a:lnTo>
+                  <a:lnTo>
+                    <a:pt x="3581126" y="822006"/>
+                  </a:lnTo>
+                  <a:lnTo>
+                    <a:pt x="3509503" y="834033"/>
+                  </a:lnTo>
+                  <a:lnTo>
+                    <a:pt x="3437881" y="845909"/>
+                  </a:lnTo>
+                  <a:lnTo>
+                    <a:pt x="3366258" y="857636"/>
+                  </a:lnTo>
+                  <a:lnTo>
+                    <a:pt x="3294636" y="869215"/>
+                  </a:lnTo>
+                  <a:lnTo>
+                    <a:pt x="3223013" y="880648"/>
+                  </a:lnTo>
+                  <a:lnTo>
+                    <a:pt x="3151391" y="891937"/>
+                  </a:lnTo>
+                  <a:lnTo>
+                    <a:pt x="3079768" y="903084"/>
+                  </a:lnTo>
+                  <a:lnTo>
+                    <a:pt x="3008146" y="931496"/>
+                  </a:lnTo>
+                  <a:lnTo>
+                    <a:pt x="2936523" y="970679"/>
+                  </a:lnTo>
+                  <a:lnTo>
+                    <a:pt x="2864901" y="1008047"/>
+                  </a:lnTo>
+                  <a:lnTo>
+                    <a:pt x="2793278" y="1043684"/>
+                  </a:lnTo>
+                  <a:lnTo>
+                    <a:pt x="2721655" y="1077669"/>
+                  </a:lnTo>
+                  <a:lnTo>
+                    <a:pt x="2650033" y="1110081"/>
+                  </a:lnTo>
+                  <a:lnTo>
+                    <a:pt x="2578410" y="1140991"/>
+                  </a:lnTo>
+                  <a:lnTo>
+                    <a:pt x="2506788" y="1170469"/>
+                  </a:lnTo>
+                  <a:lnTo>
+                    <a:pt x="2435165" y="1198582"/>
+                  </a:lnTo>
+                  <a:lnTo>
+                    <a:pt x="2363543" y="1225392"/>
+                  </a:lnTo>
+                  <a:lnTo>
+                    <a:pt x="2291920" y="1250961"/>
+                  </a:lnTo>
+                  <a:lnTo>
+                    <a:pt x="2220298" y="1275345"/>
+                  </a:lnTo>
+                  <a:lnTo>
+                    <a:pt x="2148675" y="1298599"/>
+                  </a:lnTo>
+                  <a:lnTo>
+                    <a:pt x="2077053" y="1320776"/>
+                  </a:lnTo>
+                  <a:lnTo>
+                    <a:pt x="2005430" y="1341926"/>
+                  </a:lnTo>
+                  <a:lnTo>
+                    <a:pt x="1933808" y="1362096"/>
+                  </a:lnTo>
+                  <a:lnTo>
+                    <a:pt x="1862185" y="1381331"/>
+                  </a:lnTo>
+                  <a:lnTo>
+                    <a:pt x="1790563" y="1399676"/>
+                  </a:lnTo>
+                  <a:lnTo>
+                    <a:pt x="1718940" y="1417171"/>
+                  </a:lnTo>
+                  <a:lnTo>
+                    <a:pt x="1647318" y="1433855"/>
+                  </a:lnTo>
+                  <a:lnTo>
+                    <a:pt x="1575695" y="1449767"/>
+                  </a:lnTo>
+                  <a:lnTo>
+                    <a:pt x="1504073" y="1464941"/>
+                  </a:lnTo>
+                  <a:lnTo>
+                    <a:pt x="1432450" y="1479412"/>
+                  </a:lnTo>
+                  <a:lnTo>
+                    <a:pt x="1360827" y="1493214"/>
+                  </a:lnTo>
+                  <a:lnTo>
+                    <a:pt x="1289205" y="1506375"/>
+                  </a:lnTo>
+                  <a:lnTo>
+                    <a:pt x="1217582" y="1518927"/>
+                  </a:lnTo>
+                  <a:lnTo>
+                    <a:pt x="1145960" y="1530898"/>
+                  </a:lnTo>
+                  <a:lnTo>
+                    <a:pt x="1074337" y="1542314"/>
+                  </a:lnTo>
+                  <a:lnTo>
+                    <a:pt x="1002715" y="1553201"/>
+                  </a:lnTo>
+                  <a:lnTo>
+                    <a:pt x="931092" y="1563584"/>
+                  </a:lnTo>
+                  <a:lnTo>
+                    <a:pt x="859470" y="1573486"/>
+                  </a:lnTo>
+                  <a:lnTo>
+                    <a:pt x="787847" y="1582929"/>
+                  </a:lnTo>
+                  <a:lnTo>
+                    <a:pt x="716225" y="1591935"/>
+                  </a:lnTo>
+                  <a:lnTo>
+                    <a:pt x="644602" y="1600523"/>
+                  </a:lnTo>
+                  <a:lnTo>
+                    <a:pt x="572980" y="1608714"/>
+                  </a:lnTo>
+                  <a:lnTo>
+                    <a:pt x="501357" y="1616525"/>
+                  </a:lnTo>
+                  <a:lnTo>
+                    <a:pt x="429735" y="1623975"/>
+                  </a:lnTo>
+                  <a:lnTo>
+                    <a:pt x="358112" y="1631079"/>
+                  </a:lnTo>
+                  <a:lnTo>
+                    <a:pt x="286490" y="1637854"/>
+                  </a:lnTo>
+                  <a:lnTo>
+                    <a:pt x="214867" y="1644315"/>
+                  </a:lnTo>
+                  <a:lnTo>
+                    <a:pt x="143245" y="1650477"/>
+                  </a:lnTo>
+                  <a:lnTo>
+                    <a:pt x="71622" y="1656354"/>
+                  </a:lnTo>
+                  <a:lnTo>
+                    <a:pt x="0" y="1661958"/>
                   </a:lnTo>
                 </a:path>
               </a:pathLst>
@@ -4260,284 +4260,287 @@
           <p:spPr>
             <a:xfrm>
               <a:off x="1172049" y="1896563"/>
-              <a:ext cx="6426491" cy="3414757"/>
+              <a:ext cx="6470242" cy="3410777"/>
             </a:xfrm>
             <a:custGeom>
               <a:avLst/>
               <a:pathLst>
-                <a:path w="6426491" h="3414757">
+                <a:path w="6470242" h="3410777">
                   <a:moveTo>
-                    <a:pt x="0" y="3414757"/>
+                    <a:pt x="0" y="3410777"/>
                   </a:moveTo>
                   <a:lnTo>
-                    <a:pt x="71622" y="3407404"/>
-                  </a:lnTo>
-                  <a:lnTo>
-                    <a:pt x="143245" y="3399824"/>
-                  </a:lnTo>
-                  <a:lnTo>
-                    <a:pt x="214867" y="3392010"/>
-                  </a:lnTo>
-                  <a:lnTo>
-                    <a:pt x="286490" y="3383954"/>
-                  </a:lnTo>
-                  <a:lnTo>
-                    <a:pt x="358112" y="3375650"/>
-                  </a:lnTo>
-                  <a:lnTo>
-                    <a:pt x="429735" y="3367088"/>
-                  </a:lnTo>
-                  <a:lnTo>
-                    <a:pt x="501357" y="3358262"/>
-                  </a:lnTo>
-                  <a:lnTo>
-                    <a:pt x="572980" y="3349163"/>
-                  </a:lnTo>
-                  <a:lnTo>
-                    <a:pt x="644602" y="3339783"/>
-                  </a:lnTo>
-                  <a:lnTo>
-                    <a:pt x="716225" y="3330113"/>
-                  </a:lnTo>
-                  <a:lnTo>
-                    <a:pt x="787847" y="3320144"/>
-                  </a:lnTo>
-                  <a:lnTo>
-                    <a:pt x="859470" y="3309867"/>
-                  </a:lnTo>
-                  <a:lnTo>
-                    <a:pt x="931092" y="3299273"/>
-                  </a:lnTo>
-                  <a:lnTo>
-                    <a:pt x="1002715" y="3288351"/>
-                  </a:lnTo>
-                  <a:lnTo>
-                    <a:pt x="1074337" y="3277091"/>
-                  </a:lnTo>
-                  <a:lnTo>
-                    <a:pt x="1145960" y="3265483"/>
-                  </a:lnTo>
-                  <a:lnTo>
-                    <a:pt x="1217582" y="3253517"/>
-                  </a:lnTo>
-                  <a:lnTo>
-                    <a:pt x="1289205" y="3241181"/>
-                  </a:lnTo>
-                  <a:lnTo>
-                    <a:pt x="1360827" y="3228463"/>
-                  </a:lnTo>
-                  <a:lnTo>
-                    <a:pt x="1432450" y="3215352"/>
-                  </a:lnTo>
-                  <a:lnTo>
-                    <a:pt x="1504073" y="3201836"/>
-                  </a:lnTo>
-                  <a:lnTo>
-                    <a:pt x="1575695" y="3187903"/>
-                  </a:lnTo>
-                  <a:lnTo>
-                    <a:pt x="1647318" y="3173538"/>
-                  </a:lnTo>
-                  <a:lnTo>
-                    <a:pt x="1718940" y="3158730"/>
-                  </a:lnTo>
-                  <a:lnTo>
-                    <a:pt x="1790563" y="3143464"/>
-                  </a:lnTo>
-                  <a:lnTo>
-                    <a:pt x="1862185" y="3127726"/>
-                  </a:lnTo>
-                  <a:lnTo>
-                    <a:pt x="1933808" y="3111502"/>
-                  </a:lnTo>
-                  <a:lnTo>
-                    <a:pt x="2005430" y="3094776"/>
-                  </a:lnTo>
-                  <a:lnTo>
-                    <a:pt x="2077053" y="3077533"/>
-                  </a:lnTo>
-                  <a:lnTo>
-                    <a:pt x="2148675" y="3059757"/>
-                  </a:lnTo>
-                  <a:lnTo>
-                    <a:pt x="2220298" y="3041432"/>
-                  </a:lnTo>
-                  <a:lnTo>
-                    <a:pt x="2291920" y="3022541"/>
-                  </a:lnTo>
-                  <a:lnTo>
-                    <a:pt x="2363543" y="3003065"/>
-                  </a:lnTo>
-                  <a:lnTo>
-                    <a:pt x="2435165" y="2982988"/>
-                  </a:lnTo>
-                  <a:lnTo>
-                    <a:pt x="2506788" y="2962290"/>
-                  </a:lnTo>
-                  <a:lnTo>
-                    <a:pt x="2578410" y="2940953"/>
-                  </a:lnTo>
-                  <a:lnTo>
-                    <a:pt x="2650033" y="2918955"/>
-                  </a:lnTo>
-                  <a:lnTo>
-                    <a:pt x="2721655" y="2896278"/>
-                  </a:lnTo>
-                  <a:lnTo>
-                    <a:pt x="2793278" y="2872900"/>
-                  </a:lnTo>
-                  <a:lnTo>
-                    <a:pt x="2864901" y="2848800"/>
-                  </a:lnTo>
-                  <a:lnTo>
-                    <a:pt x="2936523" y="2823954"/>
-                  </a:lnTo>
-                  <a:lnTo>
-                    <a:pt x="3008146" y="2798341"/>
-                  </a:lnTo>
-                  <a:lnTo>
-                    <a:pt x="3079768" y="2771936"/>
-                  </a:lnTo>
-                  <a:lnTo>
-                    <a:pt x="3151391" y="2744715"/>
-                  </a:lnTo>
-                  <a:lnTo>
-                    <a:pt x="3223013" y="2716652"/>
-                  </a:lnTo>
-                  <a:lnTo>
-                    <a:pt x="3294636" y="2687722"/>
-                  </a:lnTo>
-                  <a:lnTo>
-                    <a:pt x="3366258" y="2657898"/>
-                  </a:lnTo>
-                  <a:lnTo>
-                    <a:pt x="3437881" y="2627152"/>
-                  </a:lnTo>
-                  <a:lnTo>
-                    <a:pt x="3509503" y="2595456"/>
-                  </a:lnTo>
-                  <a:lnTo>
-                    <a:pt x="3581126" y="2562780"/>
-                  </a:lnTo>
-                  <a:lnTo>
-                    <a:pt x="3652748" y="2529095"/>
-                  </a:lnTo>
-                  <a:lnTo>
-                    <a:pt x="3724371" y="2494368"/>
-                  </a:lnTo>
-                  <a:lnTo>
-                    <a:pt x="3795993" y="2458567"/>
-                  </a:lnTo>
-                  <a:lnTo>
-                    <a:pt x="3867616" y="2421660"/>
-                  </a:lnTo>
-                  <a:lnTo>
-                    <a:pt x="3939238" y="2383613"/>
-                  </a:lnTo>
-                  <a:lnTo>
-                    <a:pt x="4010861" y="2344389"/>
-                  </a:lnTo>
-                  <a:lnTo>
-                    <a:pt x="4082483" y="2303953"/>
-                  </a:lnTo>
-                  <a:lnTo>
-                    <a:pt x="4154106" y="2262267"/>
-                  </a:lnTo>
-                  <a:lnTo>
-                    <a:pt x="4225729" y="2219293"/>
-                  </a:lnTo>
-                  <a:lnTo>
-                    <a:pt x="4297351" y="2174991"/>
-                  </a:lnTo>
-                  <a:lnTo>
-                    <a:pt x="4368974" y="2129319"/>
-                  </a:lnTo>
-                  <a:lnTo>
-                    <a:pt x="4440596" y="2082236"/>
-                  </a:lnTo>
-                  <a:lnTo>
-                    <a:pt x="4512219" y="2033697"/>
-                  </a:lnTo>
-                  <a:lnTo>
-                    <a:pt x="4583841" y="1983658"/>
-                  </a:lnTo>
-                  <a:lnTo>
-                    <a:pt x="4655464" y="1932073"/>
-                  </a:lnTo>
-                  <a:lnTo>
-                    <a:pt x="4727086" y="1878893"/>
-                  </a:lnTo>
-                  <a:lnTo>
-                    <a:pt x="4798709" y="1824069"/>
-                  </a:lnTo>
-                  <a:lnTo>
-                    <a:pt x="4870331" y="1767551"/>
-                  </a:lnTo>
-                  <a:lnTo>
-                    <a:pt x="4941954" y="1709286"/>
-                  </a:lnTo>
-                  <a:lnTo>
-                    <a:pt x="5013576" y="1649220"/>
-                  </a:lnTo>
-                  <a:lnTo>
-                    <a:pt x="5085199" y="1587298"/>
-                  </a:lnTo>
-                  <a:lnTo>
-                    <a:pt x="5156821" y="1523461"/>
-                  </a:lnTo>
-                  <a:lnTo>
-                    <a:pt x="5228444" y="1457652"/>
-                  </a:lnTo>
-                  <a:lnTo>
-                    <a:pt x="5300066" y="1389808"/>
-                  </a:lnTo>
-                  <a:lnTo>
-                    <a:pt x="5371689" y="1319868"/>
-                  </a:lnTo>
-                  <a:lnTo>
-                    <a:pt x="5443311" y="1247766"/>
-                  </a:lnTo>
-                  <a:lnTo>
-                    <a:pt x="5514934" y="1173435"/>
-                  </a:lnTo>
-                  <a:lnTo>
-                    <a:pt x="5586557" y="1096807"/>
-                  </a:lnTo>
-                  <a:lnTo>
-                    <a:pt x="5658179" y="1017811"/>
-                  </a:lnTo>
-                  <a:lnTo>
-                    <a:pt x="5729802" y="936372"/>
-                  </a:lnTo>
-                  <a:lnTo>
-                    <a:pt x="5801424" y="852417"/>
-                  </a:lnTo>
-                  <a:lnTo>
-                    <a:pt x="5873047" y="765867"/>
-                  </a:lnTo>
-                  <a:lnTo>
-                    <a:pt x="5944669" y="676641"/>
-                  </a:lnTo>
-                  <a:lnTo>
-                    <a:pt x="6016292" y="584658"/>
-                  </a:lnTo>
-                  <a:lnTo>
-                    <a:pt x="6087914" y="489832"/>
-                  </a:lnTo>
-                  <a:lnTo>
-                    <a:pt x="6159537" y="392075"/>
-                  </a:lnTo>
-                  <a:lnTo>
-                    <a:pt x="6231159" y="291296"/>
-                  </a:lnTo>
-                  <a:lnTo>
-                    <a:pt x="6302782" y="187402"/>
-                  </a:lnTo>
-                  <a:lnTo>
-                    <a:pt x="6374404" y="80298"/>
-                  </a:lnTo>
-                  <a:lnTo>
-                    <a:pt x="6426491" y="0"/>
+                    <a:pt x="71622" y="3403398"/>
+                  </a:lnTo>
+                  <a:lnTo>
+                    <a:pt x="143245" y="3395795"/>
+                  </a:lnTo>
+                  <a:lnTo>
+                    <a:pt x="214867" y="3387959"/>
+                  </a:lnTo>
+                  <a:lnTo>
+                    <a:pt x="286490" y="3379884"/>
+                  </a:lnTo>
+                  <a:lnTo>
+                    <a:pt x="358112" y="3371563"/>
+                  </a:lnTo>
+                  <a:lnTo>
+                    <a:pt x="429735" y="3362989"/>
+                  </a:lnTo>
+                  <a:lnTo>
+                    <a:pt x="501357" y="3354152"/>
+                  </a:lnTo>
+                  <a:lnTo>
+                    <a:pt x="572980" y="3345046"/>
+                  </a:lnTo>
+                  <a:lnTo>
+                    <a:pt x="644602" y="3335662"/>
+                  </a:lnTo>
+                  <a:lnTo>
+                    <a:pt x="716225" y="3325992"/>
+                  </a:lnTo>
+                  <a:lnTo>
+                    <a:pt x="787847" y="3316027"/>
+                  </a:lnTo>
+                  <a:lnTo>
+                    <a:pt x="859470" y="3305758"/>
+                  </a:lnTo>
+                  <a:lnTo>
+                    <a:pt x="931092" y="3295176"/>
+                  </a:lnTo>
+                  <a:lnTo>
+                    <a:pt x="1002715" y="3284271"/>
+                  </a:lnTo>
+                  <a:lnTo>
+                    <a:pt x="1074337" y="3273033"/>
+                  </a:lnTo>
+                  <a:lnTo>
+                    <a:pt x="1145960" y="3261452"/>
+                  </a:lnTo>
+                  <a:lnTo>
+                    <a:pt x="1217582" y="3249518"/>
+                  </a:lnTo>
+                  <a:lnTo>
+                    <a:pt x="1289205" y="3237220"/>
+                  </a:lnTo>
+                  <a:lnTo>
+                    <a:pt x="1360827" y="3224547"/>
+                  </a:lnTo>
+                  <a:lnTo>
+                    <a:pt x="1432450" y="3211487"/>
+                  </a:lnTo>
+                  <a:lnTo>
+                    <a:pt x="1504073" y="3198029"/>
+                  </a:lnTo>
+                  <a:lnTo>
+                    <a:pt x="1575695" y="3184160"/>
+                  </a:lnTo>
+                  <a:lnTo>
+                    <a:pt x="1647318" y="3169868"/>
+                  </a:lnTo>
+                  <a:lnTo>
+                    <a:pt x="1718940" y="3155140"/>
+                  </a:lnTo>
+                  <a:lnTo>
+                    <a:pt x="1790563" y="3139963"/>
+                  </a:lnTo>
+                  <a:lnTo>
+                    <a:pt x="1862185" y="3124323"/>
+                  </a:lnTo>
+                  <a:lnTo>
+                    <a:pt x="1933808" y="3108206"/>
+                  </a:lnTo>
+                  <a:lnTo>
+                    <a:pt x="2005430" y="3091597"/>
+                  </a:lnTo>
+                  <a:lnTo>
+                    <a:pt x="2077053" y="3074481"/>
+                  </a:lnTo>
+                  <a:lnTo>
+                    <a:pt x="2148675" y="3056843"/>
+                  </a:lnTo>
+                  <a:lnTo>
+                    <a:pt x="2220298" y="3038667"/>
+                  </a:lnTo>
+                  <a:lnTo>
+                    <a:pt x="2291920" y="3019937"/>
+                  </a:lnTo>
+                  <a:lnTo>
+                    <a:pt x="2363543" y="3000635"/>
+                  </a:lnTo>
+                  <a:lnTo>
+                    <a:pt x="2435165" y="2980744"/>
+                  </a:lnTo>
+                  <a:lnTo>
+                    <a:pt x="2506788" y="2960247"/>
+                  </a:lnTo>
+                  <a:lnTo>
+                    <a:pt x="2578410" y="2939124"/>
+                  </a:lnTo>
+                  <a:lnTo>
+                    <a:pt x="2650033" y="2917357"/>
+                  </a:lnTo>
+                  <a:lnTo>
+                    <a:pt x="2721655" y="2894926"/>
+                  </a:lnTo>
+                  <a:lnTo>
+                    <a:pt x="2793278" y="2871810"/>
+                  </a:lnTo>
+                  <a:lnTo>
+                    <a:pt x="2864901" y="2847990"/>
+                  </a:lnTo>
+                  <a:lnTo>
+                    <a:pt x="2936523" y="2823442"/>
+                  </a:lnTo>
+                  <a:lnTo>
+                    <a:pt x="3008146" y="2798146"/>
+                  </a:lnTo>
+                  <a:lnTo>
+                    <a:pt x="3079768" y="2772078"/>
+                  </a:lnTo>
+                  <a:lnTo>
+                    <a:pt x="3151391" y="2745215"/>
+                  </a:lnTo>
+                  <a:lnTo>
+                    <a:pt x="3223013" y="2717532"/>
+                  </a:lnTo>
+                  <a:lnTo>
+                    <a:pt x="3294636" y="2689005"/>
+                  </a:lnTo>
+                  <a:lnTo>
+                    <a:pt x="3366258" y="2659608"/>
+                  </a:lnTo>
+                  <a:lnTo>
+                    <a:pt x="3437881" y="2629313"/>
+                  </a:lnTo>
+                  <a:lnTo>
+                    <a:pt x="3509503" y="2598095"/>
+                  </a:lnTo>
+                  <a:lnTo>
+                    <a:pt x="3581126" y="2565924"/>
+                  </a:lnTo>
+                  <a:lnTo>
+                    <a:pt x="3652748" y="2532772"/>
+                  </a:lnTo>
+                  <a:lnTo>
+                    <a:pt x="3724371" y="2498608"/>
+                  </a:lnTo>
+                  <a:lnTo>
+                    <a:pt x="3795993" y="2463402"/>
+                  </a:lnTo>
+                  <a:lnTo>
+                    <a:pt x="3867616" y="2427122"/>
+                  </a:lnTo>
+                  <a:lnTo>
+                    <a:pt x="3939238" y="2389736"/>
+                  </a:lnTo>
+                  <a:lnTo>
+                    <a:pt x="4010861" y="2351208"/>
+                  </a:lnTo>
+                  <a:lnTo>
+                    <a:pt x="4082483" y="2311506"/>
+                  </a:lnTo>
+                  <a:lnTo>
+                    <a:pt x="4154106" y="2270592"/>
+                  </a:lnTo>
+                  <a:lnTo>
+                    <a:pt x="4225729" y="2228430"/>
+                  </a:lnTo>
+                  <a:lnTo>
+                    <a:pt x="4297351" y="2184982"/>
+                  </a:lnTo>
+                  <a:lnTo>
+                    <a:pt x="4368974" y="2140209"/>
+                  </a:lnTo>
+                  <a:lnTo>
+                    <a:pt x="4440596" y="2094069"/>
+                  </a:lnTo>
+                  <a:lnTo>
+                    <a:pt x="4512219" y="2046522"/>
+                  </a:lnTo>
+                  <a:lnTo>
+                    <a:pt x="4583841" y="1997525"/>
+                  </a:lnTo>
+                  <a:lnTo>
+                    <a:pt x="4655464" y="1947032"/>
+                  </a:lnTo>
+                  <a:lnTo>
+                    <a:pt x="4727086" y="1895000"/>
+                  </a:lnTo>
+                  <a:lnTo>
+                    <a:pt x="4798709" y="1841380"/>
+                  </a:lnTo>
+                  <a:lnTo>
+                    <a:pt x="4870331" y="1786124"/>
+                  </a:lnTo>
+                  <a:lnTo>
+                    <a:pt x="4941954" y="1729182"/>
+                  </a:lnTo>
+                  <a:lnTo>
+                    <a:pt x="5013576" y="1670504"/>
+                  </a:lnTo>
+                  <a:lnTo>
+                    <a:pt x="5085199" y="1610035"/>
+                  </a:lnTo>
+                  <a:lnTo>
+                    <a:pt x="5156821" y="1547722"/>
+                  </a:lnTo>
+                  <a:lnTo>
+                    <a:pt x="5228444" y="1483508"/>
+                  </a:lnTo>
+                  <a:lnTo>
+                    <a:pt x="5300066" y="1417334"/>
+                  </a:lnTo>
+                  <a:lnTo>
+                    <a:pt x="5371689" y="1349142"/>
+                  </a:lnTo>
+                  <a:lnTo>
+                    <a:pt x="5443311" y="1278870"/>
+                  </a:lnTo>
+                  <a:lnTo>
+                    <a:pt x="5514934" y="1206454"/>
+                  </a:lnTo>
+                  <a:lnTo>
+                    <a:pt x="5586557" y="1131829"/>
+                  </a:lnTo>
+                  <a:lnTo>
+                    <a:pt x="5658179" y="1054927"/>
+                  </a:lnTo>
+                  <a:lnTo>
+                    <a:pt x="5729802" y="975679"/>
+                  </a:lnTo>
+                  <a:lnTo>
+                    <a:pt x="5801424" y="894014"/>
+                  </a:lnTo>
+                  <a:lnTo>
+                    <a:pt x="5873047" y="809857"/>
+                  </a:lnTo>
+                  <a:lnTo>
+                    <a:pt x="5944669" y="723133"/>
+                  </a:lnTo>
+                  <a:lnTo>
+                    <a:pt x="6016292" y="633763"/>
+                  </a:lnTo>
+                  <a:lnTo>
+                    <a:pt x="6087914" y="541667"/>
+                  </a:lnTo>
+                  <a:lnTo>
+                    <a:pt x="6159537" y="446761"/>
+                  </a:lnTo>
+                  <a:lnTo>
+                    <a:pt x="6231159" y="348960"/>
+                  </a:lnTo>
+                  <a:lnTo>
+                    <a:pt x="6302782" y="248175"/>
+                  </a:lnTo>
+                  <a:lnTo>
+                    <a:pt x="6374404" y="144316"/>
+                  </a:lnTo>
+                  <a:lnTo>
+                    <a:pt x="6446027" y="37288"/>
+                  </a:lnTo>
+                  <a:lnTo>
+                    <a:pt x="6470242" y="0"/>
                   </a:lnTo>
                 </a:path>
               </a:pathLst>

--- a/docs/plots/carbo/jx_carbo_linsubhr_dosedisc_anyhosp.pptx
+++ b/docs/plots/carbo/jx_carbo_linsubhr_dosedisc_anyhosp.pptx
@@ -3157,7 +3157,7 @@
                     <a:pt x="358112" y="3112454"/>
                   </a:lnTo>
                   <a:lnTo>
-                    <a:pt x="429735" y="3105567"/>
+                    <a:pt x="429735" y="3105566"/>
                   </a:lnTo>
                   <a:lnTo>
                     <a:pt x="501357" y="3098591"/>
@@ -3205,7 +3205,7 @@
                     <a:pt x="1504073" y="2991061"/>
                   </a:lnTo>
                   <a:lnTo>
-                    <a:pt x="1575695" y="2982626"/>
+                    <a:pt x="1575695" y="2982625"/>
                   </a:lnTo>
                   <a:lnTo>
                     <a:pt x="1647318" y="2974083"/>
@@ -3322,13 +3322,13 @@
                     <a:pt x="4297351" y="1666206"/>
                   </a:lnTo>
                   <a:lnTo>
-                    <a:pt x="4368974" y="1569715"/>
+                    <a:pt x="4368974" y="1569716"/>
                   </a:lnTo>
                   <a:lnTo>
                     <a:pt x="4440596" y="1468538"/>
                   </a:lnTo>
                   <a:lnTo>
-                    <a:pt x="4512219" y="1362446"/>
+                    <a:pt x="4512219" y="1362447"/>
                   </a:lnTo>
                   <a:lnTo>
                     <a:pt x="4583841" y="1251201"/>
@@ -3340,22 +3340,22 @@
                     <a:pt x="4727086" y="1012237"/>
                   </a:lnTo>
                   <a:lnTo>
-                    <a:pt x="4798709" y="883980"/>
-                  </a:lnTo>
-                  <a:lnTo>
-                    <a:pt x="4870331" y="749494"/>
-                  </a:lnTo>
-                  <a:lnTo>
-                    <a:pt x="4941954" y="608475"/>
-                  </a:lnTo>
-                  <a:lnTo>
-                    <a:pt x="5013576" y="460606"/>
-                  </a:lnTo>
-                  <a:lnTo>
-                    <a:pt x="5085199" y="305554"/>
-                  </a:lnTo>
-                  <a:lnTo>
-                    <a:pt x="5156821" y="142971"/>
+                    <a:pt x="4798709" y="883981"/>
+                  </a:lnTo>
+                  <a:lnTo>
+                    <a:pt x="4870331" y="749495"/>
+                  </a:lnTo>
+                  <a:lnTo>
+                    <a:pt x="4941954" y="608476"/>
+                  </a:lnTo>
+                  <a:lnTo>
+                    <a:pt x="5013576" y="460607"/>
+                  </a:lnTo>
+                  <a:lnTo>
+                    <a:pt x="5085199" y="305555"/>
+                  </a:lnTo>
+                  <a:lnTo>
+                    <a:pt x="5156821" y="142972"/>
                   </a:lnTo>
                   <a:lnTo>
                     <a:pt x="5216887" y="0"/>
@@ -3364,40 +3364,40 @@
                     <a:pt x="7090630" y="0"/>
                   </a:lnTo>
                   <a:lnTo>
-                    <a:pt x="7090630" y="1875308"/>
-                  </a:lnTo>
-                  <a:lnTo>
-                    <a:pt x="7019007" y="1897684"/>
-                  </a:lnTo>
-                  <a:lnTo>
-                    <a:pt x="6947385" y="1919779"/>
-                  </a:lnTo>
-                  <a:lnTo>
-                    <a:pt x="6875762" y="1941595"/>
-                  </a:lnTo>
-                  <a:lnTo>
-                    <a:pt x="6804139" y="1963137"/>
-                  </a:lnTo>
-                  <a:lnTo>
-                    <a:pt x="6732517" y="1984407"/>
-                  </a:lnTo>
-                  <a:lnTo>
-                    <a:pt x="6660894" y="2005410"/>
-                  </a:lnTo>
-                  <a:lnTo>
-                    <a:pt x="6589272" y="2026148"/>
+                    <a:pt x="7090630" y="1875309"/>
+                  </a:lnTo>
+                  <a:lnTo>
+                    <a:pt x="7019007" y="1897685"/>
+                  </a:lnTo>
+                  <a:lnTo>
+                    <a:pt x="6947385" y="1919780"/>
+                  </a:lnTo>
+                  <a:lnTo>
+                    <a:pt x="6875762" y="1941596"/>
+                  </a:lnTo>
+                  <a:lnTo>
+                    <a:pt x="6804139" y="1963138"/>
+                  </a:lnTo>
+                  <a:lnTo>
+                    <a:pt x="6732517" y="1984408"/>
+                  </a:lnTo>
+                  <a:lnTo>
+                    <a:pt x="6660894" y="2005411"/>
+                  </a:lnTo>
+                  <a:lnTo>
+                    <a:pt x="6589272" y="2026149"/>
                   </a:lnTo>
                   <a:lnTo>
                     <a:pt x="6517649" y="2046626"/>
                   </a:lnTo>
                   <a:lnTo>
-                    <a:pt x="6446027" y="2066845"/>
+                    <a:pt x="6446027" y="2066846"/>
                   </a:lnTo>
                   <a:lnTo>
                     <a:pt x="6374404" y="2086810"/>
                   </a:lnTo>
                   <a:lnTo>
-                    <a:pt x="6302782" y="2106523"/>
+                    <a:pt x="6302782" y="2106524"/>
                   </a:lnTo>
                   <a:lnTo>
                     <a:pt x="6231159" y="2125989"/>
@@ -3406,16 +3406,16 @@
                     <a:pt x="6159537" y="2145209"/>
                   </a:lnTo>
                   <a:lnTo>
-                    <a:pt x="6087914" y="2164187"/>
-                  </a:lnTo>
-                  <a:lnTo>
-                    <a:pt x="6016292" y="2182926"/>
+                    <a:pt x="6087914" y="2164188"/>
+                  </a:lnTo>
+                  <a:lnTo>
+                    <a:pt x="6016292" y="2182927"/>
                   </a:lnTo>
                   <a:lnTo>
                     <a:pt x="5944669" y="2201430"/>
                   </a:lnTo>
                   <a:lnTo>
-                    <a:pt x="5873047" y="2219700"/>
+                    <a:pt x="5873047" y="2219701"/>
                   </a:lnTo>
                   <a:lnTo>
                     <a:pt x="5801424" y="2237741"/>
@@ -3436,13 +3436,13 @@
                     <a:pt x="5443311" y="2324593"/>
                   </a:lnTo>
                   <a:lnTo>
-                    <a:pt x="5371689" y="2341312"/>
+                    <a:pt x="5371689" y="2341313"/>
                   </a:lnTo>
                   <a:lnTo>
                     <a:pt x="5300066" y="2357822"/>
                   </a:lnTo>
                   <a:lnTo>
-                    <a:pt x="5228444" y="2374123"/>
+                    <a:pt x="5228444" y="2374124"/>
                   </a:lnTo>
                   <a:lnTo>
                     <a:pt x="5156821" y="2390220"/>
@@ -3472,22 +3472,22 @@
                     <a:pt x="4583841" y="2511905"/>
                   </a:lnTo>
                   <a:lnTo>
-                    <a:pt x="4512219" y="2526266"/>
+                    <a:pt x="4512219" y="2526267"/>
                   </a:lnTo>
                   <a:lnTo>
                     <a:pt x="4440596" y="2540447"/>
                   </a:lnTo>
                   <a:lnTo>
-                    <a:pt x="4368974" y="2554449"/>
-                  </a:lnTo>
-                  <a:lnTo>
-                    <a:pt x="4297351" y="2568275"/>
-                  </a:lnTo>
-                  <a:lnTo>
-                    <a:pt x="4225729" y="2581927"/>
-                  </a:lnTo>
-                  <a:lnTo>
-                    <a:pt x="4154106" y="2595407"/>
+                    <a:pt x="4368974" y="2554450"/>
+                  </a:lnTo>
+                  <a:lnTo>
+                    <a:pt x="4297351" y="2568276"/>
+                  </a:lnTo>
+                  <a:lnTo>
+                    <a:pt x="4225729" y="2581928"/>
+                  </a:lnTo>
+                  <a:lnTo>
+                    <a:pt x="4154106" y="2595408"/>
                   </a:lnTo>
                   <a:lnTo>
                     <a:pt x="4082483" y="2608718"/>
@@ -3502,7 +3502,7 @@
                     <a:pt x="3867616" y="2647652"/>
                   </a:lnTo>
                   <a:lnTo>
-                    <a:pt x="3795993" y="2660304"/>
+                    <a:pt x="3795993" y="2660305"/>
                   </a:lnTo>
                   <a:lnTo>
                     <a:pt x="3724371" y="2672798"/>
@@ -3538,7 +3538,7 @@
                     <a:pt x="3008146" y="2806805"/>
                   </a:lnTo>
                   <a:lnTo>
-                    <a:pt x="2936523" y="2845988"/>
+                    <a:pt x="2936523" y="2845987"/>
                   </a:lnTo>
                   <a:lnTo>
                     <a:pt x="2864901" y="2883355"/>
@@ -3713,7 +3713,7 @@
                     <a:pt x="358112" y="3112454"/>
                   </a:lnTo>
                   <a:lnTo>
-                    <a:pt x="429735" y="3105567"/>
+                    <a:pt x="429735" y="3105566"/>
                   </a:lnTo>
                   <a:lnTo>
                     <a:pt x="501357" y="3098591"/>
@@ -3761,7 +3761,7 @@
                     <a:pt x="1504073" y="2991061"/>
                   </a:lnTo>
                   <a:lnTo>
-                    <a:pt x="1575695" y="2982626"/>
+                    <a:pt x="1575695" y="2982625"/>
                   </a:lnTo>
                   <a:lnTo>
                     <a:pt x="1647318" y="2974083"/>
@@ -3878,13 +3878,13 @@
                     <a:pt x="4297351" y="1666206"/>
                   </a:lnTo>
                   <a:lnTo>
-                    <a:pt x="4368974" y="1569715"/>
+                    <a:pt x="4368974" y="1569716"/>
                   </a:lnTo>
                   <a:lnTo>
                     <a:pt x="4440596" y="1468538"/>
                   </a:lnTo>
                   <a:lnTo>
-                    <a:pt x="4512219" y="1362446"/>
+                    <a:pt x="4512219" y="1362447"/>
                   </a:lnTo>
                   <a:lnTo>
                     <a:pt x="4583841" y="1251201"/>
@@ -3896,22 +3896,22 @@
                     <a:pt x="4727086" y="1012237"/>
                   </a:lnTo>
                   <a:lnTo>
-                    <a:pt x="4798709" y="883980"/>
-                  </a:lnTo>
-                  <a:lnTo>
-                    <a:pt x="4870331" y="749494"/>
-                  </a:lnTo>
-                  <a:lnTo>
-                    <a:pt x="4941954" y="608475"/>
-                  </a:lnTo>
-                  <a:lnTo>
-                    <a:pt x="5013576" y="460606"/>
-                  </a:lnTo>
-                  <a:lnTo>
-                    <a:pt x="5085199" y="305554"/>
-                  </a:lnTo>
-                  <a:lnTo>
-                    <a:pt x="5156821" y="142971"/>
+                    <a:pt x="4798709" y="883981"/>
+                  </a:lnTo>
+                  <a:lnTo>
+                    <a:pt x="4870331" y="749495"/>
+                  </a:lnTo>
+                  <a:lnTo>
+                    <a:pt x="4941954" y="608476"/>
+                  </a:lnTo>
+                  <a:lnTo>
+                    <a:pt x="5013576" y="460607"/>
+                  </a:lnTo>
+                  <a:lnTo>
+                    <a:pt x="5085199" y="305555"/>
+                  </a:lnTo>
+                  <a:lnTo>
+                    <a:pt x="5156821" y="142972"/>
                   </a:lnTo>
                   <a:lnTo>
                     <a:pt x="5216887" y="0"/>
@@ -3934,7 +3934,7 @@
           </p:nvSpPr>
           <p:spPr>
             <a:xfrm>
-              <a:off x="1172049" y="3771871"/>
+              <a:off x="1172049" y="3771872"/>
               <a:ext cx="7090630" cy="1661958"/>
             </a:xfrm>
             <a:custGeom>
@@ -3960,7 +3960,7 @@
                     <a:pt x="6732517" y="109099"/>
                   </a:lnTo>
                   <a:lnTo>
-                    <a:pt x="6660894" y="130102"/>
+                    <a:pt x="6660894" y="130101"/>
                   </a:lnTo>
                   <a:lnTo>
                     <a:pt x="6589272" y="150840"/>
@@ -3984,7 +3984,7 @@
                     <a:pt x="6159537" y="269900"/>
                   </a:lnTo>
                   <a:lnTo>
-                    <a:pt x="6087914" y="288879"/>
+                    <a:pt x="6087914" y="288878"/>
                   </a:lnTo>
                   <a:lnTo>
                     <a:pt x="6016292" y="307618"/>
@@ -3993,7 +3993,7 @@
                     <a:pt x="5944669" y="326121"/>
                   </a:lnTo>
                   <a:lnTo>
-                    <a:pt x="5873047" y="344392"/>
+                    <a:pt x="5873047" y="344391"/>
                   </a:lnTo>
                   <a:lnTo>
                     <a:pt x="5801424" y="362432"/>
@@ -4014,19 +4014,19 @@
                     <a:pt x="5443311" y="449284"/>
                   </a:lnTo>
                   <a:lnTo>
-                    <a:pt x="5371689" y="466004"/>
+                    <a:pt x="5371689" y="466003"/>
                   </a:lnTo>
                   <a:lnTo>
                     <a:pt x="5300066" y="482513"/>
                   </a:lnTo>
                   <a:lnTo>
-                    <a:pt x="5228444" y="498815"/>
+                    <a:pt x="5228444" y="498814"/>
                   </a:lnTo>
                   <a:lnTo>
                     <a:pt x="5156821" y="514911"/>
                   </a:lnTo>
                   <a:lnTo>
-                    <a:pt x="5085199" y="530805"/>
+                    <a:pt x="5085199" y="530804"/>
                   </a:lnTo>
                   <a:lnTo>
                     <a:pt x="5013576" y="546498"/>
@@ -4035,7 +4035,7 @@
                     <a:pt x="4941954" y="561994"/>
                   </a:lnTo>
                   <a:lnTo>
-                    <a:pt x="4870331" y="577295"/>
+                    <a:pt x="4870331" y="577294"/>
                   </a:lnTo>
                   <a:lnTo>
                     <a:pt x="4798709" y="592403"/>
@@ -4050,28 +4050,28 @@
                     <a:pt x="4583841" y="636596"/>
                   </a:lnTo>
                   <a:lnTo>
-                    <a:pt x="4512219" y="650958"/>
-                  </a:lnTo>
-                  <a:lnTo>
-                    <a:pt x="4440596" y="665139"/>
-                  </a:lnTo>
-                  <a:lnTo>
-                    <a:pt x="4368974" y="679141"/>
-                  </a:lnTo>
-                  <a:lnTo>
-                    <a:pt x="4297351" y="692967"/>
-                  </a:lnTo>
-                  <a:lnTo>
-                    <a:pt x="4225729" y="706619"/>
-                  </a:lnTo>
-                  <a:lnTo>
-                    <a:pt x="4154106" y="720099"/>
+                    <a:pt x="4512219" y="650957"/>
+                  </a:lnTo>
+                  <a:lnTo>
+                    <a:pt x="4440596" y="665138"/>
+                  </a:lnTo>
+                  <a:lnTo>
+                    <a:pt x="4368974" y="679140"/>
+                  </a:lnTo>
+                  <a:lnTo>
+                    <a:pt x="4297351" y="692966"/>
+                  </a:lnTo>
+                  <a:lnTo>
+                    <a:pt x="4225729" y="706618"/>
+                  </a:lnTo>
+                  <a:lnTo>
+                    <a:pt x="4154106" y="720098"/>
                   </a:lnTo>
                   <a:lnTo>
                     <a:pt x="4082483" y="733409"/>
                   </a:lnTo>
                   <a:lnTo>
-                    <a:pt x="4010861" y="746552"/>
+                    <a:pt x="4010861" y="746551"/>
                   </a:lnTo>
                   <a:lnTo>
                     <a:pt x="3939238" y="759529"/>
@@ -4080,7 +4080,7 @@
                     <a:pt x="3867616" y="772343"/>
                   </a:lnTo>
                   <a:lnTo>
-                    <a:pt x="3795993" y="784996"/>
+                    <a:pt x="3795993" y="784995"/>
                   </a:lnTo>
                   <a:lnTo>
                     <a:pt x="3724371" y="797489"/>
@@ -4089,7 +4089,7 @@
                     <a:pt x="3652748" y="809825"/>
                   </a:lnTo>
                   <a:lnTo>
-                    <a:pt x="3581126" y="822006"/>
+                    <a:pt x="3581126" y="822005"/>
                   </a:lnTo>
                   <a:lnTo>
                     <a:pt x="3509503" y="834033"/>
@@ -4098,136 +4098,136 @@
                     <a:pt x="3437881" y="845909"/>
                   </a:lnTo>
                   <a:lnTo>
-                    <a:pt x="3366258" y="857636"/>
-                  </a:lnTo>
-                  <a:lnTo>
-                    <a:pt x="3294636" y="869215"/>
-                  </a:lnTo>
-                  <a:lnTo>
-                    <a:pt x="3223013" y="880648"/>
-                  </a:lnTo>
-                  <a:lnTo>
-                    <a:pt x="3151391" y="891937"/>
-                  </a:lnTo>
-                  <a:lnTo>
-                    <a:pt x="3079768" y="903084"/>
-                  </a:lnTo>
-                  <a:lnTo>
-                    <a:pt x="3008146" y="931496"/>
-                  </a:lnTo>
-                  <a:lnTo>
-                    <a:pt x="2936523" y="970679"/>
-                  </a:lnTo>
-                  <a:lnTo>
-                    <a:pt x="2864901" y="1008047"/>
-                  </a:lnTo>
-                  <a:lnTo>
-                    <a:pt x="2793278" y="1043684"/>
+                    <a:pt x="3366258" y="857635"/>
+                  </a:lnTo>
+                  <a:lnTo>
+                    <a:pt x="3294636" y="869214"/>
+                  </a:lnTo>
+                  <a:lnTo>
+                    <a:pt x="3223013" y="880647"/>
+                  </a:lnTo>
+                  <a:lnTo>
+                    <a:pt x="3151391" y="891936"/>
+                  </a:lnTo>
+                  <a:lnTo>
+                    <a:pt x="3079768" y="903083"/>
+                  </a:lnTo>
+                  <a:lnTo>
+                    <a:pt x="3008146" y="931495"/>
+                  </a:lnTo>
+                  <a:lnTo>
+                    <a:pt x="2936523" y="970678"/>
+                  </a:lnTo>
+                  <a:lnTo>
+                    <a:pt x="2864901" y="1008046"/>
+                  </a:lnTo>
+                  <a:lnTo>
+                    <a:pt x="2793278" y="1043683"/>
                   </a:lnTo>
                   <a:lnTo>
                     <a:pt x="2721655" y="1077669"/>
                   </a:lnTo>
                   <a:lnTo>
-                    <a:pt x="2650033" y="1110081"/>
-                  </a:lnTo>
-                  <a:lnTo>
-                    <a:pt x="2578410" y="1140991"/>
-                  </a:lnTo>
-                  <a:lnTo>
-                    <a:pt x="2506788" y="1170469"/>
-                  </a:lnTo>
-                  <a:lnTo>
-                    <a:pt x="2435165" y="1198582"/>
-                  </a:lnTo>
-                  <a:lnTo>
-                    <a:pt x="2363543" y="1225392"/>
-                  </a:lnTo>
-                  <a:lnTo>
-                    <a:pt x="2291920" y="1250961"/>
-                  </a:lnTo>
-                  <a:lnTo>
-                    <a:pt x="2220298" y="1275345"/>
-                  </a:lnTo>
-                  <a:lnTo>
-                    <a:pt x="2148675" y="1298599"/>
-                  </a:lnTo>
-                  <a:lnTo>
-                    <a:pt x="2077053" y="1320776"/>
-                  </a:lnTo>
-                  <a:lnTo>
-                    <a:pt x="2005430" y="1341926"/>
-                  </a:lnTo>
-                  <a:lnTo>
-                    <a:pt x="1933808" y="1362096"/>
+                    <a:pt x="2650033" y="1110080"/>
+                  </a:lnTo>
+                  <a:lnTo>
+                    <a:pt x="2578410" y="1140990"/>
+                  </a:lnTo>
+                  <a:lnTo>
+                    <a:pt x="2506788" y="1170468"/>
+                  </a:lnTo>
+                  <a:lnTo>
+                    <a:pt x="2435165" y="1198581"/>
+                  </a:lnTo>
+                  <a:lnTo>
+                    <a:pt x="2363543" y="1225391"/>
+                  </a:lnTo>
+                  <a:lnTo>
+                    <a:pt x="2291920" y="1250960"/>
+                  </a:lnTo>
+                  <a:lnTo>
+                    <a:pt x="2220298" y="1275344"/>
+                  </a:lnTo>
+                  <a:lnTo>
+                    <a:pt x="2148675" y="1298598"/>
+                  </a:lnTo>
+                  <a:lnTo>
+                    <a:pt x="2077053" y="1320775"/>
+                  </a:lnTo>
+                  <a:lnTo>
+                    <a:pt x="2005430" y="1341925"/>
+                  </a:lnTo>
+                  <a:lnTo>
+                    <a:pt x="1933808" y="1362095"/>
                   </a:lnTo>
                   <a:lnTo>
                     <a:pt x="1862185" y="1381331"/>
                   </a:lnTo>
                   <a:lnTo>
-                    <a:pt x="1790563" y="1399676"/>
-                  </a:lnTo>
-                  <a:lnTo>
-                    <a:pt x="1718940" y="1417171"/>
-                  </a:lnTo>
-                  <a:lnTo>
-                    <a:pt x="1647318" y="1433855"/>
-                  </a:lnTo>
-                  <a:lnTo>
-                    <a:pt x="1575695" y="1449767"/>
-                  </a:lnTo>
-                  <a:lnTo>
-                    <a:pt x="1504073" y="1464941"/>
+                    <a:pt x="1790563" y="1399675"/>
+                  </a:lnTo>
+                  <a:lnTo>
+                    <a:pt x="1718940" y="1417170"/>
+                  </a:lnTo>
+                  <a:lnTo>
+                    <a:pt x="1647318" y="1433854"/>
+                  </a:lnTo>
+                  <a:lnTo>
+                    <a:pt x="1575695" y="1449766"/>
+                  </a:lnTo>
+                  <a:lnTo>
+                    <a:pt x="1504073" y="1464940"/>
                   </a:lnTo>
                   <a:lnTo>
                     <a:pt x="1432450" y="1479412"/>
                   </a:lnTo>
                   <a:lnTo>
-                    <a:pt x="1360827" y="1493214"/>
-                  </a:lnTo>
-                  <a:lnTo>
-                    <a:pt x="1289205" y="1506375"/>
-                  </a:lnTo>
-                  <a:lnTo>
-                    <a:pt x="1217582" y="1518927"/>
-                  </a:lnTo>
-                  <a:lnTo>
-                    <a:pt x="1145960" y="1530898"/>
-                  </a:lnTo>
-                  <a:lnTo>
-                    <a:pt x="1074337" y="1542314"/>
-                  </a:lnTo>
-                  <a:lnTo>
-                    <a:pt x="1002715" y="1553201"/>
-                  </a:lnTo>
-                  <a:lnTo>
-                    <a:pt x="931092" y="1563584"/>
-                  </a:lnTo>
-                  <a:lnTo>
-                    <a:pt x="859470" y="1573486"/>
-                  </a:lnTo>
-                  <a:lnTo>
-                    <a:pt x="787847" y="1582929"/>
-                  </a:lnTo>
-                  <a:lnTo>
-                    <a:pt x="716225" y="1591935"/>
-                  </a:lnTo>
-                  <a:lnTo>
-                    <a:pt x="644602" y="1600523"/>
-                  </a:lnTo>
-                  <a:lnTo>
-                    <a:pt x="572980" y="1608714"/>
-                  </a:lnTo>
-                  <a:lnTo>
-                    <a:pt x="501357" y="1616525"/>
-                  </a:lnTo>
-                  <a:lnTo>
-                    <a:pt x="429735" y="1623975"/>
-                  </a:lnTo>
-                  <a:lnTo>
-                    <a:pt x="358112" y="1631079"/>
-                  </a:lnTo>
-                  <a:lnTo>
-                    <a:pt x="286490" y="1637854"/>
+                    <a:pt x="1360827" y="1493213"/>
+                  </a:lnTo>
+                  <a:lnTo>
+                    <a:pt x="1289205" y="1506374"/>
+                  </a:lnTo>
+                  <a:lnTo>
+                    <a:pt x="1217582" y="1518926"/>
+                  </a:lnTo>
+                  <a:lnTo>
+                    <a:pt x="1145960" y="1530897"/>
+                  </a:lnTo>
+                  <a:lnTo>
+                    <a:pt x="1074337" y="1542313"/>
+                  </a:lnTo>
+                  <a:lnTo>
+                    <a:pt x="1002715" y="1553200"/>
+                  </a:lnTo>
+                  <a:lnTo>
+                    <a:pt x="931092" y="1563583"/>
+                  </a:lnTo>
+                  <a:lnTo>
+                    <a:pt x="859470" y="1573485"/>
+                  </a:lnTo>
+                  <a:lnTo>
+                    <a:pt x="787847" y="1582928"/>
+                  </a:lnTo>
+                  <a:lnTo>
+                    <a:pt x="716225" y="1591934"/>
+                  </a:lnTo>
+                  <a:lnTo>
+                    <a:pt x="644602" y="1600522"/>
+                  </a:lnTo>
+                  <a:lnTo>
+                    <a:pt x="572980" y="1608713"/>
+                  </a:lnTo>
+                  <a:lnTo>
+                    <a:pt x="501357" y="1616524"/>
+                  </a:lnTo>
+                  <a:lnTo>
+                    <a:pt x="429735" y="1623974"/>
+                  </a:lnTo>
+                  <a:lnTo>
+                    <a:pt x="358112" y="1631078"/>
+                  </a:lnTo>
+                  <a:lnTo>
+                    <a:pt x="286490" y="1637853"/>
                   </a:lnTo>
                   <a:lnTo>
                     <a:pt x="214867" y="1644315"/>
@@ -4236,7 +4236,7 @@
                     <a:pt x="143245" y="1650477"/>
                   </a:lnTo>
                   <a:lnTo>
-                    <a:pt x="71622" y="1656354"/>
+                    <a:pt x="71622" y="1656353"/>
                   </a:lnTo>
                   <a:lnTo>
                     <a:pt x="0" y="1661958"/>
@@ -4435,7 +4435,7 @@
                     <a:pt x="3939238" y="2389736"/>
                   </a:lnTo>
                   <a:lnTo>
-                    <a:pt x="4010861" y="2351208"/>
+                    <a:pt x="4010861" y="2351209"/>
                   </a:lnTo>
                   <a:lnTo>
                     <a:pt x="4082483" y="2311506"/>
@@ -4462,7 +4462,7 @@
                     <a:pt x="4583841" y="1997525"/>
                   </a:lnTo>
                   <a:lnTo>
-                    <a:pt x="4655464" y="1947032"/>
+                    <a:pt x="4655464" y="1947033"/>
                   </a:lnTo>
                   <a:lnTo>
                     <a:pt x="4727086" y="1895000"/>
@@ -4474,13 +4474,13 @@
                     <a:pt x="4870331" y="1786124"/>
                   </a:lnTo>
                   <a:lnTo>
-                    <a:pt x="4941954" y="1729182"/>
+                    <a:pt x="4941954" y="1729183"/>
                   </a:lnTo>
                   <a:lnTo>
                     <a:pt x="5013576" y="1670504"/>
                   </a:lnTo>
                   <a:lnTo>
-                    <a:pt x="5085199" y="1610035"/>
+                    <a:pt x="5085199" y="1610036"/>
                   </a:lnTo>
                   <a:lnTo>
                     <a:pt x="5156821" y="1547722"/>
@@ -4489,55 +4489,55 @@
                     <a:pt x="5228444" y="1483508"/>
                   </a:lnTo>
                   <a:lnTo>
-                    <a:pt x="5300066" y="1417334"/>
-                  </a:lnTo>
-                  <a:lnTo>
-                    <a:pt x="5371689" y="1349142"/>
-                  </a:lnTo>
-                  <a:lnTo>
-                    <a:pt x="5443311" y="1278870"/>
-                  </a:lnTo>
-                  <a:lnTo>
-                    <a:pt x="5514934" y="1206454"/>
+                    <a:pt x="5300066" y="1417335"/>
+                  </a:lnTo>
+                  <a:lnTo>
+                    <a:pt x="5371689" y="1349143"/>
+                  </a:lnTo>
+                  <a:lnTo>
+                    <a:pt x="5443311" y="1278871"/>
+                  </a:lnTo>
+                  <a:lnTo>
+                    <a:pt x="5514934" y="1206455"/>
                   </a:lnTo>
                   <a:lnTo>
                     <a:pt x="5586557" y="1131829"/>
                   </a:lnTo>
                   <a:lnTo>
-                    <a:pt x="5658179" y="1054927"/>
-                  </a:lnTo>
-                  <a:lnTo>
-                    <a:pt x="5729802" y="975679"/>
+                    <a:pt x="5658179" y="1054928"/>
+                  </a:lnTo>
+                  <a:lnTo>
+                    <a:pt x="5729802" y="975680"/>
                   </a:lnTo>
                   <a:lnTo>
                     <a:pt x="5801424" y="894014"/>
                   </a:lnTo>
                   <a:lnTo>
-                    <a:pt x="5873047" y="809857"/>
+                    <a:pt x="5873047" y="809858"/>
                   </a:lnTo>
                   <a:lnTo>
                     <a:pt x="5944669" y="723133"/>
                   </a:lnTo>
                   <a:lnTo>
-                    <a:pt x="6016292" y="633763"/>
-                  </a:lnTo>
-                  <a:lnTo>
-                    <a:pt x="6087914" y="541667"/>
-                  </a:lnTo>
-                  <a:lnTo>
-                    <a:pt x="6159537" y="446761"/>
-                  </a:lnTo>
-                  <a:lnTo>
-                    <a:pt x="6231159" y="348960"/>
-                  </a:lnTo>
-                  <a:lnTo>
-                    <a:pt x="6302782" y="248175"/>
-                  </a:lnTo>
-                  <a:lnTo>
-                    <a:pt x="6374404" y="144316"/>
-                  </a:lnTo>
-                  <a:lnTo>
-                    <a:pt x="6446027" y="37288"/>
+                    <a:pt x="6016292" y="633764"/>
+                  </a:lnTo>
+                  <a:lnTo>
+                    <a:pt x="6087914" y="541668"/>
+                  </a:lnTo>
+                  <a:lnTo>
+                    <a:pt x="6159537" y="446762"/>
+                  </a:lnTo>
+                  <a:lnTo>
+                    <a:pt x="6231159" y="348961"/>
+                  </a:lnTo>
+                  <a:lnTo>
+                    <a:pt x="6302782" y="248176"/>
+                  </a:lnTo>
+                  <a:lnTo>
+                    <a:pt x="6374404" y="144317"/>
+                  </a:lnTo>
+                  <a:lnTo>
+                    <a:pt x="6446027" y="37289"/>
                   </a:lnTo>
                   <a:lnTo>
                     <a:pt x="6470242" y="0"/>

--- a/docs/plots/carbo/jx_carbo_linsubhr_dosedisc_anyhosp.pptx
+++ b/docs/plots/carbo/jx_carbo_linsubhr_dosedisc_anyhosp.pptx
@@ -2271,7 +2271,7 @@
           </p:nvSpPr>
           <p:spPr>
             <a:xfrm>
-              <a:off x="817517" y="5114368"/>
+              <a:off x="817517" y="5142518"/>
               <a:ext cx="7799693" cy="0"/>
             </a:xfrm>
             <a:custGeom>
@@ -2314,7 +2314,7 @@
           </p:nvSpPr>
           <p:spPr>
             <a:xfrm>
-              <a:off x="817517" y="4244691"/>
+              <a:off x="817517" y="4313054"/>
               <a:ext cx="7799693" cy="0"/>
             </a:xfrm>
             <a:custGeom>
@@ -2357,7 +2357,7 @@
           </p:nvSpPr>
           <p:spPr>
             <a:xfrm>
-              <a:off x="817517" y="3375014"/>
+              <a:off x="817517" y="3483591"/>
               <a:ext cx="7799693" cy="0"/>
             </a:xfrm>
             <a:custGeom>
@@ -2400,7 +2400,7 @@
           </p:nvSpPr>
           <p:spPr>
             <a:xfrm>
-              <a:off x="817517" y="2505337"/>
+              <a:off x="817517" y="2654127"/>
               <a:ext cx="7799693" cy="0"/>
             </a:xfrm>
             <a:custGeom>
@@ -2443,15 +2443,15 @@
           </p:nvSpPr>
           <p:spPr>
             <a:xfrm>
-              <a:off x="2122745" y="1896563"/>
-              <a:ext cx="0" cy="3826579"/>
+              <a:off x="2122745" y="2073503"/>
+              <a:ext cx="0" cy="3649639"/>
             </a:xfrm>
             <a:custGeom>
               <a:avLst/>
               <a:pathLst>
-                <a:path w="0" h="3826579">
+                <a:path w="0" h="3649639">
                   <a:moveTo>
-                    <a:pt x="0" y="3826579"/>
+                    <a:pt x="0" y="3649639"/>
                   </a:moveTo>
                   <a:lnTo>
                     <a:pt x="0" y="0"/>
@@ -2486,15 +2486,15 @@
           </p:nvSpPr>
           <p:spPr>
             <a:xfrm>
-              <a:off x="3487174" y="1896563"/>
-              <a:ext cx="0" cy="3826579"/>
+              <a:off x="3487174" y="2073503"/>
+              <a:ext cx="0" cy="3649639"/>
             </a:xfrm>
             <a:custGeom>
               <a:avLst/>
               <a:pathLst>
-                <a:path w="0" h="3826579">
+                <a:path w="0" h="3649639">
                   <a:moveTo>
-                    <a:pt x="0" y="3826579"/>
+                    <a:pt x="0" y="3649639"/>
                   </a:moveTo>
                   <a:lnTo>
                     <a:pt x="0" y="0"/>
@@ -2529,15 +2529,15 @@
           </p:nvSpPr>
           <p:spPr>
             <a:xfrm>
-              <a:off x="4851604" y="1896563"/>
-              <a:ext cx="0" cy="3826579"/>
+              <a:off x="4851604" y="2073503"/>
+              <a:ext cx="0" cy="3649639"/>
             </a:xfrm>
             <a:custGeom>
               <a:avLst/>
               <a:pathLst>
-                <a:path w="0" h="3826579">
+                <a:path w="0" h="3649639">
                   <a:moveTo>
-                    <a:pt x="0" y="3826579"/>
+                    <a:pt x="0" y="3649639"/>
                   </a:moveTo>
                   <a:lnTo>
                     <a:pt x="0" y="0"/>
@@ -2572,15 +2572,15 @@
           </p:nvSpPr>
           <p:spPr>
             <a:xfrm>
-              <a:off x="6216034" y="1896563"/>
-              <a:ext cx="0" cy="3826579"/>
+              <a:off x="6216034" y="2073503"/>
+              <a:ext cx="0" cy="3649639"/>
             </a:xfrm>
             <a:custGeom>
               <a:avLst/>
               <a:pathLst>
-                <a:path w="0" h="3826579">
+                <a:path w="0" h="3649639">
                   <a:moveTo>
-                    <a:pt x="0" y="3826579"/>
+                    <a:pt x="0" y="3649639"/>
                   </a:moveTo>
                   <a:lnTo>
                     <a:pt x="0" y="0"/>
@@ -2615,15 +2615,15 @@
           </p:nvSpPr>
           <p:spPr>
             <a:xfrm>
-              <a:off x="7580464" y="1896563"/>
-              <a:ext cx="0" cy="3826579"/>
+              <a:off x="7580464" y="2073503"/>
+              <a:ext cx="0" cy="3649639"/>
             </a:xfrm>
             <a:custGeom>
               <a:avLst/>
               <a:pathLst>
-                <a:path w="0" h="3826579">
+                <a:path w="0" h="3649639">
                   <a:moveTo>
-                    <a:pt x="0" y="3826579"/>
+                    <a:pt x="0" y="3649639"/>
                   </a:moveTo>
                   <a:lnTo>
                     <a:pt x="0" y="0"/>
@@ -2658,7 +2658,7 @@
           </p:nvSpPr>
           <p:spPr>
             <a:xfrm>
-              <a:off x="817517" y="5549207"/>
+              <a:off x="817517" y="5557249"/>
               <a:ext cx="7799693" cy="0"/>
             </a:xfrm>
             <a:custGeom>
@@ -2701,7 +2701,7 @@
           </p:nvSpPr>
           <p:spPr>
             <a:xfrm>
-              <a:off x="817517" y="4679530"/>
+              <a:off x="817517" y="4727786"/>
               <a:ext cx="7799693" cy="0"/>
             </a:xfrm>
             <a:custGeom>
@@ -2744,7 +2744,7 @@
           </p:nvSpPr>
           <p:spPr>
             <a:xfrm>
-              <a:off x="817517" y="3809853"/>
+              <a:off x="817517" y="3898322"/>
               <a:ext cx="7799693" cy="0"/>
             </a:xfrm>
             <a:custGeom>
@@ -2787,7 +2787,7 @@
           </p:nvSpPr>
           <p:spPr>
             <a:xfrm>
-              <a:off x="817517" y="2940175"/>
+              <a:off x="817517" y="3068859"/>
               <a:ext cx="7799693" cy="0"/>
             </a:xfrm>
             <a:custGeom>
@@ -2830,7 +2830,7 @@
           </p:nvSpPr>
           <p:spPr>
             <a:xfrm>
-              <a:off x="817517" y="2070498"/>
+              <a:off x="817517" y="2239395"/>
               <a:ext cx="7799693" cy="0"/>
             </a:xfrm>
             <a:custGeom>
@@ -2873,15 +2873,15 @@
           </p:nvSpPr>
           <p:spPr>
             <a:xfrm>
-              <a:off x="1440530" y="1896563"/>
-              <a:ext cx="0" cy="3826579"/>
+              <a:off x="1440530" y="2073503"/>
+              <a:ext cx="0" cy="3649639"/>
             </a:xfrm>
             <a:custGeom>
               <a:avLst/>
               <a:pathLst>
-                <a:path w="0" h="3826579">
+                <a:path w="0" h="3649639">
                   <a:moveTo>
-                    <a:pt x="0" y="3826579"/>
+                    <a:pt x="0" y="3649639"/>
                   </a:moveTo>
                   <a:lnTo>
                     <a:pt x="0" y="0"/>
@@ -2916,15 +2916,15 @@
           </p:nvSpPr>
           <p:spPr>
             <a:xfrm>
-              <a:off x="2804959" y="1896563"/>
-              <a:ext cx="0" cy="3826579"/>
+              <a:off x="2804959" y="2073503"/>
+              <a:ext cx="0" cy="3649639"/>
             </a:xfrm>
             <a:custGeom>
               <a:avLst/>
               <a:pathLst>
-                <a:path w="0" h="3826579">
+                <a:path w="0" h="3649639">
                   <a:moveTo>
-                    <a:pt x="0" y="3826579"/>
+                    <a:pt x="0" y="3649639"/>
                   </a:moveTo>
                   <a:lnTo>
                     <a:pt x="0" y="0"/>
@@ -2959,15 +2959,15 @@
           </p:nvSpPr>
           <p:spPr>
             <a:xfrm>
-              <a:off x="4169389" y="1896563"/>
-              <a:ext cx="0" cy="3826579"/>
+              <a:off x="4169389" y="2073503"/>
+              <a:ext cx="0" cy="3649639"/>
             </a:xfrm>
             <a:custGeom>
               <a:avLst/>
               <a:pathLst>
-                <a:path w="0" h="3826579">
+                <a:path w="0" h="3649639">
                   <a:moveTo>
-                    <a:pt x="0" y="3826579"/>
+                    <a:pt x="0" y="3649639"/>
                   </a:moveTo>
                   <a:lnTo>
                     <a:pt x="0" y="0"/>
@@ -3002,15 +3002,15 @@
           </p:nvSpPr>
           <p:spPr>
             <a:xfrm>
-              <a:off x="5533819" y="1896563"/>
-              <a:ext cx="0" cy="3826579"/>
+              <a:off x="5533819" y="2073503"/>
+              <a:ext cx="0" cy="3649639"/>
             </a:xfrm>
             <a:custGeom>
               <a:avLst/>
               <a:pathLst>
-                <a:path w="0" h="3826579">
+                <a:path w="0" h="3649639">
                   <a:moveTo>
-                    <a:pt x="0" y="3826579"/>
+                    <a:pt x="0" y="3649639"/>
                   </a:moveTo>
                   <a:lnTo>
                     <a:pt x="0" y="0"/>
@@ -3045,15 +3045,15 @@
           </p:nvSpPr>
           <p:spPr>
             <a:xfrm>
-              <a:off x="6898249" y="1896563"/>
-              <a:ext cx="0" cy="3826579"/>
+              <a:off x="6898249" y="2073503"/>
+              <a:ext cx="0" cy="3649639"/>
             </a:xfrm>
             <a:custGeom>
               <a:avLst/>
               <a:pathLst>
-                <a:path w="0" h="3826579">
+                <a:path w="0" h="3649639">
                   <a:moveTo>
-                    <a:pt x="0" y="3826579"/>
+                    <a:pt x="0" y="3649639"/>
                   </a:moveTo>
                   <a:lnTo>
                     <a:pt x="0" y="0"/>
@@ -3088,15 +3088,15 @@
           </p:nvSpPr>
           <p:spPr>
             <a:xfrm>
-              <a:off x="8262679" y="1896563"/>
-              <a:ext cx="0" cy="3826579"/>
+              <a:off x="8262679" y="2073503"/>
+              <a:ext cx="0" cy="3649639"/>
             </a:xfrm>
             <a:custGeom>
               <a:avLst/>
               <a:pathLst>
-                <a:path w="0" h="3826579">
+                <a:path w="0" h="3649639">
                   <a:moveTo>
-                    <a:pt x="0" y="3826579"/>
+                    <a:pt x="0" y="3649639"/>
                   </a:moveTo>
                   <a:lnTo>
                     <a:pt x="0" y="0"/>
@@ -3131,231 +3131,231 @@
           </p:nvSpPr>
           <p:spPr>
             <a:xfrm>
-              <a:off x="1172049" y="1896563"/>
-              <a:ext cx="7090630" cy="3537267"/>
+              <a:off x="1172049" y="2073503"/>
+              <a:ext cx="7090630" cy="3373705"/>
             </a:xfrm>
             <a:custGeom>
               <a:avLst/>
               <a:pathLst>
-                <a:path w="7090630" h="3537267">
+                <a:path w="7090630" h="3373705">
                   <a:moveTo>
-                    <a:pt x="0" y="3145613"/>
+                    <a:pt x="0" y="3000161"/>
                   </a:moveTo>
                   <a:lnTo>
-                    <a:pt x="71622" y="3139148"/>
-                  </a:lnTo>
-                  <a:lnTo>
-                    <a:pt x="143245" y="3132601"/>
-                  </a:lnTo>
-                  <a:lnTo>
-                    <a:pt x="214867" y="3125970"/>
-                  </a:lnTo>
-                  <a:lnTo>
-                    <a:pt x="286490" y="3119255"/>
-                  </a:lnTo>
-                  <a:lnTo>
-                    <a:pt x="358112" y="3112454"/>
-                  </a:lnTo>
-                  <a:lnTo>
-                    <a:pt x="429735" y="3105566"/>
-                  </a:lnTo>
-                  <a:lnTo>
-                    <a:pt x="501357" y="3098591"/>
-                  </a:lnTo>
-                  <a:lnTo>
-                    <a:pt x="572980" y="3091527"/>
-                  </a:lnTo>
-                  <a:lnTo>
-                    <a:pt x="644602" y="3084372"/>
-                  </a:lnTo>
-                  <a:lnTo>
-                    <a:pt x="716225" y="3077127"/>
-                  </a:lnTo>
-                  <a:lnTo>
-                    <a:pt x="787847" y="3069789"/>
-                  </a:lnTo>
-                  <a:lnTo>
-                    <a:pt x="859470" y="3062357"/>
-                  </a:lnTo>
-                  <a:lnTo>
-                    <a:pt x="931092" y="3054831"/>
-                  </a:lnTo>
-                  <a:lnTo>
-                    <a:pt x="1002715" y="3047209"/>
-                  </a:lnTo>
-                  <a:lnTo>
-                    <a:pt x="1074337" y="3039489"/>
-                  </a:lnTo>
-                  <a:lnTo>
-                    <a:pt x="1145960" y="3031671"/>
-                  </a:lnTo>
-                  <a:lnTo>
-                    <a:pt x="1217582" y="3023754"/>
-                  </a:lnTo>
-                  <a:lnTo>
-                    <a:pt x="1289205" y="3015735"/>
-                  </a:lnTo>
-                  <a:lnTo>
-                    <a:pt x="1360827" y="3007614"/>
-                  </a:lnTo>
-                  <a:lnTo>
-                    <a:pt x="1432450" y="2999390"/>
-                  </a:lnTo>
-                  <a:lnTo>
-                    <a:pt x="1504073" y="2991061"/>
-                  </a:lnTo>
-                  <a:lnTo>
-                    <a:pt x="1575695" y="2982625"/>
-                  </a:lnTo>
-                  <a:lnTo>
-                    <a:pt x="1647318" y="2974083"/>
-                  </a:lnTo>
-                  <a:lnTo>
-                    <a:pt x="1718940" y="2965431"/>
-                  </a:lnTo>
-                  <a:lnTo>
-                    <a:pt x="1790563" y="2956669"/>
-                  </a:lnTo>
-                  <a:lnTo>
-                    <a:pt x="1862185" y="2947795"/>
-                  </a:lnTo>
-                  <a:lnTo>
-                    <a:pt x="1933808" y="2938808"/>
-                  </a:lnTo>
-                  <a:lnTo>
-                    <a:pt x="2005430" y="2929706"/>
-                  </a:lnTo>
-                  <a:lnTo>
-                    <a:pt x="2077053" y="2920488"/>
-                  </a:lnTo>
-                  <a:lnTo>
-                    <a:pt x="2148675" y="2911153"/>
-                  </a:lnTo>
-                  <a:lnTo>
-                    <a:pt x="2220298" y="2901699"/>
-                  </a:lnTo>
-                  <a:lnTo>
-                    <a:pt x="2291920" y="2892124"/>
-                  </a:lnTo>
-                  <a:lnTo>
-                    <a:pt x="2363543" y="2882427"/>
-                  </a:lnTo>
-                  <a:lnTo>
-                    <a:pt x="2435165" y="2872607"/>
-                  </a:lnTo>
-                  <a:lnTo>
-                    <a:pt x="2506788" y="2862661"/>
-                  </a:lnTo>
-                  <a:lnTo>
-                    <a:pt x="2578410" y="2852589"/>
-                  </a:lnTo>
-                  <a:lnTo>
-                    <a:pt x="2650033" y="2842388"/>
-                  </a:lnTo>
-                  <a:lnTo>
-                    <a:pt x="2721655" y="2832057"/>
-                  </a:lnTo>
-                  <a:lnTo>
-                    <a:pt x="2793278" y="2821594"/>
-                  </a:lnTo>
-                  <a:lnTo>
-                    <a:pt x="2864901" y="2810998"/>
-                  </a:lnTo>
-                  <a:lnTo>
-                    <a:pt x="2936523" y="2800267"/>
-                  </a:lnTo>
-                  <a:lnTo>
-                    <a:pt x="3008146" y="2789399"/>
-                  </a:lnTo>
-                  <a:lnTo>
-                    <a:pt x="3079768" y="2765718"/>
-                  </a:lnTo>
-                  <a:lnTo>
-                    <a:pt x="3151391" y="2722636"/>
-                  </a:lnTo>
-                  <a:lnTo>
-                    <a:pt x="3223013" y="2677462"/>
-                  </a:lnTo>
-                  <a:lnTo>
-                    <a:pt x="3294636" y="2630093"/>
-                  </a:lnTo>
-                  <a:lnTo>
-                    <a:pt x="3366258" y="2580423"/>
-                  </a:lnTo>
-                  <a:lnTo>
-                    <a:pt x="3437881" y="2528340"/>
-                  </a:lnTo>
-                  <a:lnTo>
-                    <a:pt x="3509503" y="2473728"/>
-                  </a:lnTo>
-                  <a:lnTo>
-                    <a:pt x="3581126" y="2416463"/>
-                  </a:lnTo>
-                  <a:lnTo>
-                    <a:pt x="3652748" y="2356416"/>
-                  </a:lnTo>
-                  <a:lnTo>
-                    <a:pt x="3724371" y="2293452"/>
-                  </a:lnTo>
-                  <a:lnTo>
-                    <a:pt x="3795993" y="2227430"/>
-                  </a:lnTo>
-                  <a:lnTo>
-                    <a:pt x="3867616" y="2158201"/>
-                  </a:lnTo>
-                  <a:lnTo>
-                    <a:pt x="3939238" y="2085609"/>
-                  </a:lnTo>
-                  <a:lnTo>
-                    <a:pt x="4010861" y="2009491"/>
-                  </a:lnTo>
-                  <a:lnTo>
-                    <a:pt x="4082483" y="1929676"/>
-                  </a:lnTo>
-                  <a:lnTo>
-                    <a:pt x="4154106" y="1845984"/>
-                  </a:lnTo>
-                  <a:lnTo>
-                    <a:pt x="4225729" y="1758226"/>
-                  </a:lnTo>
-                  <a:lnTo>
-                    <a:pt x="4297351" y="1666206"/>
-                  </a:lnTo>
-                  <a:lnTo>
-                    <a:pt x="4368974" y="1569716"/>
-                  </a:lnTo>
-                  <a:lnTo>
-                    <a:pt x="4440596" y="1468538"/>
-                  </a:lnTo>
-                  <a:lnTo>
-                    <a:pt x="4512219" y="1362447"/>
-                  </a:lnTo>
-                  <a:lnTo>
-                    <a:pt x="4583841" y="1251201"/>
-                  </a:lnTo>
-                  <a:lnTo>
-                    <a:pt x="4655464" y="1134552"/>
-                  </a:lnTo>
-                  <a:lnTo>
-                    <a:pt x="4727086" y="1012237"/>
-                  </a:lnTo>
-                  <a:lnTo>
-                    <a:pt x="4798709" y="883981"/>
-                  </a:lnTo>
-                  <a:lnTo>
-                    <a:pt x="4870331" y="749495"/>
-                  </a:lnTo>
-                  <a:lnTo>
-                    <a:pt x="4941954" y="608476"/>
-                  </a:lnTo>
-                  <a:lnTo>
-                    <a:pt x="5013576" y="460607"/>
-                  </a:lnTo>
-                  <a:lnTo>
-                    <a:pt x="5085199" y="305555"/>
-                  </a:lnTo>
-                  <a:lnTo>
-                    <a:pt x="5156821" y="142972"/>
+                    <a:pt x="71622" y="2993995"/>
+                  </a:lnTo>
+                  <a:lnTo>
+                    <a:pt x="143245" y="2987750"/>
+                  </a:lnTo>
+                  <a:lnTo>
+                    <a:pt x="214867" y="2981426"/>
+                  </a:lnTo>
+                  <a:lnTo>
+                    <a:pt x="286490" y="2975022"/>
+                  </a:lnTo>
+                  <a:lnTo>
+                    <a:pt x="358112" y="2968535"/>
+                  </a:lnTo>
+                  <a:lnTo>
+                    <a:pt x="429735" y="2961966"/>
+                  </a:lnTo>
+                  <a:lnTo>
+                    <a:pt x="501357" y="2955313"/>
+                  </a:lnTo>
+                  <a:lnTo>
+                    <a:pt x="572980" y="2948576"/>
+                  </a:lnTo>
+                  <a:lnTo>
+                    <a:pt x="644602" y="2941752"/>
+                  </a:lnTo>
+                  <a:lnTo>
+                    <a:pt x="716225" y="2934841"/>
+                  </a:lnTo>
+                  <a:lnTo>
+                    <a:pt x="787847" y="2927843"/>
+                  </a:lnTo>
+                  <a:lnTo>
+                    <a:pt x="859470" y="2920755"/>
+                  </a:lnTo>
+                  <a:lnTo>
+                    <a:pt x="931092" y="2913577"/>
+                  </a:lnTo>
+                  <a:lnTo>
+                    <a:pt x="1002715" y="2906307"/>
+                  </a:lnTo>
+                  <a:lnTo>
+                    <a:pt x="1074337" y="2898944"/>
+                  </a:lnTo>
+                  <a:lnTo>
+                    <a:pt x="1145960" y="2891488"/>
+                  </a:lnTo>
+                  <a:lnTo>
+                    <a:pt x="1217582" y="2883936"/>
+                  </a:lnTo>
+                  <a:lnTo>
+                    <a:pt x="1289205" y="2876289"/>
+                  </a:lnTo>
+                  <a:lnTo>
+                    <a:pt x="1360827" y="2868543"/>
+                  </a:lnTo>
+                  <a:lnTo>
+                    <a:pt x="1432450" y="2860699"/>
+                  </a:lnTo>
+                  <a:lnTo>
+                    <a:pt x="1504073" y="2852755"/>
+                  </a:lnTo>
+                  <a:lnTo>
+                    <a:pt x="1575695" y="2844710"/>
+                  </a:lnTo>
+                  <a:lnTo>
+                    <a:pt x="1647318" y="2836562"/>
+                  </a:lnTo>
+                  <a:lnTo>
+                    <a:pt x="1718940" y="2828310"/>
+                  </a:lnTo>
+                  <a:lnTo>
+                    <a:pt x="1790563" y="2819953"/>
+                  </a:lnTo>
+                  <a:lnTo>
+                    <a:pt x="1862185" y="2811490"/>
+                  </a:lnTo>
+                  <a:lnTo>
+                    <a:pt x="1933808" y="2802918"/>
+                  </a:lnTo>
+                  <a:lnTo>
+                    <a:pt x="2005430" y="2794238"/>
+                  </a:lnTo>
+                  <a:lnTo>
+                    <a:pt x="2077053" y="2785446"/>
+                  </a:lnTo>
+                  <a:lnTo>
+                    <a:pt x="2148675" y="2776543"/>
+                  </a:lnTo>
+                  <a:lnTo>
+                    <a:pt x="2220298" y="2767526"/>
+                  </a:lnTo>
+                  <a:lnTo>
+                    <a:pt x="2291920" y="2758393"/>
+                  </a:lnTo>
+                  <a:lnTo>
+                    <a:pt x="2363543" y="2749145"/>
+                  </a:lnTo>
+                  <a:lnTo>
+                    <a:pt x="2435165" y="2739779"/>
+                  </a:lnTo>
+                  <a:lnTo>
+                    <a:pt x="2506788" y="2730293"/>
+                  </a:lnTo>
+                  <a:lnTo>
+                    <a:pt x="2578410" y="2720686"/>
+                  </a:lnTo>
+                  <a:lnTo>
+                    <a:pt x="2650033" y="2710957"/>
+                  </a:lnTo>
+                  <a:lnTo>
+                    <a:pt x="2721655" y="2701104"/>
+                  </a:lnTo>
+                  <a:lnTo>
+                    <a:pt x="2793278" y="2691125"/>
+                  </a:lnTo>
+                  <a:lnTo>
+                    <a:pt x="2864901" y="2681019"/>
+                  </a:lnTo>
+                  <a:lnTo>
+                    <a:pt x="2936523" y="2670783"/>
+                  </a:lnTo>
+                  <a:lnTo>
+                    <a:pt x="3008146" y="2660418"/>
+                  </a:lnTo>
+                  <a:lnTo>
+                    <a:pt x="3079768" y="2637833"/>
+                  </a:lnTo>
+                  <a:lnTo>
+                    <a:pt x="3151391" y="2596743"/>
+                  </a:lnTo>
+                  <a:lnTo>
+                    <a:pt x="3223013" y="2553657"/>
+                  </a:lnTo>
+                  <a:lnTo>
+                    <a:pt x="3294636" y="2508478"/>
+                  </a:lnTo>
+                  <a:lnTo>
+                    <a:pt x="3366258" y="2461105"/>
+                  </a:lnTo>
+                  <a:lnTo>
+                    <a:pt x="3437881" y="2411431"/>
+                  </a:lnTo>
+                  <a:lnTo>
+                    <a:pt x="3509503" y="2359344"/>
+                  </a:lnTo>
+                  <a:lnTo>
+                    <a:pt x="3581126" y="2304726"/>
+                  </a:lnTo>
+                  <a:lnTo>
+                    <a:pt x="3652748" y="2247456"/>
+                  </a:lnTo>
+                  <a:lnTo>
+                    <a:pt x="3724371" y="2187404"/>
+                  </a:lnTo>
+                  <a:lnTo>
+                    <a:pt x="3795993" y="2124435"/>
+                  </a:lnTo>
+                  <a:lnTo>
+                    <a:pt x="3867616" y="2058407"/>
+                  </a:lnTo>
+                  <a:lnTo>
+                    <a:pt x="3939238" y="1989171"/>
+                  </a:lnTo>
+                  <a:lnTo>
+                    <a:pt x="4010861" y="1916573"/>
+                  </a:lnTo>
+                  <a:lnTo>
+                    <a:pt x="4082483" y="1840449"/>
+                  </a:lnTo>
+                  <a:lnTo>
+                    <a:pt x="4154106" y="1760626"/>
+                  </a:lnTo>
+                  <a:lnTo>
+                    <a:pt x="4225729" y="1676926"/>
+                  </a:lnTo>
+                  <a:lnTo>
+                    <a:pt x="4297351" y="1589161"/>
+                  </a:lnTo>
+                  <a:lnTo>
+                    <a:pt x="4368974" y="1497132"/>
+                  </a:lnTo>
+                  <a:lnTo>
+                    <a:pt x="4440596" y="1400634"/>
+                  </a:lnTo>
+                  <a:lnTo>
+                    <a:pt x="4512219" y="1299447"/>
+                  </a:lnTo>
+                  <a:lnTo>
+                    <a:pt x="4583841" y="1193346"/>
+                  </a:lnTo>
+                  <a:lnTo>
+                    <a:pt x="4655464" y="1082091"/>
+                  </a:lnTo>
+                  <a:lnTo>
+                    <a:pt x="4727086" y="965432"/>
+                  </a:lnTo>
+                  <a:lnTo>
+                    <a:pt x="4798709" y="843106"/>
+                  </a:lnTo>
+                  <a:lnTo>
+                    <a:pt x="4870331" y="714838"/>
+                  </a:lnTo>
+                  <a:lnTo>
+                    <a:pt x="4941954" y="580340"/>
+                  </a:lnTo>
+                  <a:lnTo>
+                    <a:pt x="5013576" y="439308"/>
+                  </a:lnTo>
+                  <a:lnTo>
+                    <a:pt x="5085199" y="291426"/>
+                  </a:lnTo>
+                  <a:lnTo>
+                    <a:pt x="5156821" y="136361"/>
                   </a:lnTo>
                   <a:lnTo>
                     <a:pt x="5216887" y="0"/>
@@ -3364,304 +3364,304 @@
                     <a:pt x="7090630" y="0"/>
                   </a:lnTo>
                   <a:lnTo>
-                    <a:pt x="7090630" y="1875309"/>
-                  </a:lnTo>
-                  <a:lnTo>
-                    <a:pt x="7019007" y="1897685"/>
-                  </a:lnTo>
-                  <a:lnTo>
-                    <a:pt x="6947385" y="1919780"/>
-                  </a:lnTo>
-                  <a:lnTo>
-                    <a:pt x="6875762" y="1941596"/>
-                  </a:lnTo>
-                  <a:lnTo>
-                    <a:pt x="6804139" y="1963138"/>
-                  </a:lnTo>
-                  <a:lnTo>
-                    <a:pt x="6732517" y="1984408"/>
-                  </a:lnTo>
-                  <a:lnTo>
-                    <a:pt x="6660894" y="2005411"/>
-                  </a:lnTo>
-                  <a:lnTo>
-                    <a:pt x="6589272" y="2026149"/>
-                  </a:lnTo>
-                  <a:lnTo>
-                    <a:pt x="6517649" y="2046626"/>
-                  </a:lnTo>
-                  <a:lnTo>
-                    <a:pt x="6446027" y="2066846"/>
-                  </a:lnTo>
-                  <a:lnTo>
-                    <a:pt x="6374404" y="2086810"/>
-                  </a:lnTo>
-                  <a:lnTo>
-                    <a:pt x="6302782" y="2106524"/>
-                  </a:lnTo>
-                  <a:lnTo>
-                    <a:pt x="6231159" y="2125989"/>
-                  </a:lnTo>
-                  <a:lnTo>
-                    <a:pt x="6159537" y="2145209"/>
-                  </a:lnTo>
-                  <a:lnTo>
-                    <a:pt x="6087914" y="2164188"/>
-                  </a:lnTo>
-                  <a:lnTo>
-                    <a:pt x="6016292" y="2182927"/>
-                  </a:lnTo>
-                  <a:lnTo>
-                    <a:pt x="5944669" y="2201430"/>
-                  </a:lnTo>
-                  <a:lnTo>
-                    <a:pt x="5873047" y="2219701"/>
-                  </a:lnTo>
-                  <a:lnTo>
-                    <a:pt x="5801424" y="2237741"/>
-                  </a:lnTo>
-                  <a:lnTo>
-                    <a:pt x="5729802" y="2255554"/>
-                  </a:lnTo>
-                  <a:lnTo>
-                    <a:pt x="5658179" y="2273143"/>
-                  </a:lnTo>
-                  <a:lnTo>
-                    <a:pt x="5586557" y="2290511"/>
-                  </a:lnTo>
-                  <a:lnTo>
-                    <a:pt x="5514934" y="2307660"/>
-                  </a:lnTo>
-                  <a:lnTo>
-                    <a:pt x="5443311" y="2324593"/>
-                  </a:lnTo>
-                  <a:lnTo>
-                    <a:pt x="5371689" y="2341313"/>
-                  </a:lnTo>
-                  <a:lnTo>
-                    <a:pt x="5300066" y="2357822"/>
-                  </a:lnTo>
-                  <a:lnTo>
-                    <a:pt x="5228444" y="2374124"/>
-                  </a:lnTo>
-                  <a:lnTo>
-                    <a:pt x="5156821" y="2390220"/>
-                  </a:lnTo>
-                  <a:lnTo>
-                    <a:pt x="5085199" y="2406113"/>
-                  </a:lnTo>
-                  <a:lnTo>
-                    <a:pt x="5013576" y="2421807"/>
-                  </a:lnTo>
-                  <a:lnTo>
-                    <a:pt x="4941954" y="2437303"/>
-                  </a:lnTo>
-                  <a:lnTo>
-                    <a:pt x="4870331" y="2452604"/>
-                  </a:lnTo>
-                  <a:lnTo>
-                    <a:pt x="4798709" y="2467712"/>
-                  </a:lnTo>
-                  <a:lnTo>
-                    <a:pt x="4727086" y="2482630"/>
-                  </a:lnTo>
-                  <a:lnTo>
-                    <a:pt x="4655464" y="2497360"/>
-                  </a:lnTo>
-                  <a:lnTo>
-                    <a:pt x="4583841" y="2511905"/>
-                  </a:lnTo>
-                  <a:lnTo>
-                    <a:pt x="4512219" y="2526267"/>
-                  </a:lnTo>
-                  <a:lnTo>
-                    <a:pt x="4440596" y="2540447"/>
-                  </a:lnTo>
-                  <a:lnTo>
-                    <a:pt x="4368974" y="2554450"/>
-                  </a:lnTo>
-                  <a:lnTo>
-                    <a:pt x="4297351" y="2568276"/>
-                  </a:lnTo>
-                  <a:lnTo>
-                    <a:pt x="4225729" y="2581928"/>
-                  </a:lnTo>
-                  <a:lnTo>
-                    <a:pt x="4154106" y="2595408"/>
-                  </a:lnTo>
-                  <a:lnTo>
-                    <a:pt x="4082483" y="2608718"/>
-                  </a:lnTo>
-                  <a:lnTo>
-                    <a:pt x="4010861" y="2621861"/>
-                  </a:lnTo>
-                  <a:lnTo>
-                    <a:pt x="3939238" y="2634838"/>
-                  </a:lnTo>
-                  <a:lnTo>
-                    <a:pt x="3867616" y="2647652"/>
-                  </a:lnTo>
-                  <a:lnTo>
-                    <a:pt x="3795993" y="2660305"/>
-                  </a:lnTo>
-                  <a:lnTo>
-                    <a:pt x="3724371" y="2672798"/>
-                  </a:lnTo>
-                  <a:lnTo>
-                    <a:pt x="3652748" y="2685134"/>
-                  </a:lnTo>
-                  <a:lnTo>
-                    <a:pt x="3581126" y="2697315"/>
-                  </a:lnTo>
-                  <a:lnTo>
-                    <a:pt x="3509503" y="2709342"/>
-                  </a:lnTo>
-                  <a:lnTo>
-                    <a:pt x="3437881" y="2721218"/>
-                  </a:lnTo>
-                  <a:lnTo>
-                    <a:pt x="3366258" y="2732944"/>
-                  </a:lnTo>
-                  <a:lnTo>
-                    <a:pt x="3294636" y="2744523"/>
-                  </a:lnTo>
-                  <a:lnTo>
-                    <a:pt x="3223013" y="2755956"/>
-                  </a:lnTo>
-                  <a:lnTo>
-                    <a:pt x="3151391" y="2767245"/>
-                  </a:lnTo>
-                  <a:lnTo>
-                    <a:pt x="3079768" y="2778392"/>
-                  </a:lnTo>
-                  <a:lnTo>
-                    <a:pt x="3008146" y="2806805"/>
-                  </a:lnTo>
-                  <a:lnTo>
-                    <a:pt x="2936523" y="2845987"/>
-                  </a:lnTo>
-                  <a:lnTo>
-                    <a:pt x="2864901" y="2883355"/>
-                  </a:lnTo>
-                  <a:lnTo>
-                    <a:pt x="2793278" y="2918992"/>
-                  </a:lnTo>
-                  <a:lnTo>
-                    <a:pt x="2721655" y="2952978"/>
-                  </a:lnTo>
-                  <a:lnTo>
-                    <a:pt x="2650033" y="2985389"/>
-                  </a:lnTo>
-                  <a:lnTo>
-                    <a:pt x="2578410" y="3016300"/>
-                  </a:lnTo>
-                  <a:lnTo>
-                    <a:pt x="2506788" y="3045778"/>
-                  </a:lnTo>
-                  <a:lnTo>
-                    <a:pt x="2435165" y="3073890"/>
-                  </a:lnTo>
-                  <a:lnTo>
-                    <a:pt x="2363543" y="3100701"/>
-                  </a:lnTo>
-                  <a:lnTo>
-                    <a:pt x="2291920" y="3126269"/>
-                  </a:lnTo>
-                  <a:lnTo>
-                    <a:pt x="2220298" y="3150653"/>
-                  </a:lnTo>
-                  <a:lnTo>
-                    <a:pt x="2148675" y="3173907"/>
-                  </a:lnTo>
-                  <a:lnTo>
-                    <a:pt x="2077053" y="3196085"/>
-                  </a:lnTo>
-                  <a:lnTo>
-                    <a:pt x="2005430" y="3217234"/>
-                  </a:lnTo>
-                  <a:lnTo>
-                    <a:pt x="1933808" y="3237404"/>
-                  </a:lnTo>
-                  <a:lnTo>
-                    <a:pt x="1862185" y="3256640"/>
-                  </a:lnTo>
-                  <a:lnTo>
-                    <a:pt x="1790563" y="3274985"/>
-                  </a:lnTo>
-                  <a:lnTo>
-                    <a:pt x="1718940" y="3292479"/>
-                  </a:lnTo>
-                  <a:lnTo>
-                    <a:pt x="1647318" y="3309164"/>
-                  </a:lnTo>
-                  <a:lnTo>
-                    <a:pt x="1575695" y="3325075"/>
-                  </a:lnTo>
-                  <a:lnTo>
-                    <a:pt x="1504073" y="3340250"/>
-                  </a:lnTo>
-                  <a:lnTo>
-                    <a:pt x="1432450" y="3354721"/>
-                  </a:lnTo>
-                  <a:lnTo>
-                    <a:pt x="1360827" y="3368522"/>
-                  </a:lnTo>
-                  <a:lnTo>
-                    <a:pt x="1289205" y="3381684"/>
-                  </a:lnTo>
-                  <a:lnTo>
-                    <a:pt x="1217582" y="3394236"/>
-                  </a:lnTo>
-                  <a:lnTo>
-                    <a:pt x="1145960" y="3406206"/>
-                  </a:lnTo>
-                  <a:lnTo>
-                    <a:pt x="1074337" y="3417622"/>
-                  </a:lnTo>
-                  <a:lnTo>
-                    <a:pt x="1002715" y="3428510"/>
-                  </a:lnTo>
-                  <a:lnTo>
-                    <a:pt x="931092" y="3438892"/>
-                  </a:lnTo>
-                  <a:lnTo>
-                    <a:pt x="859470" y="3448794"/>
-                  </a:lnTo>
-                  <a:lnTo>
-                    <a:pt x="787847" y="3458237"/>
-                  </a:lnTo>
-                  <a:lnTo>
-                    <a:pt x="716225" y="3467243"/>
-                  </a:lnTo>
-                  <a:lnTo>
-                    <a:pt x="644602" y="3475832"/>
-                  </a:lnTo>
-                  <a:lnTo>
-                    <a:pt x="572980" y="3484022"/>
-                  </a:lnTo>
-                  <a:lnTo>
-                    <a:pt x="501357" y="3491834"/>
-                  </a:lnTo>
-                  <a:lnTo>
-                    <a:pt x="429735" y="3499283"/>
-                  </a:lnTo>
-                  <a:lnTo>
-                    <a:pt x="358112" y="3506387"/>
-                  </a:lnTo>
-                  <a:lnTo>
-                    <a:pt x="286490" y="3513163"/>
-                  </a:lnTo>
-                  <a:lnTo>
-                    <a:pt x="214867" y="3519624"/>
-                  </a:lnTo>
-                  <a:lnTo>
-                    <a:pt x="143245" y="3525786"/>
-                  </a:lnTo>
-                  <a:lnTo>
-                    <a:pt x="71622" y="3531663"/>
-                  </a:lnTo>
-                  <a:lnTo>
-                    <a:pt x="0" y="3537267"/>
+                    <a:pt x="7090630" y="1788595"/>
+                  </a:lnTo>
+                  <a:lnTo>
+                    <a:pt x="7019007" y="1809937"/>
+                  </a:lnTo>
+                  <a:lnTo>
+                    <a:pt x="6947385" y="1831010"/>
+                  </a:lnTo>
+                  <a:lnTo>
+                    <a:pt x="6875762" y="1851817"/>
+                  </a:lnTo>
+                  <a:lnTo>
+                    <a:pt x="6804139" y="1872363"/>
+                  </a:lnTo>
+                  <a:lnTo>
+                    <a:pt x="6732517" y="1892650"/>
+                  </a:lnTo>
+                  <a:lnTo>
+                    <a:pt x="6660894" y="1912681"/>
+                  </a:lnTo>
+                  <a:lnTo>
+                    <a:pt x="6589272" y="1932461"/>
+                  </a:lnTo>
+                  <a:lnTo>
+                    <a:pt x="6517649" y="1951991"/>
+                  </a:lnTo>
+                  <a:lnTo>
+                    <a:pt x="6446027" y="1971275"/>
+                  </a:lnTo>
+                  <a:lnTo>
+                    <a:pt x="6374404" y="1990317"/>
+                  </a:lnTo>
+                  <a:lnTo>
+                    <a:pt x="6302782" y="2009119"/>
+                  </a:lnTo>
+                  <a:lnTo>
+                    <a:pt x="6231159" y="2027684"/>
+                  </a:lnTo>
+                  <a:lnTo>
+                    <a:pt x="6159537" y="2046016"/>
+                  </a:lnTo>
+                  <a:lnTo>
+                    <a:pt x="6087914" y="2064116"/>
+                  </a:lnTo>
+                  <a:lnTo>
+                    <a:pt x="6016292" y="2081989"/>
+                  </a:lnTo>
+                  <a:lnTo>
+                    <a:pt x="5944669" y="2099637"/>
+                  </a:lnTo>
+                  <a:lnTo>
+                    <a:pt x="5873047" y="2117062"/>
+                  </a:lnTo>
+                  <a:lnTo>
+                    <a:pt x="5801424" y="2134269"/>
+                  </a:lnTo>
+                  <a:lnTo>
+                    <a:pt x="5729802" y="2151258"/>
+                  </a:lnTo>
+                  <a:lnTo>
+                    <a:pt x="5658179" y="2168034"/>
+                  </a:lnTo>
+                  <a:lnTo>
+                    <a:pt x="5586557" y="2184599"/>
+                  </a:lnTo>
+                  <a:lnTo>
+                    <a:pt x="5514934" y="2200955"/>
+                  </a:lnTo>
+                  <a:lnTo>
+                    <a:pt x="5443311" y="2217105"/>
+                  </a:lnTo>
+                  <a:lnTo>
+                    <a:pt x="5371689" y="2233051"/>
+                  </a:lnTo>
+                  <a:lnTo>
+                    <a:pt x="5300066" y="2248797"/>
+                  </a:lnTo>
+                  <a:lnTo>
+                    <a:pt x="5228444" y="2264345"/>
+                  </a:lnTo>
+                  <a:lnTo>
+                    <a:pt x="5156821" y="2279697"/>
+                  </a:lnTo>
+                  <a:lnTo>
+                    <a:pt x="5085199" y="2294856"/>
+                  </a:lnTo>
+                  <a:lnTo>
+                    <a:pt x="5013576" y="2309823"/>
+                  </a:lnTo>
+                  <a:lnTo>
+                    <a:pt x="4941954" y="2324603"/>
+                  </a:lnTo>
+                  <a:lnTo>
+                    <a:pt x="4870331" y="2339196"/>
+                  </a:lnTo>
+                  <a:lnTo>
+                    <a:pt x="4798709" y="2353606"/>
+                  </a:lnTo>
+                  <a:lnTo>
+                    <a:pt x="4727086" y="2367834"/>
+                  </a:lnTo>
+                  <a:lnTo>
+                    <a:pt x="4655464" y="2381883"/>
+                  </a:lnTo>
+                  <a:lnTo>
+                    <a:pt x="4583841" y="2395755"/>
+                  </a:lnTo>
+                  <a:lnTo>
+                    <a:pt x="4512219" y="2409453"/>
+                  </a:lnTo>
+                  <a:lnTo>
+                    <a:pt x="4440596" y="2422978"/>
+                  </a:lnTo>
+                  <a:lnTo>
+                    <a:pt x="4368974" y="2436333"/>
+                  </a:lnTo>
+                  <a:lnTo>
+                    <a:pt x="4297351" y="2449519"/>
+                  </a:lnTo>
+                  <a:lnTo>
+                    <a:pt x="4225729" y="2462540"/>
+                  </a:lnTo>
+                  <a:lnTo>
+                    <a:pt x="4154106" y="2475397"/>
+                  </a:lnTo>
+                  <a:lnTo>
+                    <a:pt x="4082483" y="2488092"/>
+                  </a:lnTo>
+                  <a:lnTo>
+                    <a:pt x="4010861" y="2500627"/>
+                  </a:lnTo>
+                  <a:lnTo>
+                    <a:pt x="3939238" y="2513004"/>
+                  </a:lnTo>
+                  <a:lnTo>
+                    <a:pt x="3867616" y="2525225"/>
+                  </a:lnTo>
+                  <a:lnTo>
+                    <a:pt x="3795993" y="2537293"/>
+                  </a:lnTo>
+                  <a:lnTo>
+                    <a:pt x="3724371" y="2549209"/>
+                  </a:lnTo>
+                  <a:lnTo>
+                    <a:pt x="3652748" y="2560974"/>
+                  </a:lnTo>
+                  <a:lnTo>
+                    <a:pt x="3581126" y="2572592"/>
+                  </a:lnTo>
+                  <a:lnTo>
+                    <a:pt x="3509503" y="2584063"/>
+                  </a:lnTo>
+                  <a:lnTo>
+                    <a:pt x="3437881" y="2595390"/>
+                  </a:lnTo>
+                  <a:lnTo>
+                    <a:pt x="3366258" y="2606574"/>
+                  </a:lnTo>
+                  <a:lnTo>
+                    <a:pt x="3294636" y="2617617"/>
+                  </a:lnTo>
+                  <a:lnTo>
+                    <a:pt x="3223013" y="2628522"/>
+                  </a:lnTo>
+                  <a:lnTo>
+                    <a:pt x="3151391" y="2639289"/>
+                  </a:lnTo>
+                  <a:lnTo>
+                    <a:pt x="3079768" y="2649920"/>
+                  </a:lnTo>
+                  <a:lnTo>
+                    <a:pt x="3008146" y="2677019"/>
+                  </a:lnTo>
+                  <a:lnTo>
+                    <a:pt x="2936523" y="2714390"/>
+                  </a:lnTo>
+                  <a:lnTo>
+                    <a:pt x="2864901" y="2750030"/>
+                  </a:lnTo>
+                  <a:lnTo>
+                    <a:pt x="2793278" y="2784019"/>
+                  </a:lnTo>
+                  <a:lnTo>
+                    <a:pt x="2721655" y="2816433"/>
+                  </a:lnTo>
+                  <a:lnTo>
+                    <a:pt x="2650033" y="2847346"/>
+                  </a:lnTo>
+                  <a:lnTo>
+                    <a:pt x="2578410" y="2876827"/>
+                  </a:lnTo>
+                  <a:lnTo>
+                    <a:pt x="2506788" y="2904942"/>
+                  </a:lnTo>
+                  <a:lnTo>
+                    <a:pt x="2435165" y="2931755"/>
+                  </a:lnTo>
+                  <a:lnTo>
+                    <a:pt x="2363543" y="2957325"/>
+                  </a:lnTo>
+                  <a:lnTo>
+                    <a:pt x="2291920" y="2981712"/>
+                  </a:lnTo>
+                  <a:lnTo>
+                    <a:pt x="2220298" y="3004968"/>
+                  </a:lnTo>
+                  <a:lnTo>
+                    <a:pt x="2148675" y="3027147"/>
+                  </a:lnTo>
+                  <a:lnTo>
+                    <a:pt x="2077053" y="3048299"/>
+                  </a:lnTo>
+                  <a:lnTo>
+                    <a:pt x="2005430" y="3068471"/>
+                  </a:lnTo>
+                  <a:lnTo>
+                    <a:pt x="1933808" y="3087708"/>
+                  </a:lnTo>
+                  <a:lnTo>
+                    <a:pt x="1862185" y="3106054"/>
+                  </a:lnTo>
+                  <a:lnTo>
+                    <a:pt x="1790563" y="3123550"/>
+                  </a:lnTo>
+                  <a:lnTo>
+                    <a:pt x="1718940" y="3140236"/>
+                  </a:lnTo>
+                  <a:lnTo>
+                    <a:pt x="1647318" y="3156149"/>
+                  </a:lnTo>
+                  <a:lnTo>
+                    <a:pt x="1575695" y="3171325"/>
+                  </a:lnTo>
+                  <a:lnTo>
+                    <a:pt x="1504073" y="3185798"/>
+                  </a:lnTo>
+                  <a:lnTo>
+                    <a:pt x="1432450" y="3199600"/>
+                  </a:lnTo>
+                  <a:lnTo>
+                    <a:pt x="1360827" y="3212763"/>
+                  </a:lnTo>
+                  <a:lnTo>
+                    <a:pt x="1289205" y="3225316"/>
+                  </a:lnTo>
+                  <a:lnTo>
+                    <a:pt x="1217582" y="3237288"/>
+                  </a:lnTo>
+                  <a:lnTo>
+                    <a:pt x="1145960" y="3248705"/>
+                  </a:lnTo>
+                  <a:lnTo>
+                    <a:pt x="1074337" y="3259593"/>
+                  </a:lnTo>
+                  <a:lnTo>
+                    <a:pt x="1002715" y="3269977"/>
+                  </a:lnTo>
+                  <a:lnTo>
+                    <a:pt x="931092" y="3279879"/>
+                  </a:lnTo>
+                  <a:lnTo>
+                    <a:pt x="859470" y="3289323"/>
+                  </a:lnTo>
+                  <a:lnTo>
+                    <a:pt x="787847" y="3298330"/>
+                  </a:lnTo>
+                  <a:lnTo>
+                    <a:pt x="716225" y="3306919"/>
+                  </a:lnTo>
+                  <a:lnTo>
+                    <a:pt x="644602" y="3315111"/>
+                  </a:lnTo>
+                  <a:lnTo>
+                    <a:pt x="572980" y="3322922"/>
+                  </a:lnTo>
+                  <a:lnTo>
+                    <a:pt x="501357" y="3330373"/>
+                  </a:lnTo>
+                  <a:lnTo>
+                    <a:pt x="429735" y="3337477"/>
+                  </a:lnTo>
+                  <a:lnTo>
+                    <a:pt x="358112" y="3344253"/>
+                  </a:lnTo>
+                  <a:lnTo>
+                    <a:pt x="286490" y="3350715"/>
+                  </a:lnTo>
+                  <a:lnTo>
+                    <a:pt x="214867" y="3356878"/>
+                  </a:lnTo>
+                  <a:lnTo>
+                    <a:pt x="143245" y="3362755"/>
+                  </a:lnTo>
+                  <a:lnTo>
+                    <a:pt x="71622" y="3368360"/>
+                  </a:lnTo>
+                  <a:lnTo>
+                    <a:pt x="0" y="3373705"/>
                   </a:lnTo>
                   <a:close/>
                 </a:path>
@@ -3687,231 +3687,231 @@
           </p:nvSpPr>
           <p:spPr>
             <a:xfrm>
-              <a:off x="1172049" y="1896563"/>
-              <a:ext cx="5216887" cy="3145613"/>
+              <a:off x="1172049" y="2073503"/>
+              <a:ext cx="5216887" cy="3000161"/>
             </a:xfrm>
             <a:custGeom>
               <a:avLst/>
               <a:pathLst>
-                <a:path w="5216887" h="3145613">
+                <a:path w="5216887" h="3000161">
                   <a:moveTo>
-                    <a:pt x="0" y="3145613"/>
+                    <a:pt x="0" y="3000161"/>
                   </a:moveTo>
                   <a:lnTo>
-                    <a:pt x="71622" y="3139148"/>
-                  </a:lnTo>
-                  <a:lnTo>
-                    <a:pt x="143245" y="3132601"/>
-                  </a:lnTo>
-                  <a:lnTo>
-                    <a:pt x="214867" y="3125970"/>
-                  </a:lnTo>
-                  <a:lnTo>
-                    <a:pt x="286490" y="3119255"/>
-                  </a:lnTo>
-                  <a:lnTo>
-                    <a:pt x="358112" y="3112454"/>
-                  </a:lnTo>
-                  <a:lnTo>
-                    <a:pt x="429735" y="3105566"/>
-                  </a:lnTo>
-                  <a:lnTo>
-                    <a:pt x="501357" y="3098591"/>
-                  </a:lnTo>
-                  <a:lnTo>
-                    <a:pt x="572980" y="3091527"/>
-                  </a:lnTo>
-                  <a:lnTo>
-                    <a:pt x="644602" y="3084372"/>
-                  </a:lnTo>
-                  <a:lnTo>
-                    <a:pt x="716225" y="3077127"/>
-                  </a:lnTo>
-                  <a:lnTo>
-                    <a:pt x="787847" y="3069789"/>
-                  </a:lnTo>
-                  <a:lnTo>
-                    <a:pt x="859470" y="3062357"/>
-                  </a:lnTo>
-                  <a:lnTo>
-                    <a:pt x="931092" y="3054831"/>
-                  </a:lnTo>
-                  <a:lnTo>
-                    <a:pt x="1002715" y="3047209"/>
-                  </a:lnTo>
-                  <a:lnTo>
-                    <a:pt x="1074337" y="3039489"/>
-                  </a:lnTo>
-                  <a:lnTo>
-                    <a:pt x="1145960" y="3031671"/>
-                  </a:lnTo>
-                  <a:lnTo>
-                    <a:pt x="1217582" y="3023754"/>
-                  </a:lnTo>
-                  <a:lnTo>
-                    <a:pt x="1289205" y="3015735"/>
-                  </a:lnTo>
-                  <a:lnTo>
-                    <a:pt x="1360827" y="3007614"/>
-                  </a:lnTo>
-                  <a:lnTo>
-                    <a:pt x="1432450" y="2999390"/>
-                  </a:lnTo>
-                  <a:lnTo>
-                    <a:pt x="1504073" y="2991061"/>
-                  </a:lnTo>
-                  <a:lnTo>
-                    <a:pt x="1575695" y="2982625"/>
-                  </a:lnTo>
-                  <a:lnTo>
-                    <a:pt x="1647318" y="2974083"/>
-                  </a:lnTo>
-                  <a:lnTo>
-                    <a:pt x="1718940" y="2965431"/>
-                  </a:lnTo>
-                  <a:lnTo>
-                    <a:pt x="1790563" y="2956669"/>
-                  </a:lnTo>
-                  <a:lnTo>
-                    <a:pt x="1862185" y="2947795"/>
-                  </a:lnTo>
-                  <a:lnTo>
-                    <a:pt x="1933808" y="2938808"/>
-                  </a:lnTo>
-                  <a:lnTo>
-                    <a:pt x="2005430" y="2929706"/>
-                  </a:lnTo>
-                  <a:lnTo>
-                    <a:pt x="2077053" y="2920488"/>
-                  </a:lnTo>
-                  <a:lnTo>
-                    <a:pt x="2148675" y="2911153"/>
-                  </a:lnTo>
-                  <a:lnTo>
-                    <a:pt x="2220298" y="2901699"/>
-                  </a:lnTo>
-                  <a:lnTo>
-                    <a:pt x="2291920" y="2892124"/>
-                  </a:lnTo>
-                  <a:lnTo>
-                    <a:pt x="2363543" y="2882427"/>
-                  </a:lnTo>
-                  <a:lnTo>
-                    <a:pt x="2435165" y="2872607"/>
-                  </a:lnTo>
-                  <a:lnTo>
-                    <a:pt x="2506788" y="2862661"/>
-                  </a:lnTo>
-                  <a:lnTo>
-                    <a:pt x="2578410" y="2852589"/>
-                  </a:lnTo>
-                  <a:lnTo>
-                    <a:pt x="2650033" y="2842388"/>
-                  </a:lnTo>
-                  <a:lnTo>
-                    <a:pt x="2721655" y="2832057"/>
-                  </a:lnTo>
-                  <a:lnTo>
-                    <a:pt x="2793278" y="2821594"/>
-                  </a:lnTo>
-                  <a:lnTo>
-                    <a:pt x="2864901" y="2810998"/>
-                  </a:lnTo>
-                  <a:lnTo>
-                    <a:pt x="2936523" y="2800267"/>
-                  </a:lnTo>
-                  <a:lnTo>
-                    <a:pt x="3008146" y="2789399"/>
-                  </a:lnTo>
-                  <a:lnTo>
-                    <a:pt x="3079768" y="2765718"/>
-                  </a:lnTo>
-                  <a:lnTo>
-                    <a:pt x="3151391" y="2722636"/>
-                  </a:lnTo>
-                  <a:lnTo>
-                    <a:pt x="3223013" y="2677462"/>
-                  </a:lnTo>
-                  <a:lnTo>
-                    <a:pt x="3294636" y="2630093"/>
-                  </a:lnTo>
-                  <a:lnTo>
-                    <a:pt x="3366258" y="2580423"/>
-                  </a:lnTo>
-                  <a:lnTo>
-                    <a:pt x="3437881" y="2528340"/>
-                  </a:lnTo>
-                  <a:lnTo>
-                    <a:pt x="3509503" y="2473728"/>
-                  </a:lnTo>
-                  <a:lnTo>
-                    <a:pt x="3581126" y="2416463"/>
-                  </a:lnTo>
-                  <a:lnTo>
-                    <a:pt x="3652748" y="2356416"/>
-                  </a:lnTo>
-                  <a:lnTo>
-                    <a:pt x="3724371" y="2293452"/>
-                  </a:lnTo>
-                  <a:lnTo>
-                    <a:pt x="3795993" y="2227430"/>
-                  </a:lnTo>
-                  <a:lnTo>
-                    <a:pt x="3867616" y="2158201"/>
-                  </a:lnTo>
-                  <a:lnTo>
-                    <a:pt x="3939238" y="2085609"/>
-                  </a:lnTo>
-                  <a:lnTo>
-                    <a:pt x="4010861" y="2009491"/>
-                  </a:lnTo>
-                  <a:lnTo>
-                    <a:pt x="4082483" y="1929676"/>
-                  </a:lnTo>
-                  <a:lnTo>
-                    <a:pt x="4154106" y="1845984"/>
-                  </a:lnTo>
-                  <a:lnTo>
-                    <a:pt x="4225729" y="1758226"/>
-                  </a:lnTo>
-                  <a:lnTo>
-                    <a:pt x="4297351" y="1666206"/>
-                  </a:lnTo>
-                  <a:lnTo>
-                    <a:pt x="4368974" y="1569716"/>
-                  </a:lnTo>
-                  <a:lnTo>
-                    <a:pt x="4440596" y="1468538"/>
-                  </a:lnTo>
-                  <a:lnTo>
-                    <a:pt x="4512219" y="1362447"/>
-                  </a:lnTo>
-                  <a:lnTo>
-                    <a:pt x="4583841" y="1251201"/>
-                  </a:lnTo>
-                  <a:lnTo>
-                    <a:pt x="4655464" y="1134552"/>
-                  </a:lnTo>
-                  <a:lnTo>
-                    <a:pt x="4727086" y="1012237"/>
-                  </a:lnTo>
-                  <a:lnTo>
-                    <a:pt x="4798709" y="883981"/>
-                  </a:lnTo>
-                  <a:lnTo>
-                    <a:pt x="4870331" y="749495"/>
-                  </a:lnTo>
-                  <a:lnTo>
-                    <a:pt x="4941954" y="608476"/>
-                  </a:lnTo>
-                  <a:lnTo>
-                    <a:pt x="5013576" y="460607"/>
-                  </a:lnTo>
-                  <a:lnTo>
-                    <a:pt x="5085199" y="305555"/>
-                  </a:lnTo>
-                  <a:lnTo>
-                    <a:pt x="5156821" y="142972"/>
+                    <a:pt x="71622" y="2993995"/>
+                  </a:lnTo>
+                  <a:lnTo>
+                    <a:pt x="143245" y="2987750"/>
+                  </a:lnTo>
+                  <a:lnTo>
+                    <a:pt x="214867" y="2981426"/>
+                  </a:lnTo>
+                  <a:lnTo>
+                    <a:pt x="286490" y="2975022"/>
+                  </a:lnTo>
+                  <a:lnTo>
+                    <a:pt x="358112" y="2968535"/>
+                  </a:lnTo>
+                  <a:lnTo>
+                    <a:pt x="429735" y="2961966"/>
+                  </a:lnTo>
+                  <a:lnTo>
+                    <a:pt x="501357" y="2955313"/>
+                  </a:lnTo>
+                  <a:lnTo>
+                    <a:pt x="572980" y="2948576"/>
+                  </a:lnTo>
+                  <a:lnTo>
+                    <a:pt x="644602" y="2941752"/>
+                  </a:lnTo>
+                  <a:lnTo>
+                    <a:pt x="716225" y="2934841"/>
+                  </a:lnTo>
+                  <a:lnTo>
+                    <a:pt x="787847" y="2927843"/>
+                  </a:lnTo>
+                  <a:lnTo>
+                    <a:pt x="859470" y="2920755"/>
+                  </a:lnTo>
+                  <a:lnTo>
+                    <a:pt x="931092" y="2913577"/>
+                  </a:lnTo>
+                  <a:lnTo>
+                    <a:pt x="1002715" y="2906307"/>
+                  </a:lnTo>
+                  <a:lnTo>
+                    <a:pt x="1074337" y="2898944"/>
+                  </a:lnTo>
+                  <a:lnTo>
+                    <a:pt x="1145960" y="2891488"/>
+                  </a:lnTo>
+                  <a:lnTo>
+                    <a:pt x="1217582" y="2883936"/>
+                  </a:lnTo>
+                  <a:lnTo>
+                    <a:pt x="1289205" y="2876289"/>
+                  </a:lnTo>
+                  <a:lnTo>
+                    <a:pt x="1360827" y="2868543"/>
+                  </a:lnTo>
+                  <a:lnTo>
+                    <a:pt x="1432450" y="2860699"/>
+                  </a:lnTo>
+                  <a:lnTo>
+                    <a:pt x="1504073" y="2852755"/>
+                  </a:lnTo>
+                  <a:lnTo>
+                    <a:pt x="1575695" y="2844710"/>
+                  </a:lnTo>
+                  <a:lnTo>
+                    <a:pt x="1647318" y="2836562"/>
+                  </a:lnTo>
+                  <a:lnTo>
+                    <a:pt x="1718940" y="2828310"/>
+                  </a:lnTo>
+                  <a:lnTo>
+                    <a:pt x="1790563" y="2819953"/>
+                  </a:lnTo>
+                  <a:lnTo>
+                    <a:pt x="1862185" y="2811490"/>
+                  </a:lnTo>
+                  <a:lnTo>
+                    <a:pt x="1933808" y="2802918"/>
+                  </a:lnTo>
+                  <a:lnTo>
+                    <a:pt x="2005430" y="2794238"/>
+                  </a:lnTo>
+                  <a:lnTo>
+                    <a:pt x="2077053" y="2785446"/>
+                  </a:lnTo>
+                  <a:lnTo>
+                    <a:pt x="2148675" y="2776543"/>
+                  </a:lnTo>
+                  <a:lnTo>
+                    <a:pt x="2220298" y="2767526"/>
+                  </a:lnTo>
+                  <a:lnTo>
+                    <a:pt x="2291920" y="2758393"/>
+                  </a:lnTo>
+                  <a:lnTo>
+                    <a:pt x="2363543" y="2749145"/>
+                  </a:lnTo>
+                  <a:lnTo>
+                    <a:pt x="2435165" y="2739779"/>
+                  </a:lnTo>
+                  <a:lnTo>
+                    <a:pt x="2506788" y="2730293"/>
+                  </a:lnTo>
+                  <a:lnTo>
+                    <a:pt x="2578410" y="2720686"/>
+                  </a:lnTo>
+                  <a:lnTo>
+                    <a:pt x="2650033" y="2710957"/>
+                  </a:lnTo>
+                  <a:lnTo>
+                    <a:pt x="2721655" y="2701104"/>
+                  </a:lnTo>
+                  <a:lnTo>
+                    <a:pt x="2793278" y="2691125"/>
+                  </a:lnTo>
+                  <a:lnTo>
+                    <a:pt x="2864901" y="2681019"/>
+                  </a:lnTo>
+                  <a:lnTo>
+                    <a:pt x="2936523" y="2670783"/>
+                  </a:lnTo>
+                  <a:lnTo>
+                    <a:pt x="3008146" y="2660418"/>
+                  </a:lnTo>
+                  <a:lnTo>
+                    <a:pt x="3079768" y="2637833"/>
+                  </a:lnTo>
+                  <a:lnTo>
+                    <a:pt x="3151391" y="2596743"/>
+                  </a:lnTo>
+                  <a:lnTo>
+                    <a:pt x="3223013" y="2553657"/>
+                  </a:lnTo>
+                  <a:lnTo>
+                    <a:pt x="3294636" y="2508478"/>
+                  </a:lnTo>
+                  <a:lnTo>
+                    <a:pt x="3366258" y="2461105"/>
+                  </a:lnTo>
+                  <a:lnTo>
+                    <a:pt x="3437881" y="2411431"/>
+                  </a:lnTo>
+                  <a:lnTo>
+                    <a:pt x="3509503" y="2359344"/>
+                  </a:lnTo>
+                  <a:lnTo>
+                    <a:pt x="3581126" y="2304726"/>
+                  </a:lnTo>
+                  <a:lnTo>
+                    <a:pt x="3652748" y="2247456"/>
+                  </a:lnTo>
+                  <a:lnTo>
+                    <a:pt x="3724371" y="2187404"/>
+                  </a:lnTo>
+                  <a:lnTo>
+                    <a:pt x="3795993" y="2124435"/>
+                  </a:lnTo>
+                  <a:lnTo>
+                    <a:pt x="3867616" y="2058407"/>
+                  </a:lnTo>
+                  <a:lnTo>
+                    <a:pt x="3939238" y="1989171"/>
+                  </a:lnTo>
+                  <a:lnTo>
+                    <a:pt x="4010861" y="1916573"/>
+                  </a:lnTo>
+                  <a:lnTo>
+                    <a:pt x="4082483" y="1840449"/>
+                  </a:lnTo>
+                  <a:lnTo>
+                    <a:pt x="4154106" y="1760626"/>
+                  </a:lnTo>
+                  <a:lnTo>
+                    <a:pt x="4225729" y="1676926"/>
+                  </a:lnTo>
+                  <a:lnTo>
+                    <a:pt x="4297351" y="1589161"/>
+                  </a:lnTo>
+                  <a:lnTo>
+                    <a:pt x="4368974" y="1497132"/>
+                  </a:lnTo>
+                  <a:lnTo>
+                    <a:pt x="4440596" y="1400634"/>
+                  </a:lnTo>
+                  <a:lnTo>
+                    <a:pt x="4512219" y="1299447"/>
+                  </a:lnTo>
+                  <a:lnTo>
+                    <a:pt x="4583841" y="1193346"/>
+                  </a:lnTo>
+                  <a:lnTo>
+                    <a:pt x="4655464" y="1082091"/>
+                  </a:lnTo>
+                  <a:lnTo>
+                    <a:pt x="4727086" y="965432"/>
+                  </a:lnTo>
+                  <a:lnTo>
+                    <a:pt x="4798709" y="843106"/>
+                  </a:lnTo>
+                  <a:lnTo>
+                    <a:pt x="4870331" y="714838"/>
+                  </a:lnTo>
+                  <a:lnTo>
+                    <a:pt x="4941954" y="580340"/>
+                  </a:lnTo>
+                  <a:lnTo>
+                    <a:pt x="5013576" y="439308"/>
+                  </a:lnTo>
+                  <a:lnTo>
+                    <a:pt x="5085199" y="291426"/>
+                  </a:lnTo>
+                  <a:lnTo>
+                    <a:pt x="5156821" y="136361"/>
                   </a:lnTo>
                   <a:lnTo>
                     <a:pt x="5216887" y="0"/>
@@ -3934,312 +3934,312 @@
           </p:nvSpPr>
           <p:spPr>
             <a:xfrm>
-              <a:off x="1172049" y="3771872"/>
-              <a:ext cx="7090630" cy="1661958"/>
+              <a:off x="1172049" y="3862098"/>
+              <a:ext cx="7090630" cy="1585109"/>
             </a:xfrm>
             <a:custGeom>
               <a:avLst/>
               <a:pathLst>
-                <a:path w="7090630" h="1661958">
+                <a:path w="7090630" h="1585109">
                   <a:moveTo>
                     <a:pt x="7090630" y="0"/>
                   </a:moveTo>
                   <a:lnTo>
-                    <a:pt x="7019007" y="22376"/>
-                  </a:lnTo>
-                  <a:lnTo>
-                    <a:pt x="6947385" y="44470"/>
-                  </a:lnTo>
-                  <a:lnTo>
-                    <a:pt x="6875762" y="66287"/>
-                  </a:lnTo>
-                  <a:lnTo>
-                    <a:pt x="6804139" y="87828"/>
-                  </a:lnTo>
-                  <a:lnTo>
-                    <a:pt x="6732517" y="109099"/>
-                  </a:lnTo>
-                  <a:lnTo>
-                    <a:pt x="6660894" y="130101"/>
-                  </a:lnTo>
-                  <a:lnTo>
-                    <a:pt x="6589272" y="150840"/>
-                  </a:lnTo>
-                  <a:lnTo>
-                    <a:pt x="6517649" y="171317"/>
-                  </a:lnTo>
-                  <a:lnTo>
-                    <a:pt x="6446027" y="191536"/>
-                  </a:lnTo>
-                  <a:lnTo>
-                    <a:pt x="6374404" y="211501"/>
-                  </a:lnTo>
-                  <a:lnTo>
-                    <a:pt x="6302782" y="231215"/>
-                  </a:lnTo>
-                  <a:lnTo>
-                    <a:pt x="6231159" y="250680"/>
-                  </a:lnTo>
-                  <a:lnTo>
-                    <a:pt x="6159537" y="269900"/>
-                  </a:lnTo>
-                  <a:lnTo>
-                    <a:pt x="6087914" y="288878"/>
-                  </a:lnTo>
-                  <a:lnTo>
-                    <a:pt x="6016292" y="307618"/>
-                  </a:lnTo>
-                  <a:lnTo>
-                    <a:pt x="5944669" y="326121"/>
-                  </a:lnTo>
-                  <a:lnTo>
-                    <a:pt x="5873047" y="344391"/>
-                  </a:lnTo>
-                  <a:lnTo>
-                    <a:pt x="5801424" y="362432"/>
-                  </a:lnTo>
-                  <a:lnTo>
-                    <a:pt x="5729802" y="380245"/>
-                  </a:lnTo>
-                  <a:lnTo>
-                    <a:pt x="5658179" y="397834"/>
-                  </a:lnTo>
-                  <a:lnTo>
-                    <a:pt x="5586557" y="415202"/>
-                  </a:lnTo>
-                  <a:lnTo>
-                    <a:pt x="5514934" y="432351"/>
-                  </a:lnTo>
-                  <a:lnTo>
-                    <a:pt x="5443311" y="449284"/>
-                  </a:lnTo>
-                  <a:lnTo>
-                    <a:pt x="5371689" y="466003"/>
-                  </a:lnTo>
-                  <a:lnTo>
-                    <a:pt x="5300066" y="482513"/>
-                  </a:lnTo>
-                  <a:lnTo>
-                    <a:pt x="5228444" y="498814"/>
-                  </a:lnTo>
-                  <a:lnTo>
-                    <a:pt x="5156821" y="514911"/>
-                  </a:lnTo>
-                  <a:lnTo>
-                    <a:pt x="5085199" y="530804"/>
-                  </a:lnTo>
-                  <a:lnTo>
-                    <a:pt x="5013576" y="546498"/>
-                  </a:lnTo>
-                  <a:lnTo>
-                    <a:pt x="4941954" y="561994"/>
-                  </a:lnTo>
-                  <a:lnTo>
-                    <a:pt x="4870331" y="577294"/>
-                  </a:lnTo>
-                  <a:lnTo>
-                    <a:pt x="4798709" y="592403"/>
-                  </a:lnTo>
-                  <a:lnTo>
-                    <a:pt x="4727086" y="607321"/>
-                  </a:lnTo>
-                  <a:lnTo>
-                    <a:pt x="4655464" y="622051"/>
-                  </a:lnTo>
-                  <a:lnTo>
-                    <a:pt x="4583841" y="636596"/>
-                  </a:lnTo>
-                  <a:lnTo>
-                    <a:pt x="4512219" y="650957"/>
-                  </a:lnTo>
-                  <a:lnTo>
-                    <a:pt x="4440596" y="665138"/>
-                  </a:lnTo>
-                  <a:lnTo>
-                    <a:pt x="4368974" y="679140"/>
-                  </a:lnTo>
-                  <a:lnTo>
-                    <a:pt x="4297351" y="692966"/>
-                  </a:lnTo>
-                  <a:lnTo>
-                    <a:pt x="4225729" y="706618"/>
-                  </a:lnTo>
-                  <a:lnTo>
-                    <a:pt x="4154106" y="720098"/>
-                  </a:lnTo>
-                  <a:lnTo>
-                    <a:pt x="4082483" y="733409"/>
-                  </a:lnTo>
-                  <a:lnTo>
-                    <a:pt x="4010861" y="746551"/>
-                  </a:lnTo>
-                  <a:lnTo>
-                    <a:pt x="3939238" y="759529"/>
-                  </a:lnTo>
-                  <a:lnTo>
-                    <a:pt x="3867616" y="772343"/>
-                  </a:lnTo>
-                  <a:lnTo>
-                    <a:pt x="3795993" y="784995"/>
-                  </a:lnTo>
-                  <a:lnTo>
-                    <a:pt x="3724371" y="797489"/>
-                  </a:lnTo>
-                  <a:lnTo>
-                    <a:pt x="3652748" y="809825"/>
-                  </a:lnTo>
-                  <a:lnTo>
-                    <a:pt x="3581126" y="822005"/>
-                  </a:lnTo>
-                  <a:lnTo>
-                    <a:pt x="3509503" y="834033"/>
-                  </a:lnTo>
-                  <a:lnTo>
-                    <a:pt x="3437881" y="845909"/>
-                  </a:lnTo>
-                  <a:lnTo>
-                    <a:pt x="3366258" y="857635"/>
-                  </a:lnTo>
-                  <a:lnTo>
-                    <a:pt x="3294636" y="869214"/>
-                  </a:lnTo>
-                  <a:lnTo>
-                    <a:pt x="3223013" y="880647"/>
-                  </a:lnTo>
-                  <a:lnTo>
-                    <a:pt x="3151391" y="891936"/>
-                  </a:lnTo>
-                  <a:lnTo>
-                    <a:pt x="3079768" y="903083"/>
-                  </a:lnTo>
-                  <a:lnTo>
-                    <a:pt x="3008146" y="931495"/>
-                  </a:lnTo>
-                  <a:lnTo>
-                    <a:pt x="2936523" y="970678"/>
-                  </a:lnTo>
-                  <a:lnTo>
-                    <a:pt x="2864901" y="1008046"/>
-                  </a:lnTo>
-                  <a:lnTo>
-                    <a:pt x="2793278" y="1043683"/>
-                  </a:lnTo>
-                  <a:lnTo>
-                    <a:pt x="2721655" y="1077669"/>
-                  </a:lnTo>
-                  <a:lnTo>
-                    <a:pt x="2650033" y="1110080"/>
-                  </a:lnTo>
-                  <a:lnTo>
-                    <a:pt x="2578410" y="1140990"/>
-                  </a:lnTo>
-                  <a:lnTo>
-                    <a:pt x="2506788" y="1170468"/>
-                  </a:lnTo>
-                  <a:lnTo>
-                    <a:pt x="2435165" y="1198581"/>
-                  </a:lnTo>
-                  <a:lnTo>
-                    <a:pt x="2363543" y="1225391"/>
-                  </a:lnTo>
-                  <a:lnTo>
-                    <a:pt x="2291920" y="1250960"/>
-                  </a:lnTo>
-                  <a:lnTo>
-                    <a:pt x="2220298" y="1275344"/>
-                  </a:lnTo>
-                  <a:lnTo>
-                    <a:pt x="2148675" y="1298598"/>
-                  </a:lnTo>
-                  <a:lnTo>
-                    <a:pt x="2077053" y="1320775"/>
-                  </a:lnTo>
-                  <a:lnTo>
-                    <a:pt x="2005430" y="1341925"/>
-                  </a:lnTo>
-                  <a:lnTo>
-                    <a:pt x="1933808" y="1362095"/>
-                  </a:lnTo>
-                  <a:lnTo>
-                    <a:pt x="1862185" y="1381331"/>
-                  </a:lnTo>
-                  <a:lnTo>
-                    <a:pt x="1790563" y="1399675"/>
-                  </a:lnTo>
-                  <a:lnTo>
-                    <a:pt x="1718940" y="1417170"/>
-                  </a:lnTo>
-                  <a:lnTo>
-                    <a:pt x="1647318" y="1433854"/>
-                  </a:lnTo>
-                  <a:lnTo>
-                    <a:pt x="1575695" y="1449766"/>
-                  </a:lnTo>
-                  <a:lnTo>
-                    <a:pt x="1504073" y="1464940"/>
-                  </a:lnTo>
-                  <a:lnTo>
-                    <a:pt x="1432450" y="1479412"/>
-                  </a:lnTo>
-                  <a:lnTo>
-                    <a:pt x="1360827" y="1493213"/>
-                  </a:lnTo>
-                  <a:lnTo>
-                    <a:pt x="1289205" y="1506374"/>
-                  </a:lnTo>
-                  <a:lnTo>
-                    <a:pt x="1217582" y="1518926"/>
-                  </a:lnTo>
-                  <a:lnTo>
-                    <a:pt x="1145960" y="1530897"/>
-                  </a:lnTo>
-                  <a:lnTo>
-                    <a:pt x="1074337" y="1542313"/>
-                  </a:lnTo>
-                  <a:lnTo>
-                    <a:pt x="1002715" y="1553200"/>
-                  </a:lnTo>
-                  <a:lnTo>
-                    <a:pt x="931092" y="1563583"/>
-                  </a:lnTo>
-                  <a:lnTo>
-                    <a:pt x="859470" y="1573485"/>
-                  </a:lnTo>
-                  <a:lnTo>
-                    <a:pt x="787847" y="1582928"/>
-                  </a:lnTo>
-                  <a:lnTo>
-                    <a:pt x="716225" y="1591934"/>
-                  </a:lnTo>
-                  <a:lnTo>
-                    <a:pt x="644602" y="1600522"/>
-                  </a:lnTo>
-                  <a:lnTo>
-                    <a:pt x="572980" y="1608713"/>
-                  </a:lnTo>
-                  <a:lnTo>
-                    <a:pt x="501357" y="1616524"/>
-                  </a:lnTo>
-                  <a:lnTo>
-                    <a:pt x="429735" y="1623974"/>
-                  </a:lnTo>
-                  <a:lnTo>
-                    <a:pt x="358112" y="1631078"/>
-                  </a:lnTo>
-                  <a:lnTo>
-                    <a:pt x="286490" y="1637853"/>
-                  </a:lnTo>
-                  <a:lnTo>
-                    <a:pt x="214867" y="1644315"/>
-                  </a:lnTo>
-                  <a:lnTo>
-                    <a:pt x="143245" y="1650477"/>
-                  </a:lnTo>
-                  <a:lnTo>
-                    <a:pt x="71622" y="1656353"/>
-                  </a:lnTo>
-                  <a:lnTo>
-                    <a:pt x="0" y="1661958"/>
+                    <a:pt x="7019007" y="21341"/>
+                  </a:lnTo>
+                  <a:lnTo>
+                    <a:pt x="6947385" y="42414"/>
+                  </a:lnTo>
+                  <a:lnTo>
+                    <a:pt x="6875762" y="63221"/>
+                  </a:lnTo>
+                  <a:lnTo>
+                    <a:pt x="6804139" y="83767"/>
+                  </a:lnTo>
+                  <a:lnTo>
+                    <a:pt x="6732517" y="104054"/>
+                  </a:lnTo>
+                  <a:lnTo>
+                    <a:pt x="6660894" y="124086"/>
+                  </a:lnTo>
+                  <a:lnTo>
+                    <a:pt x="6589272" y="143865"/>
+                  </a:lnTo>
+                  <a:lnTo>
+                    <a:pt x="6517649" y="163395"/>
+                  </a:lnTo>
+                  <a:lnTo>
+                    <a:pt x="6446027" y="182680"/>
+                  </a:lnTo>
+                  <a:lnTo>
+                    <a:pt x="6374404" y="201721"/>
+                  </a:lnTo>
+                  <a:lnTo>
+                    <a:pt x="6302782" y="220523"/>
+                  </a:lnTo>
+                  <a:lnTo>
+                    <a:pt x="6231159" y="239088"/>
+                  </a:lnTo>
+                  <a:lnTo>
+                    <a:pt x="6159537" y="257420"/>
+                  </a:lnTo>
+                  <a:lnTo>
+                    <a:pt x="6087914" y="275521"/>
+                  </a:lnTo>
+                  <a:lnTo>
+                    <a:pt x="6016292" y="293393"/>
+                  </a:lnTo>
+                  <a:lnTo>
+                    <a:pt x="5944669" y="311041"/>
+                  </a:lnTo>
+                  <a:lnTo>
+                    <a:pt x="5873047" y="328467"/>
+                  </a:lnTo>
+                  <a:lnTo>
+                    <a:pt x="5801424" y="345673"/>
+                  </a:lnTo>
+                  <a:lnTo>
+                    <a:pt x="5729802" y="362663"/>
+                  </a:lnTo>
+                  <a:lnTo>
+                    <a:pt x="5658179" y="379438"/>
+                  </a:lnTo>
+                  <a:lnTo>
+                    <a:pt x="5586557" y="396003"/>
+                  </a:lnTo>
+                  <a:lnTo>
+                    <a:pt x="5514934" y="412359"/>
+                  </a:lnTo>
+                  <a:lnTo>
+                    <a:pt x="5443311" y="428509"/>
+                  </a:lnTo>
+                  <a:lnTo>
+                    <a:pt x="5371689" y="444456"/>
+                  </a:lnTo>
+                  <a:lnTo>
+                    <a:pt x="5300066" y="460202"/>
+                  </a:lnTo>
+                  <a:lnTo>
+                    <a:pt x="5228444" y="475749"/>
+                  </a:lnTo>
+                  <a:lnTo>
+                    <a:pt x="5156821" y="491101"/>
+                  </a:lnTo>
+                  <a:lnTo>
+                    <a:pt x="5085199" y="506260"/>
+                  </a:lnTo>
+                  <a:lnTo>
+                    <a:pt x="5013576" y="521228"/>
+                  </a:lnTo>
+                  <a:lnTo>
+                    <a:pt x="4941954" y="536007"/>
+                  </a:lnTo>
+                  <a:lnTo>
+                    <a:pt x="4870331" y="550601"/>
+                  </a:lnTo>
+                  <a:lnTo>
+                    <a:pt x="4798709" y="565010"/>
+                  </a:lnTo>
+                  <a:lnTo>
+                    <a:pt x="4727086" y="579238"/>
+                  </a:lnTo>
+                  <a:lnTo>
+                    <a:pt x="4655464" y="593287"/>
+                  </a:lnTo>
+                  <a:lnTo>
+                    <a:pt x="4583841" y="607160"/>
+                  </a:lnTo>
+                  <a:lnTo>
+                    <a:pt x="4512219" y="620857"/>
+                  </a:lnTo>
+                  <a:lnTo>
+                    <a:pt x="4440596" y="634382"/>
+                  </a:lnTo>
+                  <a:lnTo>
+                    <a:pt x="4368974" y="647737"/>
+                  </a:lnTo>
+                  <a:lnTo>
+                    <a:pt x="4297351" y="660924"/>
+                  </a:lnTo>
+                  <a:lnTo>
+                    <a:pt x="4225729" y="673944"/>
+                  </a:lnTo>
+                  <a:lnTo>
+                    <a:pt x="4154106" y="686801"/>
+                  </a:lnTo>
+                  <a:lnTo>
+                    <a:pt x="4082483" y="699496"/>
+                  </a:lnTo>
+                  <a:lnTo>
+                    <a:pt x="4010861" y="712031"/>
+                  </a:lnTo>
+                  <a:lnTo>
+                    <a:pt x="3939238" y="724408"/>
+                  </a:lnTo>
+                  <a:lnTo>
+                    <a:pt x="3867616" y="736630"/>
+                  </a:lnTo>
+                  <a:lnTo>
+                    <a:pt x="3795993" y="748697"/>
+                  </a:lnTo>
+                  <a:lnTo>
+                    <a:pt x="3724371" y="760613"/>
+                  </a:lnTo>
+                  <a:lnTo>
+                    <a:pt x="3652748" y="772379"/>
+                  </a:lnTo>
+                  <a:lnTo>
+                    <a:pt x="3581126" y="783996"/>
+                  </a:lnTo>
+                  <a:lnTo>
+                    <a:pt x="3509503" y="795467"/>
+                  </a:lnTo>
+                  <a:lnTo>
+                    <a:pt x="3437881" y="806794"/>
+                  </a:lnTo>
+                  <a:lnTo>
+                    <a:pt x="3366258" y="817978"/>
+                  </a:lnTo>
+                  <a:lnTo>
+                    <a:pt x="3294636" y="829022"/>
+                  </a:lnTo>
+                  <a:lnTo>
+                    <a:pt x="3223013" y="839926"/>
+                  </a:lnTo>
+                  <a:lnTo>
+                    <a:pt x="3151391" y="850693"/>
+                  </a:lnTo>
+                  <a:lnTo>
+                    <a:pt x="3079768" y="861325"/>
+                  </a:lnTo>
+                  <a:lnTo>
+                    <a:pt x="3008146" y="888423"/>
+                  </a:lnTo>
+                  <a:lnTo>
+                    <a:pt x="2936523" y="925794"/>
+                  </a:lnTo>
+                  <a:lnTo>
+                    <a:pt x="2864901" y="961434"/>
+                  </a:lnTo>
+                  <a:lnTo>
+                    <a:pt x="2793278" y="995423"/>
+                  </a:lnTo>
+                  <a:lnTo>
+                    <a:pt x="2721655" y="1027838"/>
+                  </a:lnTo>
+                  <a:lnTo>
+                    <a:pt x="2650033" y="1058750"/>
+                  </a:lnTo>
+                  <a:lnTo>
+                    <a:pt x="2578410" y="1088231"/>
+                  </a:lnTo>
+                  <a:lnTo>
+                    <a:pt x="2506788" y="1116346"/>
+                  </a:lnTo>
+                  <a:lnTo>
+                    <a:pt x="2435165" y="1143159"/>
+                  </a:lnTo>
+                  <a:lnTo>
+                    <a:pt x="2363543" y="1168730"/>
+                  </a:lnTo>
+                  <a:lnTo>
+                    <a:pt x="2291920" y="1193116"/>
+                  </a:lnTo>
+                  <a:lnTo>
+                    <a:pt x="2220298" y="1216372"/>
+                  </a:lnTo>
+                  <a:lnTo>
+                    <a:pt x="2148675" y="1238551"/>
+                  </a:lnTo>
+                  <a:lnTo>
+                    <a:pt x="2077053" y="1259703"/>
+                  </a:lnTo>
+                  <a:lnTo>
+                    <a:pt x="2005430" y="1279875"/>
+                  </a:lnTo>
+                  <a:lnTo>
+                    <a:pt x="1933808" y="1299112"/>
+                  </a:lnTo>
+                  <a:lnTo>
+                    <a:pt x="1862185" y="1317458"/>
+                  </a:lnTo>
+                  <a:lnTo>
+                    <a:pt x="1790563" y="1334955"/>
+                  </a:lnTo>
+                  <a:lnTo>
+                    <a:pt x="1718940" y="1351641"/>
+                  </a:lnTo>
+                  <a:lnTo>
+                    <a:pt x="1647318" y="1367554"/>
+                  </a:lnTo>
+                  <a:lnTo>
+                    <a:pt x="1575695" y="1382729"/>
+                  </a:lnTo>
+                  <a:lnTo>
+                    <a:pt x="1504073" y="1397202"/>
+                  </a:lnTo>
+                  <a:lnTo>
+                    <a:pt x="1432450" y="1411004"/>
+                  </a:lnTo>
+                  <a:lnTo>
+                    <a:pt x="1360827" y="1424167"/>
+                  </a:lnTo>
+                  <a:lnTo>
+                    <a:pt x="1289205" y="1436720"/>
+                  </a:lnTo>
+                  <a:lnTo>
+                    <a:pt x="1217582" y="1448692"/>
+                  </a:lnTo>
+                  <a:lnTo>
+                    <a:pt x="1145960" y="1460109"/>
+                  </a:lnTo>
+                  <a:lnTo>
+                    <a:pt x="1074337" y="1470997"/>
+                  </a:lnTo>
+                  <a:lnTo>
+                    <a:pt x="1002715" y="1481381"/>
+                  </a:lnTo>
+                  <a:lnTo>
+                    <a:pt x="931092" y="1491284"/>
+                  </a:lnTo>
+                  <a:lnTo>
+                    <a:pt x="859470" y="1500728"/>
+                  </a:lnTo>
+                  <a:lnTo>
+                    <a:pt x="787847" y="1509734"/>
+                  </a:lnTo>
+                  <a:lnTo>
+                    <a:pt x="716225" y="1518323"/>
+                  </a:lnTo>
+                  <a:lnTo>
+                    <a:pt x="644602" y="1526515"/>
+                  </a:lnTo>
+                  <a:lnTo>
+                    <a:pt x="572980" y="1534327"/>
+                  </a:lnTo>
+                  <a:lnTo>
+                    <a:pt x="501357" y="1541777"/>
+                  </a:lnTo>
+                  <a:lnTo>
+                    <a:pt x="429735" y="1548882"/>
+                  </a:lnTo>
+                  <a:lnTo>
+                    <a:pt x="358112" y="1555658"/>
+                  </a:lnTo>
+                  <a:lnTo>
+                    <a:pt x="286490" y="1562120"/>
+                  </a:lnTo>
+                  <a:lnTo>
+                    <a:pt x="214867" y="1568282"/>
+                  </a:lnTo>
+                  <a:lnTo>
+                    <a:pt x="143245" y="1574159"/>
+                  </a:lnTo>
+                  <a:lnTo>
+                    <a:pt x="71622" y="1579764"/>
+                  </a:lnTo>
+                  <a:lnTo>
+                    <a:pt x="0" y="1585109"/>
                   </a:lnTo>
                 </a:path>
               </a:pathLst>
@@ -4259,285 +4259,285 @@
           </p:nvSpPr>
           <p:spPr>
             <a:xfrm>
-              <a:off x="1172049" y="1896563"/>
-              <a:ext cx="6470242" cy="3410777"/>
+              <a:off x="1172049" y="2073503"/>
+              <a:ext cx="6470242" cy="3253064"/>
             </a:xfrm>
             <a:custGeom>
               <a:avLst/>
               <a:pathLst>
-                <a:path w="6470242" h="3410777">
+                <a:path w="6470242" h="3253064">
                   <a:moveTo>
-                    <a:pt x="0" y="3410777"/>
+                    <a:pt x="0" y="3253064"/>
                   </a:moveTo>
                   <a:lnTo>
-                    <a:pt x="71622" y="3403398"/>
-                  </a:lnTo>
-                  <a:lnTo>
-                    <a:pt x="143245" y="3395795"/>
-                  </a:lnTo>
-                  <a:lnTo>
-                    <a:pt x="214867" y="3387959"/>
-                  </a:lnTo>
-                  <a:lnTo>
-                    <a:pt x="286490" y="3379884"/>
-                  </a:lnTo>
-                  <a:lnTo>
-                    <a:pt x="358112" y="3371563"/>
-                  </a:lnTo>
-                  <a:lnTo>
-                    <a:pt x="429735" y="3362989"/>
-                  </a:lnTo>
-                  <a:lnTo>
-                    <a:pt x="501357" y="3354152"/>
-                  </a:lnTo>
-                  <a:lnTo>
-                    <a:pt x="572980" y="3345046"/>
-                  </a:lnTo>
-                  <a:lnTo>
-                    <a:pt x="644602" y="3335662"/>
-                  </a:lnTo>
-                  <a:lnTo>
-                    <a:pt x="716225" y="3325992"/>
-                  </a:lnTo>
-                  <a:lnTo>
-                    <a:pt x="787847" y="3316027"/>
-                  </a:lnTo>
-                  <a:lnTo>
-                    <a:pt x="859470" y="3305758"/>
-                  </a:lnTo>
-                  <a:lnTo>
-                    <a:pt x="931092" y="3295176"/>
-                  </a:lnTo>
-                  <a:lnTo>
-                    <a:pt x="1002715" y="3284271"/>
-                  </a:lnTo>
-                  <a:lnTo>
-                    <a:pt x="1074337" y="3273033"/>
-                  </a:lnTo>
-                  <a:lnTo>
-                    <a:pt x="1145960" y="3261452"/>
-                  </a:lnTo>
-                  <a:lnTo>
-                    <a:pt x="1217582" y="3249518"/>
-                  </a:lnTo>
-                  <a:lnTo>
-                    <a:pt x="1289205" y="3237220"/>
-                  </a:lnTo>
-                  <a:lnTo>
-                    <a:pt x="1360827" y="3224547"/>
-                  </a:lnTo>
-                  <a:lnTo>
-                    <a:pt x="1432450" y="3211487"/>
-                  </a:lnTo>
-                  <a:lnTo>
-                    <a:pt x="1504073" y="3198029"/>
-                  </a:lnTo>
-                  <a:lnTo>
-                    <a:pt x="1575695" y="3184160"/>
-                  </a:lnTo>
-                  <a:lnTo>
-                    <a:pt x="1647318" y="3169868"/>
-                  </a:lnTo>
-                  <a:lnTo>
-                    <a:pt x="1718940" y="3155140"/>
-                  </a:lnTo>
-                  <a:lnTo>
-                    <a:pt x="1790563" y="3139963"/>
-                  </a:lnTo>
-                  <a:lnTo>
-                    <a:pt x="1862185" y="3124323"/>
-                  </a:lnTo>
-                  <a:lnTo>
-                    <a:pt x="1933808" y="3108206"/>
-                  </a:lnTo>
-                  <a:lnTo>
-                    <a:pt x="2005430" y="3091597"/>
-                  </a:lnTo>
-                  <a:lnTo>
-                    <a:pt x="2077053" y="3074481"/>
-                  </a:lnTo>
-                  <a:lnTo>
-                    <a:pt x="2148675" y="3056843"/>
-                  </a:lnTo>
-                  <a:lnTo>
-                    <a:pt x="2220298" y="3038667"/>
-                  </a:lnTo>
-                  <a:lnTo>
-                    <a:pt x="2291920" y="3019937"/>
-                  </a:lnTo>
-                  <a:lnTo>
-                    <a:pt x="2363543" y="3000635"/>
-                  </a:lnTo>
-                  <a:lnTo>
-                    <a:pt x="2435165" y="2980744"/>
-                  </a:lnTo>
-                  <a:lnTo>
-                    <a:pt x="2506788" y="2960247"/>
-                  </a:lnTo>
-                  <a:lnTo>
-                    <a:pt x="2578410" y="2939124"/>
-                  </a:lnTo>
-                  <a:lnTo>
-                    <a:pt x="2650033" y="2917357"/>
-                  </a:lnTo>
-                  <a:lnTo>
-                    <a:pt x="2721655" y="2894926"/>
-                  </a:lnTo>
-                  <a:lnTo>
-                    <a:pt x="2793278" y="2871810"/>
-                  </a:lnTo>
-                  <a:lnTo>
-                    <a:pt x="2864901" y="2847990"/>
-                  </a:lnTo>
-                  <a:lnTo>
-                    <a:pt x="2936523" y="2823442"/>
-                  </a:lnTo>
-                  <a:lnTo>
-                    <a:pt x="3008146" y="2798146"/>
-                  </a:lnTo>
-                  <a:lnTo>
-                    <a:pt x="3079768" y="2772078"/>
-                  </a:lnTo>
-                  <a:lnTo>
-                    <a:pt x="3151391" y="2745215"/>
-                  </a:lnTo>
-                  <a:lnTo>
-                    <a:pt x="3223013" y="2717532"/>
-                  </a:lnTo>
-                  <a:lnTo>
-                    <a:pt x="3294636" y="2689005"/>
-                  </a:lnTo>
-                  <a:lnTo>
-                    <a:pt x="3366258" y="2659608"/>
-                  </a:lnTo>
-                  <a:lnTo>
-                    <a:pt x="3437881" y="2629313"/>
-                  </a:lnTo>
-                  <a:lnTo>
-                    <a:pt x="3509503" y="2598095"/>
-                  </a:lnTo>
-                  <a:lnTo>
-                    <a:pt x="3581126" y="2565924"/>
-                  </a:lnTo>
-                  <a:lnTo>
-                    <a:pt x="3652748" y="2532772"/>
-                  </a:lnTo>
-                  <a:lnTo>
-                    <a:pt x="3724371" y="2498608"/>
-                  </a:lnTo>
-                  <a:lnTo>
-                    <a:pt x="3795993" y="2463402"/>
-                  </a:lnTo>
-                  <a:lnTo>
-                    <a:pt x="3867616" y="2427122"/>
-                  </a:lnTo>
-                  <a:lnTo>
-                    <a:pt x="3939238" y="2389736"/>
-                  </a:lnTo>
-                  <a:lnTo>
-                    <a:pt x="4010861" y="2351209"/>
-                  </a:lnTo>
-                  <a:lnTo>
-                    <a:pt x="4082483" y="2311506"/>
-                  </a:lnTo>
-                  <a:lnTo>
-                    <a:pt x="4154106" y="2270592"/>
-                  </a:lnTo>
-                  <a:lnTo>
-                    <a:pt x="4225729" y="2228430"/>
-                  </a:lnTo>
-                  <a:lnTo>
-                    <a:pt x="4297351" y="2184982"/>
-                  </a:lnTo>
-                  <a:lnTo>
-                    <a:pt x="4368974" y="2140209"/>
-                  </a:lnTo>
-                  <a:lnTo>
-                    <a:pt x="4440596" y="2094069"/>
-                  </a:lnTo>
-                  <a:lnTo>
-                    <a:pt x="4512219" y="2046522"/>
-                  </a:lnTo>
-                  <a:lnTo>
-                    <a:pt x="4583841" y="1997525"/>
-                  </a:lnTo>
-                  <a:lnTo>
-                    <a:pt x="4655464" y="1947033"/>
-                  </a:lnTo>
-                  <a:lnTo>
-                    <a:pt x="4727086" y="1895000"/>
-                  </a:lnTo>
-                  <a:lnTo>
-                    <a:pt x="4798709" y="1841380"/>
-                  </a:lnTo>
-                  <a:lnTo>
-                    <a:pt x="4870331" y="1786124"/>
-                  </a:lnTo>
-                  <a:lnTo>
-                    <a:pt x="4941954" y="1729183"/>
-                  </a:lnTo>
-                  <a:lnTo>
-                    <a:pt x="5013576" y="1670504"/>
-                  </a:lnTo>
-                  <a:lnTo>
-                    <a:pt x="5085199" y="1610036"/>
-                  </a:lnTo>
-                  <a:lnTo>
-                    <a:pt x="5156821" y="1547722"/>
-                  </a:lnTo>
-                  <a:lnTo>
-                    <a:pt x="5228444" y="1483508"/>
-                  </a:lnTo>
-                  <a:lnTo>
-                    <a:pt x="5300066" y="1417335"/>
-                  </a:lnTo>
-                  <a:lnTo>
-                    <a:pt x="5371689" y="1349143"/>
-                  </a:lnTo>
-                  <a:lnTo>
-                    <a:pt x="5443311" y="1278871"/>
-                  </a:lnTo>
-                  <a:lnTo>
-                    <a:pt x="5514934" y="1206455"/>
-                  </a:lnTo>
-                  <a:lnTo>
-                    <a:pt x="5586557" y="1131829"/>
-                  </a:lnTo>
-                  <a:lnTo>
-                    <a:pt x="5658179" y="1054928"/>
-                  </a:lnTo>
-                  <a:lnTo>
-                    <a:pt x="5729802" y="975680"/>
-                  </a:lnTo>
-                  <a:lnTo>
-                    <a:pt x="5801424" y="894014"/>
-                  </a:lnTo>
-                  <a:lnTo>
-                    <a:pt x="5873047" y="809858"/>
-                  </a:lnTo>
-                  <a:lnTo>
-                    <a:pt x="5944669" y="723133"/>
-                  </a:lnTo>
-                  <a:lnTo>
-                    <a:pt x="6016292" y="633764"/>
-                  </a:lnTo>
-                  <a:lnTo>
-                    <a:pt x="6087914" y="541668"/>
-                  </a:lnTo>
-                  <a:lnTo>
-                    <a:pt x="6159537" y="446762"/>
-                  </a:lnTo>
-                  <a:lnTo>
-                    <a:pt x="6231159" y="348961"/>
-                  </a:lnTo>
-                  <a:lnTo>
-                    <a:pt x="6302782" y="248176"/>
-                  </a:lnTo>
-                  <a:lnTo>
-                    <a:pt x="6374404" y="144317"/>
-                  </a:lnTo>
-                  <a:lnTo>
-                    <a:pt x="6446027" y="37289"/>
+                    <a:pt x="71622" y="3246026"/>
+                  </a:lnTo>
+                  <a:lnTo>
+                    <a:pt x="143245" y="3238774"/>
+                  </a:lnTo>
+                  <a:lnTo>
+                    <a:pt x="214867" y="3231301"/>
+                  </a:lnTo>
+                  <a:lnTo>
+                    <a:pt x="286490" y="3223600"/>
+                  </a:lnTo>
+                  <a:lnTo>
+                    <a:pt x="358112" y="3215664"/>
+                  </a:lnTo>
+                  <a:lnTo>
+                    <a:pt x="429735" y="3207485"/>
+                  </a:lnTo>
+                  <a:lnTo>
+                    <a:pt x="501357" y="3199057"/>
+                  </a:lnTo>
+                  <a:lnTo>
+                    <a:pt x="572980" y="3190372"/>
+                  </a:lnTo>
+                  <a:lnTo>
+                    <a:pt x="644602" y="3181423"/>
+                  </a:lnTo>
+                  <a:lnTo>
+                    <a:pt x="716225" y="3172200"/>
+                  </a:lnTo>
+                  <a:lnTo>
+                    <a:pt x="787847" y="3162695"/>
+                  </a:lnTo>
+                  <a:lnTo>
+                    <a:pt x="859470" y="3152901"/>
+                  </a:lnTo>
+                  <a:lnTo>
+                    <a:pt x="931092" y="3142808"/>
+                  </a:lnTo>
+                  <a:lnTo>
+                    <a:pt x="1002715" y="3132407"/>
+                  </a:lnTo>
+                  <a:lnTo>
+                    <a:pt x="1074337" y="3121689"/>
+                  </a:lnTo>
+                  <a:lnTo>
+                    <a:pt x="1145960" y="3110644"/>
+                  </a:lnTo>
+                  <a:lnTo>
+                    <a:pt x="1217582" y="3099262"/>
+                  </a:lnTo>
+                  <a:lnTo>
+                    <a:pt x="1289205" y="3087532"/>
+                  </a:lnTo>
+                  <a:lnTo>
+                    <a:pt x="1360827" y="3075445"/>
+                  </a:lnTo>
+                  <a:lnTo>
+                    <a:pt x="1432450" y="3062989"/>
+                  </a:lnTo>
+                  <a:lnTo>
+                    <a:pt x="1504073" y="3050153"/>
+                  </a:lnTo>
+                  <a:lnTo>
+                    <a:pt x="1575695" y="3036926"/>
+                  </a:lnTo>
+                  <a:lnTo>
+                    <a:pt x="1647318" y="3023295"/>
+                  </a:lnTo>
+                  <a:lnTo>
+                    <a:pt x="1718940" y="3009248"/>
+                  </a:lnTo>
+                  <a:lnTo>
+                    <a:pt x="1790563" y="2994772"/>
+                  </a:lnTo>
+                  <a:lnTo>
+                    <a:pt x="1862185" y="2979855"/>
+                  </a:lnTo>
+                  <a:lnTo>
+                    <a:pt x="1933808" y="2964483"/>
+                  </a:lnTo>
+                  <a:lnTo>
+                    <a:pt x="2005430" y="2948642"/>
+                  </a:lnTo>
+                  <a:lnTo>
+                    <a:pt x="2077053" y="2932318"/>
+                  </a:lnTo>
+                  <a:lnTo>
+                    <a:pt x="2148675" y="2915496"/>
+                  </a:lnTo>
+                  <a:lnTo>
+                    <a:pt x="2220298" y="2898160"/>
+                  </a:lnTo>
+                  <a:lnTo>
+                    <a:pt x="2291920" y="2880296"/>
+                  </a:lnTo>
+                  <a:lnTo>
+                    <a:pt x="2363543" y="2861887"/>
+                  </a:lnTo>
+                  <a:lnTo>
+                    <a:pt x="2435165" y="2842916"/>
+                  </a:lnTo>
+                  <a:lnTo>
+                    <a:pt x="2506788" y="2823366"/>
+                  </a:lnTo>
+                  <a:lnTo>
+                    <a:pt x="2578410" y="2803220"/>
+                  </a:lnTo>
+                  <a:lnTo>
+                    <a:pt x="2650033" y="2782459"/>
+                  </a:lnTo>
+                  <a:lnTo>
+                    <a:pt x="2721655" y="2761065"/>
+                  </a:lnTo>
+                  <a:lnTo>
+                    <a:pt x="2793278" y="2739019"/>
+                  </a:lnTo>
+                  <a:lnTo>
+                    <a:pt x="2864901" y="2716300"/>
+                  </a:lnTo>
+                  <a:lnTo>
+                    <a:pt x="2936523" y="2692887"/>
+                  </a:lnTo>
+                  <a:lnTo>
+                    <a:pt x="3008146" y="2668761"/>
+                  </a:lnTo>
+                  <a:lnTo>
+                    <a:pt x="3079768" y="2643898"/>
+                  </a:lnTo>
+                  <a:lnTo>
+                    <a:pt x="3151391" y="2618277"/>
+                  </a:lnTo>
+                  <a:lnTo>
+                    <a:pt x="3223013" y="2591875"/>
+                  </a:lnTo>
+                  <a:lnTo>
+                    <a:pt x="3294636" y="2564666"/>
+                  </a:lnTo>
+                  <a:lnTo>
+                    <a:pt x="3366258" y="2536628"/>
+                  </a:lnTo>
+                  <a:lnTo>
+                    <a:pt x="3437881" y="2507735"/>
+                  </a:lnTo>
+                  <a:lnTo>
+                    <a:pt x="3509503" y="2477960"/>
+                  </a:lnTo>
+                  <a:lnTo>
+                    <a:pt x="3581126" y="2447277"/>
+                  </a:lnTo>
+                  <a:lnTo>
+                    <a:pt x="3652748" y="2415657"/>
+                  </a:lnTo>
+                  <a:lnTo>
+                    <a:pt x="3724371" y="2383073"/>
+                  </a:lnTo>
+                  <a:lnTo>
+                    <a:pt x="3795993" y="2349495"/>
+                  </a:lnTo>
+                  <a:lnTo>
+                    <a:pt x="3867616" y="2314893"/>
+                  </a:lnTo>
+                  <a:lnTo>
+                    <a:pt x="3939238" y="2279235"/>
+                  </a:lnTo>
+                  <a:lnTo>
+                    <a:pt x="4010861" y="2242490"/>
+                  </a:lnTo>
+                  <a:lnTo>
+                    <a:pt x="4082483" y="2204623"/>
+                  </a:lnTo>
+                  <a:lnTo>
+                    <a:pt x="4154106" y="2165601"/>
+                  </a:lnTo>
+                  <a:lnTo>
+                    <a:pt x="4225729" y="2125389"/>
+                  </a:lnTo>
+                  <a:lnTo>
+                    <a:pt x="4297351" y="2083950"/>
+                  </a:lnTo>
+                  <a:lnTo>
+                    <a:pt x="4368974" y="2041246"/>
+                  </a:lnTo>
+                  <a:lnTo>
+                    <a:pt x="4440596" y="1997240"/>
+                  </a:lnTo>
+                  <a:lnTo>
+                    <a:pt x="4512219" y="1951892"/>
+                  </a:lnTo>
+                  <a:lnTo>
+                    <a:pt x="4583841" y="1905160"/>
+                  </a:lnTo>
+                  <a:lnTo>
+                    <a:pt x="4655464" y="1857002"/>
+                  </a:lnTo>
+                  <a:lnTo>
+                    <a:pt x="4727086" y="1807376"/>
+                  </a:lnTo>
+                  <a:lnTo>
+                    <a:pt x="4798709" y="1756235"/>
+                  </a:lnTo>
+                  <a:lnTo>
+                    <a:pt x="4870331" y="1703535"/>
+                  </a:lnTo>
+                  <a:lnTo>
+                    <a:pt x="4941954" y="1649226"/>
+                  </a:lnTo>
+                  <a:lnTo>
+                    <a:pt x="5013576" y="1593261"/>
+                  </a:lnTo>
+                  <a:lnTo>
+                    <a:pt x="5085199" y="1535588"/>
+                  </a:lnTo>
+                  <a:lnTo>
+                    <a:pt x="5156821" y="1476156"/>
+                  </a:lnTo>
+                  <a:lnTo>
+                    <a:pt x="5228444" y="1414911"/>
+                  </a:lnTo>
+                  <a:lnTo>
+                    <a:pt x="5300066" y="1351798"/>
+                  </a:lnTo>
+                  <a:lnTo>
+                    <a:pt x="5371689" y="1286759"/>
+                  </a:lnTo>
+                  <a:lnTo>
+                    <a:pt x="5443311" y="1219736"/>
+                  </a:lnTo>
+                  <a:lnTo>
+                    <a:pt x="5514934" y="1150669"/>
+                  </a:lnTo>
+                  <a:lnTo>
+                    <a:pt x="5586557" y="1079494"/>
+                  </a:lnTo>
+                  <a:lnTo>
+                    <a:pt x="5658179" y="1006148"/>
+                  </a:lnTo>
+                  <a:lnTo>
+                    <a:pt x="5729802" y="930565"/>
+                  </a:lnTo>
+                  <a:lnTo>
+                    <a:pt x="5801424" y="852675"/>
+                  </a:lnTo>
+                  <a:lnTo>
+                    <a:pt x="5873047" y="772410"/>
+                  </a:lnTo>
+                  <a:lnTo>
+                    <a:pt x="5944669" y="689696"/>
+                  </a:lnTo>
+                  <a:lnTo>
+                    <a:pt x="6016292" y="604459"/>
+                  </a:lnTo>
+                  <a:lnTo>
+                    <a:pt x="6087914" y="516621"/>
+                  </a:lnTo>
+                  <a:lnTo>
+                    <a:pt x="6159537" y="426104"/>
+                  </a:lnTo>
+                  <a:lnTo>
+                    <a:pt x="6231159" y="332825"/>
+                  </a:lnTo>
+                  <a:lnTo>
+                    <a:pt x="6302782" y="236701"/>
+                  </a:lnTo>
+                  <a:lnTo>
+                    <a:pt x="6374404" y="137644"/>
+                  </a:lnTo>
+                  <a:lnTo>
+                    <a:pt x="6446027" y="35565"/>
                   </a:lnTo>
                   <a:lnTo>
                     <a:pt x="6470242" y="0"/>
@@ -4569,7 +4569,7 @@
           </p:nvSpPr>
           <p:spPr>
             <a:xfrm>
-              <a:off x="817517" y="4679530"/>
+              <a:off x="817517" y="4727786"/>
               <a:ext cx="7799693" cy="0"/>
             </a:xfrm>
             <a:custGeom>
@@ -4612,15 +4612,15 @@
           </p:nvSpPr>
           <p:spPr>
             <a:xfrm>
-              <a:off x="4222163" y="1896563"/>
-              <a:ext cx="0" cy="3826579"/>
+              <a:off x="4222163" y="2073503"/>
+              <a:ext cx="0" cy="3649639"/>
             </a:xfrm>
             <a:custGeom>
               <a:avLst/>
               <a:pathLst>
-                <a:path w="0" h="3826579">
+                <a:path w="0" h="3649639">
                   <a:moveTo>
-                    <a:pt x="0" y="3826579"/>
+                    <a:pt x="0" y="3649639"/>
                   </a:moveTo>
                   <a:lnTo>
                     <a:pt x="0" y="0"/>
@@ -4655,7 +4655,7 @@
           </p:nvSpPr>
           <p:spPr>
             <a:xfrm>
-              <a:off x="692708" y="5509156"/>
+              <a:off x="692708" y="5517199"/>
               <a:ext cx="62179" cy="80101"/>
             </a:xfrm>
             <a:prstGeom prst="rect">
@@ -4701,7 +4701,7 @@
           </p:nvSpPr>
           <p:spPr>
             <a:xfrm>
-              <a:off x="692708" y="4639479"/>
+              <a:off x="692708" y="4687735"/>
               <a:ext cx="62179" cy="80101"/>
             </a:xfrm>
             <a:prstGeom prst="rect">
@@ -4747,7 +4747,7 @@
           </p:nvSpPr>
           <p:spPr>
             <a:xfrm>
-              <a:off x="692708" y="3769802"/>
+              <a:off x="692708" y="3858272"/>
               <a:ext cx="62179" cy="80101"/>
             </a:xfrm>
             <a:prstGeom prst="rect">
@@ -4793,7 +4793,7 @@
           </p:nvSpPr>
           <p:spPr>
             <a:xfrm>
-              <a:off x="692708" y="2900125"/>
+              <a:off x="692708" y="3028808"/>
               <a:ext cx="62179" cy="80101"/>
             </a:xfrm>
             <a:prstGeom prst="rect">
@@ -4839,7 +4839,7 @@
           </p:nvSpPr>
           <p:spPr>
             <a:xfrm>
-              <a:off x="692708" y="2030448"/>
+              <a:off x="692708" y="2199345"/>
               <a:ext cx="62179" cy="80101"/>
             </a:xfrm>
             <a:prstGeom prst="rect">
@@ -5207,7 +5207,7 @@
           </p:nvSpPr>
           <p:spPr>
             <a:xfrm rot="-5400000">
-              <a:off x="68446" y="3759743"/>
+              <a:off x="68446" y="3848213"/>
               <a:ext cx="1016904" cy="100218"/>
             </a:xfrm>
             <a:prstGeom prst="rect">
@@ -5248,6 +5248,52 @@
         <p:sp>
           <p:nvSpPr>
             <p:cNvPr id="43" name="tx43"/>
+            <p:cNvSpPr/>
+            <p:nvPr/>
+          </p:nvSpPr>
+          <p:spPr>
+            <a:xfrm>
+              <a:off x="817517" y="1896563"/>
+              <a:ext cx="4500128" cy="82021"/>
+            </a:xfrm>
+            <a:prstGeom prst="rect">
+              <a:avLst/>
+            </a:prstGeom>
+            <a:noFill/>
+          </p:spPr>
+          <p:txBody>
+            <a:bodyPr lIns="0" rIns="0" tIns="0" bIns="0" anchorCtr="1" anchor="ctr" wrap="none"/>
+            <a:lstStyle/>
+            <a:p>
+              <a:pPr algn="l" marL="0" marR="0" indent="0">
+                <a:lnSpc>
+                  <a:spcPts val="900"/>
+                </a:lnSpc>
+                <a:spcBef>
+                  <a:spcPts val="0"/>
+                </a:spcBef>
+                <a:spcAft>
+                  <a:spcPts val="0"/>
+                </a:spcAft>
+              </a:pPr>
+              <a:r>
+                <a:rPr sz="900">
+                  <a:solidFill>
+                    <a:srgbClr val="404040">
+                      <a:alpha val="100000"/>
+                    </a:srgbClr>
+                  </a:solidFill>
+                  <a:latin typeface="Helvetica"/>
+                  <a:cs typeface="Helvetica"/>
+                </a:rPr>
+                <a:t>subHR = 1.33 (95% CI 1.13-1.57), p = &lt;0.001   (per 25 mg increase in dose discrepancy)</a:t>
+              </a:r>
+            </a:p>
+          </p:txBody>
+        </p:sp>
+        <p:sp>
+          <p:nvSpPr>
+            <p:cNvPr id="44" name="tx44"/>
             <p:cNvSpPr/>
             <p:nvPr/>
           </p:nvSpPr>

--- a/docs/plots/carbo/jx_carbo_linsubhr_dosedisc_anyhosp.pptx
+++ b/docs/plots/carbo/jx_carbo_linsubhr_dosedisc_anyhosp.pptx
@@ -2271,26 +2271,26 @@
           </p:nvSpPr>
           <p:spPr>
             <a:xfrm>
-              <a:off x="817517" y="5142518"/>
-              <a:ext cx="7799693" cy="0"/>
+              <a:off x="915645" y="5071743"/>
+              <a:ext cx="7682587" cy="0"/>
             </a:xfrm>
             <a:custGeom>
               <a:avLst/>
               <a:pathLst>
-                <a:path w="7799693" h="0">
+                <a:path w="7682587" h="0">
                   <a:moveTo>
                     <a:pt x="0" y="0"/>
                   </a:moveTo>
                   <a:lnTo>
-                    <a:pt x="7799693" y="0"/>
-                  </a:lnTo>
-                  <a:lnTo>
-                    <a:pt x="7799693" y="0"/>
+                    <a:pt x="7682587" y="0"/>
+                  </a:lnTo>
+                  <a:lnTo>
+                    <a:pt x="7682587" y="0"/>
                   </a:lnTo>
                 </a:path>
               </a:pathLst>
             </a:custGeom>
-            <a:ln w="6775" cap="flat">
+            <a:ln w="8623" cap="flat">
               <a:solidFill>
                 <a:srgbClr val="EBEBEB">
                   <a:alpha val="100000"/>
@@ -2314,26 +2314,26 @@
           </p:nvSpPr>
           <p:spPr>
             <a:xfrm>
-              <a:off x="817517" y="4313054"/>
-              <a:ext cx="7799693" cy="0"/>
+              <a:off x="915645" y="4298074"/>
+              <a:ext cx="7682587" cy="0"/>
             </a:xfrm>
             <a:custGeom>
               <a:avLst/>
               <a:pathLst>
-                <a:path w="7799693" h="0">
+                <a:path w="7682587" h="0">
                   <a:moveTo>
                     <a:pt x="0" y="0"/>
                   </a:moveTo>
                   <a:lnTo>
-                    <a:pt x="7799693" y="0"/>
-                  </a:lnTo>
-                  <a:lnTo>
-                    <a:pt x="7799693" y="0"/>
+                    <a:pt x="7682587" y="0"/>
+                  </a:lnTo>
+                  <a:lnTo>
+                    <a:pt x="7682587" y="0"/>
                   </a:lnTo>
                 </a:path>
               </a:pathLst>
             </a:custGeom>
-            <a:ln w="6775" cap="flat">
+            <a:ln w="8623" cap="flat">
               <a:solidFill>
                 <a:srgbClr val="EBEBEB">
                   <a:alpha val="100000"/>
@@ -2357,26 +2357,26 @@
           </p:nvSpPr>
           <p:spPr>
             <a:xfrm>
-              <a:off x="817517" y="3483591"/>
-              <a:ext cx="7799693" cy="0"/>
+              <a:off x="915645" y="3524405"/>
+              <a:ext cx="7682587" cy="0"/>
             </a:xfrm>
             <a:custGeom>
               <a:avLst/>
               <a:pathLst>
-                <a:path w="7799693" h="0">
+                <a:path w="7682587" h="0">
                   <a:moveTo>
                     <a:pt x="0" y="0"/>
                   </a:moveTo>
                   <a:lnTo>
-                    <a:pt x="7799693" y="0"/>
-                  </a:lnTo>
-                  <a:lnTo>
-                    <a:pt x="7799693" y="0"/>
+                    <a:pt x="7682587" y="0"/>
+                  </a:lnTo>
+                  <a:lnTo>
+                    <a:pt x="7682587" y="0"/>
                   </a:lnTo>
                 </a:path>
               </a:pathLst>
             </a:custGeom>
-            <a:ln w="6775" cap="flat">
+            <a:ln w="8623" cap="flat">
               <a:solidFill>
                 <a:srgbClr val="EBEBEB">
                   <a:alpha val="100000"/>
@@ -2400,26 +2400,26 @@
           </p:nvSpPr>
           <p:spPr>
             <a:xfrm>
-              <a:off x="817517" y="2654127"/>
-              <a:ext cx="7799693" cy="0"/>
+              <a:off x="915645" y="2750737"/>
+              <a:ext cx="7682587" cy="0"/>
             </a:xfrm>
             <a:custGeom>
               <a:avLst/>
               <a:pathLst>
-                <a:path w="7799693" h="0">
+                <a:path w="7682587" h="0">
                   <a:moveTo>
                     <a:pt x="0" y="0"/>
                   </a:moveTo>
                   <a:lnTo>
-                    <a:pt x="7799693" y="0"/>
-                  </a:lnTo>
-                  <a:lnTo>
-                    <a:pt x="7799693" y="0"/>
+                    <a:pt x="7682587" y="0"/>
+                  </a:lnTo>
+                  <a:lnTo>
+                    <a:pt x="7682587" y="0"/>
                   </a:lnTo>
                 </a:path>
               </a:pathLst>
             </a:custGeom>
-            <a:ln w="6775" cap="flat">
+            <a:ln w="8623" cap="flat">
               <a:solidFill>
                 <a:srgbClr val="EBEBEB">
                   <a:alpha val="100000"/>
@@ -2443,15 +2443,15 @@
           </p:nvSpPr>
           <p:spPr>
             <a:xfrm>
-              <a:off x="2122745" y="2073503"/>
-              <a:ext cx="0" cy="3649639"/>
+              <a:off x="2201275" y="2209169"/>
+              <a:ext cx="0" cy="3404141"/>
             </a:xfrm>
             <a:custGeom>
               <a:avLst/>
               <a:pathLst>
-                <a:path w="0" h="3649639">
+                <a:path w="0" h="3404141">
                   <a:moveTo>
-                    <a:pt x="0" y="3649639"/>
+                    <a:pt x="0" y="3404141"/>
                   </a:moveTo>
                   <a:lnTo>
                     <a:pt x="0" y="0"/>
@@ -2462,7 +2462,7 @@
                 </a:path>
               </a:pathLst>
             </a:custGeom>
-            <a:ln w="6775" cap="flat">
+            <a:ln w="8623" cap="flat">
               <a:solidFill>
                 <a:srgbClr val="EBEBEB">
                   <a:alpha val="100000"/>
@@ -2486,15 +2486,15 @@
           </p:nvSpPr>
           <p:spPr>
             <a:xfrm>
-              <a:off x="3487174" y="2073503"/>
-              <a:ext cx="0" cy="3649639"/>
+              <a:off x="3545219" y="2209169"/>
+              <a:ext cx="0" cy="3404141"/>
             </a:xfrm>
             <a:custGeom>
               <a:avLst/>
               <a:pathLst>
-                <a:path w="0" h="3649639">
+                <a:path w="0" h="3404141">
                   <a:moveTo>
-                    <a:pt x="0" y="3649639"/>
+                    <a:pt x="0" y="3404141"/>
                   </a:moveTo>
                   <a:lnTo>
                     <a:pt x="0" y="0"/>
@@ -2505,7 +2505,7 @@
                 </a:path>
               </a:pathLst>
             </a:custGeom>
-            <a:ln w="6775" cap="flat">
+            <a:ln w="8623" cap="flat">
               <a:solidFill>
                 <a:srgbClr val="EBEBEB">
                   <a:alpha val="100000"/>
@@ -2529,15 +2529,15 @@
           </p:nvSpPr>
           <p:spPr>
             <a:xfrm>
-              <a:off x="4851604" y="2073503"/>
-              <a:ext cx="0" cy="3649639"/>
+              <a:off x="4889163" y="2209169"/>
+              <a:ext cx="0" cy="3404141"/>
             </a:xfrm>
             <a:custGeom>
               <a:avLst/>
               <a:pathLst>
-                <a:path w="0" h="3649639">
+                <a:path w="0" h="3404141">
                   <a:moveTo>
-                    <a:pt x="0" y="3649639"/>
+                    <a:pt x="0" y="3404141"/>
                   </a:moveTo>
                   <a:lnTo>
                     <a:pt x="0" y="0"/>
@@ -2548,7 +2548,7 @@
                 </a:path>
               </a:pathLst>
             </a:custGeom>
-            <a:ln w="6775" cap="flat">
+            <a:ln w="8623" cap="flat">
               <a:solidFill>
                 <a:srgbClr val="EBEBEB">
                   <a:alpha val="100000"/>
@@ -2572,15 +2572,15 @@
           </p:nvSpPr>
           <p:spPr>
             <a:xfrm>
-              <a:off x="6216034" y="2073503"/>
-              <a:ext cx="0" cy="3649639"/>
+              <a:off x="6233107" y="2209169"/>
+              <a:ext cx="0" cy="3404141"/>
             </a:xfrm>
             <a:custGeom>
               <a:avLst/>
               <a:pathLst>
-                <a:path w="0" h="3649639">
+                <a:path w="0" h="3404141">
                   <a:moveTo>
-                    <a:pt x="0" y="3649639"/>
+                    <a:pt x="0" y="3404141"/>
                   </a:moveTo>
                   <a:lnTo>
                     <a:pt x="0" y="0"/>
@@ -2591,7 +2591,7 @@
                 </a:path>
               </a:pathLst>
             </a:custGeom>
-            <a:ln w="6775" cap="flat">
+            <a:ln w="8623" cap="flat">
               <a:solidFill>
                 <a:srgbClr val="EBEBEB">
                   <a:alpha val="100000"/>
@@ -2615,15 +2615,15 @@
           </p:nvSpPr>
           <p:spPr>
             <a:xfrm>
-              <a:off x="7580464" y="2073503"/>
-              <a:ext cx="0" cy="3649639"/>
+              <a:off x="7577051" y="2209169"/>
+              <a:ext cx="0" cy="3404141"/>
             </a:xfrm>
             <a:custGeom>
               <a:avLst/>
               <a:pathLst>
-                <a:path w="0" h="3649639">
+                <a:path w="0" h="3404141">
                   <a:moveTo>
-                    <a:pt x="0" y="3649639"/>
+                    <a:pt x="0" y="3404141"/>
                   </a:moveTo>
                   <a:lnTo>
                     <a:pt x="0" y="0"/>
@@ -2634,7 +2634,7 @@
                 </a:path>
               </a:pathLst>
             </a:custGeom>
-            <a:ln w="6775" cap="flat">
+            <a:ln w="8623" cap="flat">
               <a:solidFill>
                 <a:srgbClr val="EBEBEB">
                   <a:alpha val="100000"/>
@@ -2658,26 +2658,26 @@
           </p:nvSpPr>
           <p:spPr>
             <a:xfrm>
-              <a:off x="817517" y="5557249"/>
-              <a:ext cx="7799693" cy="0"/>
+              <a:off x="915645" y="5458577"/>
+              <a:ext cx="7682587" cy="0"/>
             </a:xfrm>
             <a:custGeom>
               <a:avLst/>
               <a:pathLst>
-                <a:path w="7799693" h="0">
+                <a:path w="7682587" h="0">
                   <a:moveTo>
                     <a:pt x="0" y="0"/>
                   </a:moveTo>
                   <a:lnTo>
-                    <a:pt x="7799693" y="0"/>
-                  </a:lnTo>
-                  <a:lnTo>
-                    <a:pt x="7799693" y="0"/>
+                    <a:pt x="7682587" y="0"/>
+                  </a:lnTo>
+                  <a:lnTo>
+                    <a:pt x="7682587" y="0"/>
                   </a:lnTo>
                 </a:path>
               </a:pathLst>
             </a:custGeom>
-            <a:ln w="13550" cap="flat">
+            <a:ln w="17246" cap="flat">
               <a:solidFill>
                 <a:srgbClr val="EBEBEB">
                   <a:alpha val="100000"/>
@@ -2701,26 +2701,26 @@
           </p:nvSpPr>
           <p:spPr>
             <a:xfrm>
-              <a:off x="817517" y="4727786"/>
-              <a:ext cx="7799693" cy="0"/>
+              <a:off x="915645" y="4684908"/>
+              <a:ext cx="7682587" cy="0"/>
             </a:xfrm>
             <a:custGeom>
               <a:avLst/>
               <a:pathLst>
-                <a:path w="7799693" h="0">
+                <a:path w="7682587" h="0">
                   <a:moveTo>
                     <a:pt x="0" y="0"/>
                   </a:moveTo>
                   <a:lnTo>
-                    <a:pt x="7799693" y="0"/>
-                  </a:lnTo>
-                  <a:lnTo>
-                    <a:pt x="7799693" y="0"/>
+                    <a:pt x="7682587" y="0"/>
+                  </a:lnTo>
+                  <a:lnTo>
+                    <a:pt x="7682587" y="0"/>
                   </a:lnTo>
                 </a:path>
               </a:pathLst>
             </a:custGeom>
-            <a:ln w="13550" cap="flat">
+            <a:ln w="17246" cap="flat">
               <a:solidFill>
                 <a:srgbClr val="EBEBEB">
                   <a:alpha val="100000"/>
@@ -2744,26 +2744,26 @@
           </p:nvSpPr>
           <p:spPr>
             <a:xfrm>
-              <a:off x="817517" y="3898322"/>
-              <a:ext cx="7799693" cy="0"/>
+              <a:off x="915645" y="3911240"/>
+              <a:ext cx="7682587" cy="0"/>
             </a:xfrm>
             <a:custGeom>
               <a:avLst/>
               <a:pathLst>
-                <a:path w="7799693" h="0">
+                <a:path w="7682587" h="0">
                   <a:moveTo>
                     <a:pt x="0" y="0"/>
                   </a:moveTo>
                   <a:lnTo>
-                    <a:pt x="7799693" y="0"/>
-                  </a:lnTo>
-                  <a:lnTo>
-                    <a:pt x="7799693" y="0"/>
+                    <a:pt x="7682587" y="0"/>
+                  </a:lnTo>
+                  <a:lnTo>
+                    <a:pt x="7682587" y="0"/>
                   </a:lnTo>
                 </a:path>
               </a:pathLst>
             </a:custGeom>
-            <a:ln w="13550" cap="flat">
+            <a:ln w="17246" cap="flat">
               <a:solidFill>
                 <a:srgbClr val="EBEBEB">
                   <a:alpha val="100000"/>
@@ -2787,26 +2787,26 @@
           </p:nvSpPr>
           <p:spPr>
             <a:xfrm>
-              <a:off x="817517" y="3068859"/>
-              <a:ext cx="7799693" cy="0"/>
+              <a:off x="915645" y="3137571"/>
+              <a:ext cx="7682587" cy="0"/>
             </a:xfrm>
             <a:custGeom>
               <a:avLst/>
               <a:pathLst>
-                <a:path w="7799693" h="0">
+                <a:path w="7682587" h="0">
                   <a:moveTo>
                     <a:pt x="0" y="0"/>
                   </a:moveTo>
                   <a:lnTo>
-                    <a:pt x="7799693" y="0"/>
-                  </a:lnTo>
-                  <a:lnTo>
-                    <a:pt x="7799693" y="0"/>
+                    <a:pt x="7682587" y="0"/>
+                  </a:lnTo>
+                  <a:lnTo>
+                    <a:pt x="7682587" y="0"/>
                   </a:lnTo>
                 </a:path>
               </a:pathLst>
             </a:custGeom>
-            <a:ln w="13550" cap="flat">
+            <a:ln w="17246" cap="flat">
               <a:solidFill>
                 <a:srgbClr val="EBEBEB">
                   <a:alpha val="100000"/>
@@ -2830,26 +2830,26 @@
           </p:nvSpPr>
           <p:spPr>
             <a:xfrm>
-              <a:off x="817517" y="2239395"/>
-              <a:ext cx="7799693" cy="0"/>
+              <a:off x="915645" y="2363903"/>
+              <a:ext cx="7682587" cy="0"/>
             </a:xfrm>
             <a:custGeom>
               <a:avLst/>
               <a:pathLst>
-                <a:path w="7799693" h="0">
+                <a:path w="7682587" h="0">
                   <a:moveTo>
                     <a:pt x="0" y="0"/>
                   </a:moveTo>
                   <a:lnTo>
-                    <a:pt x="7799693" y="0"/>
-                  </a:lnTo>
-                  <a:lnTo>
-                    <a:pt x="7799693" y="0"/>
+                    <a:pt x="7682587" y="0"/>
+                  </a:lnTo>
+                  <a:lnTo>
+                    <a:pt x="7682587" y="0"/>
                   </a:lnTo>
                 </a:path>
               </a:pathLst>
             </a:custGeom>
-            <a:ln w="13550" cap="flat">
+            <a:ln w="17246" cap="flat">
               <a:solidFill>
                 <a:srgbClr val="EBEBEB">
                   <a:alpha val="100000"/>
@@ -2873,15 +2873,15 @@
           </p:nvSpPr>
           <p:spPr>
             <a:xfrm>
-              <a:off x="1440530" y="2073503"/>
-              <a:ext cx="0" cy="3649639"/>
+              <a:off x="1529303" y="2209169"/>
+              <a:ext cx="0" cy="3404141"/>
             </a:xfrm>
             <a:custGeom>
               <a:avLst/>
               <a:pathLst>
-                <a:path w="0" h="3649639">
+                <a:path w="0" h="3404141">
                   <a:moveTo>
-                    <a:pt x="0" y="3649639"/>
+                    <a:pt x="0" y="3404141"/>
                   </a:moveTo>
                   <a:lnTo>
                     <a:pt x="0" y="0"/>
@@ -2892,7 +2892,7 @@
                 </a:path>
               </a:pathLst>
             </a:custGeom>
-            <a:ln w="13550" cap="flat">
+            <a:ln w="17246" cap="flat">
               <a:solidFill>
                 <a:srgbClr val="EBEBEB">
                   <a:alpha val="100000"/>
@@ -2916,15 +2916,15 @@
           </p:nvSpPr>
           <p:spPr>
             <a:xfrm>
-              <a:off x="2804959" y="2073503"/>
-              <a:ext cx="0" cy="3649639"/>
+              <a:off x="2873247" y="2209169"/>
+              <a:ext cx="0" cy="3404141"/>
             </a:xfrm>
             <a:custGeom>
               <a:avLst/>
               <a:pathLst>
-                <a:path w="0" h="3649639">
+                <a:path w="0" h="3404141">
                   <a:moveTo>
-                    <a:pt x="0" y="3649639"/>
+                    <a:pt x="0" y="3404141"/>
                   </a:moveTo>
                   <a:lnTo>
                     <a:pt x="0" y="0"/>
@@ -2935,7 +2935,7 @@
                 </a:path>
               </a:pathLst>
             </a:custGeom>
-            <a:ln w="13550" cap="flat">
+            <a:ln w="17246" cap="flat">
               <a:solidFill>
                 <a:srgbClr val="EBEBEB">
                   <a:alpha val="100000"/>
@@ -2959,15 +2959,15 @@
           </p:nvSpPr>
           <p:spPr>
             <a:xfrm>
-              <a:off x="4169389" y="2073503"/>
-              <a:ext cx="0" cy="3649639"/>
+              <a:off x="4217191" y="2209169"/>
+              <a:ext cx="0" cy="3404141"/>
             </a:xfrm>
             <a:custGeom>
               <a:avLst/>
               <a:pathLst>
-                <a:path w="0" h="3649639">
+                <a:path w="0" h="3404141">
                   <a:moveTo>
-                    <a:pt x="0" y="3649639"/>
+                    <a:pt x="0" y="3404141"/>
                   </a:moveTo>
                   <a:lnTo>
                     <a:pt x="0" y="0"/>
@@ -2978,7 +2978,7 @@
                 </a:path>
               </a:pathLst>
             </a:custGeom>
-            <a:ln w="13550" cap="flat">
+            <a:ln w="17246" cap="flat">
               <a:solidFill>
                 <a:srgbClr val="EBEBEB">
                   <a:alpha val="100000"/>
@@ -3002,15 +3002,15 @@
           </p:nvSpPr>
           <p:spPr>
             <a:xfrm>
-              <a:off x="5533819" y="2073503"/>
-              <a:ext cx="0" cy="3649639"/>
+              <a:off x="5561135" y="2209169"/>
+              <a:ext cx="0" cy="3404141"/>
             </a:xfrm>
             <a:custGeom>
               <a:avLst/>
               <a:pathLst>
-                <a:path w="0" h="3649639">
+                <a:path w="0" h="3404141">
                   <a:moveTo>
-                    <a:pt x="0" y="3649639"/>
+                    <a:pt x="0" y="3404141"/>
                   </a:moveTo>
                   <a:lnTo>
                     <a:pt x="0" y="0"/>
@@ -3021,7 +3021,7 @@
                 </a:path>
               </a:pathLst>
             </a:custGeom>
-            <a:ln w="13550" cap="flat">
+            <a:ln w="17246" cap="flat">
               <a:solidFill>
                 <a:srgbClr val="EBEBEB">
                   <a:alpha val="100000"/>
@@ -3045,15 +3045,15 @@
           </p:nvSpPr>
           <p:spPr>
             <a:xfrm>
-              <a:off x="6898249" y="2073503"/>
-              <a:ext cx="0" cy="3649639"/>
+              <a:off x="6905079" y="2209169"/>
+              <a:ext cx="0" cy="3404141"/>
             </a:xfrm>
             <a:custGeom>
               <a:avLst/>
               <a:pathLst>
-                <a:path w="0" h="3649639">
+                <a:path w="0" h="3404141">
                   <a:moveTo>
-                    <a:pt x="0" y="3649639"/>
+                    <a:pt x="0" y="3404141"/>
                   </a:moveTo>
                   <a:lnTo>
                     <a:pt x="0" y="0"/>
@@ -3064,7 +3064,7 @@
                 </a:path>
               </a:pathLst>
             </a:custGeom>
-            <a:ln w="13550" cap="flat">
+            <a:ln w="17246" cap="flat">
               <a:solidFill>
                 <a:srgbClr val="EBEBEB">
                   <a:alpha val="100000"/>
@@ -3088,15 +3088,15 @@
           </p:nvSpPr>
           <p:spPr>
             <a:xfrm>
-              <a:off x="8262679" y="2073503"/>
-              <a:ext cx="0" cy="3649639"/>
+              <a:off x="8249023" y="2209169"/>
+              <a:ext cx="0" cy="3404141"/>
             </a:xfrm>
             <a:custGeom>
               <a:avLst/>
               <a:pathLst>
-                <a:path w="0" h="3649639">
+                <a:path w="0" h="3404141">
                   <a:moveTo>
-                    <a:pt x="0" y="3649639"/>
+                    <a:pt x="0" y="3404141"/>
                   </a:moveTo>
                   <a:lnTo>
                     <a:pt x="0" y="0"/>
@@ -3107,7 +3107,7 @@
                 </a:path>
               </a:pathLst>
             </a:custGeom>
-            <a:ln w="13550" cap="flat">
+            <a:ln w="17246" cap="flat">
               <a:solidFill>
                 <a:srgbClr val="EBEBEB">
                   <a:alpha val="100000"/>
@@ -3131,537 +3131,537 @@
           </p:nvSpPr>
           <p:spPr>
             <a:xfrm>
-              <a:off x="1172049" y="2073503"/>
-              <a:ext cx="7090630" cy="3373705"/>
+              <a:off x="1264853" y="2209169"/>
+              <a:ext cx="6984170" cy="3146768"/>
             </a:xfrm>
             <a:custGeom>
               <a:avLst/>
               <a:pathLst>
-                <a:path w="7090630" h="3373705">
+                <a:path w="6984170" h="3146768">
                   <a:moveTo>
-                    <a:pt x="0" y="3000161"/>
+                    <a:pt x="0" y="2798351"/>
                   </a:moveTo>
                   <a:lnTo>
-                    <a:pt x="71622" y="2993995"/>
-                  </a:lnTo>
-                  <a:lnTo>
-                    <a:pt x="143245" y="2987750"/>
-                  </a:lnTo>
-                  <a:lnTo>
-                    <a:pt x="214867" y="2981426"/>
-                  </a:lnTo>
-                  <a:lnTo>
-                    <a:pt x="286490" y="2975022"/>
-                  </a:lnTo>
-                  <a:lnTo>
-                    <a:pt x="358112" y="2968535"/>
-                  </a:lnTo>
-                  <a:lnTo>
-                    <a:pt x="429735" y="2961966"/>
-                  </a:lnTo>
-                  <a:lnTo>
-                    <a:pt x="501357" y="2955313"/>
-                  </a:lnTo>
-                  <a:lnTo>
-                    <a:pt x="572980" y="2948576"/>
-                  </a:lnTo>
-                  <a:lnTo>
-                    <a:pt x="644602" y="2941752"/>
-                  </a:lnTo>
-                  <a:lnTo>
-                    <a:pt x="716225" y="2934841"/>
-                  </a:lnTo>
-                  <a:lnTo>
-                    <a:pt x="787847" y="2927843"/>
-                  </a:lnTo>
-                  <a:lnTo>
-                    <a:pt x="859470" y="2920755"/>
-                  </a:lnTo>
-                  <a:lnTo>
-                    <a:pt x="931092" y="2913577"/>
-                  </a:lnTo>
-                  <a:lnTo>
-                    <a:pt x="1002715" y="2906307"/>
-                  </a:lnTo>
-                  <a:lnTo>
-                    <a:pt x="1074337" y="2898944"/>
-                  </a:lnTo>
-                  <a:lnTo>
-                    <a:pt x="1145960" y="2891488"/>
-                  </a:lnTo>
-                  <a:lnTo>
-                    <a:pt x="1217582" y="2883936"/>
-                  </a:lnTo>
-                  <a:lnTo>
-                    <a:pt x="1289205" y="2876289"/>
-                  </a:lnTo>
-                  <a:lnTo>
-                    <a:pt x="1360827" y="2868543"/>
-                  </a:lnTo>
-                  <a:lnTo>
-                    <a:pt x="1432450" y="2860699"/>
-                  </a:lnTo>
-                  <a:lnTo>
-                    <a:pt x="1504073" y="2852755"/>
-                  </a:lnTo>
-                  <a:lnTo>
-                    <a:pt x="1575695" y="2844710"/>
-                  </a:lnTo>
-                  <a:lnTo>
-                    <a:pt x="1647318" y="2836562"/>
-                  </a:lnTo>
-                  <a:lnTo>
-                    <a:pt x="1718940" y="2828310"/>
-                  </a:lnTo>
-                  <a:lnTo>
-                    <a:pt x="1790563" y="2819953"/>
-                  </a:lnTo>
-                  <a:lnTo>
-                    <a:pt x="1862185" y="2811490"/>
-                  </a:lnTo>
-                  <a:lnTo>
-                    <a:pt x="1933808" y="2802918"/>
-                  </a:lnTo>
-                  <a:lnTo>
-                    <a:pt x="2005430" y="2794238"/>
-                  </a:lnTo>
-                  <a:lnTo>
-                    <a:pt x="2077053" y="2785446"/>
-                  </a:lnTo>
-                  <a:lnTo>
-                    <a:pt x="2148675" y="2776543"/>
-                  </a:lnTo>
-                  <a:lnTo>
-                    <a:pt x="2220298" y="2767526"/>
-                  </a:lnTo>
-                  <a:lnTo>
-                    <a:pt x="2291920" y="2758393"/>
-                  </a:lnTo>
-                  <a:lnTo>
-                    <a:pt x="2363543" y="2749145"/>
-                  </a:lnTo>
-                  <a:lnTo>
-                    <a:pt x="2435165" y="2739779"/>
-                  </a:lnTo>
-                  <a:lnTo>
-                    <a:pt x="2506788" y="2730293"/>
-                  </a:lnTo>
-                  <a:lnTo>
-                    <a:pt x="2578410" y="2720686"/>
-                  </a:lnTo>
-                  <a:lnTo>
-                    <a:pt x="2650033" y="2710957"/>
-                  </a:lnTo>
-                  <a:lnTo>
-                    <a:pt x="2721655" y="2701104"/>
-                  </a:lnTo>
-                  <a:lnTo>
-                    <a:pt x="2793278" y="2691125"/>
-                  </a:lnTo>
-                  <a:lnTo>
-                    <a:pt x="2864901" y="2681019"/>
-                  </a:lnTo>
-                  <a:lnTo>
-                    <a:pt x="2936523" y="2670783"/>
-                  </a:lnTo>
-                  <a:lnTo>
-                    <a:pt x="3008146" y="2660418"/>
-                  </a:lnTo>
-                  <a:lnTo>
-                    <a:pt x="3079768" y="2637833"/>
-                  </a:lnTo>
-                  <a:lnTo>
-                    <a:pt x="3151391" y="2596743"/>
-                  </a:lnTo>
-                  <a:lnTo>
-                    <a:pt x="3223013" y="2553657"/>
-                  </a:lnTo>
-                  <a:lnTo>
-                    <a:pt x="3294636" y="2508478"/>
-                  </a:lnTo>
-                  <a:lnTo>
-                    <a:pt x="3366258" y="2461105"/>
-                  </a:lnTo>
-                  <a:lnTo>
-                    <a:pt x="3437881" y="2411431"/>
-                  </a:lnTo>
-                  <a:lnTo>
-                    <a:pt x="3509503" y="2359344"/>
-                  </a:lnTo>
-                  <a:lnTo>
-                    <a:pt x="3581126" y="2304726"/>
-                  </a:lnTo>
-                  <a:lnTo>
-                    <a:pt x="3652748" y="2247456"/>
-                  </a:lnTo>
-                  <a:lnTo>
-                    <a:pt x="3724371" y="2187404"/>
-                  </a:lnTo>
-                  <a:lnTo>
-                    <a:pt x="3795993" y="2124435"/>
-                  </a:lnTo>
-                  <a:lnTo>
-                    <a:pt x="3867616" y="2058407"/>
-                  </a:lnTo>
-                  <a:lnTo>
-                    <a:pt x="3939238" y="1989171"/>
-                  </a:lnTo>
-                  <a:lnTo>
-                    <a:pt x="4010861" y="1916573"/>
-                  </a:lnTo>
-                  <a:lnTo>
-                    <a:pt x="4082483" y="1840449"/>
-                  </a:lnTo>
-                  <a:lnTo>
-                    <a:pt x="4154106" y="1760626"/>
-                  </a:lnTo>
-                  <a:lnTo>
-                    <a:pt x="4225729" y="1676926"/>
-                  </a:lnTo>
-                  <a:lnTo>
-                    <a:pt x="4297351" y="1589161"/>
-                  </a:lnTo>
-                  <a:lnTo>
-                    <a:pt x="4368974" y="1497132"/>
-                  </a:lnTo>
-                  <a:lnTo>
-                    <a:pt x="4440596" y="1400634"/>
-                  </a:lnTo>
-                  <a:lnTo>
-                    <a:pt x="4512219" y="1299447"/>
-                  </a:lnTo>
-                  <a:lnTo>
-                    <a:pt x="4583841" y="1193346"/>
-                  </a:lnTo>
-                  <a:lnTo>
-                    <a:pt x="4655464" y="1082091"/>
-                  </a:lnTo>
-                  <a:lnTo>
-                    <a:pt x="4727086" y="965432"/>
-                  </a:lnTo>
-                  <a:lnTo>
-                    <a:pt x="4798709" y="843106"/>
-                  </a:lnTo>
-                  <a:lnTo>
-                    <a:pt x="4870331" y="714838"/>
-                  </a:lnTo>
-                  <a:lnTo>
-                    <a:pt x="4941954" y="580340"/>
-                  </a:lnTo>
-                  <a:lnTo>
-                    <a:pt x="5013576" y="439308"/>
-                  </a:lnTo>
-                  <a:lnTo>
-                    <a:pt x="5085199" y="291426"/>
-                  </a:lnTo>
-                  <a:lnTo>
-                    <a:pt x="5156821" y="136361"/>
-                  </a:lnTo>
-                  <a:lnTo>
-                    <a:pt x="5216887" y="0"/>
-                  </a:lnTo>
-                  <a:lnTo>
-                    <a:pt x="7090630" y="0"/>
-                  </a:lnTo>
-                  <a:lnTo>
-                    <a:pt x="7090630" y="1788595"/>
-                  </a:lnTo>
-                  <a:lnTo>
-                    <a:pt x="7019007" y="1809937"/>
-                  </a:lnTo>
-                  <a:lnTo>
-                    <a:pt x="6947385" y="1831010"/>
-                  </a:lnTo>
-                  <a:lnTo>
-                    <a:pt x="6875762" y="1851817"/>
-                  </a:lnTo>
-                  <a:lnTo>
-                    <a:pt x="6804139" y="1872363"/>
-                  </a:lnTo>
-                  <a:lnTo>
-                    <a:pt x="6732517" y="1892650"/>
-                  </a:lnTo>
-                  <a:lnTo>
-                    <a:pt x="6660894" y="1912681"/>
-                  </a:lnTo>
-                  <a:lnTo>
-                    <a:pt x="6589272" y="1932461"/>
-                  </a:lnTo>
-                  <a:lnTo>
-                    <a:pt x="6517649" y="1951991"/>
-                  </a:lnTo>
-                  <a:lnTo>
-                    <a:pt x="6446027" y="1971275"/>
-                  </a:lnTo>
-                  <a:lnTo>
-                    <a:pt x="6374404" y="1990317"/>
-                  </a:lnTo>
-                  <a:lnTo>
-                    <a:pt x="6302782" y="2009119"/>
-                  </a:lnTo>
-                  <a:lnTo>
-                    <a:pt x="6231159" y="2027684"/>
-                  </a:lnTo>
-                  <a:lnTo>
-                    <a:pt x="6159537" y="2046016"/>
-                  </a:lnTo>
-                  <a:lnTo>
-                    <a:pt x="6087914" y="2064116"/>
-                  </a:lnTo>
-                  <a:lnTo>
-                    <a:pt x="6016292" y="2081989"/>
-                  </a:lnTo>
-                  <a:lnTo>
-                    <a:pt x="5944669" y="2099637"/>
-                  </a:lnTo>
-                  <a:lnTo>
-                    <a:pt x="5873047" y="2117062"/>
-                  </a:lnTo>
-                  <a:lnTo>
-                    <a:pt x="5801424" y="2134269"/>
-                  </a:lnTo>
-                  <a:lnTo>
-                    <a:pt x="5729802" y="2151258"/>
-                  </a:lnTo>
-                  <a:lnTo>
-                    <a:pt x="5658179" y="2168034"/>
-                  </a:lnTo>
-                  <a:lnTo>
-                    <a:pt x="5586557" y="2184599"/>
-                  </a:lnTo>
-                  <a:lnTo>
-                    <a:pt x="5514934" y="2200955"/>
-                  </a:lnTo>
-                  <a:lnTo>
-                    <a:pt x="5443311" y="2217105"/>
-                  </a:lnTo>
-                  <a:lnTo>
-                    <a:pt x="5371689" y="2233051"/>
-                  </a:lnTo>
-                  <a:lnTo>
-                    <a:pt x="5300066" y="2248797"/>
-                  </a:lnTo>
-                  <a:lnTo>
-                    <a:pt x="5228444" y="2264345"/>
-                  </a:lnTo>
-                  <a:lnTo>
-                    <a:pt x="5156821" y="2279697"/>
-                  </a:lnTo>
-                  <a:lnTo>
-                    <a:pt x="5085199" y="2294856"/>
-                  </a:lnTo>
-                  <a:lnTo>
-                    <a:pt x="5013576" y="2309823"/>
-                  </a:lnTo>
-                  <a:lnTo>
-                    <a:pt x="4941954" y="2324603"/>
-                  </a:lnTo>
-                  <a:lnTo>
-                    <a:pt x="4870331" y="2339196"/>
-                  </a:lnTo>
-                  <a:lnTo>
-                    <a:pt x="4798709" y="2353606"/>
-                  </a:lnTo>
-                  <a:lnTo>
-                    <a:pt x="4727086" y="2367834"/>
-                  </a:lnTo>
-                  <a:lnTo>
-                    <a:pt x="4655464" y="2381883"/>
-                  </a:lnTo>
-                  <a:lnTo>
-                    <a:pt x="4583841" y="2395755"/>
-                  </a:lnTo>
-                  <a:lnTo>
-                    <a:pt x="4512219" y="2409453"/>
-                  </a:lnTo>
-                  <a:lnTo>
-                    <a:pt x="4440596" y="2422978"/>
-                  </a:lnTo>
-                  <a:lnTo>
-                    <a:pt x="4368974" y="2436333"/>
-                  </a:lnTo>
-                  <a:lnTo>
-                    <a:pt x="4297351" y="2449519"/>
-                  </a:lnTo>
-                  <a:lnTo>
-                    <a:pt x="4225729" y="2462540"/>
-                  </a:lnTo>
-                  <a:lnTo>
-                    <a:pt x="4154106" y="2475397"/>
-                  </a:lnTo>
-                  <a:lnTo>
-                    <a:pt x="4082483" y="2488092"/>
-                  </a:lnTo>
-                  <a:lnTo>
-                    <a:pt x="4010861" y="2500627"/>
-                  </a:lnTo>
-                  <a:lnTo>
-                    <a:pt x="3939238" y="2513004"/>
-                  </a:lnTo>
-                  <a:lnTo>
-                    <a:pt x="3867616" y="2525225"/>
-                  </a:lnTo>
-                  <a:lnTo>
-                    <a:pt x="3795993" y="2537293"/>
-                  </a:lnTo>
-                  <a:lnTo>
-                    <a:pt x="3724371" y="2549209"/>
-                  </a:lnTo>
-                  <a:lnTo>
-                    <a:pt x="3652748" y="2560974"/>
-                  </a:lnTo>
-                  <a:lnTo>
-                    <a:pt x="3581126" y="2572592"/>
-                  </a:lnTo>
-                  <a:lnTo>
-                    <a:pt x="3509503" y="2584063"/>
-                  </a:lnTo>
-                  <a:lnTo>
-                    <a:pt x="3437881" y="2595390"/>
-                  </a:lnTo>
-                  <a:lnTo>
-                    <a:pt x="3366258" y="2606574"/>
-                  </a:lnTo>
-                  <a:lnTo>
-                    <a:pt x="3294636" y="2617617"/>
-                  </a:lnTo>
-                  <a:lnTo>
-                    <a:pt x="3223013" y="2628522"/>
-                  </a:lnTo>
-                  <a:lnTo>
-                    <a:pt x="3151391" y="2639289"/>
-                  </a:lnTo>
-                  <a:lnTo>
-                    <a:pt x="3079768" y="2649920"/>
-                  </a:lnTo>
-                  <a:lnTo>
-                    <a:pt x="3008146" y="2677019"/>
-                  </a:lnTo>
-                  <a:lnTo>
-                    <a:pt x="2936523" y="2714390"/>
-                  </a:lnTo>
-                  <a:lnTo>
-                    <a:pt x="2864901" y="2750030"/>
-                  </a:lnTo>
-                  <a:lnTo>
-                    <a:pt x="2793278" y="2784019"/>
-                  </a:lnTo>
-                  <a:lnTo>
-                    <a:pt x="2721655" y="2816433"/>
-                  </a:lnTo>
-                  <a:lnTo>
-                    <a:pt x="2650033" y="2847346"/>
-                  </a:lnTo>
-                  <a:lnTo>
-                    <a:pt x="2578410" y="2876827"/>
-                  </a:lnTo>
-                  <a:lnTo>
-                    <a:pt x="2506788" y="2904942"/>
-                  </a:lnTo>
-                  <a:lnTo>
-                    <a:pt x="2435165" y="2931755"/>
-                  </a:lnTo>
-                  <a:lnTo>
-                    <a:pt x="2363543" y="2957325"/>
-                  </a:lnTo>
-                  <a:lnTo>
-                    <a:pt x="2291920" y="2981712"/>
-                  </a:lnTo>
-                  <a:lnTo>
-                    <a:pt x="2220298" y="3004968"/>
-                  </a:lnTo>
-                  <a:lnTo>
-                    <a:pt x="2148675" y="3027147"/>
-                  </a:lnTo>
-                  <a:lnTo>
-                    <a:pt x="2077053" y="3048299"/>
-                  </a:lnTo>
-                  <a:lnTo>
-                    <a:pt x="2005430" y="3068471"/>
-                  </a:lnTo>
-                  <a:lnTo>
-                    <a:pt x="1933808" y="3087708"/>
-                  </a:lnTo>
-                  <a:lnTo>
-                    <a:pt x="1862185" y="3106054"/>
-                  </a:lnTo>
-                  <a:lnTo>
-                    <a:pt x="1790563" y="3123550"/>
-                  </a:lnTo>
-                  <a:lnTo>
-                    <a:pt x="1718940" y="3140236"/>
-                  </a:lnTo>
-                  <a:lnTo>
-                    <a:pt x="1647318" y="3156149"/>
-                  </a:lnTo>
-                  <a:lnTo>
-                    <a:pt x="1575695" y="3171325"/>
-                  </a:lnTo>
-                  <a:lnTo>
-                    <a:pt x="1504073" y="3185798"/>
-                  </a:lnTo>
-                  <a:lnTo>
-                    <a:pt x="1432450" y="3199600"/>
-                  </a:lnTo>
-                  <a:lnTo>
-                    <a:pt x="1360827" y="3212763"/>
-                  </a:lnTo>
-                  <a:lnTo>
-                    <a:pt x="1289205" y="3225316"/>
-                  </a:lnTo>
-                  <a:lnTo>
-                    <a:pt x="1217582" y="3237288"/>
-                  </a:lnTo>
-                  <a:lnTo>
-                    <a:pt x="1145960" y="3248705"/>
-                  </a:lnTo>
-                  <a:lnTo>
-                    <a:pt x="1074337" y="3259593"/>
-                  </a:lnTo>
-                  <a:lnTo>
-                    <a:pt x="1002715" y="3269977"/>
-                  </a:lnTo>
-                  <a:lnTo>
-                    <a:pt x="931092" y="3279879"/>
-                  </a:lnTo>
-                  <a:lnTo>
-                    <a:pt x="859470" y="3289323"/>
-                  </a:lnTo>
-                  <a:lnTo>
-                    <a:pt x="787847" y="3298330"/>
-                  </a:lnTo>
-                  <a:lnTo>
-                    <a:pt x="716225" y="3306919"/>
-                  </a:lnTo>
-                  <a:lnTo>
-                    <a:pt x="644602" y="3315111"/>
-                  </a:lnTo>
-                  <a:lnTo>
-                    <a:pt x="572980" y="3322922"/>
-                  </a:lnTo>
-                  <a:lnTo>
-                    <a:pt x="501357" y="3330373"/>
-                  </a:lnTo>
-                  <a:lnTo>
-                    <a:pt x="429735" y="3337477"/>
-                  </a:lnTo>
-                  <a:lnTo>
-                    <a:pt x="358112" y="3344253"/>
-                  </a:lnTo>
-                  <a:lnTo>
-                    <a:pt x="286490" y="3350715"/>
-                  </a:lnTo>
-                  <a:lnTo>
-                    <a:pt x="214867" y="3356878"/>
-                  </a:lnTo>
-                  <a:lnTo>
-                    <a:pt x="143245" y="3362755"/>
-                  </a:lnTo>
-                  <a:lnTo>
-                    <a:pt x="71622" y="3368360"/>
-                  </a:lnTo>
-                  <a:lnTo>
-                    <a:pt x="0" y="3373705"/>
+                    <a:pt x="70547" y="2792600"/>
+                  </a:lnTo>
+                  <a:lnTo>
+                    <a:pt x="141094" y="2786775"/>
+                  </a:lnTo>
+                  <a:lnTo>
+                    <a:pt x="211641" y="2780877"/>
+                  </a:lnTo>
+                  <a:lnTo>
+                    <a:pt x="282188" y="2774903"/>
+                  </a:lnTo>
+                  <a:lnTo>
+                    <a:pt x="352735" y="2768853"/>
+                  </a:lnTo>
+                  <a:lnTo>
+                    <a:pt x="423283" y="2762726"/>
+                  </a:lnTo>
+                  <a:lnTo>
+                    <a:pt x="493830" y="2756520"/>
+                  </a:lnTo>
+                  <a:lnTo>
+                    <a:pt x="564377" y="2750236"/>
+                  </a:lnTo>
+                  <a:lnTo>
+                    <a:pt x="634924" y="2743871"/>
+                  </a:lnTo>
+                  <a:lnTo>
+                    <a:pt x="705471" y="2737425"/>
+                  </a:lnTo>
+                  <a:lnTo>
+                    <a:pt x="776018" y="2730898"/>
+                  </a:lnTo>
+                  <a:lnTo>
+                    <a:pt x="846566" y="2724286"/>
+                  </a:lnTo>
+                  <a:lnTo>
+                    <a:pt x="917113" y="2717591"/>
+                  </a:lnTo>
+                  <a:lnTo>
+                    <a:pt x="987660" y="2710810"/>
+                  </a:lnTo>
+                  <a:lnTo>
+                    <a:pt x="1058207" y="2703943"/>
+                  </a:lnTo>
+                  <a:lnTo>
+                    <a:pt x="1128754" y="2696988"/>
+                  </a:lnTo>
+                  <a:lnTo>
+                    <a:pt x="1199301" y="2689945"/>
+                  </a:lnTo>
+                  <a:lnTo>
+                    <a:pt x="1269849" y="2682811"/>
+                  </a:lnTo>
+                  <a:lnTo>
+                    <a:pt x="1340396" y="2675587"/>
+                  </a:lnTo>
+                  <a:lnTo>
+                    <a:pt x="1410943" y="2668271"/>
+                  </a:lnTo>
+                  <a:lnTo>
+                    <a:pt x="1481490" y="2660861"/>
+                  </a:lnTo>
+                  <a:lnTo>
+                    <a:pt x="1552037" y="2653357"/>
+                  </a:lnTo>
+                  <a:lnTo>
+                    <a:pt x="1622584" y="2645757"/>
+                  </a:lnTo>
+                  <a:lnTo>
+                    <a:pt x="1693132" y="2638060"/>
+                  </a:lnTo>
+                  <a:lnTo>
+                    <a:pt x="1763679" y="2630265"/>
+                  </a:lnTo>
+                  <a:lnTo>
+                    <a:pt x="1834226" y="2622371"/>
+                  </a:lnTo>
+                  <a:lnTo>
+                    <a:pt x="1904773" y="2614376"/>
+                  </a:lnTo>
+                  <a:lnTo>
+                    <a:pt x="1975320" y="2606279"/>
+                  </a:lnTo>
+                  <a:lnTo>
+                    <a:pt x="2045868" y="2598079"/>
+                  </a:lnTo>
+                  <a:lnTo>
+                    <a:pt x="2116415" y="2589775"/>
+                  </a:lnTo>
+                  <a:lnTo>
+                    <a:pt x="2186962" y="2581364"/>
+                  </a:lnTo>
+                  <a:lnTo>
+                    <a:pt x="2257509" y="2572846"/>
+                  </a:lnTo>
+                  <a:lnTo>
+                    <a:pt x="2328056" y="2564220"/>
+                  </a:lnTo>
+                  <a:lnTo>
+                    <a:pt x="2398603" y="2555484"/>
+                  </a:lnTo>
+                  <a:lnTo>
+                    <a:pt x="2469151" y="2546636"/>
+                  </a:lnTo>
+                  <a:lnTo>
+                    <a:pt x="2539698" y="2537676"/>
+                  </a:lnTo>
+                  <a:lnTo>
+                    <a:pt x="2610245" y="2528601"/>
+                  </a:lnTo>
+                  <a:lnTo>
+                    <a:pt x="2680792" y="2519410"/>
+                  </a:lnTo>
+                  <a:lnTo>
+                    <a:pt x="2751339" y="2510103"/>
+                  </a:lnTo>
+                  <a:lnTo>
+                    <a:pt x="2821886" y="2500676"/>
+                  </a:lnTo>
+                  <a:lnTo>
+                    <a:pt x="2892434" y="2491130"/>
+                  </a:lnTo>
+                  <a:lnTo>
+                    <a:pt x="2962981" y="2481461"/>
+                  </a:lnTo>
+                  <a:lnTo>
+                    <a:pt x="3033528" y="2460395"/>
+                  </a:lnTo>
+                  <a:lnTo>
+                    <a:pt x="3104075" y="2422069"/>
+                  </a:lnTo>
+                  <a:lnTo>
+                    <a:pt x="3174622" y="2381882"/>
+                  </a:lnTo>
+                  <a:lnTo>
+                    <a:pt x="3245169" y="2339742"/>
+                  </a:lnTo>
+                  <a:lnTo>
+                    <a:pt x="3315717" y="2295556"/>
+                  </a:lnTo>
+                  <a:lnTo>
+                    <a:pt x="3386264" y="2249223"/>
+                  </a:lnTo>
+                  <a:lnTo>
+                    <a:pt x="3456811" y="2200639"/>
+                  </a:lnTo>
+                  <a:lnTo>
+                    <a:pt x="3527358" y="2149696"/>
+                  </a:lnTo>
+                  <a:lnTo>
+                    <a:pt x="3597905" y="2096278"/>
+                  </a:lnTo>
+                  <a:lnTo>
+                    <a:pt x="3668452" y="2040265"/>
+                  </a:lnTo>
+                  <a:lnTo>
+                    <a:pt x="3739000" y="1981532"/>
+                  </a:lnTo>
+                  <a:lnTo>
+                    <a:pt x="3809547" y="1919945"/>
+                  </a:lnTo>
+                  <a:lnTo>
+                    <a:pt x="3880094" y="1855367"/>
+                  </a:lnTo>
+                  <a:lnTo>
+                    <a:pt x="3950641" y="1787652"/>
+                  </a:lnTo>
+                  <a:lnTo>
+                    <a:pt x="4021188" y="1716648"/>
+                  </a:lnTo>
+                  <a:lnTo>
+                    <a:pt x="4091736" y="1642195"/>
+                  </a:lnTo>
+                  <a:lnTo>
+                    <a:pt x="4162283" y="1564126"/>
+                  </a:lnTo>
+                  <a:lnTo>
+                    <a:pt x="4232830" y="1482264"/>
+                  </a:lnTo>
+                  <a:lnTo>
+                    <a:pt x="4303377" y="1396426"/>
+                  </a:lnTo>
+                  <a:lnTo>
+                    <a:pt x="4373924" y="1306418"/>
+                  </a:lnTo>
+                  <a:lnTo>
+                    <a:pt x="4444471" y="1212038"/>
+                  </a:lnTo>
+                  <a:lnTo>
+                    <a:pt x="4515019" y="1113074"/>
+                  </a:lnTo>
+                  <a:lnTo>
+                    <a:pt x="4585566" y="1009303"/>
+                  </a:lnTo>
+                  <a:lnTo>
+                    <a:pt x="4656113" y="900491"/>
+                  </a:lnTo>
+                  <a:lnTo>
+                    <a:pt x="4726660" y="786393"/>
+                  </a:lnTo>
+                  <a:lnTo>
+                    <a:pt x="4797207" y="666754"/>
+                  </a:lnTo>
+                  <a:lnTo>
+                    <a:pt x="4867754" y="541303"/>
+                  </a:lnTo>
+                  <a:lnTo>
+                    <a:pt x="4938302" y="409758"/>
+                  </a:lnTo>
+                  <a:lnTo>
+                    <a:pt x="5008849" y="271823"/>
+                  </a:lnTo>
+                  <a:lnTo>
+                    <a:pt x="5079396" y="127188"/>
+                  </a:lnTo>
+                  <a:lnTo>
+                    <a:pt x="5138560" y="0"/>
+                  </a:lnTo>
+                  <a:lnTo>
+                    <a:pt x="6984170" y="0"/>
+                  </a:lnTo>
+                  <a:lnTo>
+                    <a:pt x="6984170" y="1668283"/>
+                  </a:lnTo>
+                  <a:lnTo>
+                    <a:pt x="6913622" y="1688189"/>
+                  </a:lnTo>
+                  <a:lnTo>
+                    <a:pt x="6843075" y="1707844"/>
+                  </a:lnTo>
+                  <a:lnTo>
+                    <a:pt x="6772528" y="1727252"/>
+                  </a:lnTo>
+                  <a:lnTo>
+                    <a:pt x="6701981" y="1746416"/>
+                  </a:lnTo>
+                  <a:lnTo>
+                    <a:pt x="6631434" y="1765338"/>
+                  </a:lnTo>
+                  <a:lnTo>
+                    <a:pt x="6560887" y="1784022"/>
+                  </a:lnTo>
+                  <a:lnTo>
+                    <a:pt x="6490339" y="1802471"/>
+                  </a:lnTo>
+                  <a:lnTo>
+                    <a:pt x="6419792" y="1820688"/>
+                  </a:lnTo>
+                  <a:lnTo>
+                    <a:pt x="6349245" y="1838675"/>
+                  </a:lnTo>
+                  <a:lnTo>
+                    <a:pt x="6278698" y="1856436"/>
+                  </a:lnTo>
+                  <a:lnTo>
+                    <a:pt x="6208151" y="1873973"/>
+                  </a:lnTo>
+                  <a:lnTo>
+                    <a:pt x="6137604" y="1891289"/>
+                  </a:lnTo>
+                  <a:lnTo>
+                    <a:pt x="6067056" y="1908388"/>
+                  </a:lnTo>
+                  <a:lnTo>
+                    <a:pt x="5996509" y="1925271"/>
+                  </a:lnTo>
+                  <a:lnTo>
+                    <a:pt x="5925962" y="1941941"/>
+                  </a:lnTo>
+                  <a:lnTo>
+                    <a:pt x="5855415" y="1958402"/>
+                  </a:lnTo>
+                  <a:lnTo>
+                    <a:pt x="5784868" y="1974655"/>
+                  </a:lnTo>
+                  <a:lnTo>
+                    <a:pt x="5714320" y="1990704"/>
+                  </a:lnTo>
+                  <a:lnTo>
+                    <a:pt x="5643773" y="2006551"/>
+                  </a:lnTo>
+                  <a:lnTo>
+                    <a:pt x="5573226" y="2022198"/>
+                  </a:lnTo>
+                  <a:lnTo>
+                    <a:pt x="5502679" y="2037649"/>
+                  </a:lnTo>
+                  <a:lnTo>
+                    <a:pt x="5432132" y="2052904"/>
+                  </a:lnTo>
+                  <a:lnTo>
+                    <a:pt x="5361585" y="2067968"/>
+                  </a:lnTo>
+                  <a:lnTo>
+                    <a:pt x="5291037" y="2082842"/>
+                  </a:lnTo>
+                  <a:lnTo>
+                    <a:pt x="5220490" y="2097529"/>
+                  </a:lnTo>
+                  <a:lnTo>
+                    <a:pt x="5149943" y="2112031"/>
+                  </a:lnTo>
+                  <a:lnTo>
+                    <a:pt x="5079396" y="2126350"/>
+                  </a:lnTo>
+                  <a:lnTo>
+                    <a:pt x="5008849" y="2140489"/>
+                  </a:lnTo>
+                  <a:lnTo>
+                    <a:pt x="4938302" y="2154450"/>
+                  </a:lnTo>
+                  <a:lnTo>
+                    <a:pt x="4867754" y="2168235"/>
+                  </a:lnTo>
+                  <a:lnTo>
+                    <a:pt x="4797207" y="2181847"/>
+                  </a:lnTo>
+                  <a:lnTo>
+                    <a:pt x="4726660" y="2195287"/>
+                  </a:lnTo>
+                  <a:lnTo>
+                    <a:pt x="4656113" y="2208559"/>
+                  </a:lnTo>
+                  <a:lnTo>
+                    <a:pt x="4585566" y="2221663"/>
+                  </a:lnTo>
+                  <a:lnTo>
+                    <a:pt x="4515019" y="2234602"/>
+                  </a:lnTo>
+                  <a:lnTo>
+                    <a:pt x="4444471" y="2247378"/>
+                  </a:lnTo>
+                  <a:lnTo>
+                    <a:pt x="4373924" y="2259993"/>
+                  </a:lnTo>
+                  <a:lnTo>
+                    <a:pt x="4303377" y="2272450"/>
+                  </a:lnTo>
+                  <a:lnTo>
+                    <a:pt x="4232830" y="2284749"/>
+                  </a:lnTo>
+                  <a:lnTo>
+                    <a:pt x="4162283" y="2296894"/>
+                  </a:lnTo>
+                  <a:lnTo>
+                    <a:pt x="4091736" y="2308886"/>
+                  </a:lnTo>
+                  <a:lnTo>
+                    <a:pt x="4021188" y="2320727"/>
+                  </a:lnTo>
+                  <a:lnTo>
+                    <a:pt x="3950641" y="2332419"/>
+                  </a:lnTo>
+                  <a:lnTo>
+                    <a:pt x="3880094" y="2343963"/>
+                  </a:lnTo>
+                  <a:lnTo>
+                    <a:pt x="3809547" y="2355363"/>
+                  </a:lnTo>
+                  <a:lnTo>
+                    <a:pt x="3739000" y="2366619"/>
+                  </a:lnTo>
+                  <a:lnTo>
+                    <a:pt x="3668452" y="2377733"/>
+                  </a:lnTo>
+                  <a:lnTo>
+                    <a:pt x="3597905" y="2388707"/>
+                  </a:lnTo>
+                  <a:lnTo>
+                    <a:pt x="3527358" y="2399543"/>
+                  </a:lnTo>
+                  <a:lnTo>
+                    <a:pt x="3456811" y="2410243"/>
+                  </a:lnTo>
+                  <a:lnTo>
+                    <a:pt x="3386264" y="2420807"/>
+                  </a:lnTo>
+                  <a:lnTo>
+                    <a:pt x="3315717" y="2431239"/>
+                  </a:lnTo>
+                  <a:lnTo>
+                    <a:pt x="3245169" y="2441540"/>
+                  </a:lnTo>
+                  <a:lnTo>
+                    <a:pt x="3174622" y="2451711"/>
+                  </a:lnTo>
+                  <a:lnTo>
+                    <a:pt x="3104075" y="2461754"/>
+                  </a:lnTo>
+                  <a:lnTo>
+                    <a:pt x="3033528" y="2471670"/>
+                  </a:lnTo>
+                  <a:lnTo>
+                    <a:pt x="2962981" y="2496946"/>
+                  </a:lnTo>
+                  <a:lnTo>
+                    <a:pt x="2892434" y="2531803"/>
+                  </a:lnTo>
+                  <a:lnTo>
+                    <a:pt x="2821886" y="2565046"/>
+                  </a:lnTo>
+                  <a:lnTo>
+                    <a:pt x="2751339" y="2596748"/>
+                  </a:lnTo>
+                  <a:lnTo>
+                    <a:pt x="2680792" y="2626982"/>
+                  </a:lnTo>
+                  <a:lnTo>
+                    <a:pt x="2610245" y="2655816"/>
+                  </a:lnTo>
+                  <a:lnTo>
+                    <a:pt x="2539698" y="2683313"/>
+                  </a:lnTo>
+                  <a:lnTo>
+                    <a:pt x="2469151" y="2709537"/>
+                  </a:lnTo>
+                  <a:lnTo>
+                    <a:pt x="2398603" y="2734546"/>
+                  </a:lnTo>
+                  <a:lnTo>
+                    <a:pt x="2328056" y="2758397"/>
+                  </a:lnTo>
+                  <a:lnTo>
+                    <a:pt x="2257509" y="2781143"/>
+                  </a:lnTo>
+                  <a:lnTo>
+                    <a:pt x="2186962" y="2802835"/>
+                  </a:lnTo>
+                  <a:lnTo>
+                    <a:pt x="2116415" y="2823522"/>
+                  </a:lnTo>
+                  <a:lnTo>
+                    <a:pt x="2045868" y="2843251"/>
+                  </a:lnTo>
+                  <a:lnTo>
+                    <a:pt x="1975320" y="2862066"/>
+                  </a:lnTo>
+                  <a:lnTo>
+                    <a:pt x="1904773" y="2880009"/>
+                  </a:lnTo>
+                  <a:lnTo>
+                    <a:pt x="1834226" y="2897121"/>
+                  </a:lnTo>
+                  <a:lnTo>
+                    <a:pt x="1763679" y="2913441"/>
+                  </a:lnTo>
+                  <a:lnTo>
+                    <a:pt x="1693132" y="2929004"/>
+                  </a:lnTo>
+                  <a:lnTo>
+                    <a:pt x="1622584" y="2943847"/>
+                  </a:lnTo>
+                  <a:lnTo>
+                    <a:pt x="1552037" y="2958002"/>
+                  </a:lnTo>
+                  <a:lnTo>
+                    <a:pt x="1481490" y="2971501"/>
+                  </a:lnTo>
+                  <a:lnTo>
+                    <a:pt x="1410943" y="2984375"/>
+                  </a:lnTo>
+                  <a:lnTo>
+                    <a:pt x="1340396" y="2996652"/>
+                  </a:lnTo>
+                  <a:lnTo>
+                    <a:pt x="1269849" y="3008361"/>
+                  </a:lnTo>
+                  <a:lnTo>
+                    <a:pt x="1199301" y="3019527"/>
+                  </a:lnTo>
+                  <a:lnTo>
+                    <a:pt x="1128754" y="3030176"/>
+                  </a:lnTo>
+                  <a:lnTo>
+                    <a:pt x="1058207" y="3040332"/>
+                  </a:lnTo>
+                  <a:lnTo>
+                    <a:pt x="987660" y="3050017"/>
+                  </a:lnTo>
+                  <a:lnTo>
+                    <a:pt x="917113" y="3059254"/>
+                  </a:lnTo>
+                  <a:lnTo>
+                    <a:pt x="846566" y="3068063"/>
+                  </a:lnTo>
+                  <a:lnTo>
+                    <a:pt x="776018" y="3076463"/>
+                  </a:lnTo>
+                  <a:lnTo>
+                    <a:pt x="705471" y="3084475"/>
+                  </a:lnTo>
+                  <a:lnTo>
+                    <a:pt x="634924" y="3092115"/>
+                  </a:lnTo>
+                  <a:lnTo>
+                    <a:pt x="564377" y="3099402"/>
+                  </a:lnTo>
+                  <a:lnTo>
+                    <a:pt x="493830" y="3106351"/>
+                  </a:lnTo>
+                  <a:lnTo>
+                    <a:pt x="423283" y="3112978"/>
+                  </a:lnTo>
+                  <a:lnTo>
+                    <a:pt x="352735" y="3119298"/>
+                  </a:lnTo>
+                  <a:lnTo>
+                    <a:pt x="282188" y="3125325"/>
+                  </a:lnTo>
+                  <a:lnTo>
+                    <a:pt x="211641" y="3131073"/>
+                  </a:lnTo>
+                  <a:lnTo>
+                    <a:pt x="141094" y="3136555"/>
+                  </a:lnTo>
+                  <a:lnTo>
+                    <a:pt x="70547" y="3141783"/>
+                  </a:lnTo>
+                  <a:lnTo>
+                    <a:pt x="0" y="3146768"/>
                   </a:lnTo>
                   <a:close/>
                 </a:path>
@@ -3687,234 +3687,234 @@
           </p:nvSpPr>
           <p:spPr>
             <a:xfrm>
-              <a:off x="1172049" y="2073503"/>
-              <a:ext cx="5216887" cy="3000161"/>
+              <a:off x="1264853" y="2209169"/>
+              <a:ext cx="5138560" cy="2798351"/>
             </a:xfrm>
             <a:custGeom>
               <a:avLst/>
               <a:pathLst>
-                <a:path w="5216887" h="3000161">
+                <a:path w="5138560" h="2798351">
                   <a:moveTo>
-                    <a:pt x="0" y="3000161"/>
+                    <a:pt x="0" y="2798351"/>
                   </a:moveTo>
                   <a:lnTo>
-                    <a:pt x="71622" y="2993995"/>
-                  </a:lnTo>
-                  <a:lnTo>
-                    <a:pt x="143245" y="2987750"/>
-                  </a:lnTo>
-                  <a:lnTo>
-                    <a:pt x="214867" y="2981426"/>
-                  </a:lnTo>
-                  <a:lnTo>
-                    <a:pt x="286490" y="2975022"/>
-                  </a:lnTo>
-                  <a:lnTo>
-                    <a:pt x="358112" y="2968535"/>
-                  </a:lnTo>
-                  <a:lnTo>
-                    <a:pt x="429735" y="2961966"/>
-                  </a:lnTo>
-                  <a:lnTo>
-                    <a:pt x="501357" y="2955313"/>
-                  </a:lnTo>
-                  <a:lnTo>
-                    <a:pt x="572980" y="2948576"/>
-                  </a:lnTo>
-                  <a:lnTo>
-                    <a:pt x="644602" y="2941752"/>
-                  </a:lnTo>
-                  <a:lnTo>
-                    <a:pt x="716225" y="2934841"/>
-                  </a:lnTo>
-                  <a:lnTo>
-                    <a:pt x="787847" y="2927843"/>
-                  </a:lnTo>
-                  <a:lnTo>
-                    <a:pt x="859470" y="2920755"/>
-                  </a:lnTo>
-                  <a:lnTo>
-                    <a:pt x="931092" y="2913577"/>
-                  </a:lnTo>
-                  <a:lnTo>
-                    <a:pt x="1002715" y="2906307"/>
-                  </a:lnTo>
-                  <a:lnTo>
-                    <a:pt x="1074337" y="2898944"/>
-                  </a:lnTo>
-                  <a:lnTo>
-                    <a:pt x="1145960" y="2891488"/>
-                  </a:lnTo>
-                  <a:lnTo>
-                    <a:pt x="1217582" y="2883936"/>
-                  </a:lnTo>
-                  <a:lnTo>
-                    <a:pt x="1289205" y="2876289"/>
-                  </a:lnTo>
-                  <a:lnTo>
-                    <a:pt x="1360827" y="2868543"/>
-                  </a:lnTo>
-                  <a:lnTo>
-                    <a:pt x="1432450" y="2860699"/>
-                  </a:lnTo>
-                  <a:lnTo>
-                    <a:pt x="1504073" y="2852755"/>
-                  </a:lnTo>
-                  <a:lnTo>
-                    <a:pt x="1575695" y="2844710"/>
-                  </a:lnTo>
-                  <a:lnTo>
-                    <a:pt x="1647318" y="2836562"/>
-                  </a:lnTo>
-                  <a:lnTo>
-                    <a:pt x="1718940" y="2828310"/>
-                  </a:lnTo>
-                  <a:lnTo>
-                    <a:pt x="1790563" y="2819953"/>
-                  </a:lnTo>
-                  <a:lnTo>
-                    <a:pt x="1862185" y="2811490"/>
-                  </a:lnTo>
-                  <a:lnTo>
-                    <a:pt x="1933808" y="2802918"/>
-                  </a:lnTo>
-                  <a:lnTo>
-                    <a:pt x="2005430" y="2794238"/>
-                  </a:lnTo>
-                  <a:lnTo>
-                    <a:pt x="2077053" y="2785446"/>
-                  </a:lnTo>
-                  <a:lnTo>
-                    <a:pt x="2148675" y="2776543"/>
-                  </a:lnTo>
-                  <a:lnTo>
-                    <a:pt x="2220298" y="2767526"/>
-                  </a:lnTo>
-                  <a:lnTo>
-                    <a:pt x="2291920" y="2758393"/>
-                  </a:lnTo>
-                  <a:lnTo>
-                    <a:pt x="2363543" y="2749145"/>
-                  </a:lnTo>
-                  <a:lnTo>
-                    <a:pt x="2435165" y="2739779"/>
-                  </a:lnTo>
-                  <a:lnTo>
-                    <a:pt x="2506788" y="2730293"/>
-                  </a:lnTo>
-                  <a:lnTo>
-                    <a:pt x="2578410" y="2720686"/>
-                  </a:lnTo>
-                  <a:lnTo>
-                    <a:pt x="2650033" y="2710957"/>
-                  </a:lnTo>
-                  <a:lnTo>
-                    <a:pt x="2721655" y="2701104"/>
-                  </a:lnTo>
-                  <a:lnTo>
-                    <a:pt x="2793278" y="2691125"/>
-                  </a:lnTo>
-                  <a:lnTo>
-                    <a:pt x="2864901" y="2681019"/>
-                  </a:lnTo>
-                  <a:lnTo>
-                    <a:pt x="2936523" y="2670783"/>
-                  </a:lnTo>
-                  <a:lnTo>
-                    <a:pt x="3008146" y="2660418"/>
-                  </a:lnTo>
-                  <a:lnTo>
-                    <a:pt x="3079768" y="2637833"/>
-                  </a:lnTo>
-                  <a:lnTo>
-                    <a:pt x="3151391" y="2596743"/>
-                  </a:lnTo>
-                  <a:lnTo>
-                    <a:pt x="3223013" y="2553657"/>
-                  </a:lnTo>
-                  <a:lnTo>
-                    <a:pt x="3294636" y="2508478"/>
-                  </a:lnTo>
-                  <a:lnTo>
-                    <a:pt x="3366258" y="2461105"/>
-                  </a:lnTo>
-                  <a:lnTo>
-                    <a:pt x="3437881" y="2411431"/>
-                  </a:lnTo>
-                  <a:lnTo>
-                    <a:pt x="3509503" y="2359344"/>
-                  </a:lnTo>
-                  <a:lnTo>
-                    <a:pt x="3581126" y="2304726"/>
-                  </a:lnTo>
-                  <a:lnTo>
-                    <a:pt x="3652748" y="2247456"/>
-                  </a:lnTo>
-                  <a:lnTo>
-                    <a:pt x="3724371" y="2187404"/>
-                  </a:lnTo>
-                  <a:lnTo>
-                    <a:pt x="3795993" y="2124435"/>
-                  </a:lnTo>
-                  <a:lnTo>
-                    <a:pt x="3867616" y="2058407"/>
-                  </a:lnTo>
-                  <a:lnTo>
-                    <a:pt x="3939238" y="1989171"/>
-                  </a:lnTo>
-                  <a:lnTo>
-                    <a:pt x="4010861" y="1916573"/>
-                  </a:lnTo>
-                  <a:lnTo>
-                    <a:pt x="4082483" y="1840449"/>
-                  </a:lnTo>
-                  <a:lnTo>
-                    <a:pt x="4154106" y="1760626"/>
-                  </a:lnTo>
-                  <a:lnTo>
-                    <a:pt x="4225729" y="1676926"/>
-                  </a:lnTo>
-                  <a:lnTo>
-                    <a:pt x="4297351" y="1589161"/>
-                  </a:lnTo>
-                  <a:lnTo>
-                    <a:pt x="4368974" y="1497132"/>
-                  </a:lnTo>
-                  <a:lnTo>
-                    <a:pt x="4440596" y="1400634"/>
-                  </a:lnTo>
-                  <a:lnTo>
-                    <a:pt x="4512219" y="1299447"/>
-                  </a:lnTo>
-                  <a:lnTo>
-                    <a:pt x="4583841" y="1193346"/>
-                  </a:lnTo>
-                  <a:lnTo>
-                    <a:pt x="4655464" y="1082091"/>
-                  </a:lnTo>
-                  <a:lnTo>
-                    <a:pt x="4727086" y="965432"/>
-                  </a:lnTo>
-                  <a:lnTo>
-                    <a:pt x="4798709" y="843106"/>
-                  </a:lnTo>
-                  <a:lnTo>
-                    <a:pt x="4870331" y="714838"/>
-                  </a:lnTo>
-                  <a:lnTo>
-                    <a:pt x="4941954" y="580340"/>
-                  </a:lnTo>
-                  <a:lnTo>
-                    <a:pt x="5013576" y="439308"/>
-                  </a:lnTo>
-                  <a:lnTo>
-                    <a:pt x="5085199" y="291426"/>
-                  </a:lnTo>
-                  <a:lnTo>
-                    <a:pt x="5156821" y="136361"/>
-                  </a:lnTo>
-                  <a:lnTo>
-                    <a:pt x="5216887" y="0"/>
+                    <a:pt x="70547" y="2792600"/>
+                  </a:lnTo>
+                  <a:lnTo>
+                    <a:pt x="141094" y="2786775"/>
+                  </a:lnTo>
+                  <a:lnTo>
+                    <a:pt x="211641" y="2780877"/>
+                  </a:lnTo>
+                  <a:lnTo>
+                    <a:pt x="282188" y="2774903"/>
+                  </a:lnTo>
+                  <a:lnTo>
+                    <a:pt x="352735" y="2768853"/>
+                  </a:lnTo>
+                  <a:lnTo>
+                    <a:pt x="423283" y="2762726"/>
+                  </a:lnTo>
+                  <a:lnTo>
+                    <a:pt x="493830" y="2756520"/>
+                  </a:lnTo>
+                  <a:lnTo>
+                    <a:pt x="564377" y="2750236"/>
+                  </a:lnTo>
+                  <a:lnTo>
+                    <a:pt x="634924" y="2743871"/>
+                  </a:lnTo>
+                  <a:lnTo>
+                    <a:pt x="705471" y="2737425"/>
+                  </a:lnTo>
+                  <a:lnTo>
+                    <a:pt x="776018" y="2730898"/>
+                  </a:lnTo>
+                  <a:lnTo>
+                    <a:pt x="846566" y="2724286"/>
+                  </a:lnTo>
+                  <a:lnTo>
+                    <a:pt x="917113" y="2717591"/>
+                  </a:lnTo>
+                  <a:lnTo>
+                    <a:pt x="987660" y="2710810"/>
+                  </a:lnTo>
+                  <a:lnTo>
+                    <a:pt x="1058207" y="2703943"/>
+                  </a:lnTo>
+                  <a:lnTo>
+                    <a:pt x="1128754" y="2696988"/>
+                  </a:lnTo>
+                  <a:lnTo>
+                    <a:pt x="1199301" y="2689945"/>
+                  </a:lnTo>
+                  <a:lnTo>
+                    <a:pt x="1269849" y="2682811"/>
+                  </a:lnTo>
+                  <a:lnTo>
+                    <a:pt x="1340396" y="2675587"/>
+                  </a:lnTo>
+                  <a:lnTo>
+                    <a:pt x="1410943" y="2668271"/>
+                  </a:lnTo>
+                  <a:lnTo>
+                    <a:pt x="1481490" y="2660861"/>
+                  </a:lnTo>
+                  <a:lnTo>
+                    <a:pt x="1552037" y="2653357"/>
+                  </a:lnTo>
+                  <a:lnTo>
+                    <a:pt x="1622584" y="2645757"/>
+                  </a:lnTo>
+                  <a:lnTo>
+                    <a:pt x="1693132" y="2638060"/>
+                  </a:lnTo>
+                  <a:lnTo>
+                    <a:pt x="1763679" y="2630265"/>
+                  </a:lnTo>
+                  <a:lnTo>
+                    <a:pt x="1834226" y="2622371"/>
+                  </a:lnTo>
+                  <a:lnTo>
+                    <a:pt x="1904773" y="2614376"/>
+                  </a:lnTo>
+                  <a:lnTo>
+                    <a:pt x="1975320" y="2606279"/>
+                  </a:lnTo>
+                  <a:lnTo>
+                    <a:pt x="2045868" y="2598079"/>
+                  </a:lnTo>
+                  <a:lnTo>
+                    <a:pt x="2116415" y="2589775"/>
+                  </a:lnTo>
+                  <a:lnTo>
+                    <a:pt x="2186962" y="2581364"/>
+                  </a:lnTo>
+                  <a:lnTo>
+                    <a:pt x="2257509" y="2572846"/>
+                  </a:lnTo>
+                  <a:lnTo>
+                    <a:pt x="2328056" y="2564220"/>
+                  </a:lnTo>
+                  <a:lnTo>
+                    <a:pt x="2398603" y="2555484"/>
+                  </a:lnTo>
+                  <a:lnTo>
+                    <a:pt x="2469151" y="2546636"/>
+                  </a:lnTo>
+                  <a:lnTo>
+                    <a:pt x="2539698" y="2537676"/>
+                  </a:lnTo>
+                  <a:lnTo>
+                    <a:pt x="2610245" y="2528601"/>
+                  </a:lnTo>
+                  <a:lnTo>
+                    <a:pt x="2680792" y="2519410"/>
+                  </a:lnTo>
+                  <a:lnTo>
+                    <a:pt x="2751339" y="2510103"/>
+                  </a:lnTo>
+                  <a:lnTo>
+                    <a:pt x="2821886" y="2500676"/>
+                  </a:lnTo>
+                  <a:lnTo>
+                    <a:pt x="2892434" y="2491130"/>
+                  </a:lnTo>
+                  <a:lnTo>
+                    <a:pt x="2962981" y="2481461"/>
+                  </a:lnTo>
+                  <a:lnTo>
+                    <a:pt x="3033528" y="2460395"/>
+                  </a:lnTo>
+                  <a:lnTo>
+                    <a:pt x="3104075" y="2422069"/>
+                  </a:lnTo>
+                  <a:lnTo>
+                    <a:pt x="3174622" y="2381882"/>
+                  </a:lnTo>
+                  <a:lnTo>
+                    <a:pt x="3245169" y="2339742"/>
+                  </a:lnTo>
+                  <a:lnTo>
+                    <a:pt x="3315717" y="2295556"/>
+                  </a:lnTo>
+                  <a:lnTo>
+                    <a:pt x="3386264" y="2249223"/>
+                  </a:lnTo>
+                  <a:lnTo>
+                    <a:pt x="3456811" y="2200639"/>
+                  </a:lnTo>
+                  <a:lnTo>
+                    <a:pt x="3527358" y="2149696"/>
+                  </a:lnTo>
+                  <a:lnTo>
+                    <a:pt x="3597905" y="2096278"/>
+                  </a:lnTo>
+                  <a:lnTo>
+                    <a:pt x="3668452" y="2040265"/>
+                  </a:lnTo>
+                  <a:lnTo>
+                    <a:pt x="3739000" y="1981532"/>
+                  </a:lnTo>
+                  <a:lnTo>
+                    <a:pt x="3809547" y="1919945"/>
+                  </a:lnTo>
+                  <a:lnTo>
+                    <a:pt x="3880094" y="1855367"/>
+                  </a:lnTo>
+                  <a:lnTo>
+                    <a:pt x="3950641" y="1787652"/>
+                  </a:lnTo>
+                  <a:lnTo>
+                    <a:pt x="4021188" y="1716648"/>
+                  </a:lnTo>
+                  <a:lnTo>
+                    <a:pt x="4091736" y="1642195"/>
+                  </a:lnTo>
+                  <a:lnTo>
+                    <a:pt x="4162283" y="1564126"/>
+                  </a:lnTo>
+                  <a:lnTo>
+                    <a:pt x="4232830" y="1482264"/>
+                  </a:lnTo>
+                  <a:lnTo>
+                    <a:pt x="4303377" y="1396426"/>
+                  </a:lnTo>
+                  <a:lnTo>
+                    <a:pt x="4373924" y="1306418"/>
+                  </a:lnTo>
+                  <a:lnTo>
+                    <a:pt x="4444471" y="1212038"/>
+                  </a:lnTo>
+                  <a:lnTo>
+                    <a:pt x="4515019" y="1113074"/>
+                  </a:lnTo>
+                  <a:lnTo>
+                    <a:pt x="4585566" y="1009303"/>
+                  </a:lnTo>
+                  <a:lnTo>
+                    <a:pt x="4656113" y="900491"/>
+                  </a:lnTo>
+                  <a:lnTo>
+                    <a:pt x="4726660" y="786393"/>
+                  </a:lnTo>
+                  <a:lnTo>
+                    <a:pt x="4797207" y="666754"/>
+                  </a:lnTo>
+                  <a:lnTo>
+                    <a:pt x="4867754" y="541303"/>
+                  </a:lnTo>
+                  <a:lnTo>
+                    <a:pt x="4938302" y="409758"/>
+                  </a:lnTo>
+                  <a:lnTo>
+                    <a:pt x="5008849" y="271823"/>
+                  </a:lnTo>
+                  <a:lnTo>
+                    <a:pt x="5079396" y="127188"/>
+                  </a:lnTo>
+                  <a:lnTo>
+                    <a:pt x="5138560" y="0"/>
                   </a:lnTo>
                 </a:path>
               </a:pathLst>
@@ -3934,312 +3934,312 @@
           </p:nvSpPr>
           <p:spPr>
             <a:xfrm>
-              <a:off x="1172049" y="3862098"/>
-              <a:ext cx="7090630" cy="1585109"/>
+              <a:off x="1264853" y="3877452"/>
+              <a:ext cx="6984170" cy="1478485"/>
             </a:xfrm>
             <a:custGeom>
               <a:avLst/>
               <a:pathLst>
-                <a:path w="7090630" h="1585109">
+                <a:path w="6984170" h="1478485">
                   <a:moveTo>
-                    <a:pt x="7090630" y="0"/>
+                    <a:pt x="6984170" y="0"/>
                   </a:moveTo>
                   <a:lnTo>
-                    <a:pt x="7019007" y="21341"/>
-                  </a:lnTo>
-                  <a:lnTo>
-                    <a:pt x="6947385" y="42414"/>
-                  </a:lnTo>
-                  <a:lnTo>
-                    <a:pt x="6875762" y="63221"/>
-                  </a:lnTo>
-                  <a:lnTo>
-                    <a:pt x="6804139" y="83767"/>
-                  </a:lnTo>
-                  <a:lnTo>
-                    <a:pt x="6732517" y="104054"/>
-                  </a:lnTo>
-                  <a:lnTo>
-                    <a:pt x="6660894" y="124086"/>
-                  </a:lnTo>
-                  <a:lnTo>
-                    <a:pt x="6589272" y="143865"/>
-                  </a:lnTo>
-                  <a:lnTo>
-                    <a:pt x="6517649" y="163395"/>
-                  </a:lnTo>
-                  <a:lnTo>
-                    <a:pt x="6446027" y="182680"/>
-                  </a:lnTo>
-                  <a:lnTo>
-                    <a:pt x="6374404" y="201721"/>
-                  </a:lnTo>
-                  <a:lnTo>
-                    <a:pt x="6302782" y="220523"/>
-                  </a:lnTo>
-                  <a:lnTo>
-                    <a:pt x="6231159" y="239088"/>
-                  </a:lnTo>
-                  <a:lnTo>
-                    <a:pt x="6159537" y="257420"/>
-                  </a:lnTo>
-                  <a:lnTo>
-                    <a:pt x="6087914" y="275521"/>
-                  </a:lnTo>
-                  <a:lnTo>
-                    <a:pt x="6016292" y="293393"/>
-                  </a:lnTo>
-                  <a:lnTo>
-                    <a:pt x="5944669" y="311041"/>
-                  </a:lnTo>
-                  <a:lnTo>
-                    <a:pt x="5873047" y="328467"/>
-                  </a:lnTo>
-                  <a:lnTo>
-                    <a:pt x="5801424" y="345673"/>
-                  </a:lnTo>
-                  <a:lnTo>
-                    <a:pt x="5729802" y="362663"/>
-                  </a:lnTo>
-                  <a:lnTo>
-                    <a:pt x="5658179" y="379438"/>
-                  </a:lnTo>
-                  <a:lnTo>
-                    <a:pt x="5586557" y="396003"/>
-                  </a:lnTo>
-                  <a:lnTo>
-                    <a:pt x="5514934" y="412359"/>
-                  </a:lnTo>
-                  <a:lnTo>
-                    <a:pt x="5443311" y="428509"/>
-                  </a:lnTo>
-                  <a:lnTo>
-                    <a:pt x="5371689" y="444456"/>
-                  </a:lnTo>
-                  <a:lnTo>
-                    <a:pt x="5300066" y="460202"/>
-                  </a:lnTo>
-                  <a:lnTo>
-                    <a:pt x="5228444" y="475749"/>
-                  </a:lnTo>
-                  <a:lnTo>
-                    <a:pt x="5156821" y="491101"/>
-                  </a:lnTo>
-                  <a:lnTo>
-                    <a:pt x="5085199" y="506260"/>
-                  </a:lnTo>
-                  <a:lnTo>
-                    <a:pt x="5013576" y="521228"/>
-                  </a:lnTo>
-                  <a:lnTo>
-                    <a:pt x="4941954" y="536007"/>
-                  </a:lnTo>
-                  <a:lnTo>
-                    <a:pt x="4870331" y="550601"/>
-                  </a:lnTo>
-                  <a:lnTo>
-                    <a:pt x="4798709" y="565010"/>
-                  </a:lnTo>
-                  <a:lnTo>
-                    <a:pt x="4727086" y="579238"/>
-                  </a:lnTo>
-                  <a:lnTo>
-                    <a:pt x="4655464" y="593287"/>
-                  </a:lnTo>
-                  <a:lnTo>
-                    <a:pt x="4583841" y="607160"/>
-                  </a:lnTo>
-                  <a:lnTo>
-                    <a:pt x="4512219" y="620857"/>
-                  </a:lnTo>
-                  <a:lnTo>
-                    <a:pt x="4440596" y="634382"/>
-                  </a:lnTo>
-                  <a:lnTo>
-                    <a:pt x="4368974" y="647737"/>
-                  </a:lnTo>
-                  <a:lnTo>
-                    <a:pt x="4297351" y="660924"/>
-                  </a:lnTo>
-                  <a:lnTo>
-                    <a:pt x="4225729" y="673944"/>
-                  </a:lnTo>
-                  <a:lnTo>
-                    <a:pt x="4154106" y="686801"/>
-                  </a:lnTo>
-                  <a:lnTo>
-                    <a:pt x="4082483" y="699496"/>
-                  </a:lnTo>
-                  <a:lnTo>
-                    <a:pt x="4010861" y="712031"/>
-                  </a:lnTo>
-                  <a:lnTo>
-                    <a:pt x="3939238" y="724408"/>
-                  </a:lnTo>
-                  <a:lnTo>
-                    <a:pt x="3867616" y="736630"/>
-                  </a:lnTo>
-                  <a:lnTo>
-                    <a:pt x="3795993" y="748697"/>
-                  </a:lnTo>
-                  <a:lnTo>
-                    <a:pt x="3724371" y="760613"/>
-                  </a:lnTo>
-                  <a:lnTo>
-                    <a:pt x="3652748" y="772379"/>
-                  </a:lnTo>
-                  <a:lnTo>
-                    <a:pt x="3581126" y="783996"/>
-                  </a:lnTo>
-                  <a:lnTo>
-                    <a:pt x="3509503" y="795467"/>
-                  </a:lnTo>
-                  <a:lnTo>
-                    <a:pt x="3437881" y="806794"/>
-                  </a:lnTo>
-                  <a:lnTo>
-                    <a:pt x="3366258" y="817978"/>
-                  </a:lnTo>
-                  <a:lnTo>
-                    <a:pt x="3294636" y="829022"/>
-                  </a:lnTo>
-                  <a:lnTo>
-                    <a:pt x="3223013" y="839926"/>
-                  </a:lnTo>
-                  <a:lnTo>
-                    <a:pt x="3151391" y="850693"/>
-                  </a:lnTo>
-                  <a:lnTo>
-                    <a:pt x="3079768" y="861325"/>
-                  </a:lnTo>
-                  <a:lnTo>
-                    <a:pt x="3008146" y="888423"/>
-                  </a:lnTo>
-                  <a:lnTo>
-                    <a:pt x="2936523" y="925794"/>
-                  </a:lnTo>
-                  <a:lnTo>
-                    <a:pt x="2864901" y="961434"/>
-                  </a:lnTo>
-                  <a:lnTo>
-                    <a:pt x="2793278" y="995423"/>
-                  </a:lnTo>
-                  <a:lnTo>
-                    <a:pt x="2721655" y="1027838"/>
-                  </a:lnTo>
-                  <a:lnTo>
-                    <a:pt x="2650033" y="1058750"/>
-                  </a:lnTo>
-                  <a:lnTo>
-                    <a:pt x="2578410" y="1088231"/>
-                  </a:lnTo>
-                  <a:lnTo>
-                    <a:pt x="2506788" y="1116346"/>
-                  </a:lnTo>
-                  <a:lnTo>
-                    <a:pt x="2435165" y="1143159"/>
-                  </a:lnTo>
-                  <a:lnTo>
-                    <a:pt x="2363543" y="1168730"/>
-                  </a:lnTo>
-                  <a:lnTo>
-                    <a:pt x="2291920" y="1193116"/>
-                  </a:lnTo>
-                  <a:lnTo>
-                    <a:pt x="2220298" y="1216372"/>
-                  </a:lnTo>
-                  <a:lnTo>
-                    <a:pt x="2148675" y="1238551"/>
-                  </a:lnTo>
-                  <a:lnTo>
-                    <a:pt x="2077053" y="1259703"/>
-                  </a:lnTo>
-                  <a:lnTo>
-                    <a:pt x="2005430" y="1279875"/>
-                  </a:lnTo>
-                  <a:lnTo>
-                    <a:pt x="1933808" y="1299112"/>
-                  </a:lnTo>
-                  <a:lnTo>
-                    <a:pt x="1862185" y="1317458"/>
-                  </a:lnTo>
-                  <a:lnTo>
-                    <a:pt x="1790563" y="1334955"/>
-                  </a:lnTo>
-                  <a:lnTo>
-                    <a:pt x="1718940" y="1351641"/>
-                  </a:lnTo>
-                  <a:lnTo>
-                    <a:pt x="1647318" y="1367554"/>
-                  </a:lnTo>
-                  <a:lnTo>
-                    <a:pt x="1575695" y="1382729"/>
-                  </a:lnTo>
-                  <a:lnTo>
-                    <a:pt x="1504073" y="1397202"/>
-                  </a:lnTo>
-                  <a:lnTo>
-                    <a:pt x="1432450" y="1411004"/>
-                  </a:lnTo>
-                  <a:lnTo>
-                    <a:pt x="1360827" y="1424167"/>
-                  </a:lnTo>
-                  <a:lnTo>
-                    <a:pt x="1289205" y="1436720"/>
-                  </a:lnTo>
-                  <a:lnTo>
-                    <a:pt x="1217582" y="1448692"/>
-                  </a:lnTo>
-                  <a:lnTo>
-                    <a:pt x="1145960" y="1460109"/>
-                  </a:lnTo>
-                  <a:lnTo>
-                    <a:pt x="1074337" y="1470997"/>
-                  </a:lnTo>
-                  <a:lnTo>
-                    <a:pt x="1002715" y="1481381"/>
-                  </a:lnTo>
-                  <a:lnTo>
-                    <a:pt x="931092" y="1491284"/>
-                  </a:lnTo>
-                  <a:lnTo>
-                    <a:pt x="859470" y="1500728"/>
-                  </a:lnTo>
-                  <a:lnTo>
-                    <a:pt x="787847" y="1509734"/>
-                  </a:lnTo>
-                  <a:lnTo>
-                    <a:pt x="716225" y="1518323"/>
-                  </a:lnTo>
-                  <a:lnTo>
-                    <a:pt x="644602" y="1526515"/>
-                  </a:lnTo>
-                  <a:lnTo>
-                    <a:pt x="572980" y="1534327"/>
-                  </a:lnTo>
-                  <a:lnTo>
-                    <a:pt x="501357" y="1541777"/>
-                  </a:lnTo>
-                  <a:lnTo>
-                    <a:pt x="429735" y="1548882"/>
-                  </a:lnTo>
-                  <a:lnTo>
-                    <a:pt x="358112" y="1555658"/>
-                  </a:lnTo>
-                  <a:lnTo>
-                    <a:pt x="286490" y="1562120"/>
-                  </a:lnTo>
-                  <a:lnTo>
-                    <a:pt x="214867" y="1568282"/>
-                  </a:lnTo>
-                  <a:lnTo>
-                    <a:pt x="143245" y="1574159"/>
-                  </a:lnTo>
-                  <a:lnTo>
-                    <a:pt x="71622" y="1579764"/>
-                  </a:lnTo>
-                  <a:lnTo>
-                    <a:pt x="0" y="1585109"/>
+                    <a:pt x="6913622" y="19905"/>
+                  </a:lnTo>
+                  <a:lnTo>
+                    <a:pt x="6843075" y="39561"/>
+                  </a:lnTo>
+                  <a:lnTo>
+                    <a:pt x="6772528" y="58969"/>
+                  </a:lnTo>
+                  <a:lnTo>
+                    <a:pt x="6701981" y="78132"/>
+                  </a:lnTo>
+                  <a:lnTo>
+                    <a:pt x="6631434" y="97055"/>
+                  </a:lnTo>
+                  <a:lnTo>
+                    <a:pt x="6560887" y="115739"/>
+                  </a:lnTo>
+                  <a:lnTo>
+                    <a:pt x="6490339" y="134188"/>
+                  </a:lnTo>
+                  <a:lnTo>
+                    <a:pt x="6419792" y="152404"/>
+                  </a:lnTo>
+                  <a:lnTo>
+                    <a:pt x="6349245" y="170391"/>
+                  </a:lnTo>
+                  <a:lnTo>
+                    <a:pt x="6278698" y="188152"/>
+                  </a:lnTo>
+                  <a:lnTo>
+                    <a:pt x="6208151" y="205689"/>
+                  </a:lnTo>
+                  <a:lnTo>
+                    <a:pt x="6137604" y="223006"/>
+                  </a:lnTo>
+                  <a:lnTo>
+                    <a:pt x="6067056" y="240104"/>
+                  </a:lnTo>
+                  <a:lnTo>
+                    <a:pt x="5996509" y="256987"/>
+                  </a:lnTo>
+                  <a:lnTo>
+                    <a:pt x="5925962" y="273658"/>
+                  </a:lnTo>
+                  <a:lnTo>
+                    <a:pt x="5855415" y="290119"/>
+                  </a:lnTo>
+                  <a:lnTo>
+                    <a:pt x="5784868" y="306372"/>
+                  </a:lnTo>
+                  <a:lnTo>
+                    <a:pt x="5714320" y="322421"/>
+                  </a:lnTo>
+                  <a:lnTo>
+                    <a:pt x="5643773" y="338268"/>
+                  </a:lnTo>
+                  <a:lnTo>
+                    <a:pt x="5573226" y="353915"/>
+                  </a:lnTo>
+                  <a:lnTo>
+                    <a:pt x="5502679" y="369365"/>
+                  </a:lnTo>
+                  <a:lnTo>
+                    <a:pt x="5432132" y="384621"/>
+                  </a:lnTo>
+                  <a:lnTo>
+                    <a:pt x="5361585" y="399685"/>
+                  </a:lnTo>
+                  <a:lnTo>
+                    <a:pt x="5291037" y="414559"/>
+                  </a:lnTo>
+                  <a:lnTo>
+                    <a:pt x="5220490" y="429245"/>
+                  </a:lnTo>
+                  <a:lnTo>
+                    <a:pt x="5149943" y="443747"/>
+                  </a:lnTo>
+                  <a:lnTo>
+                    <a:pt x="5079396" y="458067"/>
+                  </a:lnTo>
+                  <a:lnTo>
+                    <a:pt x="5008849" y="472206"/>
+                  </a:lnTo>
+                  <a:lnTo>
+                    <a:pt x="4938302" y="486167"/>
+                  </a:lnTo>
+                  <a:lnTo>
+                    <a:pt x="4867754" y="499952"/>
+                  </a:lnTo>
+                  <a:lnTo>
+                    <a:pt x="4797207" y="513564"/>
+                  </a:lnTo>
+                  <a:lnTo>
+                    <a:pt x="4726660" y="527004"/>
+                  </a:lnTo>
+                  <a:lnTo>
+                    <a:pt x="4656113" y="540275"/>
+                  </a:lnTo>
+                  <a:lnTo>
+                    <a:pt x="4585566" y="553379"/>
+                  </a:lnTo>
+                  <a:lnTo>
+                    <a:pt x="4515019" y="566318"/>
+                  </a:lnTo>
+                  <a:lnTo>
+                    <a:pt x="4444471" y="579094"/>
+                  </a:lnTo>
+                  <a:lnTo>
+                    <a:pt x="4373924" y="591710"/>
+                  </a:lnTo>
+                  <a:lnTo>
+                    <a:pt x="4303377" y="604166"/>
+                  </a:lnTo>
+                  <a:lnTo>
+                    <a:pt x="4232830" y="616466"/>
+                  </a:lnTo>
+                  <a:lnTo>
+                    <a:pt x="4162283" y="628611"/>
+                  </a:lnTo>
+                  <a:lnTo>
+                    <a:pt x="4091736" y="640603"/>
+                  </a:lnTo>
+                  <a:lnTo>
+                    <a:pt x="4021188" y="652444"/>
+                  </a:lnTo>
+                  <a:lnTo>
+                    <a:pt x="3950641" y="664135"/>
+                  </a:lnTo>
+                  <a:lnTo>
+                    <a:pt x="3880094" y="675680"/>
+                  </a:lnTo>
+                  <a:lnTo>
+                    <a:pt x="3809547" y="687079"/>
+                  </a:lnTo>
+                  <a:lnTo>
+                    <a:pt x="3739000" y="698335"/>
+                  </a:lnTo>
+                  <a:lnTo>
+                    <a:pt x="3668452" y="709449"/>
+                  </a:lnTo>
+                  <a:lnTo>
+                    <a:pt x="3597905" y="720423"/>
+                  </a:lnTo>
+                  <a:lnTo>
+                    <a:pt x="3527358" y="731259"/>
+                  </a:lnTo>
+                  <a:lnTo>
+                    <a:pt x="3456811" y="741959"/>
+                  </a:lnTo>
+                  <a:lnTo>
+                    <a:pt x="3386264" y="752524"/>
+                  </a:lnTo>
+                  <a:lnTo>
+                    <a:pt x="3315717" y="762956"/>
+                  </a:lnTo>
+                  <a:lnTo>
+                    <a:pt x="3245169" y="773256"/>
+                  </a:lnTo>
+                  <a:lnTo>
+                    <a:pt x="3174622" y="783427"/>
+                  </a:lnTo>
+                  <a:lnTo>
+                    <a:pt x="3104075" y="793470"/>
+                  </a:lnTo>
+                  <a:lnTo>
+                    <a:pt x="3033528" y="803386"/>
+                  </a:lnTo>
+                  <a:lnTo>
+                    <a:pt x="2962981" y="828662"/>
+                  </a:lnTo>
+                  <a:lnTo>
+                    <a:pt x="2892434" y="863520"/>
+                  </a:lnTo>
+                  <a:lnTo>
+                    <a:pt x="2821886" y="896762"/>
+                  </a:lnTo>
+                  <a:lnTo>
+                    <a:pt x="2751339" y="928465"/>
+                  </a:lnTo>
+                  <a:lnTo>
+                    <a:pt x="2680792" y="958699"/>
+                  </a:lnTo>
+                  <a:lnTo>
+                    <a:pt x="2610245" y="987532"/>
+                  </a:lnTo>
+                  <a:lnTo>
+                    <a:pt x="2539698" y="1015030"/>
+                  </a:lnTo>
+                  <a:lnTo>
+                    <a:pt x="2469151" y="1041254"/>
+                  </a:lnTo>
+                  <a:lnTo>
+                    <a:pt x="2398603" y="1066263"/>
+                  </a:lnTo>
+                  <a:lnTo>
+                    <a:pt x="2328056" y="1090114"/>
+                  </a:lnTo>
+                  <a:lnTo>
+                    <a:pt x="2257509" y="1112859"/>
+                  </a:lnTo>
+                  <a:lnTo>
+                    <a:pt x="2186962" y="1134551"/>
+                  </a:lnTo>
+                  <a:lnTo>
+                    <a:pt x="2116415" y="1155239"/>
+                  </a:lnTo>
+                  <a:lnTo>
+                    <a:pt x="2045868" y="1174967"/>
+                  </a:lnTo>
+                  <a:lnTo>
+                    <a:pt x="1975320" y="1193782"/>
+                  </a:lnTo>
+                  <a:lnTo>
+                    <a:pt x="1904773" y="1211726"/>
+                  </a:lnTo>
+                  <a:lnTo>
+                    <a:pt x="1834226" y="1228838"/>
+                  </a:lnTo>
+                  <a:lnTo>
+                    <a:pt x="1763679" y="1245157"/>
+                  </a:lnTo>
+                  <a:lnTo>
+                    <a:pt x="1693132" y="1260721"/>
+                  </a:lnTo>
+                  <a:lnTo>
+                    <a:pt x="1622584" y="1275563"/>
+                  </a:lnTo>
+                  <a:lnTo>
+                    <a:pt x="1552037" y="1289718"/>
+                  </a:lnTo>
+                  <a:lnTo>
+                    <a:pt x="1481490" y="1303217"/>
+                  </a:lnTo>
+                  <a:lnTo>
+                    <a:pt x="1410943" y="1316091"/>
+                  </a:lnTo>
+                  <a:lnTo>
+                    <a:pt x="1340396" y="1328369"/>
+                  </a:lnTo>
+                  <a:lnTo>
+                    <a:pt x="1269849" y="1340077"/>
+                  </a:lnTo>
+                  <a:lnTo>
+                    <a:pt x="1199301" y="1351244"/>
+                  </a:lnTo>
+                  <a:lnTo>
+                    <a:pt x="1128754" y="1361893"/>
+                  </a:lnTo>
+                  <a:lnTo>
+                    <a:pt x="1058207" y="1372048"/>
+                  </a:lnTo>
+                  <a:lnTo>
+                    <a:pt x="987660" y="1381734"/>
+                  </a:lnTo>
+                  <a:lnTo>
+                    <a:pt x="917113" y="1390970"/>
+                  </a:lnTo>
+                  <a:lnTo>
+                    <a:pt x="846566" y="1399779"/>
+                  </a:lnTo>
+                  <a:lnTo>
+                    <a:pt x="776018" y="1408180"/>
+                  </a:lnTo>
+                  <a:lnTo>
+                    <a:pt x="705471" y="1416191"/>
+                  </a:lnTo>
+                  <a:lnTo>
+                    <a:pt x="634924" y="1423832"/>
+                  </a:lnTo>
+                  <a:lnTo>
+                    <a:pt x="564377" y="1431118"/>
+                  </a:lnTo>
+                  <a:lnTo>
+                    <a:pt x="493830" y="1438067"/>
+                  </a:lnTo>
+                  <a:lnTo>
+                    <a:pt x="423283" y="1444694"/>
+                  </a:lnTo>
+                  <a:lnTo>
+                    <a:pt x="352735" y="1451014"/>
+                  </a:lnTo>
+                  <a:lnTo>
+                    <a:pt x="282188" y="1457041"/>
+                  </a:lnTo>
+                  <a:lnTo>
+                    <a:pt x="211641" y="1462789"/>
+                  </a:lnTo>
+                  <a:lnTo>
+                    <a:pt x="141094" y="1468271"/>
+                  </a:lnTo>
+                  <a:lnTo>
+                    <a:pt x="70547" y="1473499"/>
+                  </a:lnTo>
+                  <a:lnTo>
+                    <a:pt x="0" y="1478485"/>
                   </a:lnTo>
                 </a:path>
               </a:pathLst>
@@ -4259,288 +4259,288 @@
           </p:nvSpPr>
           <p:spPr>
             <a:xfrm>
-              <a:off x="1172049" y="2073503"/>
-              <a:ext cx="6470242" cy="3253064"/>
+              <a:off x="1264853" y="2209169"/>
+              <a:ext cx="6373097" cy="3034242"/>
             </a:xfrm>
             <a:custGeom>
               <a:avLst/>
               <a:pathLst>
-                <a:path w="6470242" h="3253064">
+                <a:path w="6373097" h="3034242">
                   <a:moveTo>
-                    <a:pt x="0" y="3253064"/>
+                    <a:pt x="0" y="3034242"/>
                   </a:moveTo>
                   <a:lnTo>
-                    <a:pt x="71622" y="3246026"/>
-                  </a:lnTo>
-                  <a:lnTo>
-                    <a:pt x="143245" y="3238774"/>
-                  </a:lnTo>
-                  <a:lnTo>
-                    <a:pt x="214867" y="3231301"/>
-                  </a:lnTo>
-                  <a:lnTo>
-                    <a:pt x="286490" y="3223600"/>
-                  </a:lnTo>
-                  <a:lnTo>
-                    <a:pt x="358112" y="3215664"/>
-                  </a:lnTo>
-                  <a:lnTo>
-                    <a:pt x="429735" y="3207485"/>
-                  </a:lnTo>
-                  <a:lnTo>
-                    <a:pt x="501357" y="3199057"/>
-                  </a:lnTo>
-                  <a:lnTo>
-                    <a:pt x="572980" y="3190372"/>
-                  </a:lnTo>
-                  <a:lnTo>
-                    <a:pt x="644602" y="3181423"/>
-                  </a:lnTo>
-                  <a:lnTo>
-                    <a:pt x="716225" y="3172200"/>
-                  </a:lnTo>
-                  <a:lnTo>
-                    <a:pt x="787847" y="3162695"/>
-                  </a:lnTo>
-                  <a:lnTo>
-                    <a:pt x="859470" y="3152901"/>
-                  </a:lnTo>
-                  <a:lnTo>
-                    <a:pt x="931092" y="3142808"/>
-                  </a:lnTo>
-                  <a:lnTo>
-                    <a:pt x="1002715" y="3132407"/>
-                  </a:lnTo>
-                  <a:lnTo>
-                    <a:pt x="1074337" y="3121689"/>
-                  </a:lnTo>
-                  <a:lnTo>
-                    <a:pt x="1145960" y="3110644"/>
-                  </a:lnTo>
-                  <a:lnTo>
-                    <a:pt x="1217582" y="3099262"/>
-                  </a:lnTo>
-                  <a:lnTo>
-                    <a:pt x="1289205" y="3087532"/>
-                  </a:lnTo>
-                  <a:lnTo>
-                    <a:pt x="1360827" y="3075445"/>
-                  </a:lnTo>
-                  <a:lnTo>
-                    <a:pt x="1432450" y="3062989"/>
-                  </a:lnTo>
-                  <a:lnTo>
-                    <a:pt x="1504073" y="3050153"/>
-                  </a:lnTo>
-                  <a:lnTo>
-                    <a:pt x="1575695" y="3036926"/>
-                  </a:lnTo>
-                  <a:lnTo>
-                    <a:pt x="1647318" y="3023295"/>
-                  </a:lnTo>
-                  <a:lnTo>
-                    <a:pt x="1718940" y="3009248"/>
-                  </a:lnTo>
-                  <a:lnTo>
-                    <a:pt x="1790563" y="2994772"/>
-                  </a:lnTo>
-                  <a:lnTo>
-                    <a:pt x="1862185" y="2979855"/>
-                  </a:lnTo>
-                  <a:lnTo>
-                    <a:pt x="1933808" y="2964483"/>
-                  </a:lnTo>
-                  <a:lnTo>
-                    <a:pt x="2005430" y="2948642"/>
-                  </a:lnTo>
-                  <a:lnTo>
-                    <a:pt x="2077053" y="2932318"/>
-                  </a:lnTo>
-                  <a:lnTo>
-                    <a:pt x="2148675" y="2915496"/>
-                  </a:lnTo>
-                  <a:lnTo>
-                    <a:pt x="2220298" y="2898160"/>
-                  </a:lnTo>
-                  <a:lnTo>
-                    <a:pt x="2291920" y="2880296"/>
-                  </a:lnTo>
-                  <a:lnTo>
-                    <a:pt x="2363543" y="2861887"/>
-                  </a:lnTo>
-                  <a:lnTo>
-                    <a:pt x="2435165" y="2842916"/>
-                  </a:lnTo>
-                  <a:lnTo>
-                    <a:pt x="2506788" y="2823366"/>
-                  </a:lnTo>
-                  <a:lnTo>
-                    <a:pt x="2578410" y="2803220"/>
-                  </a:lnTo>
-                  <a:lnTo>
-                    <a:pt x="2650033" y="2782459"/>
-                  </a:lnTo>
-                  <a:lnTo>
-                    <a:pt x="2721655" y="2761065"/>
-                  </a:lnTo>
-                  <a:lnTo>
-                    <a:pt x="2793278" y="2739019"/>
-                  </a:lnTo>
-                  <a:lnTo>
-                    <a:pt x="2864901" y="2716300"/>
-                  </a:lnTo>
-                  <a:lnTo>
-                    <a:pt x="2936523" y="2692887"/>
-                  </a:lnTo>
-                  <a:lnTo>
-                    <a:pt x="3008146" y="2668761"/>
-                  </a:lnTo>
-                  <a:lnTo>
-                    <a:pt x="3079768" y="2643898"/>
-                  </a:lnTo>
-                  <a:lnTo>
-                    <a:pt x="3151391" y="2618277"/>
-                  </a:lnTo>
-                  <a:lnTo>
-                    <a:pt x="3223013" y="2591875"/>
-                  </a:lnTo>
-                  <a:lnTo>
-                    <a:pt x="3294636" y="2564666"/>
-                  </a:lnTo>
-                  <a:lnTo>
-                    <a:pt x="3366258" y="2536628"/>
-                  </a:lnTo>
-                  <a:lnTo>
-                    <a:pt x="3437881" y="2507735"/>
-                  </a:lnTo>
-                  <a:lnTo>
-                    <a:pt x="3509503" y="2477960"/>
-                  </a:lnTo>
-                  <a:lnTo>
-                    <a:pt x="3581126" y="2447277"/>
-                  </a:lnTo>
-                  <a:lnTo>
-                    <a:pt x="3652748" y="2415657"/>
-                  </a:lnTo>
-                  <a:lnTo>
-                    <a:pt x="3724371" y="2383073"/>
-                  </a:lnTo>
-                  <a:lnTo>
-                    <a:pt x="3795993" y="2349495"/>
-                  </a:lnTo>
-                  <a:lnTo>
-                    <a:pt x="3867616" y="2314893"/>
-                  </a:lnTo>
-                  <a:lnTo>
-                    <a:pt x="3939238" y="2279235"/>
-                  </a:lnTo>
-                  <a:lnTo>
-                    <a:pt x="4010861" y="2242490"/>
-                  </a:lnTo>
-                  <a:lnTo>
-                    <a:pt x="4082483" y="2204623"/>
-                  </a:lnTo>
-                  <a:lnTo>
-                    <a:pt x="4154106" y="2165601"/>
-                  </a:lnTo>
-                  <a:lnTo>
-                    <a:pt x="4225729" y="2125389"/>
-                  </a:lnTo>
-                  <a:lnTo>
-                    <a:pt x="4297351" y="2083950"/>
-                  </a:lnTo>
-                  <a:lnTo>
-                    <a:pt x="4368974" y="2041246"/>
-                  </a:lnTo>
-                  <a:lnTo>
-                    <a:pt x="4440596" y="1997240"/>
-                  </a:lnTo>
-                  <a:lnTo>
-                    <a:pt x="4512219" y="1951892"/>
-                  </a:lnTo>
-                  <a:lnTo>
-                    <a:pt x="4583841" y="1905160"/>
-                  </a:lnTo>
-                  <a:lnTo>
-                    <a:pt x="4655464" y="1857002"/>
-                  </a:lnTo>
-                  <a:lnTo>
-                    <a:pt x="4727086" y="1807376"/>
-                  </a:lnTo>
-                  <a:lnTo>
-                    <a:pt x="4798709" y="1756235"/>
-                  </a:lnTo>
-                  <a:lnTo>
-                    <a:pt x="4870331" y="1703535"/>
-                  </a:lnTo>
-                  <a:lnTo>
-                    <a:pt x="4941954" y="1649226"/>
-                  </a:lnTo>
-                  <a:lnTo>
-                    <a:pt x="5013576" y="1593261"/>
-                  </a:lnTo>
-                  <a:lnTo>
-                    <a:pt x="5085199" y="1535588"/>
-                  </a:lnTo>
-                  <a:lnTo>
-                    <a:pt x="5156821" y="1476156"/>
-                  </a:lnTo>
-                  <a:lnTo>
-                    <a:pt x="5228444" y="1414911"/>
-                  </a:lnTo>
-                  <a:lnTo>
-                    <a:pt x="5300066" y="1351798"/>
-                  </a:lnTo>
-                  <a:lnTo>
-                    <a:pt x="5371689" y="1286759"/>
-                  </a:lnTo>
-                  <a:lnTo>
-                    <a:pt x="5443311" y="1219736"/>
-                  </a:lnTo>
-                  <a:lnTo>
-                    <a:pt x="5514934" y="1150669"/>
-                  </a:lnTo>
-                  <a:lnTo>
-                    <a:pt x="5586557" y="1079494"/>
-                  </a:lnTo>
-                  <a:lnTo>
-                    <a:pt x="5658179" y="1006148"/>
-                  </a:lnTo>
-                  <a:lnTo>
-                    <a:pt x="5729802" y="930565"/>
-                  </a:lnTo>
-                  <a:lnTo>
-                    <a:pt x="5801424" y="852675"/>
-                  </a:lnTo>
-                  <a:lnTo>
-                    <a:pt x="5873047" y="772410"/>
-                  </a:lnTo>
-                  <a:lnTo>
-                    <a:pt x="5944669" y="689696"/>
-                  </a:lnTo>
-                  <a:lnTo>
-                    <a:pt x="6016292" y="604459"/>
-                  </a:lnTo>
-                  <a:lnTo>
-                    <a:pt x="6087914" y="516621"/>
-                  </a:lnTo>
-                  <a:lnTo>
-                    <a:pt x="6159537" y="426104"/>
-                  </a:lnTo>
-                  <a:lnTo>
-                    <a:pt x="6231159" y="332825"/>
-                  </a:lnTo>
-                  <a:lnTo>
-                    <a:pt x="6302782" y="236701"/>
-                  </a:lnTo>
-                  <a:lnTo>
-                    <a:pt x="6374404" y="137644"/>
-                  </a:lnTo>
-                  <a:lnTo>
-                    <a:pt x="6446027" y="35565"/>
-                  </a:lnTo>
-                  <a:lnTo>
-                    <a:pt x="6470242" y="0"/>
+                    <a:pt x="70547" y="3027678"/>
+                  </a:lnTo>
+                  <a:lnTo>
+                    <a:pt x="141094" y="3020914"/>
+                  </a:lnTo>
+                  <a:lnTo>
+                    <a:pt x="211641" y="3013943"/>
+                  </a:lnTo>
+                  <a:lnTo>
+                    <a:pt x="282188" y="3006760"/>
+                  </a:lnTo>
+                  <a:lnTo>
+                    <a:pt x="352735" y="2999358"/>
+                  </a:lnTo>
+                  <a:lnTo>
+                    <a:pt x="423283" y="2991729"/>
+                  </a:lnTo>
+                  <a:lnTo>
+                    <a:pt x="493830" y="2983869"/>
+                  </a:lnTo>
+                  <a:lnTo>
+                    <a:pt x="564377" y="2975768"/>
+                  </a:lnTo>
+                  <a:lnTo>
+                    <a:pt x="634924" y="2967420"/>
+                  </a:lnTo>
+                  <a:lnTo>
+                    <a:pt x="705471" y="2958817"/>
+                  </a:lnTo>
+                  <a:lnTo>
+                    <a:pt x="776018" y="2949952"/>
+                  </a:lnTo>
+                  <a:lnTo>
+                    <a:pt x="846566" y="2940817"/>
+                  </a:lnTo>
+                  <a:lnTo>
+                    <a:pt x="917113" y="2931403"/>
+                  </a:lnTo>
+                  <a:lnTo>
+                    <a:pt x="987660" y="2921702"/>
+                  </a:lnTo>
+                  <a:lnTo>
+                    <a:pt x="1058207" y="2911704"/>
+                  </a:lnTo>
+                  <a:lnTo>
+                    <a:pt x="1128754" y="2901402"/>
+                  </a:lnTo>
+                  <a:lnTo>
+                    <a:pt x="1199301" y="2890786"/>
+                  </a:lnTo>
+                  <a:lnTo>
+                    <a:pt x="1269849" y="2879845"/>
+                  </a:lnTo>
+                  <a:lnTo>
+                    <a:pt x="1340396" y="2868571"/>
+                  </a:lnTo>
+                  <a:lnTo>
+                    <a:pt x="1410943" y="2856953"/>
+                  </a:lnTo>
+                  <a:lnTo>
+                    <a:pt x="1481490" y="2844981"/>
+                  </a:lnTo>
+                  <a:lnTo>
+                    <a:pt x="1552037" y="2832643"/>
+                  </a:lnTo>
+                  <a:lnTo>
+                    <a:pt x="1622584" y="2819929"/>
+                  </a:lnTo>
+                  <a:lnTo>
+                    <a:pt x="1693132" y="2806827"/>
+                  </a:lnTo>
+                  <a:lnTo>
+                    <a:pt x="1763679" y="2793325"/>
+                  </a:lnTo>
+                  <a:lnTo>
+                    <a:pt x="1834226" y="2779411"/>
+                  </a:lnTo>
+                  <a:lnTo>
+                    <a:pt x="1904773" y="2765073"/>
+                  </a:lnTo>
+                  <a:lnTo>
+                    <a:pt x="1975320" y="2750298"/>
+                  </a:lnTo>
+                  <a:lnTo>
+                    <a:pt x="2045868" y="2735072"/>
+                  </a:lnTo>
+                  <a:lnTo>
+                    <a:pt x="2116415" y="2719381"/>
+                  </a:lnTo>
+                  <a:lnTo>
+                    <a:pt x="2186962" y="2703212"/>
+                  </a:lnTo>
+                  <a:lnTo>
+                    <a:pt x="2257509" y="2686549"/>
+                  </a:lnTo>
+                  <a:lnTo>
+                    <a:pt x="2328056" y="2669378"/>
+                  </a:lnTo>
+                  <a:lnTo>
+                    <a:pt x="2398603" y="2651683"/>
+                  </a:lnTo>
+                  <a:lnTo>
+                    <a:pt x="2469151" y="2633449"/>
+                  </a:lnTo>
+                  <a:lnTo>
+                    <a:pt x="2539698" y="2614658"/>
+                  </a:lnTo>
+                  <a:lnTo>
+                    <a:pt x="2610245" y="2595294"/>
+                  </a:lnTo>
+                  <a:lnTo>
+                    <a:pt x="2680792" y="2575339"/>
+                  </a:lnTo>
+                  <a:lnTo>
+                    <a:pt x="2751339" y="2554775"/>
+                  </a:lnTo>
+                  <a:lnTo>
+                    <a:pt x="2821886" y="2533584"/>
+                  </a:lnTo>
+                  <a:lnTo>
+                    <a:pt x="2892434" y="2511747"/>
+                  </a:lnTo>
+                  <a:lnTo>
+                    <a:pt x="2962981" y="2489243"/>
+                  </a:lnTo>
+                  <a:lnTo>
+                    <a:pt x="3033528" y="2466053"/>
+                  </a:lnTo>
+                  <a:lnTo>
+                    <a:pt x="3104075" y="2442155"/>
+                  </a:lnTo>
+                  <a:lnTo>
+                    <a:pt x="3174622" y="2417529"/>
+                  </a:lnTo>
+                  <a:lnTo>
+                    <a:pt x="3245169" y="2392151"/>
+                  </a:lnTo>
+                  <a:lnTo>
+                    <a:pt x="3315717" y="2365999"/>
+                  </a:lnTo>
+                  <a:lnTo>
+                    <a:pt x="3386264" y="2339049"/>
+                  </a:lnTo>
+                  <a:lnTo>
+                    <a:pt x="3456811" y="2311277"/>
+                  </a:lnTo>
+                  <a:lnTo>
+                    <a:pt x="3527358" y="2282657"/>
+                  </a:lnTo>
+                  <a:lnTo>
+                    <a:pt x="3597905" y="2253165"/>
+                  </a:lnTo>
+                  <a:lnTo>
+                    <a:pt x="3668452" y="2222773"/>
+                  </a:lnTo>
+                  <a:lnTo>
+                    <a:pt x="3739000" y="2191453"/>
+                  </a:lnTo>
+                  <a:lnTo>
+                    <a:pt x="3809547" y="2159179"/>
+                  </a:lnTo>
+                  <a:lnTo>
+                    <a:pt x="3880094" y="2125919"/>
+                  </a:lnTo>
+                  <a:lnTo>
+                    <a:pt x="3950641" y="2091645"/>
+                  </a:lnTo>
+                  <a:lnTo>
+                    <a:pt x="4021188" y="2056326"/>
+                  </a:lnTo>
+                  <a:lnTo>
+                    <a:pt x="4091736" y="2019929"/>
+                  </a:lnTo>
+                  <a:lnTo>
+                    <a:pt x="4162283" y="1982422"/>
+                  </a:lnTo>
+                  <a:lnTo>
+                    <a:pt x="4232830" y="1943770"/>
+                  </a:lnTo>
+                  <a:lnTo>
+                    <a:pt x="4303377" y="1903939"/>
+                  </a:lnTo>
+                  <a:lnTo>
+                    <a:pt x="4373924" y="1862893"/>
+                  </a:lnTo>
+                  <a:lnTo>
+                    <a:pt x="4444471" y="1820595"/>
+                  </a:lnTo>
+                  <a:lnTo>
+                    <a:pt x="4515019" y="1777007"/>
+                  </a:lnTo>
+                  <a:lnTo>
+                    <a:pt x="4585566" y="1732089"/>
+                  </a:lnTo>
+                  <a:lnTo>
+                    <a:pt x="4656113" y="1685800"/>
+                  </a:lnTo>
+                  <a:lnTo>
+                    <a:pt x="4726660" y="1638100"/>
+                  </a:lnTo>
+                  <a:lnTo>
+                    <a:pt x="4797207" y="1588944"/>
+                  </a:lnTo>
+                  <a:lnTo>
+                    <a:pt x="4867754" y="1538289"/>
+                  </a:lnTo>
+                  <a:lnTo>
+                    <a:pt x="4938302" y="1486088"/>
+                  </a:lnTo>
+                  <a:lnTo>
+                    <a:pt x="5008849" y="1432295"/>
+                  </a:lnTo>
+                  <a:lnTo>
+                    <a:pt x="5079396" y="1376861"/>
+                  </a:lnTo>
+                  <a:lnTo>
+                    <a:pt x="5149943" y="1319735"/>
+                  </a:lnTo>
+                  <a:lnTo>
+                    <a:pt x="5220490" y="1260867"/>
+                  </a:lnTo>
+                  <a:lnTo>
+                    <a:pt x="5291037" y="1200204"/>
+                  </a:lnTo>
+                  <a:lnTo>
+                    <a:pt x="5361585" y="1137689"/>
+                  </a:lnTo>
+                  <a:lnTo>
+                    <a:pt x="5432132" y="1073267"/>
+                  </a:lnTo>
+                  <a:lnTo>
+                    <a:pt x="5502679" y="1006880"/>
+                  </a:lnTo>
+                  <a:lnTo>
+                    <a:pt x="5573226" y="938468"/>
+                  </a:lnTo>
+                  <a:lnTo>
+                    <a:pt x="5643773" y="867969"/>
+                  </a:lnTo>
+                  <a:lnTo>
+                    <a:pt x="5714320" y="795319"/>
+                  </a:lnTo>
+                  <a:lnTo>
+                    <a:pt x="5784868" y="720453"/>
+                  </a:lnTo>
+                  <a:lnTo>
+                    <a:pt x="5855415" y="643303"/>
+                  </a:lnTo>
+                  <a:lnTo>
+                    <a:pt x="5925962" y="563799"/>
+                  </a:lnTo>
+                  <a:lnTo>
+                    <a:pt x="5996509" y="481870"/>
+                  </a:lnTo>
+                  <a:lnTo>
+                    <a:pt x="6067056" y="397441"/>
+                  </a:lnTo>
+                  <a:lnTo>
+                    <a:pt x="6137604" y="310437"/>
+                  </a:lnTo>
+                  <a:lnTo>
+                    <a:pt x="6208151" y="220779"/>
+                  </a:lnTo>
+                  <a:lnTo>
+                    <a:pt x="6278698" y="128385"/>
+                  </a:lnTo>
+                  <a:lnTo>
+                    <a:pt x="6349245" y="33173"/>
+                  </a:lnTo>
+                  <a:lnTo>
+                    <a:pt x="6373097" y="0"/>
                   </a:lnTo>
                 </a:path>
               </a:pathLst>
@@ -4569,21 +4569,21 @@
           </p:nvSpPr>
           <p:spPr>
             <a:xfrm>
-              <a:off x="817517" y="4727786"/>
-              <a:ext cx="7799693" cy="0"/>
+              <a:off x="915645" y="4684908"/>
+              <a:ext cx="7682587" cy="0"/>
             </a:xfrm>
             <a:custGeom>
               <a:avLst/>
               <a:pathLst>
-                <a:path w="7799693" h="0">
+                <a:path w="7682587" h="0">
                   <a:moveTo>
                     <a:pt x="0" y="0"/>
                   </a:moveTo>
                   <a:lnTo>
-                    <a:pt x="7799693" y="0"/>
-                  </a:lnTo>
-                  <a:lnTo>
-                    <a:pt x="7799693" y="0"/>
+                    <a:pt x="7682587" y="0"/>
+                  </a:lnTo>
+                  <a:lnTo>
+                    <a:pt x="7682587" y="0"/>
                   </a:lnTo>
                 </a:path>
               </a:pathLst>
@@ -4612,15 +4612,15 @@
           </p:nvSpPr>
           <p:spPr>
             <a:xfrm>
-              <a:off x="4222163" y="2073503"/>
-              <a:ext cx="0" cy="3649639"/>
+              <a:off x="4269172" y="2209169"/>
+              <a:ext cx="0" cy="3404141"/>
             </a:xfrm>
             <a:custGeom>
               <a:avLst/>
               <a:pathLst>
-                <a:path w="0" h="3649639">
+                <a:path w="0" h="3404141">
                   <a:moveTo>
-                    <a:pt x="0" y="3649639"/>
+                    <a:pt x="0" y="3404141"/>
                   </a:moveTo>
                   <a:lnTo>
                     <a:pt x="0" y="0"/>
@@ -4655,8 +4655,8 @@
           </p:nvSpPr>
           <p:spPr>
             <a:xfrm>
-              <a:off x="692708" y="5517199"/>
-              <a:ext cx="62179" cy="80101"/>
+              <a:off x="756929" y="5407599"/>
+              <a:ext cx="79004" cy="101955"/>
             </a:xfrm>
             <a:prstGeom prst="rect">
               <a:avLst/>
@@ -4669,7 +4669,7 @@
             <a:p>
               <a:pPr algn="l" marL="0" marR="0" indent="0">
                 <a:lnSpc>
-                  <a:spcPts val="880"/>
+                  <a:spcPts val="1120"/>
                 </a:lnSpc>
                 <a:spcBef>
                   <a:spcPts val="0"/>
@@ -4679,7 +4679,7 @@
                 </a:spcAft>
               </a:pPr>
               <a:r>
-                <a:rPr sz="880">
+                <a:rPr sz="1120">
                   <a:solidFill>
                     <a:srgbClr val="4D4D4D">
                       <a:alpha val="100000"/>
@@ -4701,8 +4701,8 @@
           </p:nvSpPr>
           <p:spPr>
             <a:xfrm>
-              <a:off x="692708" y="4687735"/>
-              <a:ext cx="62179" cy="80101"/>
+              <a:off x="756929" y="4633931"/>
+              <a:ext cx="79004" cy="101955"/>
             </a:xfrm>
             <a:prstGeom prst="rect">
               <a:avLst/>
@@ -4715,7 +4715,7 @@
             <a:p>
               <a:pPr algn="l" marL="0" marR="0" indent="0">
                 <a:lnSpc>
-                  <a:spcPts val="880"/>
+                  <a:spcPts val="1120"/>
                 </a:lnSpc>
                 <a:spcBef>
                   <a:spcPts val="0"/>
@@ -4725,7 +4725,7 @@
                 </a:spcAft>
               </a:pPr>
               <a:r>
-                <a:rPr sz="880">
+                <a:rPr sz="1120">
                   <a:solidFill>
                     <a:srgbClr val="4D4D4D">
                       <a:alpha val="100000"/>
@@ -4747,8 +4747,8 @@
           </p:nvSpPr>
           <p:spPr>
             <a:xfrm>
-              <a:off x="692708" y="3858272"/>
-              <a:ext cx="62179" cy="80101"/>
+              <a:off x="756929" y="3860262"/>
+              <a:ext cx="79004" cy="101955"/>
             </a:xfrm>
             <a:prstGeom prst="rect">
               <a:avLst/>
@@ -4761,7 +4761,7 @@
             <a:p>
               <a:pPr algn="l" marL="0" marR="0" indent="0">
                 <a:lnSpc>
-                  <a:spcPts val="880"/>
+                  <a:spcPts val="1120"/>
                 </a:lnSpc>
                 <a:spcBef>
                   <a:spcPts val="0"/>
@@ -4771,7 +4771,7 @@
                 </a:spcAft>
               </a:pPr>
               <a:r>
-                <a:rPr sz="880">
+                <a:rPr sz="1120">
                   <a:solidFill>
                     <a:srgbClr val="4D4D4D">
                       <a:alpha val="100000"/>
@@ -4793,8 +4793,8 @@
           </p:nvSpPr>
           <p:spPr>
             <a:xfrm>
-              <a:off x="692708" y="3028808"/>
-              <a:ext cx="62179" cy="80101"/>
+              <a:off x="756929" y="3086593"/>
+              <a:ext cx="79004" cy="101955"/>
             </a:xfrm>
             <a:prstGeom prst="rect">
               <a:avLst/>
@@ -4807,7 +4807,7 @@
             <a:p>
               <a:pPr algn="l" marL="0" marR="0" indent="0">
                 <a:lnSpc>
-                  <a:spcPts val="880"/>
+                  <a:spcPts val="1120"/>
                 </a:lnSpc>
                 <a:spcBef>
                   <a:spcPts val="0"/>
@@ -4817,7 +4817,7 @@
                 </a:spcAft>
               </a:pPr>
               <a:r>
-                <a:rPr sz="880">
+                <a:rPr sz="1120">
                   <a:solidFill>
                     <a:srgbClr val="4D4D4D">
                       <a:alpha val="100000"/>
@@ -4839,8 +4839,8 @@
           </p:nvSpPr>
           <p:spPr>
             <a:xfrm>
-              <a:off x="692708" y="2199345"/>
-              <a:ext cx="62179" cy="80101"/>
+              <a:off x="756929" y="2312925"/>
+              <a:ext cx="79004" cy="101955"/>
             </a:xfrm>
             <a:prstGeom prst="rect">
               <a:avLst/>
@@ -4853,7 +4853,7 @@
             <a:p>
               <a:pPr algn="l" marL="0" marR="0" indent="0">
                 <a:lnSpc>
-                  <a:spcPts val="880"/>
+                  <a:spcPts val="1120"/>
                 </a:lnSpc>
                 <a:spcBef>
                   <a:spcPts val="0"/>
@@ -4863,7 +4863,7 @@
                 </a:spcAft>
               </a:pPr>
               <a:r>
-                <a:rPr sz="880">
+                <a:rPr sz="1120">
                   <a:solidFill>
                     <a:srgbClr val="4D4D4D">
                       <a:alpha val="100000"/>
@@ -4885,8 +4885,8 @@
           </p:nvSpPr>
           <p:spPr>
             <a:xfrm>
-              <a:off x="1328653" y="5785772"/>
-              <a:ext cx="223753" cy="80101"/>
+              <a:off x="1387159" y="5693022"/>
+              <a:ext cx="284286" cy="101955"/>
             </a:xfrm>
             <a:prstGeom prst="rect">
               <a:avLst/>
@@ -4899,7 +4899,7 @@
             <a:p>
               <a:pPr algn="l" marL="0" marR="0" indent="0">
                 <a:lnSpc>
-                  <a:spcPts val="880"/>
+                  <a:spcPts val="1120"/>
                 </a:lnSpc>
                 <a:spcBef>
                   <a:spcPts val="0"/>
@@ -4909,7 +4909,7 @@
                 </a:spcAft>
               </a:pPr>
               <a:r>
-                <a:rPr sz="880">
+                <a:rPr sz="1120">
                   <a:solidFill>
                     <a:srgbClr val="4D4D4D">
                       <a:alpha val="100000"/>
@@ -4931,8 +4931,8 @@
           </p:nvSpPr>
           <p:spPr>
             <a:xfrm>
-              <a:off x="2724172" y="5785772"/>
-              <a:ext cx="161574" cy="80101"/>
+              <a:off x="2770605" y="5693022"/>
+              <a:ext cx="205282" cy="101955"/>
             </a:xfrm>
             <a:prstGeom prst="rect">
               <a:avLst/>
@@ -4945,7 +4945,7 @@
             <a:p>
               <a:pPr algn="l" marL="0" marR="0" indent="0">
                 <a:lnSpc>
-                  <a:spcPts val="880"/>
+                  <a:spcPts val="1120"/>
                 </a:lnSpc>
                 <a:spcBef>
                   <a:spcPts val="0"/>
@@ -4955,7 +4955,7 @@
                 </a:spcAft>
               </a:pPr>
               <a:r>
-                <a:rPr sz="880">
+                <a:rPr sz="1120">
                   <a:solidFill>
                     <a:srgbClr val="4D4D4D">
                       <a:alpha val="100000"/>
@@ -4977,8 +4977,8 @@
           </p:nvSpPr>
           <p:spPr>
             <a:xfrm>
-              <a:off x="4138300" y="5785772"/>
-              <a:ext cx="62179" cy="80101"/>
+              <a:off x="4177689" y="5693022"/>
+              <a:ext cx="79004" cy="101955"/>
             </a:xfrm>
             <a:prstGeom prst="rect">
               <a:avLst/>
@@ -4991,7 +4991,7 @@
             <a:p>
               <a:pPr algn="l" marL="0" marR="0" indent="0">
                 <a:lnSpc>
-                  <a:spcPts val="880"/>
+                  <a:spcPts val="1120"/>
                 </a:lnSpc>
                 <a:spcBef>
                   <a:spcPts val="0"/>
@@ -5001,7 +5001,7 @@
                 </a:spcAft>
               </a:pPr>
               <a:r>
-                <a:rPr sz="880">
+                <a:rPr sz="1120">
                   <a:solidFill>
                     <a:srgbClr val="4D4D4D">
                       <a:alpha val="100000"/>
@@ -5023,8 +5023,8 @@
           </p:nvSpPr>
           <p:spPr>
             <a:xfrm>
-              <a:off x="5471640" y="5785772"/>
-              <a:ext cx="124358" cy="80101"/>
+              <a:off x="5482131" y="5693022"/>
+              <a:ext cx="158008" cy="101955"/>
             </a:xfrm>
             <a:prstGeom prst="rect">
               <a:avLst/>
@@ -5037,7 +5037,7 @@
             <a:p>
               <a:pPr algn="l" marL="0" marR="0" indent="0">
                 <a:lnSpc>
-                  <a:spcPts val="880"/>
+                  <a:spcPts val="1120"/>
                 </a:lnSpc>
                 <a:spcBef>
                   <a:spcPts val="0"/>
@@ -5047,7 +5047,7 @@
                 </a:spcAft>
               </a:pPr>
               <a:r>
-                <a:rPr sz="880">
+                <a:rPr sz="1120">
                   <a:solidFill>
                     <a:srgbClr val="4D4D4D">
                       <a:alpha val="100000"/>
@@ -5069,8 +5069,8 @@
           </p:nvSpPr>
           <p:spPr>
             <a:xfrm>
-              <a:off x="6804980" y="5785772"/>
-              <a:ext cx="186537" cy="80101"/>
+              <a:off x="6786573" y="5693022"/>
+              <a:ext cx="237012" cy="101955"/>
             </a:xfrm>
             <a:prstGeom prst="rect">
               <a:avLst/>
@@ -5083,7 +5083,7 @@
             <a:p>
               <a:pPr algn="l" marL="0" marR="0" indent="0">
                 <a:lnSpc>
-                  <a:spcPts val="880"/>
+                  <a:spcPts val="1120"/>
                 </a:lnSpc>
                 <a:spcBef>
                   <a:spcPts val="0"/>
@@ -5093,7 +5093,7 @@
                 </a:spcAft>
               </a:pPr>
               <a:r>
-                <a:rPr sz="880">
+                <a:rPr sz="1120">
                   <a:solidFill>
                     <a:srgbClr val="4D4D4D">
                       <a:alpha val="100000"/>
@@ -5115,8 +5115,8 @@
           </p:nvSpPr>
           <p:spPr>
             <a:xfrm>
-              <a:off x="8169410" y="5785772"/>
-              <a:ext cx="186537" cy="80101"/>
+              <a:off x="8130517" y="5693022"/>
+              <a:ext cx="237012" cy="101955"/>
             </a:xfrm>
             <a:prstGeom prst="rect">
               <a:avLst/>
@@ -5129,7 +5129,7 @@
             <a:p>
               <a:pPr algn="l" marL="0" marR="0" indent="0">
                 <a:lnSpc>
-                  <a:spcPts val="880"/>
+                  <a:spcPts val="1120"/>
                 </a:lnSpc>
                 <a:spcBef>
                   <a:spcPts val="0"/>
@@ -5139,7 +5139,7 @@
                 </a:spcAft>
               </a:pPr>
               <a:r>
-                <a:rPr sz="880">
+                <a:rPr sz="1120">
                   <a:solidFill>
                     <a:srgbClr val="4D4D4D">
                       <a:alpha val="100000"/>
@@ -5161,8 +5161,8 @@
           </p:nvSpPr>
           <p:spPr>
             <a:xfrm>
-              <a:off x="3987536" y="5925448"/>
-              <a:ext cx="1459656" cy="100218"/>
+              <a:off x="3828319" y="5870717"/>
+              <a:ext cx="1857237" cy="127558"/>
             </a:xfrm>
             <a:prstGeom prst="rect">
               <a:avLst/>
@@ -5175,7 +5175,7 @@
             <a:p>
               <a:pPr algn="l" marL="0" marR="0" indent="0">
                 <a:lnSpc>
-                  <a:spcPts val="1100"/>
+                  <a:spcPts val="1400"/>
                 </a:lnSpc>
                 <a:spcBef>
                   <a:spcPts val="0"/>
@@ -5185,7 +5185,7 @@
                 </a:spcAft>
               </a:pPr>
               <a:r>
-                <a:rPr sz="1100">
+                <a:rPr sz="1400">
                   <a:solidFill>
                     <a:srgbClr val="000000">
                       <a:alpha val="100000"/>
@@ -5207,8 +5207,8 @@
           </p:nvSpPr>
           <p:spPr>
             <a:xfrm rot="-5400000">
-              <a:off x="68446" y="3848213"/>
-              <a:ext cx="1016904" cy="100218"/>
+              <a:off x="-37527" y="3847460"/>
+              <a:ext cx="1294150" cy="127558"/>
             </a:xfrm>
             <a:prstGeom prst="rect">
               <a:avLst/>
@@ -5221,7 +5221,7 @@
             <a:p>
               <a:pPr algn="l" marL="0" marR="0" indent="0">
                 <a:lnSpc>
-                  <a:spcPts val="1100"/>
+                  <a:spcPts val="1400"/>
                 </a:lnSpc>
                 <a:spcBef>
                   <a:spcPts val="0"/>
@@ -5231,7 +5231,7 @@
                 </a:spcAft>
               </a:pPr>
               <a:r>
-                <a:rPr sz="1100">
+                <a:rPr sz="1400">
                   <a:solidFill>
                     <a:srgbClr val="000000">
                       <a:alpha val="100000"/>
@@ -5253,8 +5253,8 @@
           </p:nvSpPr>
           <p:spPr>
             <a:xfrm>
-              <a:off x="817517" y="1896563"/>
-              <a:ext cx="4500128" cy="82021"/>
+              <a:off x="915645" y="1977589"/>
+              <a:ext cx="6001755" cy="109362"/>
             </a:xfrm>
             <a:prstGeom prst="rect">
               <a:avLst/>
@@ -5267,7 +5267,7 @@
             <a:p>
               <a:pPr algn="l" marL="0" marR="0" indent="0">
                 <a:lnSpc>
-                  <a:spcPts val="900"/>
+                  <a:spcPts val="1200"/>
                 </a:lnSpc>
                 <a:spcBef>
                   <a:spcPts val="0"/>
@@ -5277,7 +5277,7 @@
                 </a:spcAft>
               </a:pPr>
               <a:r>
-                <a:rPr sz="900">
+                <a:rPr sz="1200">
                   <a:solidFill>
                     <a:srgbClr val="404040">
                       <a:alpha val="100000"/>
@@ -5299,8 +5299,8 @@
           </p:nvSpPr>
           <p:spPr>
             <a:xfrm>
-              <a:off x="817517" y="1669789"/>
-              <a:ext cx="2681569" cy="120152"/>
+              <a:off x="915645" y="1688767"/>
+              <a:ext cx="3413729" cy="153070"/>
             </a:xfrm>
             <a:prstGeom prst="rect">
               <a:avLst/>
@@ -5313,7 +5313,7 @@
             <a:p>
               <a:pPr algn="l" marL="0" marR="0" indent="0">
                 <a:lnSpc>
-                  <a:spcPts val="1320"/>
+                  <a:spcPts val="1680"/>
                 </a:lnSpc>
                 <a:spcBef>
                   <a:spcPts val="0"/>
@@ -5323,7 +5323,7 @@
                 </a:spcAft>
               </a:pPr>
               <a:r>
-                <a:rPr sz="1320">
+                <a:rPr sz="1680">
                   <a:solidFill>
                     <a:srgbClr val="000000">
                       <a:alpha val="100000"/>
